--- a/deck/poc-biochar-capex-opex.pptx
+++ b/deck/poc-biochar-capex-opex.pptx
@@ -689,7 +689,7 @@
           <a:p>
             <a:r>
               <a:rPr lang="en-US" dirty="0"/>
-              <a:t>Cinco gates binários. Nenhum é uma meta: cada um é condição para o degrau seguinte.</a:t>
+              <a:t>Cinco barreiras técnicas atravessadas, não cinco marcos numa linha. A densidade de partículas de cada membrana codifica a incerteza restante.</a:t>
             </a:r>
             <a:endParaRPr lang="en-US" dirty="0"/>
           </a:p>
@@ -1041,7 +1041,7 @@
           <a:p>
             <a:r>
               <a:rPr lang="en-US" dirty="0"/>
-              <a:t>810 t/ano de char equivalem a 4.000 t de biomassa a ~20% de rendimento. O laço tracejado no desenho é a recirculação de areia entre as zonas.</a:t>
+              <a:t>A banda de char é 20,25% da altura da banda de biomassa porque esse é o rendimento; a banda de remoção é o dobro da de char porque são 2,0 tCO2e/t. A geometria é o dado.</a:t>
             </a:r>
             <a:endParaRPr lang="en-US" dirty="0"/>
           </a:p>
@@ -1393,7 +1393,7 @@
           <a:p>
             <a:r>
               <a:rPr lang="en-US" dirty="0"/>
-              <a:t>Três receitas independentes empilhadas numa margem. O contrato B existe para o caso de a cimenteira reivindicar o carbono no próprio EPD.</a:t>
+              <a:t>As duas barras partilham origem e escala, então o excesso do custo é lido como distância. A margem de R$ 763 é [DOC] e pertence a outra camada contábil — o slide diz isso em vez de sugerir que uma deriva da outra.</a:t>
             </a:r>
             <a:endParaRPr lang="en-US" dirty="0"/>
           </a:p>
@@ -1481,7 +1481,7 @@
           <a:p>
             <a:r>
               <a:rPr lang="en-US" dirty="0"/>
-              <a:t>4.700 t de capacidade contra 5.448 t de necessidade: o Módulo 1 sozinho não fecha a conta a mercado pleno. Por isso a Planta 1 entra em 2029.</a:t>
+              <a:t>Os quatro limiares estão em escala. Os dois vãos são subtrações sobre números [DOC]: 5.448 − 4.700 = 748 t, e 6.942 − 5.448 = 1.494 t.</a:t>
             </a:r>
             <a:endParaRPr lang="en-US" dirty="0"/>
           </a:p>
@@ -3400,7 +3400,7 @@
         <p:spPr>
           <a:xfrm>
             <a:off x="841248" y="429768"/>
-            <a:ext cx="2743200" cy="155448"/>
+            <a:ext cx="3657600" cy="155448"/>
           </a:xfrm>
           <a:prstGeom prst="rect">
             <a:avLst/>
@@ -3424,7 +3424,7 @@
                 <a:ea typeface="Arial" pitchFamily="34" charset="-122"/>
                 <a:cs typeface="Arial" pitchFamily="34" charset="-120"/>
               </a:rPr>
-              <a:t>10 / DISCIPLINA</a:t>
+              <a:t>10 / DISCIPLINA · ARQUITETURA DE GATES</a:t>
             </a:r>
             <a:endParaRPr lang="en-US" sz="750" dirty="0"/>
           </a:p>
@@ -3438,8 +3438,8 @@
         </p:nvSpPr>
         <p:spPr>
           <a:xfrm>
-            <a:off x="457200" y="1298448"/>
-            <a:ext cx="7680960" cy="1371600"/>
+            <a:off x="457200" y="822960"/>
+            <a:ext cx="7863840" cy="915416"/>
           </a:xfrm>
           <a:prstGeom prst="rect">
             <a:avLst/>
@@ -3453,12 +3453,12 @@
           <a:p>
             <a:pPr indent="0" marL="0">
               <a:lnSpc>
-                <a:spcPts val="4100"/>
+                <a:spcPts val="3600"/>
               </a:lnSpc>
               <a:buNone/>
             </a:pPr>
             <a:r>
-              <a:rPr lang="en-US" sz="3600" spc="-100" kern="0" dirty="0">
+              <a:rPr lang="en-US" sz="3400" spc="-90" kern="0" dirty="0">
                 <a:solidFill>
                   <a:srgbClr val="EEFAF5"/>
                 </a:solidFill>
@@ -3468,17 +3468,17 @@
               </a:rPr>
               <a:t>Cada tonelada da POC compra</a:t>
             </a:r>
-            <a:endParaRPr lang="en-US" sz="3600" dirty="0"/>
+            <a:endParaRPr lang="en-US" sz="3400" dirty="0"/>
           </a:p>
           <a:p>
             <a:pPr indent="0" marL="0">
               <a:lnSpc>
-                <a:spcPts val="4100"/>
+                <a:spcPts val="3600"/>
               </a:lnSpc>
               <a:buNone/>
             </a:pPr>
             <a:r>
-              <a:rPr lang="en-US" sz="3600" spc="-100" kern="0" dirty="0">
+              <a:rPr lang="en-US" sz="3400" spc="-90" kern="0" dirty="0">
                 <a:solidFill>
                   <a:srgbClr val="EEFAF5"/>
                 </a:solidFill>
@@ -3488,7 +3488,7 @@
               </a:rPr>
               <a:t>o que dinheiro não compra depois.</a:t>
             </a:r>
-            <a:endParaRPr lang="en-US" sz="3600" dirty="0"/>
+            <a:endParaRPr lang="en-US" sz="3400" dirty="0"/>
           </a:p>
         </p:txBody>
       </p:sp>
@@ -3500,7 +3500,7 @@
         </p:nvSpPr>
         <p:spPr>
           <a:xfrm>
-            <a:off x="612648" y="4041648"/>
+            <a:off x="475488" y="2505456"/>
             <a:ext cx="731520" cy="173736"/>
           </a:xfrm>
           <a:prstGeom prst="rect">
@@ -3517,7 +3517,7 @@
               <a:buNone/>
             </a:pPr>
             <a:r>
-              <a:rPr lang="en-US" sz="900" dirty="0">
+              <a:rPr lang="en-US" sz="1000" dirty="0">
                 <a:solidFill>
                   <a:srgbClr val="97DCC7"/>
                 </a:solidFill>
@@ -3527,7 +3527,7 @@
               </a:rPr>
               <a:t>M03</a:t>
             </a:r>
-            <a:endParaRPr lang="en-US" sz="900" dirty="0"/>
+            <a:endParaRPr lang="en-US" sz="1000" dirty="0"/>
           </a:p>
         </p:txBody>
       </p:sp>
@@ -3539,8 +3539,47 @@
         </p:nvSpPr>
         <p:spPr>
           <a:xfrm>
-            <a:off x="612648" y="4224528"/>
-            <a:ext cx="1600200" cy="219456"/>
+            <a:off x="475488" y="2706624"/>
+            <a:ext cx="1417320" cy="155448"/>
+          </a:xfrm>
+          <a:prstGeom prst="rect">
+            <a:avLst/>
+          </a:prstGeom>
+          <a:noFill/>
+          <a:ln/>
+        </p:spPr>
+        <p:txBody>
+          <a:bodyPr wrap="square" lIns="0" tIns="0" rIns="0" bIns="0" rtlCol="0" anchor="ctr"/>
+          <a:lstStyle/>
+          <a:p>
+            <a:pPr algn="l" indent="0" marL="0">
+              <a:buNone/>
+            </a:pPr>
+            <a:r>
+              <a:rPr lang="en-US" sz="620" spc="260" kern="0" dirty="0">
+                <a:solidFill>
+                  <a:srgbClr val="BED7E9"/>
+                </a:solidFill>
+                <a:latin typeface="Arial" pitchFamily="34" charset="0"/>
+                <a:ea typeface="Arial" pitchFamily="34" charset="-122"/>
+                <a:cs typeface="Arial" pitchFamily="34" charset="-120"/>
+              </a:rPr>
+              <a:t>QUALIDADE DO CARBONO</a:t>
+            </a:r>
+            <a:endParaRPr lang="en-US" sz="620" dirty="0"/>
+          </a:p>
+        </p:txBody>
+      </p:sp>
+      <p:sp>
+        <p:nvSpPr>
+          <p:cNvPr id="7" name="Text 4"/>
+          <p:cNvSpPr txBox="1"/>
+          <p:nvPr/>
+        </p:nvSpPr>
+        <p:spPr>
+          <a:xfrm>
+            <a:off x="475488" y="2889504"/>
+            <a:ext cx="1380744" cy="457200"/>
           </a:xfrm>
           <a:prstGeom prst="rect">
             <a:avLst/>
@@ -3553,10 +3592,13 @@
           <a:lstStyle/>
           <a:p>
             <a:pPr indent="0" marL="0">
-              <a:buNone/>
-            </a:pPr>
-            <a:r>
-              <a:rPr lang="en-US" sz="1050" dirty="0">
+              <a:lnSpc>
+                <a:spcPts val="1300"/>
+              </a:lnSpc>
+              <a:buNone/>
+            </a:pPr>
+            <a:r>
+              <a:rPr lang="en-US" sz="1100" dirty="0">
                 <a:solidFill>
                   <a:srgbClr val="EEFAF5"/>
                 </a:solidFill>
@@ -3566,36 +3608,58 @@
               </a:rPr>
               <a:t>H/Corg ≤ 0,40</a:t>
             </a:r>
-            <a:endParaRPr lang="en-US" sz="1050" dirty="0"/>
-          </a:p>
-        </p:txBody>
-      </p:sp>
-      <p:sp>
-        <p:nvSpPr>
-          <p:cNvPr id="7" name="Text 4"/>
-          <p:cNvSpPr txBox="1"/>
-          <p:nvPr/>
-        </p:nvSpPr>
-        <p:spPr>
-          <a:xfrm>
-            <a:off x="612648" y="4462272"/>
-            <a:ext cx="1645920" cy="155448"/>
-          </a:xfrm>
-          <a:prstGeom prst="rect">
-            <a:avLst/>
-          </a:prstGeom>
-          <a:noFill/>
-          <a:ln/>
-        </p:spPr>
-        <p:txBody>
-          <a:bodyPr wrap="square" lIns="0" tIns="0" rIns="0" bIns="0" rtlCol="0" anchor="ctr"/>
-          <a:lstStyle/>
-          <a:p>
-            <a:pPr algn="l" indent="0" marL="0">
-              <a:buNone/>
-            </a:pPr>
-            <a:r>
-              <a:rPr lang="en-US" sz="650" spc="260" kern="0" dirty="0">
+            <a:endParaRPr lang="en-US" sz="1100" dirty="0"/>
+          </a:p>
+        </p:txBody>
+      </p:sp>
+      <p:sp>
+        <p:nvSpPr>
+          <p:cNvPr id="8" name="Shape 5"/>
+          <p:cNvSpPr/>
+          <p:nvPr/>
+        </p:nvSpPr>
+        <p:spPr>
+          <a:xfrm>
+            <a:off x="475488" y="3346704"/>
+            <a:ext cx="1380744" cy="7315"/>
+          </a:xfrm>
+          <a:prstGeom prst="rect">
+            <a:avLst/>
+          </a:prstGeom>
+          <a:solidFill>
+            <a:srgbClr val="97DCC7">
+              <a:alpha val="38000"/>
+            </a:srgbClr>
+          </a:solidFill>
+          <a:ln/>
+        </p:spPr>
+      </p:sp>
+      <p:sp>
+        <p:nvSpPr>
+          <p:cNvPr id="9" name="Text 6"/>
+          <p:cNvSpPr txBox="1"/>
+          <p:nvPr/>
+        </p:nvSpPr>
+        <p:spPr>
+          <a:xfrm>
+            <a:off x="475488" y="3419856"/>
+            <a:ext cx="1380744" cy="155448"/>
+          </a:xfrm>
+          <a:prstGeom prst="rect">
+            <a:avLst/>
+          </a:prstGeom>
+          <a:noFill/>
+          <a:ln/>
+        </p:spPr>
+        <p:txBody>
+          <a:bodyPr wrap="square" lIns="0" tIns="0" rIns="0" bIns="0" rtlCol="0" anchor="ctr"/>
+          <a:lstStyle/>
+          <a:p>
+            <a:pPr algn="l" indent="0" marL="0">
+              <a:buNone/>
+            </a:pPr>
+            <a:r>
+              <a:rPr lang="en-US" sz="600" spc="260" kern="0" dirty="0">
                 <a:solidFill>
                   <a:srgbClr val="BED7E9"/>
                 </a:solidFill>
@@ -3603,21 +3667,166 @@
                 <a:ea typeface="Arial" pitchFamily="34" charset="-122"/>
                 <a:cs typeface="Arial" pitchFamily="34" charset="-120"/>
               </a:rPr>
-              <a:t>MANTÉM PURO E EBC ABERTAS</a:t>
-            </a:r>
-            <a:endParaRPr lang="en-US" sz="650" dirty="0"/>
-          </a:p>
-        </p:txBody>
-      </p:sp>
-      <p:sp>
-        <p:nvSpPr>
-          <p:cNvPr id="8" name="Text 5"/>
-          <p:cNvSpPr txBox="1"/>
-          <p:nvPr/>
-        </p:nvSpPr>
-        <p:spPr>
-          <a:xfrm>
-            <a:off x="2350008" y="4041648"/>
+              <a:t>RISCO FECHADO</a:t>
+            </a:r>
+            <a:endParaRPr lang="en-US" sz="600" dirty="0"/>
+          </a:p>
+        </p:txBody>
+      </p:sp>
+      <p:sp>
+        <p:nvSpPr>
+          <p:cNvPr id="10" name="Text 7"/>
+          <p:cNvSpPr txBox="1"/>
+          <p:nvPr/>
+        </p:nvSpPr>
+        <p:spPr>
+          <a:xfrm>
+            <a:off x="475488" y="3566160"/>
+            <a:ext cx="1380744" cy="365760"/>
+          </a:xfrm>
+          <a:prstGeom prst="rect">
+            <a:avLst/>
+          </a:prstGeom>
+          <a:noFill/>
+          <a:ln/>
+        </p:spPr>
+        <p:txBody>
+          <a:bodyPr wrap="square" lIns="0" tIns="0" rIns="0" bIns="0" rtlCol="0" anchor="t"/>
+          <a:lstStyle/>
+          <a:p>
+            <a:pPr indent="0" marL="0">
+              <a:lnSpc>
+                <a:spcPts val="1000"/>
+              </a:lnSpc>
+              <a:buNone/>
+            </a:pPr>
+            <a:r>
+              <a:rPr lang="en-US" sz="850" dirty="0">
+                <a:solidFill>
+                  <a:srgbClr val="97DCC7"/>
+                </a:solidFill>
+                <a:latin typeface="Arial" pitchFamily="34" charset="0"/>
+                <a:ea typeface="Arial" pitchFamily="34" charset="-122"/>
+                <a:cs typeface="Arial" pitchFamily="34" charset="-120"/>
+              </a:rPr>
+              <a:t>permanência</a:t>
+            </a:r>
+            <a:endParaRPr lang="en-US" sz="850" dirty="0"/>
+          </a:p>
+        </p:txBody>
+      </p:sp>
+      <p:sp>
+        <p:nvSpPr>
+          <p:cNvPr id="11" name="Shape 8"/>
+          <p:cNvSpPr/>
+          <p:nvPr/>
+        </p:nvSpPr>
+        <p:spPr>
+          <a:xfrm>
+            <a:off x="475488" y="3950208"/>
+            <a:ext cx="1380744" cy="7315"/>
+          </a:xfrm>
+          <a:prstGeom prst="rect">
+            <a:avLst/>
+          </a:prstGeom>
+          <a:solidFill>
+            <a:srgbClr val="97DCC7">
+              <a:alpha val="38000"/>
+            </a:srgbClr>
+          </a:solidFill>
+          <a:ln/>
+        </p:spPr>
+      </p:sp>
+      <p:sp>
+        <p:nvSpPr>
+          <p:cNvPr id="12" name="Text 9"/>
+          <p:cNvSpPr txBox="1"/>
+          <p:nvPr/>
+        </p:nvSpPr>
+        <p:spPr>
+          <a:xfrm>
+            <a:off x="475488" y="4023360"/>
+            <a:ext cx="1380744" cy="155448"/>
+          </a:xfrm>
+          <a:prstGeom prst="rect">
+            <a:avLst/>
+          </a:prstGeom>
+          <a:noFill/>
+          <a:ln/>
+        </p:spPr>
+        <p:txBody>
+          <a:bodyPr wrap="square" lIns="0" tIns="0" rIns="0" bIns="0" rtlCol="0" anchor="ctr"/>
+          <a:lstStyle/>
+          <a:p>
+            <a:pPr algn="l" indent="0" marL="0">
+              <a:buNone/>
+            </a:pPr>
+            <a:r>
+              <a:rPr lang="en-US" sz="600" spc="260" kern="0" dirty="0">
+                <a:solidFill>
+                  <a:srgbClr val="97DCC7"/>
+                </a:solidFill>
+                <a:latin typeface="Arial" pitchFamily="34" charset="0"/>
+                <a:ea typeface="Arial" pitchFamily="34" charset="-122"/>
+                <a:cs typeface="Arial" pitchFamily="34" charset="-120"/>
+              </a:rPr>
+              <a:t>DESTRAVA</a:t>
+            </a:r>
+            <a:endParaRPr lang="en-US" sz="600" dirty="0"/>
+          </a:p>
+        </p:txBody>
+      </p:sp>
+      <p:sp>
+        <p:nvSpPr>
+          <p:cNvPr id="13" name="Text 10"/>
+          <p:cNvSpPr txBox="1"/>
+          <p:nvPr/>
+        </p:nvSpPr>
+        <p:spPr>
+          <a:xfrm>
+            <a:off x="475488" y="4169664"/>
+            <a:ext cx="1380744" cy="365760"/>
+          </a:xfrm>
+          <a:prstGeom prst="rect">
+            <a:avLst/>
+          </a:prstGeom>
+          <a:noFill/>
+          <a:ln/>
+        </p:spPr>
+        <p:txBody>
+          <a:bodyPr wrap="square" lIns="0" tIns="0" rIns="0" bIns="0" rtlCol="0" anchor="t"/>
+          <a:lstStyle/>
+          <a:p>
+            <a:pPr indent="0" marL="0">
+              <a:lnSpc>
+                <a:spcPts val="1000"/>
+              </a:lnSpc>
+              <a:buNone/>
+            </a:pPr>
+            <a:r>
+              <a:rPr lang="en-US" sz="850" dirty="0">
+                <a:solidFill>
+                  <a:srgbClr val="EEFAF5"/>
+                </a:solidFill>
+                <a:latin typeface="Arial" pitchFamily="34" charset="0"/>
+                <a:ea typeface="Arial" pitchFamily="34" charset="-122"/>
+                <a:cs typeface="Arial" pitchFamily="34" charset="-120"/>
+              </a:rPr>
+              <a:t>Puro e EBC abertas</a:t>
+            </a:r>
+            <a:endParaRPr lang="en-US" sz="850" dirty="0"/>
+          </a:p>
+        </p:txBody>
+      </p:sp>
+      <p:sp>
+        <p:nvSpPr>
+          <p:cNvPr id="14" name="Text 11"/>
+          <p:cNvSpPr txBox="1"/>
+          <p:nvPr/>
+        </p:nvSpPr>
+        <p:spPr>
+          <a:xfrm>
+            <a:off x="2212848" y="2505456"/>
             <a:ext cx="731520" cy="173736"/>
           </a:xfrm>
           <a:prstGeom prst="rect">
@@ -3634,7 +3843,7 @@
               <a:buNone/>
             </a:pPr>
             <a:r>
-              <a:rPr lang="en-US" sz="900" dirty="0">
+              <a:rPr lang="en-US" sz="1000" dirty="0">
                 <a:solidFill>
                   <a:srgbClr val="97DCC7"/>
                 </a:solidFill>
@@ -3644,20 +3853,59 @@
               </a:rPr>
               <a:t>M06</a:t>
             </a:r>
-            <a:endParaRPr lang="en-US" sz="900" dirty="0"/>
-          </a:p>
-        </p:txBody>
-      </p:sp>
-      <p:sp>
-        <p:nvSpPr>
-          <p:cNvPr id="9" name="Text 6"/>
-          <p:cNvSpPr txBox="1"/>
-          <p:nvPr/>
-        </p:nvSpPr>
-        <p:spPr>
-          <a:xfrm>
-            <a:off x="2350008" y="4224528"/>
-            <a:ext cx="1600200" cy="219456"/>
+            <a:endParaRPr lang="en-US" sz="1000" dirty="0"/>
+          </a:p>
+        </p:txBody>
+      </p:sp>
+      <p:sp>
+        <p:nvSpPr>
+          <p:cNvPr id="15" name="Text 12"/>
+          <p:cNvSpPr txBox="1"/>
+          <p:nvPr/>
+        </p:nvSpPr>
+        <p:spPr>
+          <a:xfrm>
+            <a:off x="2212848" y="2706624"/>
+            <a:ext cx="1417320" cy="155448"/>
+          </a:xfrm>
+          <a:prstGeom prst="rect">
+            <a:avLst/>
+          </a:prstGeom>
+          <a:noFill/>
+          <a:ln/>
+        </p:spPr>
+        <p:txBody>
+          <a:bodyPr wrap="square" lIns="0" tIns="0" rIns="0" bIns="0" rtlCol="0" anchor="ctr"/>
+          <a:lstStyle/>
+          <a:p>
+            <a:pPr algn="l" indent="0" marL="0">
+              <a:buNone/>
+            </a:pPr>
+            <a:r>
+              <a:rPr lang="en-US" sz="620" spc="260" kern="0" dirty="0">
+                <a:solidFill>
+                  <a:srgbClr val="BED7E9"/>
+                </a:solidFill>
+                <a:latin typeface="Arial" pitchFamily="34" charset="0"/>
+                <a:ea typeface="Arial" pitchFamily="34" charset="-122"/>
+                <a:cs typeface="Arial" pitchFamily="34" charset="-120"/>
+              </a:rPr>
+              <a:t>OPERABILIDADE</a:t>
+            </a:r>
+            <a:endParaRPr lang="en-US" sz="620" dirty="0"/>
+          </a:p>
+        </p:txBody>
+      </p:sp>
+      <p:sp>
+        <p:nvSpPr>
+          <p:cNvPr id="16" name="Text 13"/>
+          <p:cNvSpPr txBox="1"/>
+          <p:nvPr/>
+        </p:nvSpPr>
+        <p:spPr>
+          <a:xfrm>
+            <a:off x="2212848" y="2889504"/>
+            <a:ext cx="1380744" cy="457200"/>
           </a:xfrm>
           <a:prstGeom prst="rect">
             <a:avLst/>
@@ -3670,10 +3918,13 @@
           <a:lstStyle/>
           <a:p>
             <a:pPr indent="0" marL="0">
-              <a:buNone/>
-            </a:pPr>
-            <a:r>
-              <a:rPr lang="en-US" sz="1050" dirty="0">
+              <a:lnSpc>
+                <a:spcPts val="1300"/>
+              </a:lnSpc>
+              <a:buNone/>
+            </a:pPr>
+            <a:r>
+              <a:rPr lang="en-US" sz="1100" dirty="0">
                 <a:solidFill>
                   <a:srgbClr val="EEFAF5"/>
                 </a:solidFill>
@@ -3683,36 +3934,58 @@
               </a:rPr>
               <a:t>leito não aglomera</a:t>
             </a:r>
-            <a:endParaRPr lang="en-US" sz="1050" dirty="0"/>
-          </a:p>
-        </p:txBody>
-      </p:sp>
-      <p:sp>
-        <p:nvSpPr>
-          <p:cNvPr id="10" name="Text 7"/>
-          <p:cNvSpPr txBox="1"/>
-          <p:nvPr/>
-        </p:nvSpPr>
-        <p:spPr>
-          <a:xfrm>
-            <a:off x="2350008" y="4462272"/>
-            <a:ext cx="1645920" cy="155448"/>
-          </a:xfrm>
-          <a:prstGeom prst="rect">
-            <a:avLst/>
-          </a:prstGeom>
-          <a:noFill/>
-          <a:ln/>
-        </p:spPr>
-        <p:txBody>
-          <a:bodyPr wrap="square" lIns="0" tIns="0" rIns="0" bIns="0" rtlCol="0" anchor="ctr"/>
-          <a:lstStyle/>
-          <a:p>
-            <a:pPr algn="l" indent="0" marL="0">
-              <a:buNone/>
-            </a:pPr>
-            <a:r>
-              <a:rPr lang="en-US" sz="650" spc="260" kern="0" dirty="0">
+            <a:endParaRPr lang="en-US" sz="1100" dirty="0"/>
+          </a:p>
+        </p:txBody>
+      </p:sp>
+      <p:sp>
+        <p:nvSpPr>
+          <p:cNvPr id="17" name="Shape 14"/>
+          <p:cNvSpPr/>
+          <p:nvPr/>
+        </p:nvSpPr>
+        <p:spPr>
+          <a:xfrm>
+            <a:off x="2212848" y="3346704"/>
+            <a:ext cx="1380744" cy="7315"/>
+          </a:xfrm>
+          <a:prstGeom prst="rect">
+            <a:avLst/>
+          </a:prstGeom>
+          <a:solidFill>
+            <a:srgbClr val="97DCC7">
+              <a:alpha val="38000"/>
+            </a:srgbClr>
+          </a:solidFill>
+          <a:ln/>
+        </p:spPr>
+      </p:sp>
+      <p:sp>
+        <p:nvSpPr>
+          <p:cNvPr id="18" name="Text 15"/>
+          <p:cNvSpPr txBox="1"/>
+          <p:nvPr/>
+        </p:nvSpPr>
+        <p:spPr>
+          <a:xfrm>
+            <a:off x="2212848" y="3419856"/>
+            <a:ext cx="1380744" cy="155448"/>
+          </a:xfrm>
+          <a:prstGeom prst="rect">
+            <a:avLst/>
+          </a:prstGeom>
+          <a:noFill/>
+          <a:ln/>
+        </p:spPr>
+        <p:txBody>
+          <a:bodyPr wrap="square" lIns="0" tIns="0" rIns="0" bIns="0" rtlCol="0" anchor="ctr"/>
+          <a:lstStyle/>
+          <a:p>
+            <a:pPr algn="l" indent="0" marL="0">
+              <a:buNone/>
+            </a:pPr>
+            <a:r>
+              <a:rPr lang="en-US" sz="600" spc="260" kern="0" dirty="0">
                 <a:solidFill>
                   <a:srgbClr val="BED7E9"/>
                 </a:solidFill>
@@ -3720,21 +3993,166 @@
                 <a:ea typeface="Arial" pitchFamily="34" charset="-122"/>
                 <a:cs typeface="Arial" pitchFamily="34" charset="-120"/>
               </a:rPr>
-              <a:t>COM O POTÁSSIO DO COCO</a:t>
-            </a:r>
-            <a:endParaRPr lang="en-US" sz="650" dirty="0"/>
-          </a:p>
-        </p:txBody>
-      </p:sp>
-      <p:sp>
-        <p:nvSpPr>
-          <p:cNvPr id="11" name="Text 8"/>
-          <p:cNvSpPr txBox="1"/>
-          <p:nvPr/>
-        </p:nvSpPr>
-        <p:spPr>
-          <a:xfrm>
-            <a:off x="4087368" y="4041648"/>
+              <a:t>RISCO FECHADO</a:t>
+            </a:r>
+            <a:endParaRPr lang="en-US" sz="600" dirty="0"/>
+          </a:p>
+        </p:txBody>
+      </p:sp>
+      <p:sp>
+        <p:nvSpPr>
+          <p:cNvPr id="19" name="Text 16"/>
+          <p:cNvSpPr txBox="1"/>
+          <p:nvPr/>
+        </p:nvSpPr>
+        <p:spPr>
+          <a:xfrm>
+            <a:off x="2212848" y="3566160"/>
+            <a:ext cx="1380744" cy="365760"/>
+          </a:xfrm>
+          <a:prstGeom prst="rect">
+            <a:avLst/>
+          </a:prstGeom>
+          <a:noFill/>
+          <a:ln/>
+        </p:spPr>
+        <p:txBody>
+          <a:bodyPr wrap="square" lIns="0" tIns="0" rIns="0" bIns="0" rtlCol="0" anchor="t"/>
+          <a:lstStyle/>
+          <a:p>
+            <a:pPr indent="0" marL="0">
+              <a:lnSpc>
+                <a:spcPts val="1000"/>
+              </a:lnSpc>
+              <a:buNone/>
+            </a:pPr>
+            <a:r>
+              <a:rPr lang="en-US" sz="850" dirty="0">
+                <a:solidFill>
+                  <a:srgbClr val="97DCC7"/>
+                </a:solidFill>
+                <a:latin typeface="Arial" pitchFamily="34" charset="0"/>
+                <a:ea typeface="Arial" pitchFamily="34" charset="-122"/>
+                <a:cs typeface="Arial" pitchFamily="34" charset="-120"/>
+              </a:rPr>
+              <a:t>potássio do coco</a:t>
+            </a:r>
+            <a:endParaRPr lang="en-US" sz="850" dirty="0"/>
+          </a:p>
+        </p:txBody>
+      </p:sp>
+      <p:sp>
+        <p:nvSpPr>
+          <p:cNvPr id="20" name="Shape 17"/>
+          <p:cNvSpPr/>
+          <p:nvPr/>
+        </p:nvSpPr>
+        <p:spPr>
+          <a:xfrm>
+            <a:off x="2212848" y="3950208"/>
+            <a:ext cx="1380744" cy="7315"/>
+          </a:xfrm>
+          <a:prstGeom prst="rect">
+            <a:avLst/>
+          </a:prstGeom>
+          <a:solidFill>
+            <a:srgbClr val="97DCC7">
+              <a:alpha val="38000"/>
+            </a:srgbClr>
+          </a:solidFill>
+          <a:ln/>
+        </p:spPr>
+      </p:sp>
+      <p:sp>
+        <p:nvSpPr>
+          <p:cNvPr id="21" name="Text 18"/>
+          <p:cNvSpPr txBox="1"/>
+          <p:nvPr/>
+        </p:nvSpPr>
+        <p:spPr>
+          <a:xfrm>
+            <a:off x="2212848" y="4023360"/>
+            <a:ext cx="1380744" cy="155448"/>
+          </a:xfrm>
+          <a:prstGeom prst="rect">
+            <a:avLst/>
+          </a:prstGeom>
+          <a:noFill/>
+          <a:ln/>
+        </p:spPr>
+        <p:txBody>
+          <a:bodyPr wrap="square" lIns="0" tIns="0" rIns="0" bIns="0" rtlCol="0" anchor="ctr"/>
+          <a:lstStyle/>
+          <a:p>
+            <a:pPr algn="l" indent="0" marL="0">
+              <a:buNone/>
+            </a:pPr>
+            <a:r>
+              <a:rPr lang="en-US" sz="600" spc="260" kern="0" dirty="0">
+                <a:solidFill>
+                  <a:srgbClr val="97DCC7"/>
+                </a:solidFill>
+                <a:latin typeface="Arial" pitchFamily="34" charset="0"/>
+                <a:ea typeface="Arial" pitchFamily="34" charset="-122"/>
+                <a:cs typeface="Arial" pitchFamily="34" charset="-120"/>
+              </a:rPr>
+              <a:t>DESTRAVA</a:t>
+            </a:r>
+            <a:endParaRPr lang="en-US" sz="600" dirty="0"/>
+          </a:p>
+        </p:txBody>
+      </p:sp>
+      <p:sp>
+        <p:nvSpPr>
+          <p:cNvPr id="22" name="Text 19"/>
+          <p:cNvSpPr txBox="1"/>
+          <p:nvPr/>
+        </p:nvSpPr>
+        <p:spPr>
+          <a:xfrm>
+            <a:off x="2212848" y="4169664"/>
+            <a:ext cx="1380744" cy="365760"/>
+          </a:xfrm>
+          <a:prstGeom prst="rect">
+            <a:avLst/>
+          </a:prstGeom>
+          <a:noFill/>
+          <a:ln/>
+        </p:spPr>
+        <p:txBody>
+          <a:bodyPr wrap="square" lIns="0" tIns="0" rIns="0" bIns="0" rtlCol="0" anchor="t"/>
+          <a:lstStyle/>
+          <a:p>
+            <a:pPr indent="0" marL="0">
+              <a:lnSpc>
+                <a:spcPts val="1000"/>
+              </a:lnSpc>
+              <a:buNone/>
+            </a:pPr>
+            <a:r>
+              <a:rPr lang="en-US" sz="850" dirty="0">
+                <a:solidFill>
+                  <a:srgbClr val="EEFAF5"/>
+                </a:solidFill>
+                <a:latin typeface="Arial" pitchFamily="34" charset="0"/>
+                <a:ea typeface="Arial" pitchFamily="34" charset="-122"/>
+                <a:cs typeface="Arial" pitchFamily="34" charset="-120"/>
+              </a:rPr>
+              <a:t>operação contínua</a:t>
+            </a:r>
+            <a:endParaRPr lang="en-US" sz="850" dirty="0"/>
+          </a:p>
+        </p:txBody>
+      </p:sp>
+      <p:sp>
+        <p:nvSpPr>
+          <p:cNvPr id="23" name="Text 20"/>
+          <p:cNvSpPr txBox="1"/>
+          <p:nvPr/>
+        </p:nvSpPr>
+        <p:spPr>
+          <a:xfrm>
+            <a:off x="3950208" y="2505456"/>
             <a:ext cx="731520" cy="173736"/>
           </a:xfrm>
           <a:prstGeom prst="rect">
@@ -3751,7 +4169,7 @@
               <a:buNone/>
             </a:pPr>
             <a:r>
-              <a:rPr lang="en-US" sz="900" dirty="0">
+              <a:rPr lang="en-US" sz="1000" dirty="0">
                 <a:solidFill>
                   <a:srgbClr val="97DCC7"/>
                 </a:solidFill>
@@ -3761,20 +4179,59 @@
               </a:rPr>
               <a:t>M09</a:t>
             </a:r>
-            <a:endParaRPr lang="en-US" sz="900" dirty="0"/>
-          </a:p>
-        </p:txBody>
-      </p:sp>
-      <p:sp>
-        <p:nvSpPr>
-          <p:cNvPr id="12" name="Text 9"/>
-          <p:cNvSpPr txBox="1"/>
-          <p:nvPr/>
-        </p:nvSpPr>
-        <p:spPr>
-          <a:xfrm>
-            <a:off x="4087368" y="4224528"/>
-            <a:ext cx="1600200" cy="219456"/>
+            <a:endParaRPr lang="en-US" sz="1000" dirty="0"/>
+          </a:p>
+        </p:txBody>
+      </p:sp>
+      <p:sp>
+        <p:nvSpPr>
+          <p:cNvPr id="24" name="Text 21"/>
+          <p:cNvSpPr txBox="1"/>
+          <p:nvPr/>
+        </p:nvSpPr>
+        <p:spPr>
+          <a:xfrm>
+            <a:off x="3950208" y="2706624"/>
+            <a:ext cx="1417320" cy="155448"/>
+          </a:xfrm>
+          <a:prstGeom prst="rect">
+            <a:avLst/>
+          </a:prstGeom>
+          <a:noFill/>
+          <a:ln/>
+        </p:spPr>
+        <p:txBody>
+          <a:bodyPr wrap="square" lIns="0" tIns="0" rIns="0" bIns="0" rtlCol="0" anchor="ctr"/>
+          <a:lstStyle/>
+          <a:p>
+            <a:pPr algn="l" indent="0" marL="0">
+              <a:buNone/>
+            </a:pPr>
+            <a:r>
+              <a:rPr lang="en-US" sz="620" spc="260" kern="0" dirty="0">
+                <a:solidFill>
+                  <a:srgbClr val="BED7E9"/>
+                </a:solidFill>
+                <a:latin typeface="Arial" pitchFamily="34" charset="0"/>
+                <a:ea typeface="Arial" pitchFamily="34" charset="-122"/>
+                <a:cs typeface="Arial" pitchFamily="34" charset="-120"/>
+              </a:rPr>
+              <a:t>INTEGRIDADE CLIMÁTICA</a:t>
+            </a:r>
+            <a:endParaRPr lang="en-US" sz="620" dirty="0"/>
+          </a:p>
+        </p:txBody>
+      </p:sp>
+      <p:sp>
+        <p:nvSpPr>
+          <p:cNvPr id="25" name="Text 22"/>
+          <p:cNvSpPr txBox="1"/>
+          <p:nvPr/>
+        </p:nvSpPr>
+        <p:spPr>
+          <a:xfrm>
+            <a:off x="3950208" y="2889504"/>
+            <a:ext cx="1380744" cy="457200"/>
           </a:xfrm>
           <a:prstGeom prst="rect">
             <a:avLst/>
@@ -3787,10 +4244,13 @@
           <a:lstStyle/>
           <a:p>
             <a:pPr indent="0" marL="0">
-              <a:buNone/>
-            </a:pPr>
-            <a:r>
-              <a:rPr lang="en-US" sz="1050" dirty="0">
+              <a:lnSpc>
+                <a:spcPts val="1300"/>
+              </a:lnSpc>
+              <a:buNone/>
+            </a:pPr>
+            <a:r>
+              <a:rPr lang="en-US" sz="1100" dirty="0">
                 <a:solidFill>
                   <a:srgbClr val="EEFAF5"/>
                 </a:solidFill>
@@ -3800,36 +4260,58 @@
               </a:rPr>
               <a:t>CH₄ sob o teto</a:t>
             </a:r>
-            <a:endParaRPr lang="en-US" sz="1050" dirty="0"/>
-          </a:p>
-        </p:txBody>
-      </p:sp>
-      <p:sp>
-        <p:nvSpPr>
-          <p:cNvPr id="13" name="Text 10"/>
-          <p:cNvSpPr txBox="1"/>
-          <p:nvPr/>
-        </p:nvSpPr>
-        <p:spPr>
-          <a:xfrm>
-            <a:off x="4087368" y="4462272"/>
-            <a:ext cx="1645920" cy="155448"/>
-          </a:xfrm>
-          <a:prstGeom prst="rect">
-            <a:avLst/>
-          </a:prstGeom>
-          <a:noFill/>
-          <a:ln/>
-        </p:spPr>
-        <p:txBody>
-          <a:bodyPr wrap="square" lIns="0" tIns="0" rIns="0" bIns="0" rtlCol="0" anchor="ctr"/>
-          <a:lstStyle/>
-          <a:p>
-            <a:pPr algn="l" indent="0" marL="0">
-              <a:buNone/>
-            </a:pPr>
-            <a:r>
-              <a:rPr lang="en-US" sz="650" spc="260" kern="0" dirty="0">
+            <a:endParaRPr lang="en-US" sz="1100" dirty="0"/>
+          </a:p>
+        </p:txBody>
+      </p:sp>
+      <p:sp>
+        <p:nvSpPr>
+          <p:cNvPr id="26" name="Shape 23"/>
+          <p:cNvSpPr/>
+          <p:nvPr/>
+        </p:nvSpPr>
+        <p:spPr>
+          <a:xfrm>
+            <a:off x="3950208" y="3346704"/>
+            <a:ext cx="1380744" cy="7315"/>
+          </a:xfrm>
+          <a:prstGeom prst="rect">
+            <a:avLst/>
+          </a:prstGeom>
+          <a:solidFill>
+            <a:srgbClr val="97DCC7">
+              <a:alpha val="38000"/>
+            </a:srgbClr>
+          </a:solidFill>
+          <a:ln/>
+        </p:spPr>
+      </p:sp>
+      <p:sp>
+        <p:nvSpPr>
+          <p:cNvPr id="27" name="Text 24"/>
+          <p:cNvSpPr txBox="1"/>
+          <p:nvPr/>
+        </p:nvSpPr>
+        <p:spPr>
+          <a:xfrm>
+            <a:off x="3950208" y="3419856"/>
+            <a:ext cx="1380744" cy="155448"/>
+          </a:xfrm>
+          <a:prstGeom prst="rect">
+            <a:avLst/>
+          </a:prstGeom>
+          <a:noFill/>
+          <a:ln/>
+        </p:spPr>
+        <p:txBody>
+          <a:bodyPr wrap="square" lIns="0" tIns="0" rIns="0" bIns="0" rtlCol="0" anchor="ctr"/>
+          <a:lstStyle/>
+          <a:p>
+            <a:pPr algn="l" indent="0" marL="0">
+              <a:buNone/>
+            </a:pPr>
+            <a:r>
+              <a:rPr lang="en-US" sz="600" spc="260" kern="0" dirty="0">
                 <a:solidFill>
                   <a:srgbClr val="BED7E9"/>
                 </a:solidFill>
@@ -3837,21 +4319,166 @@
                 <a:ea typeface="Arial" pitchFamily="34" charset="-122"/>
                 <a:cs typeface="Arial" pitchFamily="34" charset="-120"/>
               </a:rPr>
-              <a:t>E AREIA DENTRO DA SPEC</a:t>
-            </a:r>
-            <a:endParaRPr lang="en-US" sz="650" dirty="0"/>
-          </a:p>
-        </p:txBody>
-      </p:sp>
-      <p:sp>
-        <p:nvSpPr>
-          <p:cNvPr id="14" name="Text 11"/>
-          <p:cNvSpPr txBox="1"/>
-          <p:nvPr/>
-        </p:nvSpPr>
-        <p:spPr>
-          <a:xfrm>
-            <a:off x="5824728" y="4041648"/>
+              <a:t>RISCO FECHADO</a:t>
+            </a:r>
+            <a:endParaRPr lang="en-US" sz="600" dirty="0"/>
+          </a:p>
+        </p:txBody>
+      </p:sp>
+      <p:sp>
+        <p:nvSpPr>
+          <p:cNvPr id="28" name="Text 25"/>
+          <p:cNvSpPr txBox="1"/>
+          <p:nvPr/>
+        </p:nvSpPr>
+        <p:spPr>
+          <a:xfrm>
+            <a:off x="3950208" y="3566160"/>
+            <a:ext cx="1380744" cy="365760"/>
+          </a:xfrm>
+          <a:prstGeom prst="rect">
+            <a:avLst/>
+          </a:prstGeom>
+          <a:noFill/>
+          <a:ln/>
+        </p:spPr>
+        <p:txBody>
+          <a:bodyPr wrap="square" lIns="0" tIns="0" rIns="0" bIns="0" rtlCol="0" anchor="t"/>
+          <a:lstStyle/>
+          <a:p>
+            <a:pPr indent="0" marL="0">
+              <a:lnSpc>
+                <a:spcPts val="1000"/>
+              </a:lnSpc>
+              <a:buNone/>
+            </a:pPr>
+            <a:r>
+              <a:rPr lang="en-US" sz="850" dirty="0">
+                <a:solidFill>
+                  <a:srgbClr val="97DCC7"/>
+                </a:solidFill>
+                <a:latin typeface="Arial" pitchFamily="34" charset="0"/>
+                <a:ea typeface="Arial" pitchFamily="34" charset="-122"/>
+                <a:cs typeface="Arial" pitchFamily="34" charset="-120"/>
+              </a:rPr>
+              <a:t>fugitivas e spec da areia</a:t>
+            </a:r>
+            <a:endParaRPr lang="en-US" sz="850" dirty="0"/>
+          </a:p>
+        </p:txBody>
+      </p:sp>
+      <p:sp>
+        <p:nvSpPr>
+          <p:cNvPr id="29" name="Shape 26"/>
+          <p:cNvSpPr/>
+          <p:nvPr/>
+        </p:nvSpPr>
+        <p:spPr>
+          <a:xfrm>
+            <a:off x="3950208" y="3950208"/>
+            <a:ext cx="1380744" cy="7315"/>
+          </a:xfrm>
+          <a:prstGeom prst="rect">
+            <a:avLst/>
+          </a:prstGeom>
+          <a:solidFill>
+            <a:srgbClr val="97DCC7">
+              <a:alpha val="38000"/>
+            </a:srgbClr>
+          </a:solidFill>
+          <a:ln/>
+        </p:spPr>
+      </p:sp>
+      <p:sp>
+        <p:nvSpPr>
+          <p:cNvPr id="30" name="Text 27"/>
+          <p:cNvSpPr txBox="1"/>
+          <p:nvPr/>
+        </p:nvSpPr>
+        <p:spPr>
+          <a:xfrm>
+            <a:off x="3950208" y="4023360"/>
+            <a:ext cx="1380744" cy="155448"/>
+          </a:xfrm>
+          <a:prstGeom prst="rect">
+            <a:avLst/>
+          </a:prstGeom>
+          <a:noFill/>
+          <a:ln/>
+        </p:spPr>
+        <p:txBody>
+          <a:bodyPr wrap="square" lIns="0" tIns="0" rIns="0" bIns="0" rtlCol="0" anchor="ctr"/>
+          <a:lstStyle/>
+          <a:p>
+            <a:pPr algn="l" indent="0" marL="0">
+              <a:buNone/>
+            </a:pPr>
+            <a:r>
+              <a:rPr lang="en-US" sz="600" spc="260" kern="0" dirty="0">
+                <a:solidFill>
+                  <a:srgbClr val="97DCC7"/>
+                </a:solidFill>
+                <a:latin typeface="Arial" pitchFamily="34" charset="0"/>
+                <a:ea typeface="Arial" pitchFamily="34" charset="-122"/>
+                <a:cs typeface="Arial" pitchFamily="34" charset="-120"/>
+              </a:rPr>
+              <a:t>DESTRAVA</a:t>
+            </a:r>
+            <a:endParaRPr lang="en-US" sz="600" dirty="0"/>
+          </a:p>
+        </p:txBody>
+      </p:sp>
+      <p:sp>
+        <p:nvSpPr>
+          <p:cNvPr id="31" name="Text 28"/>
+          <p:cNvSpPr txBox="1"/>
+          <p:nvPr/>
+        </p:nvSpPr>
+        <p:spPr>
+          <a:xfrm>
+            <a:off x="3950208" y="4169664"/>
+            <a:ext cx="1380744" cy="365760"/>
+          </a:xfrm>
+          <a:prstGeom prst="rect">
+            <a:avLst/>
+          </a:prstGeom>
+          <a:noFill/>
+          <a:ln/>
+        </p:spPr>
+        <p:txBody>
+          <a:bodyPr wrap="square" lIns="0" tIns="0" rIns="0" bIns="0" rtlCol="0" anchor="t"/>
+          <a:lstStyle/>
+          <a:p>
+            <a:pPr indent="0" marL="0">
+              <a:lnSpc>
+                <a:spcPts val="1000"/>
+              </a:lnSpc>
+              <a:buNone/>
+            </a:pPr>
+            <a:r>
+              <a:rPr lang="en-US" sz="850" dirty="0">
+                <a:solidFill>
+                  <a:srgbClr val="EEFAF5"/>
+                </a:solidFill>
+                <a:latin typeface="Arial" pitchFamily="34" charset="0"/>
+                <a:ea typeface="Arial" pitchFamily="34" charset="-122"/>
+                <a:cs typeface="Arial" pitchFamily="34" charset="-120"/>
+              </a:rPr>
+              <a:t>crédito auditável</a:t>
+            </a:r>
+            <a:endParaRPr lang="en-US" sz="850" dirty="0"/>
+          </a:p>
+        </p:txBody>
+      </p:sp>
+      <p:sp>
+        <p:nvSpPr>
+          <p:cNvPr id="32" name="Text 29"/>
+          <p:cNvSpPr txBox="1"/>
+          <p:nvPr/>
+        </p:nvSpPr>
+        <p:spPr>
+          <a:xfrm>
+            <a:off x="5687568" y="2505456"/>
             <a:ext cx="731520" cy="173736"/>
           </a:xfrm>
           <a:prstGeom prst="rect">
@@ -3868,7 +4495,7 @@
               <a:buNone/>
             </a:pPr>
             <a:r>
-              <a:rPr lang="en-US" sz="900" dirty="0">
+              <a:rPr lang="en-US" sz="1000" dirty="0">
                 <a:solidFill>
                   <a:srgbClr val="97DCC7"/>
                 </a:solidFill>
@@ -3878,20 +4505,59 @@
               </a:rPr>
               <a:t>M12</a:t>
             </a:r>
-            <a:endParaRPr lang="en-US" sz="900" dirty="0"/>
-          </a:p>
-        </p:txBody>
-      </p:sp>
-      <p:sp>
-        <p:nvSpPr>
-          <p:cNvPr id="15" name="Text 12"/>
-          <p:cNvSpPr txBox="1"/>
-          <p:nvPr/>
-        </p:nvSpPr>
-        <p:spPr>
-          <a:xfrm>
-            <a:off x="5824728" y="4224528"/>
-            <a:ext cx="1600200" cy="219456"/>
+            <a:endParaRPr lang="en-US" sz="1000" dirty="0"/>
+          </a:p>
+        </p:txBody>
+      </p:sp>
+      <p:sp>
+        <p:nvSpPr>
+          <p:cNvPr id="33" name="Text 30"/>
+          <p:cNvSpPr txBox="1"/>
+          <p:nvPr/>
+        </p:nvSpPr>
+        <p:spPr>
+          <a:xfrm>
+            <a:off x="5687568" y="2706624"/>
+            <a:ext cx="1417320" cy="155448"/>
+          </a:xfrm>
+          <a:prstGeom prst="rect">
+            <a:avLst/>
+          </a:prstGeom>
+          <a:noFill/>
+          <a:ln/>
+        </p:spPr>
+        <p:txBody>
+          <a:bodyPr wrap="square" lIns="0" tIns="0" rIns="0" bIns="0" rtlCol="0" anchor="ctr"/>
+          <a:lstStyle/>
+          <a:p>
+            <a:pPr algn="l" indent="0" marL="0">
+              <a:buNone/>
+            </a:pPr>
+            <a:r>
+              <a:rPr lang="en-US" sz="620" spc="260" kern="0" dirty="0">
+                <a:solidFill>
+                  <a:srgbClr val="BED7E9"/>
+                </a:solidFill>
+                <a:latin typeface="Arial" pitchFamily="34" charset="0"/>
+                <a:ea typeface="Arial" pitchFamily="34" charset="-122"/>
+                <a:cs typeface="Arial" pitchFamily="34" charset="-120"/>
+              </a:rPr>
+              <a:t>MERCADO</a:t>
+            </a:r>
+            <a:endParaRPr lang="en-US" sz="620" dirty="0"/>
+          </a:p>
+        </p:txBody>
+      </p:sp>
+      <p:sp>
+        <p:nvSpPr>
+          <p:cNvPr id="34" name="Text 31"/>
+          <p:cNvSpPr txBox="1"/>
+          <p:nvPr/>
+        </p:nvSpPr>
+        <p:spPr>
+          <a:xfrm>
+            <a:off x="5687568" y="2889504"/>
+            <a:ext cx="1380744" cy="457200"/>
           </a:xfrm>
           <a:prstGeom prst="rect">
             <a:avLst/>
@@ -3904,10 +4570,13 @@
           <a:lstStyle/>
           <a:p>
             <a:pPr indent="0" marL="0">
-              <a:buNone/>
-            </a:pPr>
-            <a:r>
-              <a:rPr lang="en-US" sz="1050" dirty="0">
+              <a:lnSpc>
+                <a:spcPts val="1300"/>
+              </a:lnSpc>
+              <a:buNone/>
+            </a:pPr>
+            <a:r>
+              <a:rPr lang="en-US" sz="1100" dirty="0">
                 <a:solidFill>
                   <a:srgbClr val="EEFAF5"/>
                 </a:solidFill>
@@ -3917,36 +4586,58 @@
               </a:rPr>
               <a:t>destinação assinada</a:t>
             </a:r>
-            <a:endParaRPr lang="en-US" sz="1050" dirty="0"/>
-          </a:p>
-        </p:txBody>
-      </p:sp>
-      <p:sp>
-        <p:nvSpPr>
-          <p:cNvPr id="16" name="Text 13"/>
-          <p:cNvSpPr txBox="1"/>
-          <p:nvPr/>
-        </p:nvSpPr>
-        <p:spPr>
-          <a:xfrm>
-            <a:off x="5824728" y="4462272"/>
-            <a:ext cx="1645920" cy="155448"/>
-          </a:xfrm>
-          <a:prstGeom prst="rect">
-            <a:avLst/>
-          </a:prstGeom>
-          <a:noFill/>
-          <a:ln/>
-        </p:spPr>
-        <p:txBody>
-          <a:bodyPr wrap="square" lIns="0" tIns="0" rIns="0" bIns="0" rtlCol="0" anchor="ctr"/>
-          <a:lstStyle/>
-          <a:p>
-            <a:pPr algn="l" indent="0" marL="0">
-              <a:buNone/>
-            </a:pPr>
-            <a:r>
-              <a:rPr lang="en-US" sz="650" spc="260" kern="0" dirty="0">
+            <a:endParaRPr lang="en-US" sz="1100" dirty="0"/>
+          </a:p>
+        </p:txBody>
+      </p:sp>
+      <p:sp>
+        <p:nvSpPr>
+          <p:cNvPr id="35" name="Shape 32"/>
+          <p:cNvSpPr/>
+          <p:nvPr/>
+        </p:nvSpPr>
+        <p:spPr>
+          <a:xfrm>
+            <a:off x="5687568" y="3346704"/>
+            <a:ext cx="1380744" cy="7315"/>
+          </a:xfrm>
+          <a:prstGeom prst="rect">
+            <a:avLst/>
+          </a:prstGeom>
+          <a:solidFill>
+            <a:srgbClr val="97DCC7">
+              <a:alpha val="38000"/>
+            </a:srgbClr>
+          </a:solidFill>
+          <a:ln/>
+        </p:spPr>
+      </p:sp>
+      <p:sp>
+        <p:nvSpPr>
+          <p:cNvPr id="36" name="Text 33"/>
+          <p:cNvSpPr txBox="1"/>
+          <p:nvPr/>
+        </p:nvSpPr>
+        <p:spPr>
+          <a:xfrm>
+            <a:off x="5687568" y="3419856"/>
+            <a:ext cx="1380744" cy="155448"/>
+          </a:xfrm>
+          <a:prstGeom prst="rect">
+            <a:avLst/>
+          </a:prstGeom>
+          <a:noFill/>
+          <a:ln/>
+        </p:spPr>
+        <p:txBody>
+          <a:bodyPr wrap="square" lIns="0" tIns="0" rIns="0" bIns="0" rtlCol="0" anchor="ctr"/>
+          <a:lstStyle/>
+          <a:p>
+            <a:pPr algn="l" indent="0" marL="0">
+              <a:buNone/>
+            </a:pPr>
+            <a:r>
+              <a:rPr lang="en-US" sz="600" spc="260" kern="0" dirty="0">
                 <a:solidFill>
                   <a:srgbClr val="BED7E9"/>
                 </a:solidFill>
@@ -3954,21 +4645,166 @@
                 <a:ea typeface="Arial" pitchFamily="34" charset="-122"/>
                 <a:cs typeface="Arial" pitchFamily="34" charset="-120"/>
               </a:rPr>
-              <a:t>CONDIÇÃO DE CAPEX</a:t>
-            </a:r>
-            <a:endParaRPr lang="en-US" sz="650" dirty="0"/>
-          </a:p>
-        </p:txBody>
-      </p:sp>
-      <p:sp>
-        <p:nvSpPr>
-          <p:cNvPr id="17" name="Text 14"/>
-          <p:cNvSpPr txBox="1"/>
-          <p:nvPr/>
-        </p:nvSpPr>
-        <p:spPr>
-          <a:xfrm>
-            <a:off x="7562088" y="4041648"/>
+              <a:t>RISCO FECHADO</a:t>
+            </a:r>
+            <a:endParaRPr lang="en-US" sz="600" dirty="0"/>
+          </a:p>
+        </p:txBody>
+      </p:sp>
+      <p:sp>
+        <p:nvSpPr>
+          <p:cNvPr id="37" name="Text 34"/>
+          <p:cNvSpPr txBox="1"/>
+          <p:nvPr/>
+        </p:nvSpPr>
+        <p:spPr>
+          <a:xfrm>
+            <a:off x="5687568" y="3566160"/>
+            <a:ext cx="1380744" cy="365760"/>
+          </a:xfrm>
+          <a:prstGeom prst="rect">
+            <a:avLst/>
+          </a:prstGeom>
+          <a:noFill/>
+          <a:ln/>
+        </p:spPr>
+        <p:txBody>
+          <a:bodyPr wrap="square" lIns="0" tIns="0" rIns="0" bIns="0" rtlCol="0" anchor="t"/>
+          <a:lstStyle/>
+          <a:p>
+            <a:pPr indent="0" marL="0">
+              <a:lnSpc>
+                <a:spcPts val="1000"/>
+              </a:lnSpc>
+              <a:buNone/>
+            </a:pPr>
+            <a:r>
+              <a:rPr lang="en-US" sz="850" dirty="0">
+                <a:solidFill>
+                  <a:srgbClr val="97DCC7"/>
+                </a:solidFill>
+                <a:latin typeface="Arial" pitchFamily="34" charset="0"/>
+                <a:ea typeface="Arial" pitchFamily="34" charset="-122"/>
+                <a:cs typeface="Arial" pitchFamily="34" charset="-120"/>
+              </a:rPr>
+              <a:t>feedstock e receita</a:t>
+            </a:r>
+            <a:endParaRPr lang="en-US" sz="850" dirty="0"/>
+          </a:p>
+        </p:txBody>
+      </p:sp>
+      <p:sp>
+        <p:nvSpPr>
+          <p:cNvPr id="38" name="Shape 35"/>
+          <p:cNvSpPr/>
+          <p:nvPr/>
+        </p:nvSpPr>
+        <p:spPr>
+          <a:xfrm>
+            <a:off x="5687568" y="3950208"/>
+            <a:ext cx="1380744" cy="7315"/>
+          </a:xfrm>
+          <a:prstGeom prst="rect">
+            <a:avLst/>
+          </a:prstGeom>
+          <a:solidFill>
+            <a:srgbClr val="97DCC7">
+              <a:alpha val="38000"/>
+            </a:srgbClr>
+          </a:solidFill>
+          <a:ln/>
+        </p:spPr>
+      </p:sp>
+      <p:sp>
+        <p:nvSpPr>
+          <p:cNvPr id="39" name="Text 36"/>
+          <p:cNvSpPr txBox="1"/>
+          <p:nvPr/>
+        </p:nvSpPr>
+        <p:spPr>
+          <a:xfrm>
+            <a:off x="5687568" y="4023360"/>
+            <a:ext cx="1380744" cy="155448"/>
+          </a:xfrm>
+          <a:prstGeom prst="rect">
+            <a:avLst/>
+          </a:prstGeom>
+          <a:noFill/>
+          <a:ln/>
+        </p:spPr>
+        <p:txBody>
+          <a:bodyPr wrap="square" lIns="0" tIns="0" rIns="0" bIns="0" rtlCol="0" anchor="ctr"/>
+          <a:lstStyle/>
+          <a:p>
+            <a:pPr algn="l" indent="0" marL="0">
+              <a:buNone/>
+            </a:pPr>
+            <a:r>
+              <a:rPr lang="en-US" sz="600" spc="260" kern="0" dirty="0">
+                <a:solidFill>
+                  <a:srgbClr val="97DCC7"/>
+                </a:solidFill>
+                <a:latin typeface="Arial" pitchFamily="34" charset="0"/>
+                <a:ea typeface="Arial" pitchFamily="34" charset="-122"/>
+                <a:cs typeface="Arial" pitchFamily="34" charset="-120"/>
+              </a:rPr>
+              <a:t>DESTRAVA</a:t>
+            </a:r>
+            <a:endParaRPr lang="en-US" sz="600" dirty="0"/>
+          </a:p>
+        </p:txBody>
+      </p:sp>
+      <p:sp>
+        <p:nvSpPr>
+          <p:cNvPr id="40" name="Text 37"/>
+          <p:cNvSpPr txBox="1"/>
+          <p:nvPr/>
+        </p:nvSpPr>
+        <p:spPr>
+          <a:xfrm>
+            <a:off x="5687568" y="4169664"/>
+            <a:ext cx="1380744" cy="365760"/>
+          </a:xfrm>
+          <a:prstGeom prst="rect">
+            <a:avLst/>
+          </a:prstGeom>
+          <a:noFill/>
+          <a:ln/>
+        </p:spPr>
+        <p:txBody>
+          <a:bodyPr wrap="square" lIns="0" tIns="0" rIns="0" bIns="0" rtlCol="0" anchor="t"/>
+          <a:lstStyle/>
+          <a:p>
+            <a:pPr indent="0" marL="0">
+              <a:lnSpc>
+                <a:spcPts val="1000"/>
+              </a:lnSpc>
+              <a:buNone/>
+            </a:pPr>
+            <a:r>
+              <a:rPr lang="en-US" sz="850" dirty="0">
+                <a:solidFill>
+                  <a:srgbClr val="EEFAF5"/>
+                </a:solidFill>
+                <a:latin typeface="Arial" pitchFamily="34" charset="0"/>
+                <a:ea typeface="Arial" pitchFamily="34" charset="-122"/>
+                <a:cs typeface="Arial" pitchFamily="34" charset="-120"/>
+              </a:rPr>
+              <a:t>CAPEX do Módulo 1</a:t>
+            </a:r>
+            <a:endParaRPr lang="en-US" sz="850" dirty="0"/>
+          </a:p>
+        </p:txBody>
+      </p:sp>
+      <p:sp>
+        <p:nvSpPr>
+          <p:cNvPr id="41" name="Text 38"/>
+          <p:cNvSpPr txBox="1"/>
+          <p:nvPr/>
+        </p:nvSpPr>
+        <p:spPr>
+          <a:xfrm>
+            <a:off x="7424928" y="2505456"/>
             <a:ext cx="731520" cy="173736"/>
           </a:xfrm>
           <a:prstGeom prst="rect">
@@ -3985,7 +4821,7 @@
               <a:buNone/>
             </a:pPr>
             <a:r>
-              <a:rPr lang="en-US" sz="900" dirty="0">
+              <a:rPr lang="en-US" sz="1000" dirty="0">
                 <a:solidFill>
                   <a:srgbClr val="97DCC7"/>
                 </a:solidFill>
@@ -3995,20 +4831,59 @@
               </a:rPr>
               <a:t>M15</a:t>
             </a:r>
-            <a:endParaRPr lang="en-US" sz="900" dirty="0"/>
-          </a:p>
-        </p:txBody>
-      </p:sp>
-      <p:sp>
-        <p:nvSpPr>
-          <p:cNvPr id="18" name="Text 15"/>
-          <p:cNvSpPr txBox="1"/>
-          <p:nvPr/>
-        </p:nvSpPr>
-        <p:spPr>
-          <a:xfrm>
-            <a:off x="7562088" y="4224528"/>
-            <a:ext cx="1600200" cy="219456"/>
+            <a:endParaRPr lang="en-US" sz="1000" dirty="0"/>
+          </a:p>
+        </p:txBody>
+      </p:sp>
+      <p:sp>
+        <p:nvSpPr>
+          <p:cNvPr id="42" name="Text 39"/>
+          <p:cNvSpPr txBox="1"/>
+          <p:nvPr/>
+        </p:nvSpPr>
+        <p:spPr>
+          <a:xfrm>
+            <a:off x="7424928" y="2706624"/>
+            <a:ext cx="1417320" cy="155448"/>
+          </a:xfrm>
+          <a:prstGeom prst="rect">
+            <a:avLst/>
+          </a:prstGeom>
+          <a:noFill/>
+          <a:ln/>
+        </p:spPr>
+        <p:txBody>
+          <a:bodyPr wrap="square" lIns="0" tIns="0" rIns="0" bIns="0" rtlCol="0" anchor="ctr"/>
+          <a:lstStyle/>
+          <a:p>
+            <a:pPr algn="l" indent="0" marL="0">
+              <a:buNone/>
+            </a:pPr>
+            <a:r>
+              <a:rPr lang="en-US" sz="620" spc="260" kern="0" dirty="0">
+                <a:solidFill>
+                  <a:srgbClr val="BED7E9"/>
+                </a:solidFill>
+                <a:latin typeface="Arial" pitchFamily="34" charset="0"/>
+                <a:ea typeface="Arial" pitchFamily="34" charset="-122"/>
+                <a:cs typeface="Arial" pitchFamily="34" charset="-120"/>
+              </a:rPr>
+              <a:t>VERIFICABILIDADE</a:t>
+            </a:r>
+            <a:endParaRPr lang="en-US" sz="620" dirty="0"/>
+          </a:p>
+        </p:txBody>
+      </p:sp>
+      <p:sp>
+        <p:nvSpPr>
+          <p:cNvPr id="43" name="Text 40"/>
+          <p:cNvSpPr txBox="1"/>
+          <p:nvPr/>
+        </p:nvSpPr>
+        <p:spPr>
+          <a:xfrm>
+            <a:off x="7424928" y="2889504"/>
+            <a:ext cx="1380744" cy="457200"/>
           </a:xfrm>
           <a:prstGeom prst="rect">
             <a:avLst/>
@@ -4021,10 +4896,13 @@
           <a:lstStyle/>
           <a:p>
             <a:pPr indent="0" marL="0">
-              <a:buNone/>
-            </a:pPr>
-            <a:r>
-              <a:rPr lang="en-US" sz="1050" dirty="0">
+              <a:lnSpc>
+                <a:spcPts val="1300"/>
+              </a:lnSpc>
+              <a:buNone/>
+            </a:pPr>
+            <a:r>
+              <a:rPr lang="en-US" sz="1100" dirty="0">
                 <a:solidFill>
                   <a:srgbClr val="EEFAF5"/>
                 </a:solidFill>
@@ -4034,36 +4912,58 @@
               </a:rPr>
               <a:t>facility audit</a:t>
             </a:r>
-            <a:endParaRPr lang="en-US" sz="1050" dirty="0"/>
-          </a:p>
-        </p:txBody>
-      </p:sp>
-      <p:sp>
-        <p:nvSpPr>
-          <p:cNvPr id="19" name="Text 16"/>
-          <p:cNvSpPr txBox="1"/>
-          <p:nvPr/>
-        </p:nvSpPr>
-        <p:spPr>
-          <a:xfrm>
-            <a:off x="7562088" y="4462272"/>
-            <a:ext cx="1645920" cy="155448"/>
-          </a:xfrm>
-          <a:prstGeom prst="rect">
-            <a:avLst/>
-          </a:prstGeom>
-          <a:noFill/>
-          <a:ln/>
-        </p:spPr>
-        <p:txBody>
-          <a:bodyPr wrap="square" lIns="0" tIns="0" rIns="0" bIns="0" rtlCol="0" anchor="ctr"/>
-          <a:lstStyle/>
-          <a:p>
-            <a:pPr algn="l" indent="0" marL="0">
-              <a:buNone/>
-            </a:pPr>
-            <a:r>
-              <a:rPr lang="en-US" sz="650" spc="260" kern="0" dirty="0">
+            <a:endParaRPr lang="en-US" sz="1100" dirty="0"/>
+          </a:p>
+        </p:txBody>
+      </p:sp>
+      <p:sp>
+        <p:nvSpPr>
+          <p:cNvPr id="44" name="Shape 41"/>
+          <p:cNvSpPr/>
+          <p:nvPr/>
+        </p:nvSpPr>
+        <p:spPr>
+          <a:xfrm>
+            <a:off x="7424928" y="3346704"/>
+            <a:ext cx="1380744" cy="7315"/>
+          </a:xfrm>
+          <a:prstGeom prst="rect">
+            <a:avLst/>
+          </a:prstGeom>
+          <a:solidFill>
+            <a:srgbClr val="97DCC7">
+              <a:alpha val="38000"/>
+            </a:srgbClr>
+          </a:solidFill>
+          <a:ln/>
+        </p:spPr>
+      </p:sp>
+      <p:sp>
+        <p:nvSpPr>
+          <p:cNvPr id="45" name="Text 42"/>
+          <p:cNvSpPr txBox="1"/>
+          <p:nvPr/>
+        </p:nvSpPr>
+        <p:spPr>
+          <a:xfrm>
+            <a:off x="7424928" y="3419856"/>
+            <a:ext cx="1380744" cy="155448"/>
+          </a:xfrm>
+          <a:prstGeom prst="rect">
+            <a:avLst/>
+          </a:prstGeom>
+          <a:noFill/>
+          <a:ln/>
+        </p:spPr>
+        <p:txBody>
+          <a:bodyPr wrap="square" lIns="0" tIns="0" rIns="0" bIns="0" rtlCol="0" anchor="ctr"/>
+          <a:lstStyle/>
+          <a:p>
+            <a:pPr algn="l" indent="0" marL="0">
+              <a:buNone/>
+            </a:pPr>
+            <a:r>
+              <a:rPr lang="en-US" sz="600" spc="260" kern="0" dirty="0">
                 <a:solidFill>
                   <a:srgbClr val="BED7E9"/>
                 </a:solidFill>
@@ -4071,48 +4971,193 @@
                 <a:ea typeface="Arial" pitchFamily="34" charset="-122"/>
                 <a:cs typeface="Arial" pitchFamily="34" charset="-120"/>
               </a:rPr>
-              <a:t>PRIMEIRA EMISSÃO</a:t>
-            </a:r>
-            <a:endParaRPr lang="en-US" sz="650" dirty="0"/>
-          </a:p>
-        </p:txBody>
-      </p:sp>
-      <p:sp>
-        <p:nvSpPr>
-          <p:cNvPr id="20" name="Text 17"/>
-          <p:cNvSpPr txBox="1"/>
-          <p:nvPr/>
-        </p:nvSpPr>
-        <p:spPr>
-          <a:xfrm>
-            <a:off x="457200" y="4828032"/>
-            <a:ext cx="3657600" cy="155448"/>
-          </a:xfrm>
-          <a:prstGeom prst="rect">
-            <a:avLst/>
-          </a:prstGeom>
-          <a:noFill/>
-          <a:ln/>
-        </p:spPr>
-        <p:txBody>
-          <a:bodyPr wrap="square" lIns="0" tIns="0" rIns="0" bIns="0" rtlCol="0" anchor="ctr"/>
-          <a:lstStyle/>
-          <a:p>
-            <a:pPr algn="l" indent="0" marL="0">
-              <a:buNone/>
-            </a:pPr>
-            <a:r>
-              <a:rPr lang="en-US" sz="750" spc="260" kern="0" dirty="0">
-                <a:solidFill>
-                  <a:srgbClr val="7AA8C9"/>
-                </a:solidFill>
-                <a:latin typeface="Arial" pitchFamily="34" charset="0"/>
-                <a:ea typeface="Arial" pitchFamily="34" charset="-122"/>
-                <a:cs typeface="Arial" pitchFamily="34" charset="-120"/>
-              </a:rPr>
-              <a:t>POC BIOCHAR · PETROLINA</a:t>
-            </a:r>
-            <a:endParaRPr lang="en-US" sz="750" dirty="0"/>
+              <a:t>RISCO FECHADO</a:t>
+            </a:r>
+            <a:endParaRPr lang="en-US" sz="600" dirty="0"/>
+          </a:p>
+        </p:txBody>
+      </p:sp>
+      <p:sp>
+        <p:nvSpPr>
+          <p:cNvPr id="46" name="Text 43"/>
+          <p:cNvSpPr txBox="1"/>
+          <p:nvPr/>
+        </p:nvSpPr>
+        <p:spPr>
+          <a:xfrm>
+            <a:off x="7424928" y="3566160"/>
+            <a:ext cx="1380744" cy="365760"/>
+          </a:xfrm>
+          <a:prstGeom prst="rect">
+            <a:avLst/>
+          </a:prstGeom>
+          <a:noFill/>
+          <a:ln/>
+        </p:spPr>
+        <p:txBody>
+          <a:bodyPr wrap="square" lIns="0" tIns="0" rIns="0" bIns="0" rtlCol="0" anchor="t"/>
+          <a:lstStyle/>
+          <a:p>
+            <a:pPr indent="0" marL="0">
+              <a:lnSpc>
+                <a:spcPts val="1000"/>
+              </a:lnSpc>
+              <a:buNone/>
+            </a:pPr>
+            <a:r>
+              <a:rPr lang="en-US" sz="850" dirty="0">
+                <a:solidFill>
+                  <a:srgbClr val="97DCC7"/>
+                </a:solidFill>
+                <a:latin typeface="Arial" pitchFamily="34" charset="0"/>
+                <a:ea typeface="Arial" pitchFamily="34" charset="-122"/>
+                <a:cs typeface="Arial" pitchFamily="34" charset="-120"/>
+              </a:rPr>
+              <a:t>MRV</a:t>
+            </a:r>
+            <a:endParaRPr lang="en-US" sz="850" dirty="0"/>
+          </a:p>
+        </p:txBody>
+      </p:sp>
+      <p:sp>
+        <p:nvSpPr>
+          <p:cNvPr id="47" name="Shape 44"/>
+          <p:cNvSpPr/>
+          <p:nvPr/>
+        </p:nvSpPr>
+        <p:spPr>
+          <a:xfrm>
+            <a:off x="7424928" y="3950208"/>
+            <a:ext cx="1380744" cy="7315"/>
+          </a:xfrm>
+          <a:prstGeom prst="rect">
+            <a:avLst/>
+          </a:prstGeom>
+          <a:solidFill>
+            <a:srgbClr val="97DCC7">
+              <a:alpha val="38000"/>
+            </a:srgbClr>
+          </a:solidFill>
+          <a:ln/>
+        </p:spPr>
+      </p:sp>
+      <p:sp>
+        <p:nvSpPr>
+          <p:cNvPr id="48" name="Text 45"/>
+          <p:cNvSpPr txBox="1"/>
+          <p:nvPr/>
+        </p:nvSpPr>
+        <p:spPr>
+          <a:xfrm>
+            <a:off x="7424928" y="4023360"/>
+            <a:ext cx="1380744" cy="155448"/>
+          </a:xfrm>
+          <a:prstGeom prst="rect">
+            <a:avLst/>
+          </a:prstGeom>
+          <a:noFill/>
+          <a:ln/>
+        </p:spPr>
+        <p:txBody>
+          <a:bodyPr wrap="square" lIns="0" tIns="0" rIns="0" bIns="0" rtlCol="0" anchor="ctr"/>
+          <a:lstStyle/>
+          <a:p>
+            <a:pPr algn="l" indent="0" marL="0">
+              <a:buNone/>
+            </a:pPr>
+            <a:r>
+              <a:rPr lang="en-US" sz="600" spc="260" kern="0" dirty="0">
+                <a:solidFill>
+                  <a:srgbClr val="97DCC7"/>
+                </a:solidFill>
+                <a:latin typeface="Arial" pitchFamily="34" charset="0"/>
+                <a:ea typeface="Arial" pitchFamily="34" charset="-122"/>
+                <a:cs typeface="Arial" pitchFamily="34" charset="-120"/>
+              </a:rPr>
+              <a:t>DESTRAVA</a:t>
+            </a:r>
+            <a:endParaRPr lang="en-US" sz="600" dirty="0"/>
+          </a:p>
+        </p:txBody>
+      </p:sp>
+      <p:sp>
+        <p:nvSpPr>
+          <p:cNvPr id="49" name="Text 46"/>
+          <p:cNvSpPr txBox="1"/>
+          <p:nvPr/>
+        </p:nvSpPr>
+        <p:spPr>
+          <a:xfrm>
+            <a:off x="7424928" y="4169664"/>
+            <a:ext cx="1380744" cy="365760"/>
+          </a:xfrm>
+          <a:prstGeom prst="rect">
+            <a:avLst/>
+          </a:prstGeom>
+          <a:noFill/>
+          <a:ln/>
+        </p:spPr>
+        <p:txBody>
+          <a:bodyPr wrap="square" lIns="0" tIns="0" rIns="0" bIns="0" rtlCol="0" anchor="t"/>
+          <a:lstStyle/>
+          <a:p>
+            <a:pPr indent="0" marL="0">
+              <a:lnSpc>
+                <a:spcPts val="1000"/>
+              </a:lnSpc>
+              <a:buNone/>
+            </a:pPr>
+            <a:r>
+              <a:rPr lang="en-US" sz="850" dirty="0">
+                <a:solidFill>
+                  <a:srgbClr val="EEFAF5"/>
+                </a:solidFill>
+                <a:latin typeface="Arial" pitchFamily="34" charset="0"/>
+                <a:ea typeface="Arial" pitchFamily="34" charset="-122"/>
+                <a:cs typeface="Arial" pitchFamily="34" charset="-120"/>
+              </a:rPr>
+              <a:t>primeira emissão</a:t>
+            </a:r>
+            <a:endParaRPr lang="en-US" sz="850" dirty="0"/>
+          </a:p>
+        </p:txBody>
+      </p:sp>
+      <p:sp>
+        <p:nvSpPr>
+          <p:cNvPr id="50" name="Text 47"/>
+          <p:cNvSpPr txBox="1"/>
+          <p:nvPr/>
+        </p:nvSpPr>
+        <p:spPr>
+          <a:xfrm>
+            <a:off x="457200" y="4773168"/>
+            <a:ext cx="7863840" cy="155448"/>
+          </a:xfrm>
+          <a:prstGeom prst="rect">
+            <a:avLst/>
+          </a:prstGeom>
+          <a:noFill/>
+          <a:ln/>
+        </p:spPr>
+        <p:txBody>
+          <a:bodyPr wrap="square" lIns="0" tIns="0" rIns="0" bIns="0" rtlCol="0" anchor="ctr"/>
+          <a:lstStyle/>
+          <a:p>
+            <a:pPr algn="l" indent="0" marL="0">
+              <a:buNone/>
+            </a:pPr>
+            <a:r>
+              <a:rPr lang="en-US" sz="680" spc="260" kern="0" dirty="0">
+                <a:solidFill>
+                  <a:srgbClr val="97DCC7"/>
+                </a:solidFill>
+                <a:latin typeface="Arial" pitchFamily="34" charset="0"/>
+                <a:ea typeface="Arial" pitchFamily="34" charset="-122"/>
+                <a:cs typeface="Arial" pitchFamily="34" charset="-120"/>
+              </a:rPr>
+              <a:t>A DENSIDADE DE CADA MEMBRANA CAI À MEDIDA QUE O RISCO FECHA — EM M15 A MATÉRIA ESTÁ RESOLVIDA</a:t>
+            </a:r>
+            <a:endParaRPr lang="en-US" sz="680" dirty="0"/>
           </a:p>
         </p:txBody>
       </p:sp>
@@ -6470,7 +7515,7 @@
         <p:spPr>
           <a:xfrm>
             <a:off x="457200" y="402336"/>
-            <a:ext cx="2743200" cy="155448"/>
+            <a:ext cx="3657600" cy="155448"/>
           </a:xfrm>
           <a:prstGeom prst="rect">
             <a:avLst/>
@@ -6494,7 +7539,7 @@
                 <a:ea typeface="Arial" pitchFamily="34" charset="-122"/>
                 <a:cs typeface="Arial" pitchFamily="34" charset="-120"/>
               </a:rPr>
-              <a:t>03 / PILOTO</a:t>
+              <a:t>03 / PILOTO · BALANÇO DE MASSA</a:t>
             </a:r>
             <a:endParaRPr lang="en-US" sz="750" dirty="0"/>
           </a:p>
@@ -6508,8 +7553,8 @@
         </p:nvSpPr>
         <p:spPr>
           <a:xfrm>
-            <a:off x="329184" y="1170432"/>
-            <a:ext cx="4206240" cy="2773680"/>
+            <a:off x="457200" y="804672"/>
+            <a:ext cx="3840480" cy="807720"/>
           </a:xfrm>
           <a:prstGeom prst="rect">
             <a:avLst/>
@@ -6521,11 +7566,14 @@
           <a:bodyPr wrap="square" lIns="0" tIns="0" rIns="0" bIns="0" rtlCol="0" anchor="t"/>
           <a:lstStyle/>
           <a:p>
-            <a:pPr algn="l" indent="0" marL="0">
-              <a:buNone/>
-            </a:pPr>
-            <a:r>
-              <a:rPr lang="en-US" sz="16800" spc="-400" kern="0" dirty="0">
+            <a:pPr indent="0" marL="0">
+              <a:lnSpc>
+                <a:spcPts val="3180"/>
+              </a:lnSpc>
+              <a:buNone/>
+            </a:pPr>
+            <a:r>
+              <a:rPr lang="en-US" sz="3000" spc="-110" kern="0" dirty="0">
                 <a:solidFill>
                   <a:srgbClr val="143743"/>
                 </a:solidFill>
@@ -6533,22 +7581,315 @@
                 <a:ea typeface="Arial" pitchFamily="34" charset="-122"/>
                 <a:cs typeface="Arial" pitchFamily="34" charset="-120"/>
               </a:rPr>
+              <a:t>Massa entra.</a:t>
+            </a:r>
+            <a:endParaRPr lang="en-US" sz="3000" dirty="0"/>
+          </a:p>
+          <a:p>
+            <a:pPr indent="0" marL="0">
+              <a:lnSpc>
+                <a:spcPts val="3180"/>
+              </a:lnSpc>
+              <a:buNone/>
+            </a:pPr>
+            <a:r>
+              <a:rPr lang="en-US" sz="3000" spc="-110" kern="0" dirty="0">
+                <a:solidFill>
+                  <a:srgbClr val="143743"/>
+                </a:solidFill>
+                <a:latin typeface="Arial" pitchFamily="34" charset="0"/>
+                <a:ea typeface="Arial" pitchFamily="34" charset="-122"/>
+                <a:cs typeface="Arial" pitchFamily="34" charset="-120"/>
+              </a:rPr>
+              <a:t>Carbono fica.</a:t>
+            </a:r>
+            <a:endParaRPr lang="en-US" sz="3000" dirty="0"/>
+          </a:p>
+        </p:txBody>
+      </p:sp>
+      <p:sp>
+        <p:nvSpPr>
+          <p:cNvPr id="4" name="Text 2"/>
+          <p:cNvSpPr txBox="1"/>
+          <p:nvPr/>
+        </p:nvSpPr>
+        <p:spPr>
+          <a:xfrm>
+            <a:off x="548640" y="2139696"/>
+            <a:ext cx="2194560" cy="155448"/>
+          </a:xfrm>
+          <a:prstGeom prst="rect">
+            <a:avLst/>
+          </a:prstGeom>
+          <a:noFill/>
+          <a:ln/>
+        </p:spPr>
+        <p:txBody>
+          <a:bodyPr wrap="square" lIns="0" tIns="0" rIns="0" bIns="0" rtlCol="0" anchor="ctr"/>
+          <a:lstStyle/>
+          <a:p>
+            <a:pPr algn="l" indent="0" marL="0">
+              <a:buNone/>
+            </a:pPr>
+            <a:r>
+              <a:rPr lang="en-US" sz="750" spc="260" kern="0" dirty="0">
+                <a:solidFill>
+                  <a:srgbClr val="5B8AAE"/>
+                </a:solidFill>
+                <a:latin typeface="Arial" pitchFamily="34" charset="0"/>
+                <a:ea typeface="Arial" pitchFamily="34" charset="-122"/>
+                <a:cs typeface="Arial" pitchFamily="34" charset="-120"/>
+              </a:rPr>
+              <a:t>BIOMASSA · ENTRADA</a:t>
+            </a:r>
+            <a:endParaRPr lang="en-US" sz="750" dirty="0"/>
+          </a:p>
+        </p:txBody>
+      </p:sp>
+      <p:sp>
+        <p:nvSpPr>
+          <p:cNvPr id="5" name="Text 3"/>
+          <p:cNvSpPr txBox="1"/>
+          <p:nvPr/>
+        </p:nvSpPr>
+        <p:spPr>
+          <a:xfrm>
+            <a:off x="530352" y="3127248"/>
+            <a:ext cx="2377440" cy="561340"/>
+          </a:xfrm>
+          <a:prstGeom prst="rect">
+            <a:avLst/>
+          </a:prstGeom>
+          <a:noFill/>
+          <a:ln/>
+        </p:spPr>
+        <p:txBody>
+          <a:bodyPr wrap="square" lIns="0" tIns="0" rIns="0" bIns="0" rtlCol="0" anchor="t"/>
+          <a:lstStyle/>
+          <a:p>
+            <a:pPr algn="l" indent="0" marL="0">
+              <a:buNone/>
+            </a:pPr>
+            <a:r>
+              <a:rPr lang="en-US" sz="3400" spc="-200" kern="0" dirty="0">
+                <a:solidFill>
+                  <a:srgbClr val="5B8AAE"/>
+                </a:solidFill>
+                <a:latin typeface="Arial" pitchFamily="34" charset="0"/>
+                <a:ea typeface="Arial" pitchFamily="34" charset="-122"/>
+                <a:cs typeface="Arial" pitchFamily="34" charset="-120"/>
+              </a:rPr>
+              <a:t>4.000</a:t>
+            </a:r>
+            <a:endParaRPr lang="en-US" sz="3400" dirty="0"/>
+          </a:p>
+        </p:txBody>
+      </p:sp>
+      <p:sp>
+        <p:nvSpPr>
+          <p:cNvPr id="6" name="Text 4"/>
+          <p:cNvSpPr txBox="1"/>
+          <p:nvPr/>
+        </p:nvSpPr>
+        <p:spPr>
+          <a:xfrm>
+            <a:off x="566928" y="3712464"/>
+            <a:ext cx="2377440" cy="155448"/>
+          </a:xfrm>
+          <a:prstGeom prst="rect">
+            <a:avLst/>
+          </a:prstGeom>
+          <a:noFill/>
+          <a:ln/>
+        </p:spPr>
+        <p:txBody>
+          <a:bodyPr wrap="square" lIns="0" tIns="0" rIns="0" bIns="0" rtlCol="0" anchor="ctr"/>
+          <a:lstStyle/>
+          <a:p>
+            <a:pPr algn="l" indent="0" marL="0">
+              <a:buNone/>
+            </a:pPr>
+            <a:r>
+              <a:rPr lang="en-US" sz="680" spc="260" kern="0" dirty="0">
+                <a:solidFill>
+                  <a:srgbClr val="7AA8C9"/>
+                </a:solidFill>
+                <a:latin typeface="Arial" pitchFamily="34" charset="0"/>
+                <a:ea typeface="Arial" pitchFamily="34" charset="-122"/>
+                <a:cs typeface="Arial" pitchFamily="34" charset="-120"/>
+              </a:rPr>
+              <a:t>T/ANO DE CASCA DE COCO</a:t>
+            </a:r>
+            <a:endParaRPr lang="en-US" sz="680" dirty="0"/>
+          </a:p>
+        </p:txBody>
+      </p:sp>
+      <p:sp>
+        <p:nvSpPr>
+          <p:cNvPr id="7" name="Text 5"/>
+          <p:cNvSpPr txBox="1"/>
+          <p:nvPr/>
+        </p:nvSpPr>
+        <p:spPr>
+          <a:xfrm>
+            <a:off x="5029200" y="2139696"/>
+            <a:ext cx="1645920" cy="155448"/>
+          </a:xfrm>
+          <a:prstGeom prst="rect">
+            <a:avLst/>
+          </a:prstGeom>
+          <a:noFill/>
+          <a:ln/>
+        </p:spPr>
+        <p:txBody>
+          <a:bodyPr wrap="square" lIns="0" tIns="0" rIns="0" bIns="0" rtlCol="0" anchor="ctr"/>
+          <a:lstStyle/>
+          <a:p>
+            <a:pPr algn="l" indent="0" marL="0">
+              <a:buNone/>
+            </a:pPr>
+            <a:r>
+              <a:rPr lang="en-US" sz="750" spc="260" kern="0" dirty="0">
+                <a:solidFill>
+                  <a:srgbClr val="1F7370"/>
+                </a:solidFill>
+                <a:latin typeface="Arial" pitchFamily="34" charset="0"/>
+                <a:ea typeface="Arial" pitchFamily="34" charset="-122"/>
+                <a:cs typeface="Arial" pitchFamily="34" charset="-120"/>
+              </a:rPr>
+              <a:t>CHAR · PRODUTO</a:t>
+            </a:r>
+            <a:endParaRPr lang="en-US" sz="750" dirty="0"/>
+          </a:p>
+        </p:txBody>
+      </p:sp>
+      <p:sp>
+        <p:nvSpPr>
+          <p:cNvPr id="8" name="Text 6"/>
+          <p:cNvSpPr txBox="1"/>
+          <p:nvPr/>
+        </p:nvSpPr>
+        <p:spPr>
+          <a:xfrm>
+            <a:off x="4992624" y="2889504"/>
+            <a:ext cx="1828800" cy="990600"/>
+          </a:xfrm>
+          <a:prstGeom prst="rect">
+            <a:avLst/>
+          </a:prstGeom>
+          <a:noFill/>
+          <a:ln/>
+        </p:spPr>
+        <p:txBody>
+          <a:bodyPr wrap="square" lIns="0" tIns="0" rIns="0" bIns="0" rtlCol="0" anchor="t"/>
+          <a:lstStyle/>
+          <a:p>
+            <a:pPr algn="l" indent="0" marL="0">
+              <a:buNone/>
+            </a:pPr>
+            <a:r>
+              <a:rPr lang="en-US" sz="6000" spc="-200" kern="0" dirty="0">
+                <a:solidFill>
+                  <a:srgbClr val="143743"/>
+                </a:solidFill>
+                <a:latin typeface="Arial" pitchFamily="34" charset="0"/>
+                <a:ea typeface="Arial" pitchFamily="34" charset="-122"/>
+                <a:cs typeface="Arial" pitchFamily="34" charset="-120"/>
+              </a:rPr>
               <a:t>810</a:t>
             </a:r>
-            <a:endParaRPr lang="en-US" sz="16800" dirty="0"/>
-          </a:p>
-        </p:txBody>
-      </p:sp>
-      <p:sp>
-        <p:nvSpPr>
-          <p:cNvPr id="4" name="Text 2"/>
-          <p:cNvSpPr txBox="1"/>
-          <p:nvPr/>
-        </p:nvSpPr>
-        <p:spPr>
-          <a:xfrm>
-            <a:off x="512064" y="4041648"/>
-            <a:ext cx="2926080" cy="274320"/>
+            <a:endParaRPr lang="en-US" sz="6000" dirty="0"/>
+          </a:p>
+        </p:txBody>
+      </p:sp>
+      <p:sp>
+        <p:nvSpPr>
+          <p:cNvPr id="9" name="Text 7"/>
+          <p:cNvSpPr txBox="1"/>
+          <p:nvPr/>
+        </p:nvSpPr>
+        <p:spPr>
+          <a:xfrm>
+            <a:off x="5047488" y="3913632"/>
+            <a:ext cx="1828800" cy="155448"/>
+          </a:xfrm>
+          <a:prstGeom prst="rect">
+            <a:avLst/>
+          </a:prstGeom>
+          <a:noFill/>
+          <a:ln/>
+        </p:spPr>
+        <p:txBody>
+          <a:bodyPr wrap="square" lIns="0" tIns="0" rIns="0" bIns="0" rtlCol="0" anchor="ctr"/>
+          <a:lstStyle/>
+          <a:p>
+            <a:pPr algn="l" indent="0" marL="0">
+              <a:buNone/>
+            </a:pPr>
+            <a:r>
+              <a:rPr lang="en-US" sz="680" spc="260" kern="0" dirty="0">
+                <a:solidFill>
+                  <a:srgbClr val="1F7370"/>
+                </a:solidFill>
+                <a:latin typeface="Arial" pitchFamily="34" charset="0"/>
+                <a:ea typeface="Arial" pitchFamily="34" charset="-122"/>
+                <a:cs typeface="Arial" pitchFamily="34" charset="-120"/>
+              </a:rPr>
+              <a:t>T/ANO DE BIOCHAR</a:t>
+            </a:r>
+            <a:endParaRPr lang="en-US" sz="680" dirty="0"/>
+          </a:p>
+        </p:txBody>
+      </p:sp>
+      <p:sp>
+        <p:nvSpPr>
+          <p:cNvPr id="10" name="Text 8"/>
+          <p:cNvSpPr txBox="1"/>
+          <p:nvPr/>
+        </p:nvSpPr>
+        <p:spPr>
+          <a:xfrm>
+            <a:off x="6858000" y="2139696"/>
+            <a:ext cx="1554480" cy="155448"/>
+          </a:xfrm>
+          <a:prstGeom prst="rect">
+            <a:avLst/>
+          </a:prstGeom>
+          <a:noFill/>
+          <a:ln/>
+        </p:spPr>
+        <p:txBody>
+          <a:bodyPr wrap="square" lIns="0" tIns="0" rIns="0" bIns="0" rtlCol="0" anchor="ctr"/>
+          <a:lstStyle/>
+          <a:p>
+            <a:pPr algn="l" indent="0" marL="0">
+              <a:buNone/>
+            </a:pPr>
+            <a:r>
+              <a:rPr lang="en-US" sz="750" spc="260" kern="0" dirty="0">
+                <a:solidFill>
+                  <a:srgbClr val="1F92AB"/>
+                </a:solidFill>
+                <a:latin typeface="Arial" pitchFamily="34" charset="0"/>
+                <a:ea typeface="Arial" pitchFamily="34" charset="-122"/>
+                <a:cs typeface="Arial" pitchFamily="34" charset="-120"/>
+              </a:rPr>
+              <a:t>REMOÇÃO · RESULTADO</a:t>
+            </a:r>
+            <a:endParaRPr lang="en-US" sz="750" dirty="0"/>
+          </a:p>
+        </p:txBody>
+      </p:sp>
+      <p:sp>
+        <p:nvSpPr>
+          <p:cNvPr id="11" name="Text 9"/>
+          <p:cNvSpPr txBox="1"/>
+          <p:nvPr/>
+        </p:nvSpPr>
+        <p:spPr>
+          <a:xfrm>
+            <a:off x="6839712" y="2962656"/>
+            <a:ext cx="2011680" cy="627380"/>
           </a:xfrm>
           <a:prstGeom prst="rect">
             <a:avLst/>
@@ -6560,11 +7901,89 @@
           <a:bodyPr wrap="square" lIns="0" tIns="0" rIns="0" bIns="0" rtlCol="0" anchor="t"/>
           <a:lstStyle/>
           <a:p>
-            <a:pPr indent="0" marL="0">
-              <a:buNone/>
-            </a:pPr>
-            <a:r>
-              <a:rPr lang="en-US" sz="1500" spc="-20" kern="0" dirty="0">
+            <a:pPr algn="l" indent="0" marL="0">
+              <a:buNone/>
+            </a:pPr>
+            <a:r>
+              <a:rPr lang="en-US" sz="3800" spc="-200" kern="0" dirty="0">
+                <a:solidFill>
+                  <a:srgbClr val="175D5C"/>
+                </a:solidFill>
+                <a:latin typeface="Arial" pitchFamily="34" charset="0"/>
+                <a:ea typeface="Arial" pitchFamily="34" charset="-122"/>
+                <a:cs typeface="Arial" pitchFamily="34" charset="-120"/>
+              </a:rPr>
+              <a:t>1.620</a:t>
+            </a:r>
+            <a:endParaRPr lang="en-US" sz="3800" dirty="0"/>
+          </a:p>
+        </p:txBody>
+      </p:sp>
+      <p:sp>
+        <p:nvSpPr>
+          <p:cNvPr id="12" name="Text 10"/>
+          <p:cNvSpPr txBox="1"/>
+          <p:nvPr/>
+        </p:nvSpPr>
+        <p:spPr>
+          <a:xfrm>
+            <a:off x="6876288" y="3639312"/>
+            <a:ext cx="2194560" cy="155448"/>
+          </a:xfrm>
+          <a:prstGeom prst="rect">
+            <a:avLst/>
+          </a:prstGeom>
+          <a:noFill/>
+          <a:ln/>
+        </p:spPr>
+        <p:txBody>
+          <a:bodyPr wrap="square" lIns="0" tIns="0" rIns="0" bIns="0" rtlCol="0" anchor="ctr"/>
+          <a:lstStyle/>
+          <a:p>
+            <a:pPr algn="l" indent="0" marL="0">
+              <a:buNone/>
+            </a:pPr>
+            <a:r>
+              <a:rPr lang="en-US" sz="680" spc="260" kern="0" dirty="0">
+                <a:solidFill>
+                  <a:srgbClr val="7AA8C9"/>
+                </a:solidFill>
+                <a:latin typeface="Arial" pitchFamily="34" charset="0"/>
+                <a:ea typeface="Arial" pitchFamily="34" charset="-122"/>
+                <a:cs typeface="Arial" pitchFamily="34" charset="-120"/>
+              </a:rPr>
+              <a:t>TCO₂E/ANO · 2,0 POR T DE CHAR</a:t>
+            </a:r>
+            <a:endParaRPr lang="en-US" sz="680" dirty="0"/>
+          </a:p>
+        </p:txBody>
+      </p:sp>
+      <p:sp>
+        <p:nvSpPr>
+          <p:cNvPr id="13" name="Text 11"/>
+          <p:cNvSpPr txBox="1"/>
+          <p:nvPr/>
+        </p:nvSpPr>
+        <p:spPr>
+          <a:xfrm>
+            <a:off x="2834640" y="1810512"/>
+            <a:ext cx="2194560" cy="155448"/>
+          </a:xfrm>
+          <a:prstGeom prst="rect">
+            <a:avLst/>
+          </a:prstGeom>
+          <a:noFill/>
+          <a:ln/>
+        </p:spPr>
+        <p:txBody>
+          <a:bodyPr wrap="square" lIns="0" tIns="0" rIns="0" bIns="0" rtlCol="0" anchor="ctr"/>
+          <a:lstStyle/>
+          <a:p>
+            <a:pPr algn="r" indent="0" marL="0">
+              <a:buNone/>
+            </a:pPr>
+            <a:r>
+              <a:rPr lang="en-US" sz="680" spc="260" kern="0" dirty="0">
                 <a:solidFill>
                   <a:srgbClr val="1F7370"/>
                 </a:solidFill>
@@ -6572,29 +7991,29 @@
                 <a:ea typeface="Arial" pitchFamily="34" charset="-122"/>
                 <a:cs typeface="Arial" pitchFamily="34" charset="-120"/>
               </a:rPr>
-              <a:t>t biochar / ano</a:t>
-            </a:r>
-            <a:endParaRPr lang="en-US" sz="1500" dirty="0"/>
-          </a:p>
-        </p:txBody>
-      </p:sp>
-      <p:sp>
-        <p:nvSpPr>
-          <p:cNvPr id="5" name="Shape 3"/>
+              <a:t>500 KG/H  ·  ≥ 20 % BASE SECA</a:t>
+            </a:r>
+            <a:endParaRPr lang="en-US" sz="680" dirty="0"/>
+          </a:p>
+        </p:txBody>
+      </p:sp>
+      <p:sp>
+        <p:nvSpPr>
+          <p:cNvPr id="14" name="Shape 12"/>
           <p:cNvSpPr/>
           <p:nvPr/>
         </p:nvSpPr>
         <p:spPr>
           <a:xfrm>
-            <a:off x="475488" y="3968496"/>
-            <a:ext cx="2743200" cy="7315"/>
+            <a:off x="3895344" y="3931920"/>
+            <a:ext cx="1005840" cy="7315"/>
           </a:xfrm>
           <a:prstGeom prst="rect">
             <a:avLst/>
           </a:prstGeom>
           <a:solidFill>
             <a:srgbClr val="1F7370">
-              <a:alpha val="55000"/>
+              <a:alpha val="50000"/>
             </a:srgbClr>
           </a:solidFill>
           <a:ln/>
@@ -6602,21 +8021,177 @@
       </p:sp>
       <p:sp>
         <p:nvSpPr>
-          <p:cNvPr id="6" name="Shape 4"/>
+          <p:cNvPr id="15" name="Text 13"/>
+          <p:cNvSpPr txBox="1"/>
+          <p:nvPr/>
+        </p:nvSpPr>
+        <p:spPr>
+          <a:xfrm>
+            <a:off x="3895344" y="4023360"/>
+            <a:ext cx="1554480" cy="155448"/>
+          </a:xfrm>
+          <a:prstGeom prst="rect">
+            <a:avLst/>
+          </a:prstGeom>
+          <a:noFill/>
+          <a:ln/>
+        </p:spPr>
+        <p:txBody>
+          <a:bodyPr wrap="square" lIns="0" tIns="0" rIns="0" bIns="0" rtlCol="0" anchor="ctr"/>
+          <a:lstStyle/>
+          <a:p>
+            <a:pPr algn="l" indent="0" marL="0">
+              <a:buNone/>
+            </a:pPr>
+            <a:r>
+              <a:rPr lang="en-US" sz="620" spc="260" kern="0" dirty="0">
+                <a:solidFill>
+                  <a:srgbClr val="5B8AAE"/>
+                </a:solidFill>
+                <a:latin typeface="Arial" pitchFamily="34" charset="0"/>
+                <a:ea typeface="Arial" pitchFamily="34" charset="-122"/>
+                <a:cs typeface="Arial" pitchFamily="34" charset="-120"/>
+              </a:rPr>
+              <a:t>Z1 COMBUSTÃO</a:t>
+            </a:r>
+            <a:endParaRPr lang="en-US" sz="620" dirty="0"/>
+          </a:p>
+        </p:txBody>
+      </p:sp>
+      <p:sp>
+        <p:nvSpPr>
+          <p:cNvPr id="16" name="Text 14"/>
+          <p:cNvSpPr txBox="1"/>
+          <p:nvPr/>
+        </p:nvSpPr>
+        <p:spPr>
+          <a:xfrm>
+            <a:off x="3895344" y="4187952"/>
+            <a:ext cx="1554480" cy="155448"/>
+          </a:xfrm>
+          <a:prstGeom prst="rect">
+            <a:avLst/>
+          </a:prstGeom>
+          <a:noFill/>
+          <a:ln/>
+        </p:spPr>
+        <p:txBody>
+          <a:bodyPr wrap="square" lIns="0" tIns="0" rIns="0" bIns="0" rtlCol="0" anchor="ctr"/>
+          <a:lstStyle/>
+          <a:p>
+            <a:pPr algn="l" indent="0" marL="0">
+              <a:buNone/>
+            </a:pPr>
+            <a:r>
+              <a:rPr lang="en-US" sz="620" spc="260" kern="0" dirty="0">
+                <a:solidFill>
+                  <a:srgbClr val="1F7370"/>
+                </a:solidFill>
+                <a:latin typeface="Arial" pitchFamily="34" charset="0"/>
+                <a:ea typeface="Arial" pitchFamily="34" charset="-122"/>
+                <a:cs typeface="Arial" pitchFamily="34" charset="-120"/>
+              </a:rPr>
+              <a:t>Z2 PIRÓLISE 600 °C</a:t>
+            </a:r>
+            <a:endParaRPr lang="en-US" sz="620" dirty="0"/>
+          </a:p>
+        </p:txBody>
+      </p:sp>
+      <p:sp>
+        <p:nvSpPr>
+          <p:cNvPr id="17" name="Text 15"/>
+          <p:cNvSpPr txBox="1"/>
+          <p:nvPr/>
+        </p:nvSpPr>
+        <p:spPr>
+          <a:xfrm>
+            <a:off x="3895344" y="4352544"/>
+            <a:ext cx="1554480" cy="155448"/>
+          </a:xfrm>
+          <a:prstGeom prst="rect">
+            <a:avLst/>
+          </a:prstGeom>
+          <a:noFill/>
+          <a:ln/>
+        </p:spPr>
+        <p:txBody>
+          <a:bodyPr wrap="square" lIns="0" tIns="0" rIns="0" bIns="0" rtlCol="0" anchor="ctr"/>
+          <a:lstStyle/>
+          <a:p>
+            <a:pPr algn="l" indent="0" marL="0">
+              <a:buNone/>
+            </a:pPr>
+            <a:r>
+              <a:rPr lang="en-US" sz="620" spc="260" kern="0" dirty="0">
+                <a:solidFill>
+                  <a:srgbClr val="5B8AAE"/>
+                </a:solidFill>
+                <a:latin typeface="Arial" pitchFamily="34" charset="0"/>
+                <a:ea typeface="Arial" pitchFamily="34" charset="-122"/>
+                <a:cs typeface="Arial" pitchFamily="34" charset="-120"/>
+              </a:rPr>
+              <a:t>Z3 FREEBOARD</a:t>
+            </a:r>
+            <a:endParaRPr lang="en-US" sz="620" dirty="0"/>
+          </a:p>
+        </p:txBody>
+      </p:sp>
+      <p:sp>
+        <p:nvSpPr>
+          <p:cNvPr id="18" name="Text 16"/>
+          <p:cNvSpPr txBox="1"/>
+          <p:nvPr/>
+        </p:nvSpPr>
+        <p:spPr>
+          <a:xfrm>
+            <a:off x="3895344" y="4517136"/>
+            <a:ext cx="1737360" cy="155448"/>
+          </a:xfrm>
+          <a:prstGeom prst="rect">
+            <a:avLst/>
+          </a:prstGeom>
+          <a:noFill/>
+          <a:ln/>
+        </p:spPr>
+        <p:txBody>
+          <a:bodyPr wrap="square" lIns="0" tIns="0" rIns="0" bIns="0" rtlCol="0" anchor="ctr"/>
+          <a:lstStyle/>
+          <a:p>
+            <a:pPr algn="l" indent="0" marL="0">
+              <a:buNone/>
+            </a:pPr>
+            <a:r>
+              <a:rPr lang="en-US" sz="620" spc="260" kern="0" dirty="0">
+                <a:solidFill>
+                  <a:srgbClr val="7AA8C9"/>
+                </a:solidFill>
+                <a:latin typeface="Arial" pitchFamily="34" charset="0"/>
+                <a:ea typeface="Arial" pitchFamily="34" charset="-122"/>
+                <a:cs typeface="Arial" pitchFamily="34" charset="-120"/>
+              </a:rPr>
+              <a:t>AREIA RECIRCULA Z1↔Z3</a:t>
+            </a:r>
+            <a:endParaRPr lang="en-US" sz="620" dirty="0"/>
+          </a:p>
+        </p:txBody>
+      </p:sp>
+      <p:sp>
+        <p:nvSpPr>
+          <p:cNvPr id="19" name="Shape 17"/>
           <p:cNvSpPr/>
           <p:nvPr/>
         </p:nvSpPr>
         <p:spPr>
           <a:xfrm>
-            <a:off x="475488" y="4352544"/>
-            <a:ext cx="1078992" cy="7315"/>
+            <a:off x="457200" y="4626864"/>
+            <a:ext cx="3291840" cy="7315"/>
           </a:xfrm>
           <a:prstGeom prst="rect">
             <a:avLst/>
           </a:prstGeom>
           <a:solidFill>
             <a:srgbClr val="5B8AAE">
-              <a:alpha val="38000"/>
+              <a:alpha val="34000"/>
             </a:srgbClr>
           </a:solidFill>
           <a:ln/>
@@ -6624,14 +8199,14 @@
       </p:sp>
       <p:sp>
         <p:nvSpPr>
-          <p:cNvPr id="7" name="Text 5"/>
-          <p:cNvSpPr txBox="1"/>
-          <p:nvPr/>
-        </p:nvSpPr>
-        <p:spPr>
-          <a:xfrm>
-            <a:off x="475488" y="4425696"/>
-            <a:ext cx="1060704" cy="155448"/>
+          <p:cNvPr id="20" name="Text 18"/>
+          <p:cNvSpPr txBox="1"/>
+          <p:nvPr/>
+        </p:nvSpPr>
+        <p:spPr>
+          <a:xfrm>
+            <a:off x="457200" y="4718304"/>
+            <a:ext cx="8138160" cy="155448"/>
           </a:xfrm>
           <a:prstGeom prst="rect">
             <a:avLst/>
@@ -6649,13 +8224,52 @@
             <a:r>
               <a:rPr lang="en-US" sz="650" spc="260" kern="0" dirty="0">
                 <a:solidFill>
+                  <a:srgbClr val="7AA8C9"/>
+                </a:solidFill>
+                <a:latin typeface="Arial" pitchFamily="34" charset="0"/>
+                <a:ea typeface="Arial" pitchFamily="34" charset="-122"/>
+                <a:cs typeface="Arial" pitchFamily="34" charset="-120"/>
+              </a:rPr>
+              <a:t>RENDIMENTO ≥20% É O INDICADOR DA ENTREGA E3.1 · 2,0 TCO₂E/T É O PISO DA E5.2</a:t>
+            </a:r>
+            <a:endParaRPr lang="en-US" sz="650" dirty="0"/>
+          </a:p>
+        </p:txBody>
+      </p:sp>
+      <p:sp>
+        <p:nvSpPr>
+          <p:cNvPr id="21" name="Text 19"/>
+          <p:cNvSpPr txBox="1"/>
+          <p:nvPr/>
+        </p:nvSpPr>
+        <p:spPr>
+          <a:xfrm>
+            <a:off x="457200" y="4882896"/>
+            <a:ext cx="8138160" cy="155448"/>
+          </a:xfrm>
+          <a:prstGeom prst="rect">
+            <a:avLst/>
+          </a:prstGeom>
+          <a:noFill/>
+          <a:ln/>
+        </p:spPr>
+        <p:txBody>
+          <a:bodyPr wrap="square" lIns="0" tIns="0" rIns="0" bIns="0" rtlCol="0" anchor="ctr"/>
+          <a:lstStyle/>
+          <a:p>
+            <a:pPr algn="l" indent="0" marL="0">
+              <a:buNone/>
+            </a:pPr>
+            <a:r>
+              <a:rPr lang="en-US" sz="650" spc="260" kern="0" dirty="0">
+                <a:solidFill>
                   <a:srgbClr val="5B8AAE"/>
                 </a:solidFill>
                 <a:latin typeface="Arial" pitchFamily="34" charset="0"/>
                 <a:ea typeface="Arial" pitchFamily="34" charset="-122"/>
                 <a:cs typeface="Arial" pitchFamily="34" charset="-120"/>
               </a:rPr>
-              <a:t>CAPACIDADE</a:t>
+              <a:t>TRL 04 → 07 · 30 MESES · LEITO FLUIDIZADO CIRCULANTE DE TRÊS ZONAS</a:t>
             </a:r>
             <a:endParaRPr lang="en-US" sz="650" dirty="0"/>
           </a:p>
@@ -6663,541 +8277,7 @@
       </p:sp>
       <p:sp>
         <p:nvSpPr>
-          <p:cNvPr id="8" name="Text 6"/>
-          <p:cNvSpPr txBox="1"/>
-          <p:nvPr/>
-        </p:nvSpPr>
-        <p:spPr>
-          <a:xfrm>
-            <a:off x="475488" y="4590288"/>
-            <a:ext cx="1042416" cy="173736"/>
-          </a:xfrm>
-          <a:prstGeom prst="rect">
-            <a:avLst/>
-          </a:prstGeom>
-          <a:noFill/>
-          <a:ln/>
-        </p:spPr>
-        <p:txBody>
-          <a:bodyPr wrap="square" lIns="0" tIns="0" rIns="0" bIns="0" rtlCol="0" anchor="ctr"/>
-          <a:lstStyle/>
-          <a:p>
-            <a:pPr algn="l" indent="0" marL="0">
-              <a:buNone/>
-            </a:pPr>
-            <a:r>
-              <a:rPr lang="en-US" sz="900" dirty="0">
-                <a:solidFill>
-                  <a:srgbClr val="143743"/>
-                </a:solidFill>
-                <a:latin typeface="Courier New" pitchFamily="34" charset="0"/>
-                <a:ea typeface="Courier New" pitchFamily="34" charset="-122"/>
-                <a:cs typeface="Courier New" pitchFamily="34" charset="-120"/>
-              </a:rPr>
-              <a:t>500 kg/h</a:t>
-            </a:r>
-            <a:endParaRPr lang="en-US" sz="900" dirty="0"/>
-          </a:p>
-        </p:txBody>
-      </p:sp>
-      <p:sp>
-        <p:nvSpPr>
-          <p:cNvPr id="9" name="Shape 7"/>
-          <p:cNvSpPr/>
-          <p:nvPr/>
-        </p:nvSpPr>
-        <p:spPr>
-          <a:xfrm>
-            <a:off x="1664208" y="4352544"/>
-            <a:ext cx="1078992" cy="7315"/>
-          </a:xfrm>
-          <a:prstGeom prst="rect">
-            <a:avLst/>
-          </a:prstGeom>
-          <a:solidFill>
-            <a:srgbClr val="5B8AAE">
-              <a:alpha val="38000"/>
-            </a:srgbClr>
-          </a:solidFill>
-          <a:ln/>
-        </p:spPr>
-      </p:sp>
-      <p:sp>
-        <p:nvSpPr>
-          <p:cNvPr id="10" name="Text 8"/>
-          <p:cNvSpPr txBox="1"/>
-          <p:nvPr/>
-        </p:nvSpPr>
-        <p:spPr>
-          <a:xfrm>
-            <a:off x="1664208" y="4425696"/>
-            <a:ext cx="1060704" cy="155448"/>
-          </a:xfrm>
-          <a:prstGeom prst="rect">
-            <a:avLst/>
-          </a:prstGeom>
-          <a:noFill/>
-          <a:ln/>
-        </p:spPr>
-        <p:txBody>
-          <a:bodyPr wrap="square" lIns="0" tIns="0" rIns="0" bIns="0" rtlCol="0" anchor="ctr"/>
-          <a:lstStyle/>
-          <a:p>
-            <a:pPr algn="l" indent="0" marL="0">
-              <a:buNone/>
-            </a:pPr>
-            <a:r>
-              <a:rPr lang="en-US" sz="650" spc="260" kern="0" dirty="0">
-                <a:solidFill>
-                  <a:srgbClr val="5B8AAE"/>
-                </a:solidFill>
-                <a:latin typeface="Arial" pitchFamily="34" charset="0"/>
-                <a:ea typeface="Arial" pitchFamily="34" charset="-122"/>
-                <a:cs typeface="Arial" pitchFamily="34" charset="-120"/>
-              </a:rPr>
-              <a:t>BIOMASSA</a:t>
-            </a:r>
-            <a:endParaRPr lang="en-US" sz="650" dirty="0"/>
-          </a:p>
-        </p:txBody>
-      </p:sp>
-      <p:sp>
-        <p:nvSpPr>
-          <p:cNvPr id="11" name="Text 9"/>
-          <p:cNvSpPr txBox="1"/>
-          <p:nvPr/>
-        </p:nvSpPr>
-        <p:spPr>
-          <a:xfrm>
-            <a:off x="1664208" y="4590288"/>
-            <a:ext cx="1042416" cy="173736"/>
-          </a:xfrm>
-          <a:prstGeom prst="rect">
-            <a:avLst/>
-          </a:prstGeom>
-          <a:noFill/>
-          <a:ln/>
-        </p:spPr>
-        <p:txBody>
-          <a:bodyPr wrap="square" lIns="0" tIns="0" rIns="0" bIns="0" rtlCol="0" anchor="ctr"/>
-          <a:lstStyle/>
-          <a:p>
-            <a:pPr algn="l" indent="0" marL="0">
-              <a:buNone/>
-            </a:pPr>
-            <a:r>
-              <a:rPr lang="en-US" sz="900" dirty="0">
-                <a:solidFill>
-                  <a:srgbClr val="143743"/>
-                </a:solidFill>
-                <a:latin typeface="Courier New" pitchFamily="34" charset="0"/>
-                <a:ea typeface="Courier New" pitchFamily="34" charset="-122"/>
-                <a:cs typeface="Courier New" pitchFamily="34" charset="-120"/>
-              </a:rPr>
-              <a:t>4.000 t/ano</a:t>
-            </a:r>
-            <a:endParaRPr lang="en-US" sz="900" dirty="0"/>
-          </a:p>
-        </p:txBody>
-      </p:sp>
-      <p:sp>
-        <p:nvSpPr>
-          <p:cNvPr id="12" name="Shape 10"/>
-          <p:cNvSpPr/>
-          <p:nvPr/>
-        </p:nvSpPr>
-        <p:spPr>
-          <a:xfrm>
-            <a:off x="2852928" y="4352544"/>
-            <a:ext cx="1078992" cy="7315"/>
-          </a:xfrm>
-          <a:prstGeom prst="rect">
-            <a:avLst/>
-          </a:prstGeom>
-          <a:solidFill>
-            <a:srgbClr val="5B8AAE">
-              <a:alpha val="38000"/>
-            </a:srgbClr>
-          </a:solidFill>
-          <a:ln/>
-        </p:spPr>
-      </p:sp>
-      <p:sp>
-        <p:nvSpPr>
-          <p:cNvPr id="13" name="Text 11"/>
-          <p:cNvSpPr txBox="1"/>
-          <p:nvPr/>
-        </p:nvSpPr>
-        <p:spPr>
-          <a:xfrm>
-            <a:off x="2852928" y="4425696"/>
-            <a:ext cx="1060704" cy="155448"/>
-          </a:xfrm>
-          <a:prstGeom prst="rect">
-            <a:avLst/>
-          </a:prstGeom>
-          <a:noFill/>
-          <a:ln/>
-        </p:spPr>
-        <p:txBody>
-          <a:bodyPr wrap="square" lIns="0" tIns="0" rIns="0" bIns="0" rtlCol="0" anchor="ctr"/>
-          <a:lstStyle/>
-          <a:p>
-            <a:pPr algn="l" indent="0" marL="0">
-              <a:buNone/>
-            </a:pPr>
-            <a:r>
-              <a:rPr lang="en-US" sz="650" spc="260" kern="0" dirty="0">
-                <a:solidFill>
-                  <a:srgbClr val="5B8AAE"/>
-                </a:solidFill>
-                <a:latin typeface="Arial" pitchFamily="34" charset="0"/>
-                <a:ea typeface="Arial" pitchFamily="34" charset="-122"/>
-                <a:cs typeface="Arial" pitchFamily="34" charset="-120"/>
-              </a:rPr>
-              <a:t>RENDIMENTO</a:t>
-            </a:r>
-            <a:endParaRPr lang="en-US" sz="650" dirty="0"/>
-          </a:p>
-        </p:txBody>
-      </p:sp>
-      <p:sp>
-        <p:nvSpPr>
-          <p:cNvPr id="14" name="Text 12"/>
-          <p:cNvSpPr txBox="1"/>
-          <p:nvPr/>
-        </p:nvSpPr>
-        <p:spPr>
-          <a:xfrm>
-            <a:off x="2852928" y="4590288"/>
-            <a:ext cx="1042416" cy="173736"/>
-          </a:xfrm>
-          <a:prstGeom prst="rect">
-            <a:avLst/>
-          </a:prstGeom>
-          <a:noFill/>
-          <a:ln/>
-        </p:spPr>
-        <p:txBody>
-          <a:bodyPr wrap="square" lIns="0" tIns="0" rIns="0" bIns="0" rtlCol="0" anchor="ctr"/>
-          <a:lstStyle/>
-          <a:p>
-            <a:pPr algn="l" indent="0" marL="0">
-              <a:buNone/>
-            </a:pPr>
-            <a:r>
-              <a:rPr lang="en-US" sz="900" dirty="0">
-                <a:solidFill>
-                  <a:srgbClr val="143743"/>
-                </a:solidFill>
-                <a:latin typeface="Courier New" pitchFamily="34" charset="0"/>
-                <a:ea typeface="Courier New" pitchFamily="34" charset="-122"/>
-                <a:cs typeface="Courier New" pitchFamily="34" charset="-120"/>
-              </a:rPr>
-              <a:t>≥ 20 %</a:t>
-            </a:r>
-            <a:endParaRPr lang="en-US" sz="900" dirty="0"/>
-          </a:p>
-        </p:txBody>
-      </p:sp>
-      <p:sp>
-        <p:nvSpPr>
-          <p:cNvPr id="15" name="Shape 13"/>
-          <p:cNvSpPr/>
-          <p:nvPr/>
-        </p:nvSpPr>
-        <p:spPr>
-          <a:xfrm>
-            <a:off x="4041648" y="4352544"/>
-            <a:ext cx="1078992" cy="7315"/>
-          </a:xfrm>
-          <a:prstGeom prst="rect">
-            <a:avLst/>
-          </a:prstGeom>
-          <a:solidFill>
-            <a:srgbClr val="5B8AAE">
-              <a:alpha val="38000"/>
-            </a:srgbClr>
-          </a:solidFill>
-          <a:ln/>
-        </p:spPr>
-      </p:sp>
-      <p:sp>
-        <p:nvSpPr>
-          <p:cNvPr id="16" name="Text 14"/>
-          <p:cNvSpPr txBox="1"/>
-          <p:nvPr/>
-        </p:nvSpPr>
-        <p:spPr>
-          <a:xfrm>
-            <a:off x="4041648" y="4425696"/>
-            <a:ext cx="1060704" cy="155448"/>
-          </a:xfrm>
-          <a:prstGeom prst="rect">
-            <a:avLst/>
-          </a:prstGeom>
-          <a:noFill/>
-          <a:ln/>
-        </p:spPr>
-        <p:txBody>
-          <a:bodyPr wrap="square" lIns="0" tIns="0" rIns="0" bIns="0" rtlCol="0" anchor="ctr"/>
-          <a:lstStyle/>
-          <a:p>
-            <a:pPr algn="l" indent="0" marL="0">
-              <a:buNone/>
-            </a:pPr>
-            <a:r>
-              <a:rPr lang="en-US" sz="650" spc="260" kern="0" dirty="0">
-                <a:solidFill>
-                  <a:srgbClr val="5B8AAE"/>
-                </a:solidFill>
-                <a:latin typeface="Arial" pitchFamily="34" charset="0"/>
-                <a:ea typeface="Arial" pitchFamily="34" charset="-122"/>
-                <a:cs typeface="Arial" pitchFamily="34" charset="-120"/>
-              </a:rPr>
-              <a:t>REMOÇÃO LÍQUIDA</a:t>
-            </a:r>
-            <a:endParaRPr lang="en-US" sz="650" dirty="0"/>
-          </a:p>
-        </p:txBody>
-      </p:sp>
-      <p:sp>
-        <p:nvSpPr>
-          <p:cNvPr id="17" name="Text 15"/>
-          <p:cNvSpPr txBox="1"/>
-          <p:nvPr/>
-        </p:nvSpPr>
-        <p:spPr>
-          <a:xfrm>
-            <a:off x="4041648" y="4590288"/>
-            <a:ext cx="1042416" cy="173736"/>
-          </a:xfrm>
-          <a:prstGeom prst="rect">
-            <a:avLst/>
-          </a:prstGeom>
-          <a:noFill/>
-          <a:ln/>
-        </p:spPr>
-        <p:txBody>
-          <a:bodyPr wrap="square" lIns="0" tIns="0" rIns="0" bIns="0" rtlCol="0" anchor="ctr"/>
-          <a:lstStyle/>
-          <a:p>
-            <a:pPr algn="l" indent="0" marL="0">
-              <a:buNone/>
-            </a:pPr>
-            <a:r>
-              <a:rPr lang="en-US" sz="900" dirty="0">
-                <a:solidFill>
-                  <a:srgbClr val="143743"/>
-                </a:solidFill>
-                <a:latin typeface="Courier New" pitchFamily="34" charset="0"/>
-                <a:ea typeface="Courier New" pitchFamily="34" charset="-122"/>
-                <a:cs typeface="Courier New" pitchFamily="34" charset="-120"/>
-              </a:rPr>
-              <a:t>1.620 tCO₂e</a:t>
-            </a:r>
-            <a:endParaRPr lang="en-US" sz="900" dirty="0"/>
-          </a:p>
-        </p:txBody>
-      </p:sp>
-      <p:sp>
-        <p:nvSpPr>
-          <p:cNvPr id="18" name="Text 16"/>
-          <p:cNvSpPr txBox="1"/>
-          <p:nvPr/>
-        </p:nvSpPr>
-        <p:spPr>
-          <a:xfrm>
-            <a:off x="4206240" y="1298448"/>
-            <a:ext cx="1645920" cy="155448"/>
-          </a:xfrm>
-          <a:prstGeom prst="rect">
-            <a:avLst/>
-          </a:prstGeom>
-          <a:noFill/>
-          <a:ln/>
-        </p:spPr>
-        <p:txBody>
-          <a:bodyPr wrap="square" lIns="0" tIns="0" rIns="0" bIns="0" rtlCol="0" anchor="ctr"/>
-          <a:lstStyle/>
-          <a:p>
-            <a:pPr algn="r" indent="0" marL="0">
-              <a:buNone/>
-            </a:pPr>
-            <a:r>
-              <a:rPr lang="en-US" sz="750" spc="260" kern="0" dirty="0">
-                <a:solidFill>
-                  <a:srgbClr val="5B8AAE"/>
-                </a:solidFill>
-                <a:latin typeface="Arial" pitchFamily="34" charset="0"/>
-                <a:ea typeface="Arial" pitchFamily="34" charset="-122"/>
-                <a:cs typeface="Arial" pitchFamily="34" charset="-120"/>
-              </a:rPr>
-              <a:t>ZONA 1 · COMBUSTÃO</a:t>
-            </a:r>
-            <a:endParaRPr lang="en-US" sz="750" dirty="0"/>
-          </a:p>
-        </p:txBody>
-      </p:sp>
-      <p:sp>
-        <p:nvSpPr>
-          <p:cNvPr id="19" name="Text 17"/>
-          <p:cNvSpPr txBox="1"/>
-          <p:nvPr/>
-        </p:nvSpPr>
-        <p:spPr>
-          <a:xfrm>
-            <a:off x="4206240" y="2487168"/>
-            <a:ext cx="1645920" cy="155448"/>
-          </a:xfrm>
-          <a:prstGeom prst="rect">
-            <a:avLst/>
-          </a:prstGeom>
-          <a:noFill/>
-          <a:ln/>
-        </p:spPr>
-        <p:txBody>
-          <a:bodyPr wrap="square" lIns="0" tIns="0" rIns="0" bIns="0" rtlCol="0" anchor="ctr"/>
-          <a:lstStyle/>
-          <a:p>
-            <a:pPr algn="r" indent="0" marL="0">
-              <a:buNone/>
-            </a:pPr>
-            <a:r>
-              <a:rPr lang="en-US" sz="750" spc="260" kern="0" dirty="0">
-                <a:solidFill>
-                  <a:srgbClr val="1F7370"/>
-                </a:solidFill>
-                <a:latin typeface="Arial" pitchFamily="34" charset="0"/>
-                <a:ea typeface="Arial" pitchFamily="34" charset="-122"/>
-                <a:cs typeface="Arial" pitchFamily="34" charset="-120"/>
-              </a:rPr>
-              <a:t>ZONA 2 · PIRÓLISE</a:t>
-            </a:r>
-            <a:endParaRPr lang="en-US" sz="750" dirty="0"/>
-          </a:p>
-        </p:txBody>
-      </p:sp>
-      <p:sp>
-        <p:nvSpPr>
-          <p:cNvPr id="20" name="Text 18"/>
-          <p:cNvSpPr txBox="1"/>
-          <p:nvPr/>
-        </p:nvSpPr>
-        <p:spPr>
-          <a:xfrm>
-            <a:off x="4206240" y="3712464"/>
-            <a:ext cx="1645920" cy="155448"/>
-          </a:xfrm>
-          <a:prstGeom prst="rect">
-            <a:avLst/>
-          </a:prstGeom>
-          <a:noFill/>
-          <a:ln/>
-        </p:spPr>
-        <p:txBody>
-          <a:bodyPr wrap="square" lIns="0" tIns="0" rIns="0" bIns="0" rtlCol="0" anchor="ctr"/>
-          <a:lstStyle/>
-          <a:p>
-            <a:pPr algn="r" indent="0" marL="0">
-              <a:buNone/>
-            </a:pPr>
-            <a:r>
-              <a:rPr lang="en-US" sz="750" spc="260" kern="0" dirty="0">
-                <a:solidFill>
-                  <a:srgbClr val="5B8AAE"/>
-                </a:solidFill>
-                <a:latin typeface="Arial" pitchFamily="34" charset="0"/>
-                <a:ea typeface="Arial" pitchFamily="34" charset="-122"/>
-                <a:cs typeface="Arial" pitchFamily="34" charset="-120"/>
-              </a:rPr>
-              <a:t>ZONA 3 · FREEBOARD</a:t>
-            </a:r>
-            <a:endParaRPr lang="en-US" sz="750" dirty="0"/>
-          </a:p>
-        </p:txBody>
-      </p:sp>
-      <p:sp>
-        <p:nvSpPr>
-          <p:cNvPr id="21" name="Text 19"/>
-          <p:cNvSpPr txBox="1"/>
-          <p:nvPr/>
-        </p:nvSpPr>
-        <p:spPr>
-          <a:xfrm>
-            <a:off x="7772400" y="3054096"/>
-            <a:ext cx="1005840" cy="155448"/>
-          </a:xfrm>
-          <a:prstGeom prst="rect">
-            <a:avLst/>
-          </a:prstGeom>
-          <a:noFill/>
-          <a:ln/>
-        </p:spPr>
-        <p:txBody>
-          <a:bodyPr wrap="square" lIns="0" tIns="0" rIns="0" bIns="0" rtlCol="0" anchor="ctr"/>
-          <a:lstStyle/>
-          <a:p>
-            <a:pPr algn="l" indent="0" marL="0">
-              <a:buNone/>
-            </a:pPr>
-            <a:r>
-              <a:rPr lang="en-US" sz="650" spc="260" kern="0" dirty="0">
-                <a:solidFill>
-                  <a:srgbClr val="7AA8C9"/>
-                </a:solidFill>
-                <a:latin typeface="Arial" pitchFamily="34" charset="0"/>
-                <a:ea typeface="Arial" pitchFamily="34" charset="-122"/>
-                <a:cs typeface="Arial" pitchFamily="34" charset="-120"/>
-              </a:rPr>
-              <a:t>RECIRCULAÇÃO DE AREIA</a:t>
-            </a:r>
-            <a:endParaRPr lang="en-US" sz="650" dirty="0"/>
-          </a:p>
-        </p:txBody>
-      </p:sp>
-      <p:sp>
-        <p:nvSpPr>
           <p:cNvPr id="22" name="Text 20"/>
-          <p:cNvSpPr txBox="1"/>
-          <p:nvPr/>
-        </p:nvSpPr>
-        <p:spPr>
-          <a:xfrm>
-            <a:off x="475488" y="4791456"/>
-            <a:ext cx="2926080" cy="155448"/>
-          </a:xfrm>
-          <a:prstGeom prst="rect">
-            <a:avLst/>
-          </a:prstGeom>
-          <a:noFill/>
-          <a:ln/>
-        </p:spPr>
-        <p:txBody>
-          <a:bodyPr wrap="square" lIns="0" tIns="0" rIns="0" bIns="0" rtlCol="0" anchor="ctr"/>
-          <a:lstStyle/>
-          <a:p>
-            <a:pPr algn="l" indent="0" marL="0">
-              <a:buNone/>
-            </a:pPr>
-            <a:r>
-              <a:rPr lang="en-US" sz="750" spc="260" kern="0" dirty="0">
-                <a:solidFill>
-                  <a:srgbClr val="7AA8C9"/>
-                </a:solidFill>
-                <a:latin typeface="Arial" pitchFamily="34" charset="0"/>
-                <a:ea typeface="Arial" pitchFamily="34" charset="-122"/>
-                <a:cs typeface="Arial" pitchFamily="34" charset="-120"/>
-              </a:rPr>
-              <a:t>30 MESES · TRL 04 → 07</a:t>
-            </a:r>
-            <a:endParaRPr lang="en-US" sz="750" dirty="0"/>
-          </a:p>
-        </p:txBody>
-      </p:sp>
-      <p:sp>
-        <p:nvSpPr>
-          <p:cNvPr id="23" name="Text 21"/>
           <p:cNvSpPr txBox="1"/>
           <p:nvPr/>
         </p:nvSpPr>
@@ -7228,7 +8308,7 @@
                 <a:ea typeface="Arial" pitchFamily="34" charset="-122"/>
                 <a:cs typeface="Arial" pitchFamily="34" charset="-120"/>
               </a:rPr>
-              <a:t>2,0 TCO₂E POR TONELADA DE CHAR</a:t>
+              <a:t>A LINHA TÉRMICA É O PERFIL DE TEMPERATURA</a:t>
             </a:r>
             <a:endParaRPr lang="en-US" sz="680" dirty="0"/>
           </a:p>
@@ -9948,8 +11028,8 @@
         </p:nvSpPr>
         <p:spPr>
           <a:xfrm>
-            <a:off x="329184" y="1444752"/>
-            <a:ext cx="3291840" cy="1783080"/>
+            <a:off x="365760" y="1481328"/>
+            <a:ext cx="2560320" cy="1518920"/>
           </a:xfrm>
           <a:prstGeom prst="rect">
             <a:avLst/>
@@ -9965,7 +11045,7 @@
               <a:buNone/>
             </a:pPr>
             <a:r>
-              <a:rPr lang="en-US" sz="10800" spc="-400" kern="0" dirty="0">
+              <a:rPr lang="en-US" sz="9200" spc="-400" kern="0" dirty="0">
                 <a:solidFill>
                   <a:srgbClr val="143743"/>
                 </a:solidFill>
@@ -9975,7 +11055,7 @@
               </a:rPr>
               <a:t>763</a:t>
             </a:r>
-            <a:endParaRPr lang="en-US" sz="10800" dirty="0"/>
+            <a:endParaRPr lang="en-US" sz="9200" dirty="0"/>
           </a:p>
         </p:txBody>
       </p:sp>
@@ -9987,8 +11067,8 @@
         </p:nvSpPr>
         <p:spPr>
           <a:xfrm>
-            <a:off x="512064" y="3310128"/>
-            <a:ext cx="1828800" cy="365760"/>
+            <a:off x="512064" y="3054096"/>
+            <a:ext cx="1463040" cy="310896"/>
           </a:xfrm>
           <a:prstGeom prst="rect">
             <a:avLst/>
@@ -10004,7 +11084,7 @@
               <a:buNone/>
             </a:pPr>
             <a:r>
-              <a:rPr lang="en-US" sz="2200" spc="-40" kern="0" dirty="0">
+              <a:rPr lang="en-US" sz="1900" spc="-30" kern="0" dirty="0">
                 <a:solidFill>
                   <a:srgbClr val="1F7370"/>
                 </a:solidFill>
@@ -10014,7 +11094,7 @@
               </a:rPr>
               <a:t>R$ / t</a:t>
             </a:r>
-            <a:endParaRPr lang="en-US" sz="2200" dirty="0"/>
+            <a:endParaRPr lang="en-US" sz="1900" dirty="0"/>
           </a:p>
         </p:txBody>
       </p:sp>
@@ -10026,8 +11106,8 @@
         </p:nvSpPr>
         <p:spPr>
           <a:xfrm>
-            <a:off x="475488" y="3236976"/>
-            <a:ext cx="2377440" cy="7315"/>
+            <a:off x="475488" y="2980944"/>
+            <a:ext cx="2011680" cy="7315"/>
           </a:xfrm>
           <a:prstGeom prst="rect">
             <a:avLst/>
@@ -10048,8 +11128,125 @@
         </p:nvSpPr>
         <p:spPr>
           <a:xfrm>
-            <a:off x="475488" y="3712464"/>
-            <a:ext cx="3291840" cy="155448"/>
+            <a:off x="475488" y="3419856"/>
+            <a:ext cx="2743200" cy="155448"/>
+          </a:xfrm>
+          <a:prstGeom prst="rect">
+            <a:avLst/>
+          </a:prstGeom>
+          <a:noFill/>
+          <a:ln/>
+        </p:spPr>
+        <p:txBody>
+          <a:bodyPr wrap="square" lIns="0" tIns="0" rIns="0" bIns="0" rtlCol="0" anchor="ctr"/>
+          <a:lstStyle/>
+          <a:p>
+            <a:pPr algn="l" indent="0" marL="0">
+              <a:buNone/>
+            </a:pPr>
+            <a:r>
+              <a:rPr lang="en-US" sz="650" spc="260" kern="0" dirty="0">
+                <a:solidFill>
+                  <a:srgbClr val="1F7370"/>
+                </a:solidFill>
+                <a:latin typeface="Arial" pitchFamily="34" charset="0"/>
+                <a:ea typeface="Arial" pitchFamily="34" charset="-122"/>
+                <a:cs typeface="Arial" pitchFamily="34" charset="-120"/>
+              </a:rPr>
+              <a:t>MARGEM DE CONTRIBUIÇÃO [DOC]</a:t>
+            </a:r>
+            <a:endParaRPr lang="en-US" sz="650" dirty="0"/>
+          </a:p>
+        </p:txBody>
+      </p:sp>
+      <p:sp>
+        <p:nvSpPr>
+          <p:cNvPr id="7" name="Text 5"/>
+          <p:cNvSpPr txBox="1"/>
+          <p:nvPr/>
+        </p:nvSpPr>
+        <p:spPr>
+          <a:xfrm>
+            <a:off x="475488" y="3584448"/>
+            <a:ext cx="2743200" cy="155448"/>
+          </a:xfrm>
+          <a:prstGeom prst="rect">
+            <a:avLst/>
+          </a:prstGeom>
+          <a:noFill/>
+          <a:ln/>
+        </p:spPr>
+        <p:txBody>
+          <a:bodyPr wrap="square" lIns="0" tIns="0" rIns="0" bIns="0" rtlCol="0" anchor="ctr"/>
+          <a:lstStyle/>
+          <a:p>
+            <a:pPr algn="l" indent="0" marL="0">
+              <a:buNone/>
+            </a:pPr>
+            <a:r>
+              <a:rPr lang="en-US" sz="650" spc="260" kern="0" dirty="0">
+                <a:solidFill>
+                  <a:srgbClr val="5B8AAE"/>
+                </a:solidFill>
+                <a:latin typeface="Arial" pitchFamily="34" charset="0"/>
+                <a:ea typeface="Arial" pitchFamily="34" charset="-122"/>
+                <a:cs typeface="Arial" pitchFamily="34" charset="-120"/>
+              </a:rPr>
+              <a:t>CENÁRIO DO PLANO · CÂMBIO 5,20</a:t>
+            </a:r>
+            <a:endParaRPr lang="en-US" sz="650" dirty="0"/>
+          </a:p>
+        </p:txBody>
+      </p:sp>
+      <p:sp>
+        <p:nvSpPr>
+          <p:cNvPr id="8" name="Text 6"/>
+          <p:cNvSpPr txBox="1"/>
+          <p:nvPr/>
+        </p:nvSpPr>
+        <p:spPr>
+          <a:xfrm>
+            <a:off x="2926080" y="969264"/>
+            <a:ext cx="5577840" cy="155448"/>
+          </a:xfrm>
+          <a:prstGeom prst="rect">
+            <a:avLst/>
+          </a:prstGeom>
+          <a:noFill/>
+          <a:ln/>
+        </p:spPr>
+        <p:txBody>
+          <a:bodyPr wrap="square" lIns="0" tIns="0" rIns="0" bIns="0" rtlCol="0" anchor="ctr"/>
+          <a:lstStyle/>
+          <a:p>
+            <a:pPr algn="l" indent="0" marL="0">
+              <a:buNone/>
+            </a:pPr>
+            <a:r>
+              <a:rPr lang="en-US" sz="650" spc="260" kern="0" dirty="0">
+                <a:solidFill>
+                  <a:srgbClr val="1F7370"/>
+                </a:solidFill>
+                <a:latin typeface="Arial" pitchFamily="34" charset="0"/>
+                <a:ea typeface="Arial" pitchFamily="34" charset="-122"/>
+                <a:cs typeface="Arial" pitchFamily="34" charset="-120"/>
+              </a:rPr>
+              <a:t>REGRA DO CARBONO ÚNICO · O MESMO QUILO NUNCA É VENDIDO DUAS VEZES</a:t>
+            </a:r>
+            <a:endParaRPr lang="en-US" sz="650" dirty="0"/>
+          </a:p>
+        </p:txBody>
+      </p:sp>
+      <p:sp>
+        <p:nvSpPr>
+          <p:cNvPr id="9" name="Text 7"/>
+          <p:cNvSpPr txBox="1"/>
+          <p:nvPr/>
+        </p:nvSpPr>
+        <p:spPr>
+          <a:xfrm>
+            <a:off x="2926080" y="1243584"/>
+            <a:ext cx="2011680" cy="155448"/>
           </a:xfrm>
           <a:prstGeom prst="rect">
             <a:avLst/>
@@ -10073,7 +11270,7 @@
                 <a:ea typeface="Arial" pitchFamily="34" charset="-122"/>
                 <a:cs typeface="Arial" pitchFamily="34" charset="-120"/>
               </a:rPr>
-              <a:t>MARGEM DE CONTRIBUIÇÃO POR TONELADA DE CHAR</a:t>
+              <a:t>RECEITA BRUTA / T</a:t>
             </a:r>
             <a:endParaRPr lang="en-US" sz="750" dirty="0"/>
           </a:p>
@@ -10081,108 +11278,30 @@
       </p:sp>
       <p:sp>
         <p:nvSpPr>
-          <p:cNvPr id="7" name="Text 5"/>
-          <p:cNvSpPr txBox="1"/>
-          <p:nvPr/>
-        </p:nvSpPr>
-        <p:spPr>
-          <a:xfrm>
-            <a:off x="475488" y="3913632"/>
-            <a:ext cx="3291840" cy="155448"/>
-          </a:xfrm>
-          <a:prstGeom prst="rect">
-            <a:avLst/>
-          </a:prstGeom>
-          <a:noFill/>
-          <a:ln/>
-        </p:spPr>
-        <p:txBody>
-          <a:bodyPr wrap="square" lIns="0" tIns="0" rIns="0" bIns="0" rtlCol="0" anchor="ctr"/>
-          <a:lstStyle/>
-          <a:p>
-            <a:pPr algn="l" indent="0" marL="0">
-              <a:buNone/>
-            </a:pPr>
-            <a:r>
-              <a:rPr lang="en-US" sz="750" spc="260" kern="0" dirty="0">
-                <a:solidFill>
-                  <a:srgbClr val="7AA8C9"/>
-                </a:solidFill>
-                <a:latin typeface="Arial" pitchFamily="34" charset="0"/>
-                <a:ea typeface="Arial" pitchFamily="34" charset="-122"/>
-                <a:cs typeface="Arial" pitchFamily="34" charset="-120"/>
-              </a:rPr>
-              <a:t>CENÁRIO CONSERVADOR · CÂMBIO 5,20</a:t>
-            </a:r>
-            <a:endParaRPr lang="en-US" sz="750" dirty="0"/>
-          </a:p>
-        </p:txBody>
-      </p:sp>
-      <p:sp>
-        <p:nvSpPr>
-          <p:cNvPr id="8" name="Text 6"/>
-          <p:cNvSpPr txBox="1"/>
-          <p:nvPr/>
-        </p:nvSpPr>
-        <p:spPr>
-          <a:xfrm>
-            <a:off x="4261104" y="950976"/>
-            <a:ext cx="2011680" cy="155448"/>
-          </a:xfrm>
-          <a:prstGeom prst="rect">
-            <a:avLst/>
-          </a:prstGeom>
-          <a:noFill/>
-          <a:ln/>
-        </p:spPr>
-        <p:txBody>
-          <a:bodyPr wrap="square" lIns="0" tIns="0" rIns="0" bIns="0" rtlCol="0" anchor="ctr"/>
-          <a:lstStyle/>
-          <a:p>
-            <a:pPr algn="l" indent="0" marL="0">
-              <a:buNone/>
-            </a:pPr>
-            <a:r>
-              <a:rPr lang="en-US" sz="750" spc="260" kern="0" dirty="0">
-                <a:solidFill>
-                  <a:srgbClr val="1F7370"/>
-                </a:solidFill>
-                <a:latin typeface="Arial" pitchFamily="34" charset="0"/>
-                <a:ea typeface="Arial" pitchFamily="34" charset="-122"/>
-                <a:cs typeface="Arial" pitchFamily="34" charset="-120"/>
-              </a:rPr>
-              <a:t>CARBONO</a:t>
-            </a:r>
-            <a:endParaRPr lang="en-US" sz="750" dirty="0"/>
-          </a:p>
-        </p:txBody>
-      </p:sp>
-      <p:sp>
-        <p:nvSpPr>
-          <p:cNvPr id="9" name="Text 7"/>
-          <p:cNvSpPr txBox="1"/>
-          <p:nvPr/>
-        </p:nvSpPr>
-        <p:spPr>
-          <a:xfrm>
-            <a:off x="6126480" y="896112"/>
-            <a:ext cx="2377440" cy="274320"/>
-          </a:xfrm>
-          <a:prstGeom prst="rect">
-            <a:avLst/>
-          </a:prstGeom>
-          <a:noFill/>
-          <a:ln/>
-        </p:spPr>
-        <p:txBody>
-          <a:bodyPr wrap="square" lIns="0" tIns="0" rIns="0" bIns="0" rtlCol="0" anchor="t"/>
+          <p:cNvPr id="10" name="Text 8"/>
+          <p:cNvSpPr txBox="1"/>
+          <p:nvPr/>
+        </p:nvSpPr>
+        <p:spPr>
+          <a:xfrm>
+            <a:off x="6309360" y="1207008"/>
+            <a:ext cx="2011680" cy="173736"/>
+          </a:xfrm>
+          <a:prstGeom prst="rect">
+            <a:avLst/>
+          </a:prstGeom>
+          <a:noFill/>
+          <a:ln/>
+        </p:spPr>
+        <p:txBody>
+          <a:bodyPr wrap="square" lIns="0" tIns="0" rIns="0" bIns="0" rtlCol="0" anchor="ctr"/>
           <a:lstStyle/>
           <a:p>
             <a:pPr algn="r" indent="0" marL="0">
               <a:buNone/>
             </a:pPr>
             <a:r>
-              <a:rPr lang="en-US" sz="1500" dirty="0">
+              <a:rPr lang="en-US" sz="1100" dirty="0">
                 <a:solidFill>
                   <a:srgbClr val="143743"/>
                 </a:solidFill>
@@ -10190,51 +11309,9 @@
                 <a:ea typeface="Courier New" pitchFamily="34" charset="-122"/>
                 <a:cs typeface="Courier New" pitchFamily="34" charset="-120"/>
               </a:rPr>
-              <a:t>R$ 995 / t</a:t>
-            </a:r>
-            <a:endParaRPr lang="en-US" sz="1500" dirty="0"/>
-          </a:p>
-        </p:txBody>
-      </p:sp>
-      <p:sp>
-        <p:nvSpPr>
-          <p:cNvPr id="10" name="Text 8"/>
-          <p:cNvSpPr txBox="1"/>
-          <p:nvPr/>
-        </p:nvSpPr>
-        <p:spPr>
-          <a:xfrm>
-            <a:off x="4261104" y="1225296"/>
-            <a:ext cx="4023360" cy="457200"/>
-          </a:xfrm>
-          <a:prstGeom prst="rect">
-            <a:avLst/>
-          </a:prstGeom>
-          <a:noFill/>
-          <a:ln/>
-        </p:spPr>
-        <p:txBody>
-          <a:bodyPr wrap="square" lIns="0" tIns="0" rIns="0" bIns="0" rtlCol="0" anchor="t"/>
-          <a:lstStyle/>
-          <a:p>
-            <a:pPr indent="0" marL="0">
-              <a:lnSpc>
-                <a:spcPts val="1318"/>
-              </a:lnSpc>
-              <a:buNone/>
-            </a:pPr>
-            <a:r>
-              <a:rPr lang="en-US" sz="850" dirty="0">
-                <a:solidFill>
-                  <a:srgbClr val="52666B"/>
-                </a:solidFill>
-                <a:latin typeface="Arial" pitchFamily="34" charset="0"/>
-                <a:ea typeface="Arial" pitchFamily="34" charset="-122"/>
-                <a:cs typeface="Arial" pitchFamily="34" charset="-120"/>
-              </a:rPr>
-              <a:t>US$ 150/tCO₂e · −25% offtake · −15% comissão · 2,0 tCO₂e líquidas</a:t>
-            </a:r>
-            <a:endParaRPr lang="en-US" sz="850" dirty="0"/>
+              <a:t>R$ 3.177</a:t>
+            </a:r>
+            <a:endParaRPr lang="en-US" sz="1100" dirty="0"/>
           </a:p>
         </p:txBody>
       </p:sp>
@@ -10246,24 +11323,24 @@
         </p:nvSpPr>
         <p:spPr>
           <a:xfrm>
-            <a:off x="3803904" y="2240280"/>
-            <a:ext cx="2011680" cy="155448"/>
-          </a:xfrm>
-          <a:prstGeom prst="rect">
-            <a:avLst/>
-          </a:prstGeom>
-          <a:noFill/>
-          <a:ln/>
-        </p:spPr>
-        <p:txBody>
-          <a:bodyPr wrap="square" lIns="0" tIns="0" rIns="0" bIns="0" rtlCol="0" anchor="ctr"/>
-          <a:lstStyle/>
-          <a:p>
-            <a:pPr algn="l" indent="0" marL="0">
-              <a:buNone/>
-            </a:pPr>
-            <a:r>
-              <a:rPr lang="en-US" sz="750" spc="260" kern="0" dirty="0">
+            <a:off x="2926080" y="1901952"/>
+            <a:ext cx="1609344" cy="155448"/>
+          </a:xfrm>
+          <a:prstGeom prst="rect">
+            <a:avLst/>
+          </a:prstGeom>
+          <a:noFill/>
+          <a:ln/>
+        </p:spPr>
+        <p:txBody>
+          <a:bodyPr wrap="square" lIns="0" tIns="0" rIns="0" bIns="0" rtlCol="0" anchor="ctr"/>
+          <a:lstStyle/>
+          <a:p>
+            <a:pPr algn="l" indent="0" marL="0">
+              <a:buNone/>
+            </a:pPr>
+            <a:r>
+              <a:rPr lang="en-US" sz="680" spc="260" kern="0" dirty="0">
                 <a:solidFill>
                   <a:srgbClr val="1F7370"/>
                 </a:solidFill>
@@ -10271,9 +11348,9 @@
                 <a:ea typeface="Arial" pitchFamily="34" charset="-122"/>
                 <a:cs typeface="Arial" pitchFamily="34" charset="-120"/>
               </a:rPr>
-              <a:t>MATERIAL</a:t>
-            </a:r>
-            <a:endParaRPr lang="en-US" sz="750" dirty="0"/>
+              <a:t>CARBONO</a:t>
+            </a:r>
+            <a:endParaRPr lang="en-US" sz="680" dirty="0"/>
           </a:p>
         </p:txBody>
       </p:sp>
@@ -10285,24 +11362,24 @@
         </p:nvSpPr>
         <p:spPr>
           <a:xfrm>
-            <a:off x="5669280" y="2185416"/>
-            <a:ext cx="2377440" cy="274320"/>
-          </a:xfrm>
-          <a:prstGeom prst="rect">
-            <a:avLst/>
-          </a:prstGeom>
-          <a:noFill/>
-          <a:ln/>
-        </p:spPr>
-        <p:txBody>
-          <a:bodyPr wrap="square" lIns="0" tIns="0" rIns="0" bIns="0" rtlCol="0" anchor="t"/>
-          <a:lstStyle/>
-          <a:p>
-            <a:pPr algn="r" indent="0" marL="0">
-              <a:buNone/>
-            </a:pPr>
-            <a:r>
-              <a:rPr lang="en-US" sz="1500" dirty="0">
+            <a:off x="2926080" y="2066544"/>
+            <a:ext cx="1609344" cy="173736"/>
+          </a:xfrm>
+          <a:prstGeom prst="rect">
+            <a:avLst/>
+          </a:prstGeom>
+          <a:noFill/>
+          <a:ln/>
+        </p:spPr>
+        <p:txBody>
+          <a:bodyPr wrap="square" lIns="0" tIns="0" rIns="0" bIns="0" rtlCol="0" anchor="ctr"/>
+          <a:lstStyle/>
+          <a:p>
+            <a:pPr algn="l" indent="0" marL="0">
+              <a:buNone/>
+            </a:pPr>
+            <a:r>
+              <a:rPr lang="en-US" sz="900" dirty="0">
                 <a:solidFill>
                   <a:srgbClr val="143743"/>
                 </a:solidFill>
@@ -10310,9 +11387,9 @@
                 <a:ea typeface="Courier New" pitchFamily="34" charset="-122"/>
                 <a:cs typeface="Courier New" pitchFamily="34" charset="-120"/>
               </a:rPr>
-              <a:t>R$ 2.000 / t</a:t>
-            </a:r>
-            <a:endParaRPr lang="en-US" sz="1500" dirty="0"/>
+              <a:t>R$ 995</a:t>
+            </a:r>
+            <a:endParaRPr lang="en-US" sz="900" dirty="0"/>
           </a:p>
         </p:txBody>
       </p:sp>
@@ -10324,37 +11401,34 @@
         </p:nvSpPr>
         <p:spPr>
           <a:xfrm>
-            <a:off x="3803904" y="2514600"/>
-            <a:ext cx="4023360" cy="457200"/>
-          </a:xfrm>
-          <a:prstGeom prst="rect">
-            <a:avLst/>
-          </a:prstGeom>
-          <a:noFill/>
-          <a:ln/>
-        </p:spPr>
-        <p:txBody>
-          <a:bodyPr wrap="square" lIns="0" tIns="0" rIns="0" bIns="0" rtlCol="0" anchor="t"/>
-          <a:lstStyle/>
-          <a:p>
-            <a:pPr indent="0" marL="0">
-              <a:lnSpc>
-                <a:spcPts val="1318"/>
-              </a:lnSpc>
-              <a:buNone/>
-            </a:pPr>
-            <a:r>
-              <a:rPr lang="en-US" sz="850" dirty="0">
-                <a:solidFill>
-                  <a:srgbClr val="52666B"/>
-                </a:solidFill>
-                <a:latin typeface="Arial" pitchFamily="34" charset="0"/>
-                <a:ea typeface="Arial" pitchFamily="34" charset="-122"/>
-                <a:cs typeface="Arial" pitchFamily="34" charset="-120"/>
-              </a:rPr>
-              <a:t>contrato B: a fábrica fica com o carbono no EPD e não há CORC</a:t>
-            </a:r>
-            <a:endParaRPr lang="en-US" sz="850" dirty="0"/>
+            <a:off x="4553712" y="1901952"/>
+            <a:ext cx="2194560" cy="155448"/>
+          </a:xfrm>
+          <a:prstGeom prst="rect">
+            <a:avLst/>
+          </a:prstGeom>
+          <a:noFill/>
+          <a:ln/>
+        </p:spPr>
+        <p:txBody>
+          <a:bodyPr wrap="square" lIns="0" tIns="0" rIns="0" bIns="0" rtlCol="0" anchor="ctr"/>
+          <a:lstStyle/>
+          <a:p>
+            <a:pPr algn="l" indent="0" marL="0">
+              <a:buNone/>
+            </a:pPr>
+            <a:r>
+              <a:rPr lang="en-US" sz="680" spc="260" kern="0" dirty="0">
+                <a:solidFill>
+                  <a:srgbClr val="1F7370"/>
+                </a:solidFill>
+                <a:latin typeface="Arial" pitchFamily="34" charset="0"/>
+                <a:ea typeface="Arial" pitchFamily="34" charset="-122"/>
+                <a:cs typeface="Arial" pitchFamily="34" charset="-120"/>
+              </a:rPr>
+              <a:t>MATERIAL</a:t>
+            </a:r>
+            <a:endParaRPr lang="en-US" sz="680" dirty="0"/>
           </a:p>
         </p:txBody>
       </p:sp>
@@ -10366,63 +11440,24 @@
         </p:nvSpPr>
         <p:spPr>
           <a:xfrm>
-            <a:off x="4626864" y="3529584"/>
-            <a:ext cx="2011680" cy="155448"/>
-          </a:xfrm>
-          <a:prstGeom prst="rect">
-            <a:avLst/>
-          </a:prstGeom>
-          <a:noFill/>
-          <a:ln/>
-        </p:spPr>
-        <p:txBody>
-          <a:bodyPr wrap="square" lIns="0" tIns="0" rIns="0" bIns="0" rtlCol="0" anchor="ctr"/>
-          <a:lstStyle/>
-          <a:p>
-            <a:pPr algn="l" indent="0" marL="0">
-              <a:buNone/>
-            </a:pPr>
-            <a:r>
-              <a:rPr lang="en-US" sz="750" spc="260" kern="0" dirty="0">
-                <a:solidFill>
-                  <a:srgbClr val="1F7370"/>
-                </a:solidFill>
-                <a:latin typeface="Arial" pitchFamily="34" charset="0"/>
-                <a:ea typeface="Arial" pitchFamily="34" charset="-122"/>
-                <a:cs typeface="Arial" pitchFamily="34" charset="-120"/>
-              </a:rPr>
-              <a:t>GATE FEE</a:t>
-            </a:r>
-            <a:endParaRPr lang="en-US" sz="750" dirty="0"/>
-          </a:p>
-        </p:txBody>
-      </p:sp>
-      <p:sp>
-        <p:nvSpPr>
-          <p:cNvPr id="15" name="Text 13"/>
-          <p:cNvSpPr txBox="1"/>
-          <p:nvPr/>
-        </p:nvSpPr>
-        <p:spPr>
-          <a:xfrm>
-            <a:off x="6492240" y="3474720"/>
-            <a:ext cx="2377440" cy="274320"/>
-          </a:xfrm>
-          <a:prstGeom prst="rect">
-            <a:avLst/>
-          </a:prstGeom>
-          <a:noFill/>
-          <a:ln/>
-        </p:spPr>
-        <p:txBody>
-          <a:bodyPr wrap="square" lIns="0" tIns="0" rIns="0" bIns="0" rtlCol="0" anchor="t"/>
-          <a:lstStyle/>
-          <a:p>
-            <a:pPr algn="r" indent="0" marL="0">
-              <a:buNone/>
-            </a:pPr>
-            <a:r>
-              <a:rPr lang="en-US" sz="1500" dirty="0">
+            <a:off x="4553712" y="2066544"/>
+            <a:ext cx="2194560" cy="173736"/>
+          </a:xfrm>
+          <a:prstGeom prst="rect">
+            <a:avLst/>
+          </a:prstGeom>
+          <a:noFill/>
+          <a:ln/>
+        </p:spPr>
+        <p:txBody>
+          <a:bodyPr wrap="square" lIns="0" tIns="0" rIns="0" bIns="0" rtlCol="0" anchor="ctr"/>
+          <a:lstStyle/>
+          <a:p>
+            <a:pPr algn="l" indent="0" marL="0">
+              <a:buNone/>
+            </a:pPr>
+            <a:r>
+              <a:rPr lang="en-US" sz="900" dirty="0">
                 <a:solidFill>
                   <a:srgbClr val="143743"/>
                 </a:solidFill>
@@ -10430,7 +11465,241 @@
                 <a:ea typeface="Courier New" pitchFamily="34" charset="-122"/>
                 <a:cs typeface="Courier New" pitchFamily="34" charset="-120"/>
               </a:rPr>
-              <a:t>R$ 182 / t</a:t>
+              <a:t>R$ 2.000</a:t>
+            </a:r>
+            <a:endParaRPr lang="en-US" sz="900" dirty="0"/>
+          </a:p>
+        </p:txBody>
+      </p:sp>
+      <p:sp>
+        <p:nvSpPr>
+          <p:cNvPr id="15" name="Text 13"/>
+          <p:cNvSpPr txBox="1"/>
+          <p:nvPr/>
+        </p:nvSpPr>
+        <p:spPr>
+          <a:xfrm>
+            <a:off x="7699248" y="1901952"/>
+            <a:ext cx="914400" cy="155448"/>
+          </a:xfrm>
+          <a:prstGeom prst="rect">
+            <a:avLst/>
+          </a:prstGeom>
+          <a:noFill/>
+          <a:ln/>
+        </p:spPr>
+        <p:txBody>
+          <a:bodyPr wrap="square" lIns="0" tIns="0" rIns="0" bIns="0" rtlCol="0" anchor="ctr"/>
+          <a:lstStyle/>
+          <a:p>
+            <a:pPr algn="l" indent="0" marL="0">
+              <a:buNone/>
+            </a:pPr>
+            <a:r>
+              <a:rPr lang="en-US" sz="680" spc="260" kern="0" dirty="0">
+                <a:solidFill>
+                  <a:srgbClr val="1F7370"/>
+                </a:solidFill>
+                <a:latin typeface="Arial" pitchFamily="34" charset="0"/>
+                <a:ea typeface="Arial" pitchFamily="34" charset="-122"/>
+                <a:cs typeface="Arial" pitchFamily="34" charset="-120"/>
+              </a:rPr>
+              <a:t>GATE FEE</a:t>
+            </a:r>
+            <a:endParaRPr lang="en-US" sz="680" dirty="0"/>
+          </a:p>
+        </p:txBody>
+      </p:sp>
+      <p:sp>
+        <p:nvSpPr>
+          <p:cNvPr id="16" name="Text 14"/>
+          <p:cNvSpPr txBox="1"/>
+          <p:nvPr/>
+        </p:nvSpPr>
+        <p:spPr>
+          <a:xfrm>
+            <a:off x="7699248" y="2066544"/>
+            <a:ext cx="914400" cy="173736"/>
+          </a:xfrm>
+          <a:prstGeom prst="rect">
+            <a:avLst/>
+          </a:prstGeom>
+          <a:noFill/>
+          <a:ln/>
+        </p:spPr>
+        <p:txBody>
+          <a:bodyPr wrap="square" lIns="0" tIns="0" rIns="0" bIns="0" rtlCol="0" anchor="ctr"/>
+          <a:lstStyle/>
+          <a:p>
+            <a:pPr algn="l" indent="0" marL="0">
+              <a:buNone/>
+            </a:pPr>
+            <a:r>
+              <a:rPr lang="en-US" sz="900" dirty="0">
+                <a:solidFill>
+                  <a:srgbClr val="143743"/>
+                </a:solidFill>
+                <a:latin typeface="Courier New" pitchFamily="34" charset="0"/>
+                <a:ea typeface="Courier New" pitchFamily="34" charset="-122"/>
+                <a:cs typeface="Courier New" pitchFamily="34" charset="-120"/>
+              </a:rPr>
+              <a:t>R$ 182</a:t>
+            </a:r>
+            <a:endParaRPr lang="en-US" sz="900" dirty="0"/>
+          </a:p>
+        </p:txBody>
+      </p:sp>
+      <p:sp>
+        <p:nvSpPr>
+          <p:cNvPr id="17" name="Text 15"/>
+          <p:cNvSpPr txBox="1"/>
+          <p:nvPr/>
+        </p:nvSpPr>
+        <p:spPr>
+          <a:xfrm>
+            <a:off x="2926080" y="2834640"/>
+            <a:ext cx="2560320" cy="155448"/>
+          </a:xfrm>
+          <a:prstGeom prst="rect">
+            <a:avLst/>
+          </a:prstGeom>
+          <a:noFill/>
+          <a:ln/>
+        </p:spPr>
+        <p:txBody>
+          <a:bodyPr wrap="square" lIns="0" tIns="0" rIns="0" bIns="0" rtlCol="0" anchor="ctr"/>
+          <a:lstStyle/>
+          <a:p>
+            <a:pPr algn="l" indent="0" marL="0">
+              <a:buNone/>
+            </a:pPr>
+            <a:r>
+              <a:rPr lang="en-US" sz="750" spc="260" kern="0" dirty="0">
+                <a:solidFill>
+                  <a:srgbClr val="5B8AAE"/>
+                </a:solidFill>
+                <a:latin typeface="Arial" pitchFamily="34" charset="0"/>
+                <a:ea typeface="Arial" pitchFamily="34" charset="-122"/>
+                <a:cs typeface="Arial" pitchFamily="34" charset="-120"/>
+              </a:rPr>
+              <a:t>CUSTO PLENO / T · A 810 T/ANO</a:t>
+            </a:r>
+            <a:endParaRPr lang="en-US" sz="750" dirty="0"/>
+          </a:p>
+        </p:txBody>
+      </p:sp>
+      <p:sp>
+        <p:nvSpPr>
+          <p:cNvPr id="18" name="Text 16"/>
+          <p:cNvSpPr txBox="1"/>
+          <p:nvPr/>
+        </p:nvSpPr>
+        <p:spPr>
+          <a:xfrm>
+            <a:off x="5623560" y="2816352"/>
+            <a:ext cx="1463040" cy="173736"/>
+          </a:xfrm>
+          <a:prstGeom prst="rect">
+            <a:avLst/>
+          </a:prstGeom>
+          <a:noFill/>
+          <a:ln/>
+        </p:spPr>
+        <p:txBody>
+          <a:bodyPr wrap="square" lIns="0" tIns="0" rIns="0" bIns="0" rtlCol="0" anchor="ctr"/>
+          <a:lstStyle/>
+          <a:p>
+            <a:pPr algn="r" indent="0" marL="0">
+              <a:buNone/>
+            </a:pPr>
+            <a:r>
+              <a:rPr lang="en-US" sz="1100" dirty="0">
+                <a:solidFill>
+                  <a:srgbClr val="143743"/>
+                </a:solidFill>
+                <a:latin typeface="Courier New" pitchFamily="34" charset="0"/>
+                <a:ea typeface="Courier New" pitchFamily="34" charset="-122"/>
+                <a:cs typeface="Courier New" pitchFamily="34" charset="-120"/>
+              </a:rPr>
+              <a:t>R$ 3.336</a:t>
+            </a:r>
+            <a:endParaRPr lang="en-US" sz="1100" dirty="0"/>
+          </a:p>
+        </p:txBody>
+      </p:sp>
+      <p:sp>
+        <p:nvSpPr>
+          <p:cNvPr id="19" name="Text 17"/>
+          <p:cNvSpPr txBox="1"/>
+          <p:nvPr/>
+        </p:nvSpPr>
+        <p:spPr>
+          <a:xfrm>
+            <a:off x="7635240" y="2798064"/>
+            <a:ext cx="960120" cy="274320"/>
+          </a:xfrm>
+          <a:prstGeom prst="rect">
+            <a:avLst/>
+          </a:prstGeom>
+          <a:noFill/>
+          <a:ln/>
+        </p:spPr>
+        <p:txBody>
+          <a:bodyPr wrap="square" lIns="0" tIns="0" rIns="0" bIns="0" rtlCol="0" anchor="t"/>
+          <a:lstStyle/>
+          <a:p>
+            <a:pPr algn="r" indent="0" marL="0">
+              <a:buNone/>
+            </a:pPr>
+            <a:r>
+              <a:rPr lang="en-US" sz="1300" dirty="0">
+                <a:solidFill>
+                  <a:srgbClr val="C9654A"/>
+                </a:solidFill>
+                <a:latin typeface="Courier New" pitchFamily="34" charset="0"/>
+                <a:ea typeface="Courier New" pitchFamily="34" charset="-122"/>
+                <a:cs typeface="Courier New" pitchFamily="34" charset="-120"/>
+              </a:rPr>
+              <a:t>−160</a:t>
+            </a:r>
+            <a:endParaRPr lang="en-US" sz="1300" dirty="0"/>
+          </a:p>
+        </p:txBody>
+      </p:sp>
+      <p:sp>
+        <p:nvSpPr>
+          <p:cNvPr id="20" name="Text 18"/>
+          <p:cNvSpPr txBox="1"/>
+          <p:nvPr/>
+        </p:nvSpPr>
+        <p:spPr>
+          <a:xfrm>
+            <a:off x="2926080" y="3474720"/>
+            <a:ext cx="5577840" cy="310896"/>
+          </a:xfrm>
+          <a:prstGeom prst="rect">
+            <a:avLst/>
+          </a:prstGeom>
+          <a:noFill/>
+          <a:ln/>
+        </p:spPr>
+        <p:txBody>
+          <a:bodyPr wrap="square" lIns="0" tIns="0" rIns="0" bIns="0" rtlCol="0" anchor="t"/>
+          <a:lstStyle/>
+          <a:p>
+            <a:pPr indent="0" marL="0">
+              <a:buNone/>
+            </a:pPr>
+            <a:r>
+              <a:rPr lang="en-US" sz="1500" spc="-40" kern="0" dirty="0">
+                <a:solidFill>
+                  <a:srgbClr val="143743"/>
+                </a:solidFill>
+                <a:latin typeface="Arial" pitchFamily="34" charset="0"/>
+                <a:ea typeface="Arial" pitchFamily="34" charset="-122"/>
+                <a:cs typeface="Arial" pitchFamily="34" charset="-120"/>
+              </a:rPr>
+              <a:t>POC ≠ unidade econômica.  A escala é o destravamento.</a:t>
             </a:r>
             <a:endParaRPr lang="en-US" sz="1500" dirty="0"/>
           </a:p>
@@ -10438,56 +11707,114 @@
       </p:sp>
       <p:sp>
         <p:nvSpPr>
-          <p:cNvPr id="16" name="Text 14"/>
-          <p:cNvSpPr txBox="1"/>
-          <p:nvPr/>
-        </p:nvSpPr>
-        <p:spPr>
-          <a:xfrm>
-            <a:off x="4626864" y="3803904"/>
-            <a:ext cx="4023360" cy="457200"/>
-          </a:xfrm>
-          <a:prstGeom prst="rect">
-            <a:avLst/>
-          </a:prstGeom>
-          <a:noFill/>
-          <a:ln/>
-        </p:spPr>
-        <p:txBody>
-          <a:bodyPr wrap="square" lIns="0" tIns="0" rIns="0" bIns="0" rtlCol="0" anchor="t"/>
-          <a:lstStyle/>
-          <a:p>
-            <a:pPr indent="0" marL="0">
-              <a:lnSpc>
-                <a:spcPts val="1318"/>
-              </a:lnSpc>
-              <a:buNone/>
-            </a:pPr>
-            <a:r>
-              <a:rPr lang="en-US" sz="850" dirty="0">
-                <a:solidFill>
-                  <a:srgbClr val="52666B"/>
-                </a:solidFill>
-                <a:latin typeface="Arial" pitchFamily="34" charset="0"/>
-                <a:ea typeface="Arial" pitchFamily="34" charset="-122"/>
-                <a:cs typeface="Arial" pitchFamily="34" charset="-120"/>
-              </a:rPr>
-              <a:t>R$ 38/t úmida × 4,8 t — o resíduo paga antes do primeiro crédito</a:t>
-            </a:r>
-            <a:endParaRPr lang="en-US" sz="850" dirty="0"/>
-          </a:p>
-        </p:txBody>
-      </p:sp>
-      <p:sp>
-        <p:nvSpPr>
-          <p:cNvPr id="17" name="Text 15"/>
+          <p:cNvPr id="21" name="Shape 19"/>
+          <p:cNvSpPr/>
+          <p:nvPr/>
+        </p:nvSpPr>
+        <p:spPr>
+          <a:xfrm>
+            <a:off x="2926080" y="3986784"/>
+            <a:ext cx="5577840" cy="7315"/>
+          </a:xfrm>
+          <a:prstGeom prst="rect">
+            <a:avLst/>
+          </a:prstGeom>
+          <a:solidFill>
+            <a:srgbClr val="5B8AAE">
+              <a:alpha val="34000"/>
+            </a:srgbClr>
+          </a:solidFill>
+          <a:ln/>
+        </p:spPr>
+      </p:sp>
+      <p:sp>
+        <p:nvSpPr>
+          <p:cNvPr id="22" name="Text 20"/>
+          <p:cNvSpPr txBox="1"/>
+          <p:nvPr/>
+        </p:nvSpPr>
+        <p:spPr>
+          <a:xfrm>
+            <a:off x="2926080" y="4078224"/>
+            <a:ext cx="5669280" cy="155448"/>
+          </a:xfrm>
+          <a:prstGeom prst="rect">
+            <a:avLst/>
+          </a:prstGeom>
+          <a:noFill/>
+          <a:ln/>
+        </p:spPr>
+        <p:txBody>
+          <a:bodyPr wrap="square" lIns="0" tIns="0" rIns="0" bIns="0" rtlCol="0" anchor="ctr"/>
+          <a:lstStyle/>
+          <a:p>
+            <a:pPr algn="l" indent="0" marL="0">
+              <a:buNone/>
+            </a:pPr>
+            <a:r>
+              <a:rPr lang="en-US" sz="600" spc="260" kern="0" dirty="0">
+                <a:solidFill>
+                  <a:srgbClr val="7AA8C9"/>
+                </a:solidFill>
+                <a:latin typeface="Arial" pitchFamily="34" charset="0"/>
+                <a:ea typeface="Arial" pitchFamily="34" charset="-122"/>
+                <a:cs typeface="Arial" pitchFamily="34" charset="-120"/>
+              </a:rPr>
+              <a:t>RECEITA = TRÊS FLUXOS [DOC] SOMADOS · CUSTO = OPEX PLENO [EST], JÁ COM O FIXO</a:t>
+            </a:r>
+            <a:endParaRPr lang="en-US" sz="600" dirty="0"/>
+          </a:p>
+        </p:txBody>
+      </p:sp>
+      <p:sp>
+        <p:nvSpPr>
+          <p:cNvPr id="23" name="Text 21"/>
+          <p:cNvSpPr txBox="1"/>
+          <p:nvPr/>
+        </p:nvSpPr>
+        <p:spPr>
+          <a:xfrm>
+            <a:off x="2926080" y="4261104"/>
+            <a:ext cx="5669280" cy="155448"/>
+          </a:xfrm>
+          <a:prstGeom prst="rect">
+            <a:avLst/>
+          </a:prstGeom>
+          <a:noFill/>
+          <a:ln/>
+        </p:spPr>
+        <p:txBody>
+          <a:bodyPr wrap="square" lIns="0" tIns="0" rIns="0" bIns="0" rtlCol="0" anchor="ctr"/>
+          <a:lstStyle/>
+          <a:p>
+            <a:pPr algn="l" indent="0" marL="0">
+              <a:buNone/>
+            </a:pPr>
+            <a:r>
+              <a:rPr lang="en-US" sz="600" spc="260" kern="0" dirty="0">
+                <a:solidFill>
+                  <a:srgbClr val="5B8AAE"/>
+                </a:solidFill>
+                <a:latin typeface="Arial" pitchFamily="34" charset="0"/>
+                <a:ea typeface="Arial" pitchFamily="34" charset="-122"/>
+                <a:cs typeface="Arial" pitchFamily="34" charset="-120"/>
+              </a:rPr>
+              <a:t>A MARGEM DE R$ 763 É OUTRA CAMADA: LÍQUIDA SÓ DE CUSTOS VARIÁVEIS</a:t>
+            </a:r>
+            <a:endParaRPr lang="en-US" sz="600" dirty="0"/>
+          </a:p>
+        </p:txBody>
+      </p:sp>
+      <p:sp>
+        <p:nvSpPr>
+          <p:cNvPr id="24" name="Text 22"/>
           <p:cNvSpPr txBox="1"/>
           <p:nvPr/>
         </p:nvSpPr>
         <p:spPr>
           <a:xfrm>
             <a:off x="457200" y="4809744"/>
-            <a:ext cx="5486400" cy="155448"/>
+            <a:ext cx="3657600" cy="155448"/>
           </a:xfrm>
           <a:prstGeom prst="rect">
             <a:avLst/>
@@ -10505,13 +11832,13 @@
             <a:r>
               <a:rPr lang="en-US" sz="750" spc="260" kern="0" dirty="0">
                 <a:solidFill>
-                  <a:srgbClr val="1F7370"/>
-                </a:solidFill>
-                <a:latin typeface="Arial" pitchFamily="34" charset="0"/>
-                <a:ea typeface="Arial" pitchFamily="34" charset="-122"/>
-                <a:cs typeface="Arial" pitchFamily="34" charset="-120"/>
-              </a:rPr>
-              <a:t>REGRA DO CARBONO ÚNICO: O MESMO QUILO NUNCA É VENDIDO DUAS VEZES</a:t>
+                  <a:srgbClr val="7AA8C9"/>
+                </a:solidFill>
+                <a:latin typeface="Arial" pitchFamily="34" charset="0"/>
+                <a:ea typeface="Arial" pitchFamily="34" charset="-122"/>
+                <a:cs typeface="Arial" pitchFamily="34" charset="-120"/>
+              </a:rPr>
+              <a:t>POC BIOCHAR · PETROLINA</a:t>
             </a:r>
             <a:endParaRPr lang="en-US" sz="750" dirty="0"/>
           </a:p>
@@ -10603,7 +11930,7 @@
         </p:nvSpPr>
         <p:spPr>
           <a:xfrm>
-            <a:off x="457200" y="822960"/>
+            <a:off x="457200" y="804672"/>
             <a:ext cx="4023360" cy="700024"/>
           </a:xfrm>
           <a:prstGeom prst="rect">
@@ -10665,8 +11992,8 @@
         </p:nvSpPr>
         <p:spPr>
           <a:xfrm>
-            <a:off x="228600" y="1856232"/>
-            <a:ext cx="2286000" cy="429260"/>
+            <a:off x="441706" y="1948180"/>
+            <a:ext cx="2103120" cy="429260"/>
           </a:xfrm>
           <a:prstGeom prst="rect">
             <a:avLst/>
@@ -10704,8 +12031,8 @@
         </p:nvSpPr>
         <p:spPr>
           <a:xfrm>
-            <a:off x="228600" y="2340356"/>
-            <a:ext cx="2286000" cy="155448"/>
+            <a:off x="761746" y="3090672"/>
+            <a:ext cx="1463040" cy="155448"/>
           </a:xfrm>
           <a:prstGeom prst="rect">
             <a:avLst/>
@@ -10729,7 +12056,7 @@
                 <a:ea typeface="Arial" pitchFamily="34" charset="-122"/>
                 <a:cs typeface="Arial" pitchFamily="34" charset="-120"/>
               </a:rPr>
-              <a:t>BREAKEVEN DE CAIXA</a:t>
+              <a:t>CAIXA</a:t>
             </a:r>
             <a:endParaRPr lang="en-US" sz="750" dirty="0"/>
           </a:p>
@@ -10743,8 +12070,537 @@
         </p:nvSpPr>
         <p:spPr>
           <a:xfrm>
-            <a:off x="228600" y="2523236"/>
-            <a:ext cx="2286000" cy="365760"/>
+            <a:off x="441706" y="3246120"/>
+            <a:ext cx="2103120" cy="155448"/>
+          </a:xfrm>
+          <a:prstGeom prst="rect">
+            <a:avLst/>
+          </a:prstGeom>
+          <a:noFill/>
+          <a:ln/>
+        </p:spPr>
+        <p:txBody>
+          <a:bodyPr wrap="square" lIns="0" tIns="0" rIns="0" bIns="0" rtlCol="0" anchor="ctr"/>
+          <a:lstStyle/>
+          <a:p>
+            <a:pPr algn="ctr" indent="0" marL="0">
+              <a:buNone/>
+            </a:pPr>
+            <a:r>
+              <a:rPr lang="en-US" sz="620" spc="260" kern="0" dirty="0">
+                <a:solidFill>
+                  <a:srgbClr val="5B8AAE"/>
+                </a:solidFill>
+                <a:latin typeface="Arial" pitchFamily="34" charset="0"/>
+                <a:ea typeface="Arial" pitchFamily="34" charset="-122"/>
+                <a:cs typeface="Arial" pitchFamily="34" charset="-120"/>
+              </a:rPr>
+              <a:t>COM SUBVENÇÕES DE CUSTEIO</a:t>
+            </a:r>
+            <a:endParaRPr lang="en-US" sz="620" dirty="0"/>
+          </a:p>
+        </p:txBody>
+      </p:sp>
+      <p:sp>
+        <p:nvSpPr>
+          <p:cNvPr id="7" name="Text 5"/>
+          <p:cNvSpPr txBox="1"/>
+          <p:nvPr/>
+        </p:nvSpPr>
+        <p:spPr>
+          <a:xfrm>
+            <a:off x="2225040" y="1882140"/>
+            <a:ext cx="2103120" cy="495300"/>
+          </a:xfrm>
+          <a:prstGeom prst="rect">
+            <a:avLst/>
+          </a:prstGeom>
+          <a:noFill/>
+          <a:ln/>
+        </p:spPr>
+        <p:txBody>
+          <a:bodyPr wrap="square" lIns="0" tIns="0" rIns="0" bIns="0" rtlCol="0" anchor="t"/>
+          <a:lstStyle/>
+          <a:p>
+            <a:pPr algn="ctr" indent="0" marL="0">
+              <a:buNone/>
+            </a:pPr>
+            <a:r>
+              <a:rPr lang="en-US" sz="3000" spc="-200" kern="0" dirty="0">
+                <a:solidFill>
+                  <a:srgbClr val="175D5C"/>
+                </a:solidFill>
+                <a:latin typeface="Arial" pitchFamily="34" charset="0"/>
+                <a:ea typeface="Arial" pitchFamily="34" charset="-122"/>
+                <a:cs typeface="Arial" pitchFamily="34" charset="-120"/>
+              </a:rPr>
+              <a:t>4.700</a:t>
+            </a:r>
+            <a:endParaRPr lang="en-US" sz="3000" dirty="0"/>
+          </a:p>
+        </p:txBody>
+      </p:sp>
+      <p:sp>
+        <p:nvSpPr>
+          <p:cNvPr id="8" name="Text 6"/>
+          <p:cNvSpPr txBox="1"/>
+          <p:nvPr/>
+        </p:nvSpPr>
+        <p:spPr>
+          <a:xfrm>
+            <a:off x="2545080" y="3310128"/>
+            <a:ext cx="1463040" cy="155448"/>
+          </a:xfrm>
+          <a:prstGeom prst="rect">
+            <a:avLst/>
+          </a:prstGeom>
+          <a:noFill/>
+          <a:ln/>
+        </p:spPr>
+        <p:txBody>
+          <a:bodyPr wrap="square" lIns="0" tIns="0" rIns="0" bIns="0" rtlCol="0" anchor="ctr"/>
+          <a:lstStyle/>
+          <a:p>
+            <a:pPr algn="ctr" indent="0" marL="0">
+              <a:buNone/>
+            </a:pPr>
+            <a:r>
+              <a:rPr lang="en-US" sz="750" spc="260" kern="0" dirty="0">
+                <a:solidFill>
+                  <a:srgbClr val="1F7370"/>
+                </a:solidFill>
+                <a:latin typeface="Arial" pitchFamily="34" charset="0"/>
+                <a:ea typeface="Arial" pitchFamily="34" charset="-122"/>
+                <a:cs typeface="Arial" pitchFamily="34" charset="-120"/>
+              </a:rPr>
+              <a:t>MÓDULO 1</a:t>
+            </a:r>
+            <a:endParaRPr lang="en-US" sz="750" dirty="0"/>
+          </a:p>
+        </p:txBody>
+      </p:sp>
+      <p:sp>
+        <p:nvSpPr>
+          <p:cNvPr id="9" name="Text 7"/>
+          <p:cNvSpPr txBox="1"/>
+          <p:nvPr/>
+        </p:nvSpPr>
+        <p:spPr>
+          <a:xfrm>
+            <a:off x="2225040" y="3465576"/>
+            <a:ext cx="2103120" cy="155448"/>
+          </a:xfrm>
+          <a:prstGeom prst="rect">
+            <a:avLst/>
+          </a:prstGeom>
+          <a:noFill/>
+          <a:ln/>
+        </p:spPr>
+        <p:txBody>
+          <a:bodyPr wrap="square" lIns="0" tIns="0" rIns="0" bIns="0" rtlCol="0" anchor="ctr"/>
+          <a:lstStyle/>
+          <a:p>
+            <a:pPr algn="ctr" indent="0" marL="0">
+              <a:buNone/>
+            </a:pPr>
+            <a:r>
+              <a:rPr lang="en-US" sz="620" spc="260" kern="0" dirty="0">
+                <a:solidFill>
+                  <a:srgbClr val="5B8AAE"/>
+                </a:solidFill>
+                <a:latin typeface="Arial" pitchFamily="34" charset="0"/>
+                <a:ea typeface="Arial" pitchFamily="34" charset="-122"/>
+                <a:cs typeface="Arial" pitchFamily="34" charset="-120"/>
+              </a:rPr>
+              <a:t>CAPEX DE 21,6 M</a:t>
+            </a:r>
+            <a:endParaRPr lang="en-US" sz="620" dirty="0"/>
+          </a:p>
+        </p:txBody>
+      </p:sp>
+      <p:sp>
+        <p:nvSpPr>
+          <p:cNvPr id="10" name="Text 8"/>
+          <p:cNvSpPr txBox="1"/>
+          <p:nvPr/>
+        </p:nvSpPr>
+        <p:spPr>
+          <a:xfrm>
+            <a:off x="3839972" y="1750060"/>
+            <a:ext cx="2103120" cy="627380"/>
+          </a:xfrm>
+          <a:prstGeom prst="rect">
+            <a:avLst/>
+          </a:prstGeom>
+          <a:noFill/>
+          <a:ln/>
+        </p:spPr>
+        <p:txBody>
+          <a:bodyPr wrap="square" lIns="0" tIns="0" rIns="0" bIns="0" rtlCol="0" anchor="t"/>
+          <a:lstStyle/>
+          <a:p>
+            <a:pPr algn="ctr" indent="0" marL="0">
+              <a:buNone/>
+            </a:pPr>
+            <a:r>
+              <a:rPr lang="en-US" sz="3800" spc="-200" kern="0" dirty="0">
+                <a:solidFill>
+                  <a:srgbClr val="143743"/>
+                </a:solidFill>
+                <a:latin typeface="Arial" pitchFamily="34" charset="0"/>
+                <a:ea typeface="Arial" pitchFamily="34" charset="-122"/>
+                <a:cs typeface="Arial" pitchFamily="34" charset="-120"/>
+              </a:rPr>
+              <a:t>5.448</a:t>
+            </a:r>
+            <a:endParaRPr lang="en-US" sz="3800" dirty="0"/>
+          </a:p>
+        </p:txBody>
+      </p:sp>
+      <p:sp>
+        <p:nvSpPr>
+          <p:cNvPr id="11" name="Text 9"/>
+          <p:cNvSpPr txBox="1"/>
+          <p:nvPr/>
+        </p:nvSpPr>
+        <p:spPr>
+          <a:xfrm>
+            <a:off x="4160012" y="3090672"/>
+            <a:ext cx="1463040" cy="155448"/>
+          </a:xfrm>
+          <a:prstGeom prst="rect">
+            <a:avLst/>
+          </a:prstGeom>
+          <a:noFill/>
+          <a:ln/>
+        </p:spPr>
+        <p:txBody>
+          <a:bodyPr wrap="square" lIns="0" tIns="0" rIns="0" bIns="0" rtlCol="0" anchor="ctr"/>
+          <a:lstStyle/>
+          <a:p>
+            <a:pPr algn="ctr" indent="0" marL="0">
+              <a:buNone/>
+            </a:pPr>
+            <a:r>
+              <a:rPr lang="en-US" sz="750" spc="260" kern="0" dirty="0">
+                <a:solidFill>
+                  <a:srgbClr val="1F7370"/>
+                </a:solidFill>
+                <a:latin typeface="Arial" pitchFamily="34" charset="0"/>
+                <a:ea typeface="Arial" pitchFamily="34" charset="-122"/>
+                <a:cs typeface="Arial" pitchFamily="34" charset="-120"/>
+              </a:rPr>
+              <a:t>MERCADO PLENO</a:t>
+            </a:r>
+            <a:endParaRPr lang="en-US" sz="750" dirty="0"/>
+          </a:p>
+        </p:txBody>
+      </p:sp>
+      <p:sp>
+        <p:nvSpPr>
+          <p:cNvPr id="12" name="Text 10"/>
+          <p:cNvSpPr txBox="1"/>
+          <p:nvPr/>
+        </p:nvSpPr>
+        <p:spPr>
+          <a:xfrm>
+            <a:off x="3839972" y="3246120"/>
+            <a:ext cx="2103120" cy="155448"/>
+          </a:xfrm>
+          <a:prstGeom prst="rect">
+            <a:avLst/>
+          </a:prstGeom>
+          <a:noFill/>
+          <a:ln/>
+        </p:spPr>
+        <p:txBody>
+          <a:bodyPr wrap="square" lIns="0" tIns="0" rIns="0" bIns="0" rtlCol="0" anchor="ctr"/>
+          <a:lstStyle/>
+          <a:p>
+            <a:pPr algn="ctr" indent="0" marL="0">
+              <a:buNone/>
+            </a:pPr>
+            <a:r>
+              <a:rPr lang="en-US" sz="620" spc="260" kern="0" dirty="0">
+                <a:solidFill>
+                  <a:srgbClr val="5B8AAE"/>
+                </a:solidFill>
+                <a:latin typeface="Arial" pitchFamily="34" charset="0"/>
+                <a:ea typeface="Arial" pitchFamily="34" charset="-122"/>
+                <a:cs typeface="Arial" pitchFamily="34" charset="-120"/>
+              </a:rPr>
+              <a:t>EBITDA = 0 EM 2028</a:t>
+            </a:r>
+            <a:endParaRPr lang="en-US" sz="620" dirty="0"/>
+          </a:p>
+        </p:txBody>
+      </p:sp>
+      <p:sp>
+        <p:nvSpPr>
+          <p:cNvPr id="13" name="Text 11"/>
+          <p:cNvSpPr txBox="1"/>
+          <p:nvPr/>
+        </p:nvSpPr>
+        <p:spPr>
+          <a:xfrm>
+            <a:off x="7065518" y="2014220"/>
+            <a:ext cx="2103120" cy="363220"/>
+          </a:xfrm>
+          <a:prstGeom prst="rect">
+            <a:avLst/>
+          </a:prstGeom>
+          <a:noFill/>
+          <a:ln/>
+        </p:spPr>
+        <p:txBody>
+          <a:bodyPr wrap="square" lIns="0" tIns="0" rIns="0" bIns="0" rtlCol="0" anchor="t"/>
+          <a:lstStyle/>
+          <a:p>
+            <a:pPr algn="ctr" indent="0" marL="0">
+              <a:buNone/>
+            </a:pPr>
+            <a:r>
+              <a:rPr lang="en-US" sz="2200" spc="-200" kern="0" dirty="0">
+                <a:solidFill>
+                  <a:srgbClr val="C9654A"/>
+                </a:solidFill>
+                <a:latin typeface="Arial" pitchFamily="34" charset="0"/>
+                <a:ea typeface="Arial" pitchFamily="34" charset="-122"/>
+                <a:cs typeface="Arial" pitchFamily="34" charset="-120"/>
+              </a:rPr>
+              <a:t>6.942</a:t>
+            </a:r>
+            <a:endParaRPr lang="en-US" sz="2200" dirty="0"/>
+          </a:p>
+        </p:txBody>
+      </p:sp>
+      <p:sp>
+        <p:nvSpPr>
+          <p:cNvPr id="14" name="Text 12"/>
+          <p:cNvSpPr txBox="1"/>
+          <p:nvPr/>
+        </p:nvSpPr>
+        <p:spPr>
+          <a:xfrm>
+            <a:off x="7385558" y="3310128"/>
+            <a:ext cx="1463040" cy="155448"/>
+          </a:xfrm>
+          <a:prstGeom prst="rect">
+            <a:avLst/>
+          </a:prstGeom>
+          <a:noFill/>
+          <a:ln/>
+        </p:spPr>
+        <p:txBody>
+          <a:bodyPr wrap="square" lIns="0" tIns="0" rIns="0" bIns="0" rtlCol="0" anchor="ctr"/>
+          <a:lstStyle/>
+          <a:p>
+            <a:pPr algn="ctr" indent="0" marL="0">
+              <a:buNone/>
+            </a:pPr>
+            <a:r>
+              <a:rPr lang="en-US" sz="750" spc="260" kern="0" dirty="0">
+                <a:solidFill>
+                  <a:srgbClr val="C9654A"/>
+                </a:solidFill>
+                <a:latin typeface="Arial" pitchFamily="34" charset="0"/>
+                <a:ea typeface="Arial" pitchFamily="34" charset="-122"/>
+                <a:cs typeface="Arial" pitchFamily="34" charset="-120"/>
+              </a:rPr>
+              <a:t>SEM GATE FEE</a:t>
+            </a:r>
+            <a:endParaRPr lang="en-US" sz="750" dirty="0"/>
+          </a:p>
+        </p:txBody>
+      </p:sp>
+      <p:sp>
+        <p:nvSpPr>
+          <p:cNvPr id="15" name="Text 13"/>
+          <p:cNvSpPr txBox="1"/>
+          <p:nvPr/>
+        </p:nvSpPr>
+        <p:spPr>
+          <a:xfrm>
+            <a:off x="7065518" y="3465576"/>
+            <a:ext cx="2103120" cy="155448"/>
+          </a:xfrm>
+          <a:prstGeom prst="rect">
+            <a:avLst/>
+          </a:prstGeom>
+          <a:noFill/>
+          <a:ln/>
+        </p:spPr>
+        <p:txBody>
+          <a:bodyPr wrap="square" lIns="0" tIns="0" rIns="0" bIns="0" rtlCol="0" anchor="ctr"/>
+          <a:lstStyle/>
+          <a:p>
+            <a:pPr algn="ctr" indent="0" marL="0">
+              <a:buNone/>
+            </a:pPr>
+            <a:r>
+              <a:rPr lang="en-US" sz="620" spc="260" kern="0" dirty="0">
+                <a:solidFill>
+                  <a:srgbClr val="5B8AAE"/>
+                </a:solidFill>
+                <a:latin typeface="Arial" pitchFamily="34" charset="0"/>
+                <a:ea typeface="Arial" pitchFamily="34" charset="-122"/>
+                <a:cs typeface="Arial" pitchFamily="34" charset="-120"/>
+              </a:rPr>
+              <a:t>SE A DESTINAÇÃO NÃO FECHAR</a:t>
+            </a:r>
+            <a:endParaRPr lang="en-US" sz="620" dirty="0"/>
+          </a:p>
+        </p:txBody>
+      </p:sp>
+      <p:sp>
+        <p:nvSpPr>
+          <p:cNvPr id="16" name="Text 14"/>
+          <p:cNvSpPr txBox="1"/>
+          <p:nvPr/>
+        </p:nvSpPr>
+        <p:spPr>
+          <a:xfrm>
+            <a:off x="457200" y="2633472"/>
+            <a:ext cx="2194560" cy="155448"/>
+          </a:xfrm>
+          <a:prstGeom prst="rect">
+            <a:avLst/>
+          </a:prstGeom>
+          <a:noFill/>
+          <a:ln/>
+        </p:spPr>
+        <p:txBody>
+          <a:bodyPr wrap="square" lIns="0" tIns="0" rIns="0" bIns="0" rtlCol="0" anchor="ctr"/>
+          <a:lstStyle/>
+          <a:p>
+            <a:pPr algn="l" indent="0" marL="0">
+              <a:buNone/>
+            </a:pPr>
+            <a:r>
+              <a:rPr lang="en-US" sz="750" spc="260" kern="0" dirty="0">
+                <a:solidFill>
+                  <a:srgbClr val="7AA8C9"/>
+                </a:solidFill>
+                <a:latin typeface="Arial" pitchFamily="34" charset="0"/>
+                <a:ea typeface="Arial" pitchFamily="34" charset="-122"/>
+                <a:cs typeface="Arial" pitchFamily="34" charset="-120"/>
+              </a:rPr>
+              <a:t>TONELADAS DE BIOCHAR POR ANO</a:t>
+            </a:r>
+            <a:endParaRPr lang="en-US" sz="750" dirty="0"/>
+          </a:p>
+        </p:txBody>
+      </p:sp>
+      <p:sp>
+        <p:nvSpPr>
+          <p:cNvPr id="17" name="Shape 15"/>
+          <p:cNvSpPr/>
+          <p:nvPr/>
+        </p:nvSpPr>
+        <p:spPr>
+          <a:xfrm>
+            <a:off x="457200" y="3986784"/>
+            <a:ext cx="8138160" cy="7315"/>
+          </a:xfrm>
+          <a:prstGeom prst="rect">
+            <a:avLst/>
+          </a:prstGeom>
+          <a:solidFill>
+            <a:srgbClr val="1F7370">
+              <a:alpha val="45000"/>
+            </a:srgbClr>
+          </a:solidFill>
+          <a:ln/>
+        </p:spPr>
+      </p:sp>
+      <p:sp>
+        <p:nvSpPr>
+          <p:cNvPr id="18" name="Text 16"/>
+          <p:cNvSpPr txBox="1"/>
+          <p:nvPr/>
+        </p:nvSpPr>
+        <p:spPr>
+          <a:xfrm>
+            <a:off x="457200" y="4078224"/>
+            <a:ext cx="1097280" cy="155448"/>
+          </a:xfrm>
+          <a:prstGeom prst="rect">
+            <a:avLst/>
+          </a:prstGeom>
+          <a:noFill/>
+          <a:ln/>
+        </p:spPr>
+        <p:txBody>
+          <a:bodyPr wrap="square" lIns="0" tIns="0" rIns="0" bIns="0" rtlCol="0" anchor="ctr"/>
+          <a:lstStyle/>
+          <a:p>
+            <a:pPr algn="l" indent="0" marL="0">
+              <a:buNone/>
+            </a:pPr>
+            <a:r>
+              <a:rPr lang="en-US" sz="750" spc="260" kern="0" dirty="0">
+                <a:solidFill>
+                  <a:srgbClr val="C9654A"/>
+                </a:solidFill>
+                <a:latin typeface="Arial" pitchFamily="34" charset="0"/>
+                <a:ea typeface="Arial" pitchFamily="34" charset="-122"/>
+                <a:cs typeface="Arial" pitchFamily="34" charset="-120"/>
+              </a:rPr>
+              <a:t>O VÃO</a:t>
+            </a:r>
+            <a:endParaRPr lang="en-US" sz="750" dirty="0"/>
+          </a:p>
+        </p:txBody>
+      </p:sp>
+      <p:sp>
+        <p:nvSpPr>
+          <p:cNvPr id="19" name="Text 17"/>
+          <p:cNvSpPr txBox="1"/>
+          <p:nvPr/>
+        </p:nvSpPr>
+        <p:spPr>
+          <a:xfrm>
+            <a:off x="1554480" y="4059936"/>
+            <a:ext cx="914400" cy="173736"/>
+          </a:xfrm>
+          <a:prstGeom prst="rect">
+            <a:avLst/>
+          </a:prstGeom>
+          <a:noFill/>
+          <a:ln/>
+        </p:spPr>
+        <p:txBody>
+          <a:bodyPr wrap="square" lIns="0" tIns="0" rIns="0" bIns="0" rtlCol="0" anchor="ctr"/>
+          <a:lstStyle/>
+          <a:p>
+            <a:pPr algn="l" indent="0" marL="0">
+              <a:buNone/>
+            </a:pPr>
+            <a:r>
+              <a:rPr lang="en-US" sz="1000" dirty="0">
+                <a:solidFill>
+                  <a:srgbClr val="C9654A"/>
+                </a:solidFill>
+                <a:latin typeface="Courier New" pitchFamily="34" charset="0"/>
+                <a:ea typeface="Courier New" pitchFamily="34" charset="-122"/>
+                <a:cs typeface="Courier New" pitchFamily="34" charset="-120"/>
+              </a:rPr>
+              <a:t>748 t</a:t>
+            </a:r>
+            <a:endParaRPr lang="en-US" sz="1000" dirty="0"/>
+          </a:p>
+        </p:txBody>
+      </p:sp>
+      <p:sp>
+        <p:nvSpPr>
+          <p:cNvPr id="20" name="Text 18"/>
+          <p:cNvSpPr txBox="1"/>
+          <p:nvPr/>
+        </p:nvSpPr>
+        <p:spPr>
+          <a:xfrm>
+            <a:off x="2651760" y="4059936"/>
+            <a:ext cx="5852160" cy="274320"/>
           </a:xfrm>
           <a:prstGeom prst="rect">
             <a:avLst/>
@@ -10758,12 +12614,12 @@
           <a:p>
             <a:pPr indent="0" marL="0">
               <a:lnSpc>
-                <a:spcPts val="1318"/>
+                <a:spcPts val="1395"/>
               </a:lnSpc>
               <a:buNone/>
             </a:pPr>
             <a:r>
-              <a:rPr lang="en-US" sz="850" dirty="0">
+              <a:rPr lang="en-US" sz="900" dirty="0">
                 <a:solidFill>
                   <a:srgbClr val="52666B"/>
                 </a:solidFill>
@@ -10771,73 +12627,56 @@
                 <a:ea typeface="Arial" pitchFamily="34" charset="-122"/>
                 <a:cs typeface="Arial" pitchFamily="34" charset="-120"/>
               </a:rPr>
-              <a:t>com subvenções de custeio</a:t>
-            </a:r>
-            <a:endParaRPr lang="en-US" sz="850" dirty="0"/>
-          </a:p>
-        </p:txBody>
-      </p:sp>
-      <p:sp>
-        <p:nvSpPr>
-          <p:cNvPr id="7" name="Text 5"/>
-          <p:cNvSpPr txBox="1"/>
-          <p:nvPr/>
-        </p:nvSpPr>
-        <p:spPr>
-          <a:xfrm>
-            <a:off x="2423160" y="1700784"/>
-            <a:ext cx="2286000" cy="528320"/>
-          </a:xfrm>
-          <a:prstGeom prst="rect">
-            <a:avLst/>
-          </a:prstGeom>
-          <a:noFill/>
-          <a:ln/>
-        </p:spPr>
-        <p:txBody>
-          <a:bodyPr wrap="square" lIns="0" tIns="0" rIns="0" bIns="0" rtlCol="0" anchor="t"/>
-          <a:lstStyle/>
-          <a:p>
-            <a:pPr algn="ctr" indent="0" marL="0">
-              <a:buNone/>
-            </a:pPr>
-            <a:r>
-              <a:rPr lang="en-US" sz="3200" spc="-200" kern="0" dirty="0">
-                <a:solidFill>
-                  <a:srgbClr val="175D5C"/>
-                </a:solidFill>
-                <a:latin typeface="Arial" pitchFamily="34" charset="0"/>
-                <a:ea typeface="Arial" pitchFamily="34" charset="-122"/>
-                <a:cs typeface="Arial" pitchFamily="34" charset="-120"/>
-              </a:rPr>
-              <a:t>4.700</a:t>
-            </a:r>
-            <a:endParaRPr lang="en-US" sz="3200" dirty="0"/>
-          </a:p>
-        </p:txBody>
-      </p:sp>
-      <p:sp>
-        <p:nvSpPr>
-          <p:cNvPr id="8" name="Text 6"/>
-          <p:cNvSpPr txBox="1"/>
-          <p:nvPr/>
-        </p:nvSpPr>
-        <p:spPr>
-          <a:xfrm>
-            <a:off x="2423160" y="2283968"/>
-            <a:ext cx="2286000" cy="155448"/>
-          </a:xfrm>
-          <a:prstGeom prst="rect">
-            <a:avLst/>
-          </a:prstGeom>
-          <a:noFill/>
-          <a:ln/>
-        </p:spPr>
-        <p:txBody>
-          <a:bodyPr wrap="square" lIns="0" tIns="0" rIns="0" bIns="0" rtlCol="0" anchor="ctr"/>
-          <a:lstStyle/>
-          <a:p>
-            <a:pPr algn="ctr" indent="0" marL="0">
+              <a:t>o Módulo 1 sozinho não alcança o breakeven a mercado pleno — a Planta 1 existe por isso</a:t>
+            </a:r>
+            <a:endParaRPr lang="en-US" sz="900" dirty="0"/>
+          </a:p>
+        </p:txBody>
+      </p:sp>
+      <p:sp>
+        <p:nvSpPr>
+          <p:cNvPr id="21" name="Shape 19"/>
+          <p:cNvSpPr/>
+          <p:nvPr/>
+        </p:nvSpPr>
+        <p:spPr>
+          <a:xfrm>
+            <a:off x="457200" y="4425696"/>
+            <a:ext cx="8138160" cy="7315"/>
+          </a:xfrm>
+          <a:prstGeom prst="rect">
+            <a:avLst/>
+          </a:prstGeom>
+          <a:solidFill>
+            <a:srgbClr val="1F7370">
+              <a:alpha val="34000"/>
+            </a:srgbClr>
+          </a:solidFill>
+          <a:ln/>
+        </p:spPr>
+      </p:sp>
+      <p:sp>
+        <p:nvSpPr>
+          <p:cNvPr id="22" name="Text 20"/>
+          <p:cNvSpPr txBox="1"/>
+          <p:nvPr/>
+        </p:nvSpPr>
+        <p:spPr>
+          <a:xfrm>
+            <a:off x="457200" y="4517136"/>
+            <a:ext cx="1097280" cy="155448"/>
+          </a:xfrm>
+          <a:prstGeom prst="rect">
+            <a:avLst/>
+          </a:prstGeom>
+          <a:noFill/>
+          <a:ln/>
+        </p:spPr>
+        <p:txBody>
+          <a:bodyPr wrap="square" lIns="0" tIns="0" rIns="0" bIns="0" rtlCol="0" anchor="ctr"/>
+          <a:lstStyle/>
+          <a:p>
+            <a:pPr algn="l" indent="0" marL="0">
               <a:buNone/>
             </a:pPr>
             <a:r>
@@ -10849,7 +12688,7 @@
                 <a:ea typeface="Arial" pitchFamily="34" charset="-122"/>
                 <a:cs typeface="Arial" pitchFamily="34" charset="-120"/>
               </a:rPr>
-              <a:t>CAPACIDADE MÓDULO 1</a:t>
+              <a:t>A DESTINAÇÃO</a:t>
             </a:r>
             <a:endParaRPr lang="en-US" sz="750" dirty="0"/>
           </a:p>
@@ -10857,14 +12696,53 @@
       </p:sp>
       <p:sp>
         <p:nvSpPr>
-          <p:cNvPr id="9" name="Text 7"/>
-          <p:cNvSpPr txBox="1"/>
-          <p:nvPr/>
-        </p:nvSpPr>
-        <p:spPr>
-          <a:xfrm>
-            <a:off x="2423160" y="2466848"/>
-            <a:ext cx="2286000" cy="365760"/>
+          <p:cNvPr id="23" name="Text 21"/>
+          <p:cNvSpPr txBox="1"/>
+          <p:nvPr/>
+        </p:nvSpPr>
+        <p:spPr>
+          <a:xfrm>
+            <a:off x="1554480" y="4498848"/>
+            <a:ext cx="914400" cy="173736"/>
+          </a:xfrm>
+          <a:prstGeom prst="rect">
+            <a:avLst/>
+          </a:prstGeom>
+          <a:noFill/>
+          <a:ln/>
+        </p:spPr>
+        <p:txBody>
+          <a:bodyPr wrap="square" lIns="0" tIns="0" rIns="0" bIns="0" rtlCol="0" anchor="ctr"/>
+          <a:lstStyle/>
+          <a:p>
+            <a:pPr algn="l" indent="0" marL="0">
+              <a:buNone/>
+            </a:pPr>
+            <a:r>
+              <a:rPr lang="en-US" sz="1000" dirty="0">
+                <a:solidFill>
+                  <a:srgbClr val="1F7370"/>
+                </a:solidFill>
+                <a:latin typeface="Courier New" pitchFamily="34" charset="0"/>
+                <a:ea typeface="Courier New" pitchFamily="34" charset="-122"/>
+                <a:cs typeface="Courier New" pitchFamily="34" charset="-120"/>
+              </a:rPr>
+              <a:t>1.494 t</a:t>
+            </a:r>
+            <a:endParaRPr lang="en-US" sz="1000" dirty="0"/>
+          </a:p>
+        </p:txBody>
+      </p:sp>
+      <p:sp>
+        <p:nvSpPr>
+          <p:cNvPr id="24" name="Text 22"/>
+          <p:cNvSpPr txBox="1"/>
+          <p:nvPr/>
+        </p:nvSpPr>
+        <p:spPr>
+          <a:xfrm>
+            <a:off x="2651760" y="4498848"/>
+            <a:ext cx="5852160" cy="274320"/>
           </a:xfrm>
           <a:prstGeom prst="rect">
             <a:avLst/>
@@ -10878,12 +12756,12 @@
           <a:p>
             <a:pPr indent="0" marL="0">
               <a:lnSpc>
-                <a:spcPts val="1318"/>
+                <a:spcPts val="1395"/>
               </a:lnSpc>
               <a:buNone/>
             </a:pPr>
             <a:r>
-              <a:rPr lang="en-US" sz="850" dirty="0">
+              <a:rPr lang="en-US" sz="900" dirty="0">
                 <a:solidFill>
                   <a:srgbClr val="52666B"/>
                 </a:solidFill>
@@ -10891,300 +12769,21 @@
                 <a:ea typeface="Arial" pitchFamily="34" charset="-122"/>
                 <a:cs typeface="Arial" pitchFamily="34" charset="-120"/>
               </a:rPr>
-              <a:t>CAPEX de 21,6 M</a:t>
-            </a:r>
-            <a:endParaRPr lang="en-US" sz="850" dirty="0"/>
-          </a:p>
-        </p:txBody>
-      </p:sp>
-      <p:sp>
-        <p:nvSpPr>
-          <p:cNvPr id="10" name="Text 8"/>
-          <p:cNvSpPr txBox="1"/>
-          <p:nvPr/>
-        </p:nvSpPr>
-        <p:spPr>
-          <a:xfrm>
-            <a:off x="4617720" y="1481328"/>
-            <a:ext cx="2286000" cy="660400"/>
-          </a:xfrm>
-          <a:prstGeom prst="rect">
-            <a:avLst/>
-          </a:prstGeom>
-          <a:noFill/>
-          <a:ln/>
-        </p:spPr>
-        <p:txBody>
-          <a:bodyPr wrap="square" lIns="0" tIns="0" rIns="0" bIns="0" rtlCol="0" anchor="t"/>
-          <a:lstStyle/>
-          <a:p>
-            <a:pPr algn="ctr" indent="0" marL="0">
-              <a:buNone/>
-            </a:pPr>
-            <a:r>
-              <a:rPr lang="en-US" sz="4000" spc="-200" kern="0" dirty="0">
-                <a:solidFill>
-                  <a:srgbClr val="143743"/>
-                </a:solidFill>
-                <a:latin typeface="Arial" pitchFamily="34" charset="0"/>
-                <a:ea typeface="Arial" pitchFamily="34" charset="-122"/>
-                <a:cs typeface="Arial" pitchFamily="34" charset="-120"/>
-              </a:rPr>
-              <a:t>5.448</a:t>
-            </a:r>
-            <a:endParaRPr lang="en-US" sz="4000" dirty="0"/>
-          </a:p>
-        </p:txBody>
-      </p:sp>
-      <p:sp>
-        <p:nvSpPr>
-          <p:cNvPr id="11" name="Text 9"/>
-          <p:cNvSpPr txBox="1"/>
-          <p:nvPr/>
-        </p:nvSpPr>
-        <p:spPr>
-          <a:xfrm>
-            <a:off x="4617720" y="2196592"/>
-            <a:ext cx="2286000" cy="155448"/>
-          </a:xfrm>
-          <a:prstGeom prst="rect">
-            <a:avLst/>
-          </a:prstGeom>
-          <a:noFill/>
-          <a:ln/>
-        </p:spPr>
-        <p:txBody>
-          <a:bodyPr wrap="square" lIns="0" tIns="0" rIns="0" bIns="0" rtlCol="0" anchor="ctr"/>
-          <a:lstStyle/>
-          <a:p>
-            <a:pPr algn="ctr" indent="0" marL="0">
-              <a:buNone/>
-            </a:pPr>
-            <a:r>
-              <a:rPr lang="en-US" sz="750" spc="260" kern="0" dirty="0">
-                <a:solidFill>
-                  <a:srgbClr val="1F7370"/>
-                </a:solidFill>
-                <a:latin typeface="Arial" pitchFamily="34" charset="0"/>
-                <a:ea typeface="Arial" pitchFamily="34" charset="-122"/>
-                <a:cs typeface="Arial" pitchFamily="34" charset="-120"/>
-              </a:rPr>
-              <a:t>EBITDA = 0 EM 2028</a:t>
-            </a:r>
-            <a:endParaRPr lang="en-US" sz="750" dirty="0"/>
-          </a:p>
-        </p:txBody>
-      </p:sp>
-      <p:sp>
-        <p:nvSpPr>
-          <p:cNvPr id="12" name="Text 10"/>
-          <p:cNvSpPr txBox="1"/>
-          <p:nvPr/>
-        </p:nvSpPr>
-        <p:spPr>
-          <a:xfrm>
-            <a:off x="4617720" y="2379472"/>
-            <a:ext cx="2286000" cy="365760"/>
-          </a:xfrm>
-          <a:prstGeom prst="rect">
-            <a:avLst/>
-          </a:prstGeom>
-          <a:noFill/>
-          <a:ln/>
-        </p:spPr>
-        <p:txBody>
-          <a:bodyPr wrap="square" lIns="0" tIns="0" rIns="0" bIns="0" rtlCol="0" anchor="t"/>
-          <a:lstStyle/>
-          <a:p>
-            <a:pPr indent="0" marL="0">
-              <a:lnSpc>
-                <a:spcPts val="1318"/>
-              </a:lnSpc>
-              <a:buNone/>
-            </a:pPr>
-            <a:r>
-              <a:rPr lang="en-US" sz="850" dirty="0">
-                <a:solidFill>
-                  <a:srgbClr val="52666B"/>
-                </a:solidFill>
-                <a:latin typeface="Arial" pitchFamily="34" charset="0"/>
-                <a:ea typeface="Arial" pitchFamily="34" charset="-122"/>
-                <a:cs typeface="Arial" pitchFamily="34" charset="-120"/>
-              </a:rPr>
-              <a:t>a mercado pleno, 15 pessoas</a:t>
-            </a:r>
-            <a:endParaRPr lang="en-US" sz="850" dirty="0"/>
-          </a:p>
-        </p:txBody>
-      </p:sp>
-      <p:sp>
-        <p:nvSpPr>
-          <p:cNvPr id="13" name="Text 11"/>
-          <p:cNvSpPr txBox="1"/>
-          <p:nvPr/>
-        </p:nvSpPr>
-        <p:spPr>
-          <a:xfrm>
-            <a:off x="6812280" y="3310128"/>
-            <a:ext cx="2286000" cy="363220"/>
-          </a:xfrm>
-          <a:prstGeom prst="rect">
-            <a:avLst/>
-          </a:prstGeom>
-          <a:noFill/>
-          <a:ln/>
-        </p:spPr>
-        <p:txBody>
-          <a:bodyPr wrap="square" lIns="0" tIns="0" rIns="0" bIns="0" rtlCol="0" anchor="t"/>
-          <a:lstStyle/>
-          <a:p>
-            <a:pPr algn="ctr" indent="0" marL="0">
-              <a:buNone/>
-            </a:pPr>
-            <a:r>
-              <a:rPr lang="en-US" sz="2200" spc="-200" kern="0" dirty="0">
-                <a:solidFill>
-                  <a:srgbClr val="C9654A"/>
-                </a:solidFill>
-                <a:latin typeface="Arial" pitchFamily="34" charset="0"/>
-                <a:ea typeface="Arial" pitchFamily="34" charset="-122"/>
-                <a:cs typeface="Arial" pitchFamily="34" charset="-120"/>
-              </a:rPr>
-              <a:t>6.942</a:t>
-            </a:r>
-            <a:endParaRPr lang="en-US" sz="2200" dirty="0"/>
-          </a:p>
-        </p:txBody>
-      </p:sp>
-      <p:sp>
-        <p:nvSpPr>
-          <p:cNvPr id="14" name="Text 12"/>
-          <p:cNvSpPr txBox="1"/>
-          <p:nvPr/>
-        </p:nvSpPr>
-        <p:spPr>
-          <a:xfrm>
-            <a:off x="6812280" y="3728212"/>
-            <a:ext cx="2286000" cy="155448"/>
-          </a:xfrm>
-          <a:prstGeom prst="rect">
-            <a:avLst/>
-          </a:prstGeom>
-          <a:noFill/>
-          <a:ln/>
-        </p:spPr>
-        <p:txBody>
-          <a:bodyPr wrap="square" lIns="0" tIns="0" rIns="0" bIns="0" rtlCol="0" anchor="ctr"/>
-          <a:lstStyle/>
-          <a:p>
-            <a:pPr algn="ctr" indent="0" marL="0">
-              <a:buNone/>
-            </a:pPr>
-            <a:r>
-              <a:rPr lang="en-US" sz="750" spc="260" kern="0" dirty="0">
-                <a:solidFill>
-                  <a:srgbClr val="C9654A"/>
-                </a:solidFill>
-                <a:latin typeface="Arial" pitchFamily="34" charset="0"/>
-                <a:ea typeface="Arial" pitchFamily="34" charset="-122"/>
-                <a:cs typeface="Arial" pitchFamily="34" charset="-120"/>
-              </a:rPr>
-              <a:t>SEM O GATE FEE</a:t>
-            </a:r>
-            <a:endParaRPr lang="en-US" sz="750" dirty="0"/>
-          </a:p>
-        </p:txBody>
-      </p:sp>
-      <p:sp>
-        <p:nvSpPr>
-          <p:cNvPr id="15" name="Text 13"/>
-          <p:cNvSpPr txBox="1"/>
-          <p:nvPr/>
-        </p:nvSpPr>
-        <p:spPr>
-          <a:xfrm>
-            <a:off x="6812280" y="3911092"/>
-            <a:ext cx="2286000" cy="365760"/>
-          </a:xfrm>
-          <a:prstGeom prst="rect">
-            <a:avLst/>
-          </a:prstGeom>
-          <a:noFill/>
-          <a:ln/>
-        </p:spPr>
-        <p:txBody>
-          <a:bodyPr wrap="square" lIns="0" tIns="0" rIns="0" bIns="0" rtlCol="0" anchor="t"/>
-          <a:lstStyle/>
-          <a:p>
-            <a:pPr indent="0" marL="0">
-              <a:lnSpc>
-                <a:spcPts val="1318"/>
-              </a:lnSpc>
-              <a:buNone/>
-            </a:pPr>
-            <a:r>
-              <a:rPr lang="en-US" sz="850" dirty="0">
-                <a:solidFill>
-                  <a:srgbClr val="52666B"/>
-                </a:solidFill>
-                <a:latin typeface="Arial" pitchFamily="34" charset="0"/>
-                <a:ea typeface="Arial" pitchFamily="34" charset="-122"/>
-                <a:cs typeface="Arial" pitchFamily="34" charset="-120"/>
-              </a:rPr>
-              <a:t>a destinação vale ~1.500 t</a:t>
-            </a:r>
-            <a:endParaRPr lang="en-US" sz="850" dirty="0"/>
-          </a:p>
-        </p:txBody>
-      </p:sp>
-      <p:sp>
-        <p:nvSpPr>
-          <p:cNvPr id="16" name="Text 14"/>
-          <p:cNvSpPr txBox="1"/>
-          <p:nvPr/>
-        </p:nvSpPr>
-        <p:spPr>
-          <a:xfrm>
-            <a:off x="457200" y="3035808"/>
-            <a:ext cx="2743200" cy="155448"/>
-          </a:xfrm>
-          <a:prstGeom prst="rect">
-            <a:avLst/>
-          </a:prstGeom>
-          <a:noFill/>
-          <a:ln/>
-        </p:spPr>
-        <p:txBody>
-          <a:bodyPr wrap="square" lIns="0" tIns="0" rIns="0" bIns="0" rtlCol="0" anchor="ctr"/>
-          <a:lstStyle/>
-          <a:p>
-            <a:pPr algn="l" indent="0" marL="0">
-              <a:buNone/>
-            </a:pPr>
-            <a:r>
-              <a:rPr lang="en-US" sz="750" spc="260" kern="0" dirty="0">
-                <a:solidFill>
-                  <a:srgbClr val="7AA8C9"/>
-                </a:solidFill>
-                <a:latin typeface="Arial" pitchFamily="34" charset="0"/>
-                <a:ea typeface="Arial" pitchFamily="34" charset="-122"/>
-                <a:cs typeface="Arial" pitchFamily="34" charset="-120"/>
-              </a:rPr>
-              <a:t>TONELADAS DE BIOCHAR POR ANO</a:t>
-            </a:r>
-            <a:endParaRPr lang="en-US" sz="750" dirty="0"/>
-          </a:p>
-        </p:txBody>
-      </p:sp>
-      <p:sp>
-        <p:nvSpPr>
-          <p:cNvPr id="17" name="Text 15"/>
-          <p:cNvSpPr txBox="1"/>
-          <p:nvPr/>
-        </p:nvSpPr>
-        <p:spPr>
-          <a:xfrm>
-            <a:off x="457200" y="4809744"/>
+              <a:t>é quanto o contrato com a PepsiCo vale em toneladas de breakeven evitadas</a:t>
+            </a:r>
+            <a:endParaRPr lang="en-US" sz="900" dirty="0"/>
+          </a:p>
+        </p:txBody>
+      </p:sp>
+      <p:sp>
+        <p:nvSpPr>
+          <p:cNvPr id="25" name="Text 23"/>
+          <p:cNvSpPr txBox="1"/>
+          <p:nvPr/>
+        </p:nvSpPr>
+        <p:spPr>
+          <a:xfrm>
+            <a:off x="457200" y="4882896"/>
             <a:ext cx="3657600" cy="155448"/>
           </a:xfrm>
           <a:prstGeom prst="rect">

--- a/deck/poc-biochar-capex-opex.pptx
+++ b/deck/poc-biochar-capex-opex.pptx
@@ -513,7 +513,7 @@
           <a:p>
             <a:r>
               <a:rPr lang="en-US" dirty="0"/>
-              <a:t>Capa. A membrana translúcida é cortada pelo topo e pela direita; a headline ocupa a zona clara à esquerda. Nenhum quadro escuro antes do slide 11.</a:t>
+              <a:t>A membrana é o device da permanência e carrega poros — matéria, não vidro.</a:t>
             </a:r>
             <a:endParaRPr lang="en-US" dirty="0"/>
           </a:p>
@@ -601,7 +601,7 @@
           <a:p>
             <a:r>
               <a:rPr lang="en-US" dirty="0"/>
-              <a:t>A trajetória é momentum, não um gráfico. Cada nó é um marco de capacidade.</a:t>
+              <a:t>Cada membrana está dimensionada pela capacidade da sua fase — a escala é física, não uma curva desenhada por cima.</a:t>
             </a:r>
             <a:endParaRPr lang="en-US" dirty="0"/>
           </a:p>
@@ -777,7 +777,7 @@
           <a:p>
             <a:r>
               <a:rPr lang="en-US" dirty="0"/>
-              <a:t>Fecha na luz e mais claro que a capa. Grant → offtake parcial com dMRV → dívida e equity de infraestrutura.</a:t>
+              <a:t>Fecha na luz. O campo de poros da chapa está quase resolvido — o eco visual do slide 11 depois de todos os gates.</a:t>
             </a:r>
             <a:endParaRPr lang="en-US" dirty="0"/>
           </a:p>
@@ -865,7 +865,7 @@
           <a:p>
             <a:r>
               <a:rPr lang="en-US" dirty="0"/>
-              <a:t>1,5 Mt entregues contra 100 Mt/ano de demanda projetada em 2030. O fantasma "100 Mt/ano" na chapa é a demanda que o mercado não alcança.</a:t>
+              <a:t>1,5 Mt entregues contra 100 Mt/ano de demanda projetada em 2030: ~66x, em escala.</a:t>
             </a:r>
             <a:endParaRPr lang="en-US" dirty="0"/>
           </a:p>
@@ -953,7 +953,7 @@
           <a:p>
             <a:r>
               <a:rPr lang="en-US" dirty="0"/>
-              <a:t>Três estados da matéria, não três colunas. O elo do meio é o que está vazio na América Latina.</a:t>
+              <a:t>O elo do meio — char de especificação para construção — é o que está vazio na América Latina.</a:t>
             </a:r>
             <a:endParaRPr lang="en-US" dirty="0"/>
           </a:p>
@@ -1217,7 +1217,7 @@
           <a:p>
             <a:r>
               <a:rPr lang="en-US" dirty="0"/>
-              <a:t>R$ 7,3 M de custeio sobre R$ 7,7 M de investimento: R$ 15,0 M no total, 85% via subvenção Finep.</a:t>
+              <a:t>R$ 7,3 M de custeio sobre R$ 7,7 M de investimento, 85% via subvenção Finep.</a:t>
             </a:r>
             <a:endParaRPr lang="en-US" dirty="0"/>
           </a:p>
@@ -1305,7 +1305,7 @@
           <a:p>
             <a:r>
               <a:rPr lang="en-US" dirty="0"/>
-              <a:t>Honestidade deliberada: R$ 3.336/t de custo contra R$ 3.177/t de receita. O breakeven do slide seguinte é a resposta.</a:t>
+              <a:t>custo/t = fixo/volume + variável. Não cruzo receita com a curva porque esta base [EST] cruzaria em ~860 t e contradiria o breakeven [DOC] de 5.448 t, que usa uma estrutura de custo maior.</a:t>
             </a:r>
             <a:endParaRPr lang="en-US" dirty="0"/>
           </a:p>
@@ -1932,7 +1932,7 @@
         </p:nvSpPr>
         <p:spPr>
           <a:xfrm>
-            <a:off x="475488" y="2395728"/>
+            <a:off x="475488" y="2212848"/>
             <a:ext cx="5852160" cy="1238504"/>
           </a:xfrm>
           <a:prstGeom prst="rect">
@@ -1994,7 +1994,7 @@
         </p:nvSpPr>
         <p:spPr>
           <a:xfrm>
-            <a:off x="475488" y="3913632"/>
+            <a:off x="475488" y="3803904"/>
             <a:ext cx="3291840" cy="7315"/>
           </a:xfrm>
           <a:prstGeom prst="rect">
@@ -2016,7 +2016,7 @@
         </p:nvSpPr>
         <p:spPr>
           <a:xfrm>
-            <a:off x="475488" y="4023360"/>
+            <a:off x="475488" y="3913632"/>
             <a:ext cx="5486400" cy="155448"/>
           </a:xfrm>
           <a:prstGeom prst="rect">
@@ -2055,7 +2055,7 @@
         </p:nvSpPr>
         <p:spPr>
           <a:xfrm>
-            <a:off x="475488" y="4334256"/>
+            <a:off x="475488" y="4224528"/>
             <a:ext cx="1033272" cy="7315"/>
           </a:xfrm>
           <a:prstGeom prst="rect">
@@ -2077,7 +2077,7 @@
         </p:nvSpPr>
         <p:spPr>
           <a:xfrm>
-            <a:off x="475488" y="4407408"/>
+            <a:off x="475488" y="4297680"/>
             <a:ext cx="1014984" cy="155448"/>
           </a:xfrm>
           <a:prstGeom prst="rect">
@@ -2116,7 +2116,7 @@
         </p:nvSpPr>
         <p:spPr>
           <a:xfrm>
-            <a:off x="475488" y="4572000"/>
+            <a:off x="475488" y="4462272"/>
             <a:ext cx="996696" cy="173736"/>
           </a:xfrm>
           <a:prstGeom prst="rect">
@@ -2155,7 +2155,7 @@
         </p:nvSpPr>
         <p:spPr>
           <a:xfrm>
-            <a:off x="1618488" y="4334256"/>
+            <a:off x="1618488" y="4224528"/>
             <a:ext cx="1033272" cy="7315"/>
           </a:xfrm>
           <a:prstGeom prst="rect">
@@ -2177,7 +2177,7 @@
         </p:nvSpPr>
         <p:spPr>
           <a:xfrm>
-            <a:off x="1618488" y="4407408"/>
+            <a:off x="1618488" y="4297680"/>
             <a:ext cx="1014984" cy="155448"/>
           </a:xfrm>
           <a:prstGeom prst="rect">
@@ -2216,7 +2216,7 @@
         </p:nvSpPr>
         <p:spPr>
           <a:xfrm>
-            <a:off x="1618488" y="4572000"/>
+            <a:off x="1618488" y="4462272"/>
             <a:ext cx="996696" cy="173736"/>
           </a:xfrm>
           <a:prstGeom prst="rect">
@@ -2255,7 +2255,7 @@
         </p:nvSpPr>
         <p:spPr>
           <a:xfrm>
-            <a:off x="2761488" y="4334256"/>
+            <a:off x="2761488" y="4224528"/>
             <a:ext cx="1033272" cy="7315"/>
           </a:xfrm>
           <a:prstGeom prst="rect">
@@ -2277,7 +2277,7 @@
         </p:nvSpPr>
         <p:spPr>
           <a:xfrm>
-            <a:off x="2761488" y="4407408"/>
+            <a:off x="2761488" y="4297680"/>
             <a:ext cx="1014984" cy="155448"/>
           </a:xfrm>
           <a:prstGeom prst="rect">
@@ -2302,7 +2302,7 @@
                 <a:ea typeface="Arial" pitchFamily="34" charset="-122"/>
                 <a:cs typeface="Arial" pitchFamily="34" charset="-120"/>
               </a:rPr>
-              <a:t>TRL</a:t>
+              <a:t>CHAR</a:t>
             </a:r>
             <a:endParaRPr lang="en-US" sz="650" dirty="0"/>
           </a:p>
@@ -2316,7 +2316,7 @@
         </p:nvSpPr>
         <p:spPr>
           <a:xfrm>
-            <a:off x="2761488" y="4572000"/>
+            <a:off x="2761488" y="4462272"/>
             <a:ext cx="996696" cy="173736"/>
           </a:xfrm>
           <a:prstGeom prst="rect">
@@ -2341,7 +2341,7 @@
                 <a:ea typeface="Courier New" pitchFamily="34" charset="-122"/>
                 <a:cs typeface="Courier New" pitchFamily="34" charset="-120"/>
               </a:rPr>
-              <a:t>04 → 07</a:t>
+              <a:t>810 t/ano</a:t>
             </a:r>
             <a:endParaRPr lang="en-US" sz="900" dirty="0"/>
           </a:p>
@@ -2355,7 +2355,7 @@
         </p:nvSpPr>
         <p:spPr>
           <a:xfrm>
-            <a:off x="3904488" y="4334256"/>
+            <a:off x="3904488" y="4224528"/>
             <a:ext cx="1033272" cy="7315"/>
           </a:xfrm>
           <a:prstGeom prst="rect">
@@ -2377,7 +2377,7 @@
         </p:nvSpPr>
         <p:spPr>
           <a:xfrm>
-            <a:off x="3904488" y="4407408"/>
+            <a:off x="3904488" y="4297680"/>
             <a:ext cx="1014984" cy="155448"/>
           </a:xfrm>
           <a:prstGeom prst="rect">
@@ -2402,7 +2402,7 @@
                 <a:ea typeface="Arial" pitchFamily="34" charset="-122"/>
                 <a:cs typeface="Arial" pitchFamily="34" charset="-120"/>
               </a:rPr>
-              <a:t>MÉTODO</a:t>
+              <a:t>TRL</a:t>
             </a:r>
             <a:endParaRPr lang="en-US" sz="650" dirty="0"/>
           </a:p>
@@ -2416,7 +2416,7 @@
         </p:nvSpPr>
         <p:spPr>
           <a:xfrm>
-            <a:off x="3904488" y="4572000"/>
+            <a:off x="3904488" y="4462272"/>
             <a:ext cx="996696" cy="173736"/>
           </a:xfrm>
           <a:prstGeom prst="rect">
@@ -2441,7 +2441,7 @@
                 <a:ea typeface="Courier New" pitchFamily="34" charset="-122"/>
                 <a:cs typeface="Courier New" pitchFamily="34" charset="-120"/>
               </a:rPr>
-              <a:t>VM0044</a:t>
+              <a:t>04 → 07</a:t>
             </a:r>
             <a:endParaRPr lang="en-US" sz="900" dirty="0"/>
           </a:p>
@@ -2450,6 +2450,45 @@
       <p:sp>
         <p:nvSpPr>
           <p:cNvPr id="19" name="Text 16"/>
+          <p:cNvSpPr txBox="1"/>
+          <p:nvPr/>
+        </p:nvSpPr>
+        <p:spPr>
+          <a:xfrm>
+            <a:off x="475488" y="4809744"/>
+            <a:ext cx="5852160" cy="155448"/>
+          </a:xfrm>
+          <a:prstGeom prst="rect">
+            <a:avLst/>
+          </a:prstGeom>
+          <a:noFill/>
+          <a:ln/>
+        </p:spPr>
+        <p:txBody>
+          <a:bodyPr wrap="square" lIns="0" tIns="0" rIns="0" bIns="0" rtlCol="0" anchor="ctr"/>
+          <a:lstStyle/>
+          <a:p>
+            <a:pPr algn="l" indent="0" marL="0">
+              <a:buNone/>
+            </a:pPr>
+            <a:r>
+              <a:rPr lang="en-US" sz="680" spc="260" kern="0" dirty="0">
+                <a:solidFill>
+                  <a:srgbClr val="7AA8C9"/>
+                </a:solidFill>
+                <a:latin typeface="Arial" pitchFamily="34" charset="0"/>
+                <a:ea typeface="Arial" pitchFamily="34" charset="-122"/>
+                <a:cs typeface="Arial" pitchFamily="34" charset="-120"/>
+              </a:rPr>
+              <a:t>RECICLAR · EPA/BIOECOTEC · UNIÃO SOLUÇÕES · UEL   ·   AGOSTO 2026</a:t>
+            </a:r>
+            <a:endParaRPr lang="en-US" sz="680" dirty="0"/>
+          </a:p>
+        </p:txBody>
+      </p:sp>
+      <p:sp>
+        <p:nvSpPr>
+          <p:cNvPr id="20" name="Text 17"/>
           <p:cNvSpPr txBox="1"/>
           <p:nvPr/>
         </p:nvSpPr>
@@ -2572,8 +2611,8 @@
         </p:nvSpPr>
         <p:spPr>
           <a:xfrm>
-            <a:off x="457200" y="822960"/>
-            <a:ext cx="5120640" cy="700024"/>
+            <a:off x="457200" y="786384"/>
+            <a:ext cx="3108960" cy="807720"/>
           </a:xfrm>
           <a:prstGeom prst="rect">
             <a:avLst/>
@@ -2587,12 +2626,12 @@
           <a:p>
             <a:pPr indent="0" marL="0">
               <a:lnSpc>
-                <a:spcPts val="2756"/>
+                <a:spcPts val="3180"/>
               </a:lnSpc>
               <a:buNone/>
             </a:pPr>
             <a:r>
-              <a:rPr lang="en-US" sz="2600" spc="-110" kern="0" dirty="0">
+              <a:rPr lang="en-US" sz="3000" spc="-110" kern="0" dirty="0">
                 <a:solidFill>
                   <a:srgbClr val="143743"/>
                 </a:solidFill>
@@ -2600,19 +2639,19 @@
                 <a:ea typeface="Arial" pitchFamily="34" charset="-122"/>
                 <a:cs typeface="Arial" pitchFamily="34" charset="-120"/>
               </a:rPr>
-              <a:t>De 810 toneladas a um grupo</a:t>
-            </a:r>
-            <a:endParaRPr lang="en-US" sz="2600" dirty="0"/>
+              <a:t>De um reator</a:t>
+            </a:r>
+            <a:endParaRPr lang="en-US" sz="3000" dirty="0"/>
           </a:p>
           <a:p>
             <a:pPr indent="0" marL="0">
               <a:lnSpc>
-                <a:spcPts val="2756"/>
+                <a:spcPts val="3180"/>
               </a:lnSpc>
               <a:buNone/>
             </a:pPr>
             <a:r>
-              <a:rPr lang="en-US" sz="2600" spc="-110" kern="0" dirty="0">
+              <a:rPr lang="en-US" sz="3000" spc="-110" kern="0" dirty="0">
                 <a:solidFill>
                   <a:srgbClr val="143743"/>
                 </a:solidFill>
@@ -2620,9 +2659,9 @@
                 <a:ea typeface="Arial" pitchFamily="34" charset="-122"/>
                 <a:cs typeface="Arial" pitchFamily="34" charset="-120"/>
               </a:rPr>
-              <a:t>que cruza o zero.</a:t>
-            </a:r>
-            <a:endParaRPr lang="en-US" sz="2600" dirty="0"/>
+              <a:t>a uma rede.</a:t>
+            </a:r>
+            <a:endParaRPr lang="en-US" sz="3000" dirty="0"/>
           </a:p>
         </p:txBody>
       </p:sp>
@@ -2634,7 +2673,68 @@
         </p:nvSpPr>
         <p:spPr>
           <a:xfrm>
-            <a:off x="566928" y="3767328"/>
+            <a:off x="457200" y="3968496"/>
+            <a:ext cx="1828800" cy="155448"/>
+          </a:xfrm>
+          <a:prstGeom prst="rect">
+            <a:avLst/>
+          </a:prstGeom>
+          <a:noFill/>
+          <a:ln/>
+        </p:spPr>
+        <p:txBody>
+          <a:bodyPr wrap="square" lIns="0" tIns="0" rIns="0" bIns="0" rtlCol="0" anchor="ctr"/>
+          <a:lstStyle/>
+          <a:p>
+            <a:pPr algn="l" indent="0" marL="0">
+              <a:buNone/>
+            </a:pPr>
+            <a:r>
+              <a:rPr lang="en-US" sz="620" spc="260" kern="0" dirty="0">
+                <a:solidFill>
+                  <a:srgbClr val="7AA8C9"/>
+                </a:solidFill>
+                <a:latin typeface="Arial" pitchFamily="34" charset="0"/>
+                <a:ea typeface="Arial" pitchFamily="34" charset="-122"/>
+                <a:cs typeface="Arial" pitchFamily="34" charset="-120"/>
+              </a:rPr>
+              <a:t>REATOR PILOTO</a:t>
+            </a:r>
+            <a:endParaRPr lang="en-US" sz="620" dirty="0"/>
+          </a:p>
+        </p:txBody>
+      </p:sp>
+      <p:sp>
+        <p:nvSpPr>
+          <p:cNvPr id="5" name="Shape 3"/>
+          <p:cNvSpPr/>
+          <p:nvPr/>
+        </p:nvSpPr>
+        <p:spPr>
+          <a:xfrm>
+            <a:off x="457200" y="4133088"/>
+            <a:ext cx="1828800" cy="7315"/>
+          </a:xfrm>
+          <a:prstGeom prst="rect">
+            <a:avLst/>
+          </a:prstGeom>
+          <a:solidFill>
+            <a:srgbClr val="5B8AAE">
+              <a:alpha val="45000"/>
+            </a:srgbClr>
+          </a:solidFill>
+          <a:ln/>
+        </p:spPr>
+      </p:sp>
+      <p:sp>
+        <p:nvSpPr>
+          <p:cNvPr id="6" name="Text 4"/>
+          <p:cNvSpPr txBox="1"/>
+          <p:nvPr/>
+        </p:nvSpPr>
+        <p:spPr>
+          <a:xfrm>
+            <a:off x="457200" y="4206240"/>
             <a:ext cx="731520" cy="173736"/>
           </a:xfrm>
           <a:prstGeom prst="rect">
@@ -2667,14 +2767,14 @@
       </p:sp>
       <p:sp>
         <p:nvSpPr>
-          <p:cNvPr id="5" name="Text 3"/>
-          <p:cNvSpPr txBox="1"/>
-          <p:nvPr/>
-        </p:nvSpPr>
-        <p:spPr>
-          <a:xfrm>
-            <a:off x="566928" y="3950208"/>
-            <a:ext cx="1554480" cy="237744"/>
+          <p:cNvPr id="7" name="Text 5"/>
+          <p:cNvSpPr txBox="1"/>
+          <p:nvPr/>
+        </p:nvSpPr>
+        <p:spPr>
+          <a:xfrm>
+            <a:off x="457200" y="4389120"/>
+            <a:ext cx="1828800" cy="237744"/>
           </a:xfrm>
           <a:prstGeom prst="rect">
             <a:avLst/>
@@ -2706,14 +2806,14 @@
       </p:sp>
       <p:sp>
         <p:nvSpPr>
-          <p:cNvPr id="6" name="Text 4"/>
-          <p:cNvSpPr txBox="1"/>
-          <p:nvPr/>
-        </p:nvSpPr>
-        <p:spPr>
-          <a:xfrm>
-            <a:off x="566928" y="4187952"/>
-            <a:ext cx="1691640" cy="363220"/>
+          <p:cNvPr id="8" name="Text 6"/>
+          <p:cNvSpPr txBox="1"/>
+          <p:nvPr/>
+        </p:nvSpPr>
+        <p:spPr>
+          <a:xfrm>
+            <a:off x="457200" y="4553712"/>
+            <a:ext cx="1920240" cy="330200"/>
           </a:xfrm>
           <a:prstGeom prst="rect">
             <a:avLst/>
@@ -2729,7 +2829,7 @@
               <a:buNone/>
             </a:pPr>
             <a:r>
-              <a:rPr lang="en-US" sz="2200" spc="-200" kern="0" dirty="0">
+              <a:rPr lang="en-US" sz="2000" spc="-200" kern="0" dirty="0">
                 <a:solidFill>
                   <a:srgbClr val="5B8AAE"/>
                 </a:solidFill>
@@ -2739,58 +2839,80 @@
               </a:rPr>
               <a:t>810</a:t>
             </a:r>
-            <a:endParaRPr lang="en-US" sz="2200" dirty="0"/>
-          </a:p>
-        </p:txBody>
-      </p:sp>
-      <p:sp>
-        <p:nvSpPr>
-          <p:cNvPr id="7" name="Text 5"/>
-          <p:cNvSpPr txBox="1"/>
-          <p:nvPr/>
-        </p:nvSpPr>
-        <p:spPr>
-          <a:xfrm>
-            <a:off x="566928" y="4569460"/>
-            <a:ext cx="1691640" cy="155448"/>
-          </a:xfrm>
-          <a:prstGeom prst="rect">
-            <a:avLst/>
-          </a:prstGeom>
-          <a:noFill/>
-          <a:ln/>
-        </p:spPr>
-        <p:txBody>
-          <a:bodyPr wrap="square" lIns="0" tIns="0" rIns="0" bIns="0" rtlCol="0" anchor="ctr"/>
-          <a:lstStyle/>
-          <a:p>
-            <a:pPr algn="l" indent="0" marL="0">
-              <a:buNone/>
-            </a:pPr>
-            <a:r>
-              <a:rPr lang="en-US" sz="680" spc="260" kern="0" dirty="0">
-                <a:solidFill>
-                  <a:srgbClr val="5B8AAE"/>
-                </a:solidFill>
-                <a:latin typeface="Arial" pitchFamily="34" charset="0"/>
-                <a:ea typeface="Arial" pitchFamily="34" charset="-122"/>
-                <a:cs typeface="Arial" pitchFamily="34" charset="-120"/>
-              </a:rPr>
-              <a:t>T CHAR/ANO</a:t>
-            </a:r>
-            <a:endParaRPr lang="en-US" sz="680" dirty="0"/>
-          </a:p>
-        </p:txBody>
-      </p:sp>
-      <p:sp>
-        <p:nvSpPr>
-          <p:cNvPr id="8" name="Text 6"/>
-          <p:cNvSpPr txBox="1"/>
-          <p:nvPr/>
-        </p:nvSpPr>
-        <p:spPr>
-          <a:xfrm>
-            <a:off x="2724912" y="3474720"/>
+            <a:endParaRPr lang="en-US" sz="2000" dirty="0"/>
+          </a:p>
+        </p:txBody>
+      </p:sp>
+      <p:sp>
+        <p:nvSpPr>
+          <p:cNvPr id="9" name="Text 7"/>
+          <p:cNvSpPr txBox="1"/>
+          <p:nvPr/>
+        </p:nvSpPr>
+        <p:spPr>
+          <a:xfrm>
+            <a:off x="2651760" y="3968496"/>
+            <a:ext cx="1828800" cy="155448"/>
+          </a:xfrm>
+          <a:prstGeom prst="rect">
+            <a:avLst/>
+          </a:prstGeom>
+          <a:noFill/>
+          <a:ln/>
+        </p:spPr>
+        <p:txBody>
+          <a:bodyPr wrap="square" lIns="0" tIns="0" rIns="0" bIns="0" rtlCol="0" anchor="ctr"/>
+          <a:lstStyle/>
+          <a:p>
+            <a:pPr algn="l" indent="0" marL="0">
+              <a:buNone/>
+            </a:pPr>
+            <a:r>
+              <a:rPr lang="en-US" sz="620" spc="260" kern="0" dirty="0">
+                <a:solidFill>
+                  <a:srgbClr val="7AA8C9"/>
+                </a:solidFill>
+                <a:latin typeface="Arial" pitchFamily="34" charset="0"/>
+                <a:ea typeface="Arial" pitchFamily="34" charset="-122"/>
+                <a:cs typeface="Arial" pitchFamily="34" charset="-120"/>
+              </a:rPr>
+              <a:t>PRIMEIRO MÓDULO</a:t>
+            </a:r>
+            <a:endParaRPr lang="en-US" sz="620" dirty="0"/>
+          </a:p>
+        </p:txBody>
+      </p:sp>
+      <p:sp>
+        <p:nvSpPr>
+          <p:cNvPr id="10" name="Shape 8"/>
+          <p:cNvSpPr/>
+          <p:nvPr/>
+        </p:nvSpPr>
+        <p:spPr>
+          <a:xfrm>
+            <a:off x="2651760" y="4133088"/>
+            <a:ext cx="1828800" cy="7315"/>
+          </a:xfrm>
+          <a:prstGeom prst="rect">
+            <a:avLst/>
+          </a:prstGeom>
+          <a:solidFill>
+            <a:srgbClr val="5B8AAE">
+              <a:alpha val="45000"/>
+            </a:srgbClr>
+          </a:solidFill>
+          <a:ln/>
+        </p:spPr>
+      </p:sp>
+      <p:sp>
+        <p:nvSpPr>
+          <p:cNvPr id="11" name="Text 9"/>
+          <p:cNvSpPr txBox="1"/>
+          <p:nvPr/>
+        </p:nvSpPr>
+        <p:spPr>
+          <a:xfrm>
+            <a:off x="2651760" y="4206240"/>
             <a:ext cx="731520" cy="173736"/>
           </a:xfrm>
           <a:prstGeom prst="rect">
@@ -2823,14 +2945,14 @@
       </p:sp>
       <p:sp>
         <p:nvSpPr>
-          <p:cNvPr id="9" name="Text 7"/>
-          <p:cNvSpPr txBox="1"/>
-          <p:nvPr/>
-        </p:nvSpPr>
-        <p:spPr>
-          <a:xfrm>
-            <a:off x="2724912" y="3657600"/>
-            <a:ext cx="1554480" cy="237744"/>
+          <p:cNvPr id="12" name="Text 10"/>
+          <p:cNvSpPr txBox="1"/>
+          <p:nvPr/>
+        </p:nvSpPr>
+        <p:spPr>
+          <a:xfrm>
+            <a:off x="2651760" y="4389120"/>
+            <a:ext cx="1828800" cy="237744"/>
           </a:xfrm>
           <a:prstGeom prst="rect">
             <a:avLst/>
@@ -2862,14 +2984,14 @@
       </p:sp>
       <p:sp>
         <p:nvSpPr>
-          <p:cNvPr id="10" name="Text 8"/>
-          <p:cNvSpPr txBox="1"/>
-          <p:nvPr/>
-        </p:nvSpPr>
-        <p:spPr>
-          <a:xfrm>
-            <a:off x="2724912" y="3895344"/>
-            <a:ext cx="1691640" cy="429260"/>
+          <p:cNvPr id="13" name="Text 11"/>
+          <p:cNvSpPr txBox="1"/>
+          <p:nvPr/>
+        </p:nvSpPr>
+        <p:spPr>
+          <a:xfrm>
+            <a:off x="2651760" y="4553712"/>
+            <a:ext cx="1920240" cy="396240"/>
           </a:xfrm>
           <a:prstGeom prst="rect">
             <a:avLst/>
@@ -2885,7 +3007,7 @@
               <a:buNone/>
             </a:pPr>
             <a:r>
-              <a:rPr lang="en-US" sz="2600" spc="-200" kern="0" dirty="0">
+              <a:rPr lang="en-US" sz="2400" spc="-200" kern="0" dirty="0">
                 <a:solidFill>
                   <a:srgbClr val="175D5C"/>
                 </a:solidFill>
@@ -2895,58 +3017,80 @@
               </a:rPr>
               <a:t>4,7 K</a:t>
             </a:r>
-            <a:endParaRPr lang="en-US" sz="2600" dirty="0"/>
-          </a:p>
-        </p:txBody>
-      </p:sp>
-      <p:sp>
-        <p:nvSpPr>
-          <p:cNvPr id="11" name="Text 9"/>
-          <p:cNvSpPr txBox="1"/>
-          <p:nvPr/>
-        </p:nvSpPr>
-        <p:spPr>
-          <a:xfrm>
-            <a:off x="2724912" y="4342892"/>
-            <a:ext cx="1691640" cy="155448"/>
-          </a:xfrm>
-          <a:prstGeom prst="rect">
-            <a:avLst/>
-          </a:prstGeom>
-          <a:noFill/>
-          <a:ln/>
-        </p:spPr>
-        <p:txBody>
-          <a:bodyPr wrap="square" lIns="0" tIns="0" rIns="0" bIns="0" rtlCol="0" anchor="ctr"/>
-          <a:lstStyle/>
-          <a:p>
-            <a:pPr algn="l" indent="0" marL="0">
-              <a:buNone/>
-            </a:pPr>
-            <a:r>
-              <a:rPr lang="en-US" sz="680" spc="260" kern="0" dirty="0">
-                <a:solidFill>
-                  <a:srgbClr val="5B8AAE"/>
-                </a:solidFill>
-                <a:latin typeface="Arial" pitchFamily="34" charset="0"/>
-                <a:ea typeface="Arial" pitchFamily="34" charset="-122"/>
-                <a:cs typeface="Arial" pitchFamily="34" charset="-120"/>
-              </a:rPr>
-              <a:t>T CHAR/ANO</a:t>
-            </a:r>
-            <a:endParaRPr lang="en-US" sz="680" dirty="0"/>
-          </a:p>
-        </p:txBody>
-      </p:sp>
-      <p:sp>
-        <p:nvSpPr>
-          <p:cNvPr id="12" name="Text 10"/>
-          <p:cNvSpPr txBox="1"/>
-          <p:nvPr/>
-        </p:nvSpPr>
-        <p:spPr>
-          <a:xfrm>
-            <a:off x="5138928" y="2523744"/>
+            <a:endParaRPr lang="en-US" sz="2400" dirty="0"/>
+          </a:p>
+        </p:txBody>
+      </p:sp>
+      <p:sp>
+        <p:nvSpPr>
+          <p:cNvPr id="14" name="Text 12"/>
+          <p:cNvSpPr txBox="1"/>
+          <p:nvPr/>
+        </p:nvSpPr>
+        <p:spPr>
+          <a:xfrm>
+            <a:off x="4846320" y="3968496"/>
+            <a:ext cx="1828800" cy="155448"/>
+          </a:xfrm>
+          <a:prstGeom prst="rect">
+            <a:avLst/>
+          </a:prstGeom>
+          <a:noFill/>
+          <a:ln/>
+        </p:spPr>
+        <p:txBody>
+          <a:bodyPr wrap="square" lIns="0" tIns="0" rIns="0" bIns="0" rtlCol="0" anchor="ctr"/>
+          <a:lstStyle/>
+          <a:p>
+            <a:pPr algn="l" indent="0" marL="0">
+              <a:buNone/>
+            </a:pPr>
+            <a:r>
+              <a:rPr lang="en-US" sz="620" spc="260" kern="0" dirty="0">
+                <a:solidFill>
+                  <a:srgbClr val="7AA8C9"/>
+                </a:solidFill>
+                <a:latin typeface="Arial" pitchFamily="34" charset="0"/>
+                <a:ea typeface="Arial" pitchFamily="34" charset="-122"/>
+                <a:cs typeface="Arial" pitchFamily="34" charset="-120"/>
+              </a:rPr>
+              <a:t>PLANTA INDUSTRIAL</a:t>
+            </a:r>
+            <a:endParaRPr lang="en-US" sz="620" dirty="0"/>
+          </a:p>
+        </p:txBody>
+      </p:sp>
+      <p:sp>
+        <p:nvSpPr>
+          <p:cNvPr id="15" name="Shape 13"/>
+          <p:cNvSpPr/>
+          <p:nvPr/>
+        </p:nvSpPr>
+        <p:spPr>
+          <a:xfrm>
+            <a:off x="4846320" y="4133088"/>
+            <a:ext cx="1828800" cy="7315"/>
+          </a:xfrm>
+          <a:prstGeom prst="rect">
+            <a:avLst/>
+          </a:prstGeom>
+          <a:solidFill>
+            <a:srgbClr val="5B8AAE">
+              <a:alpha val="45000"/>
+            </a:srgbClr>
+          </a:solidFill>
+          <a:ln/>
+        </p:spPr>
+      </p:sp>
+      <p:sp>
+        <p:nvSpPr>
+          <p:cNvPr id="16" name="Text 14"/>
+          <p:cNvSpPr txBox="1"/>
+          <p:nvPr/>
+        </p:nvSpPr>
+        <p:spPr>
+          <a:xfrm>
+            <a:off x="4846320" y="4206240"/>
             <a:ext cx="731520" cy="173736"/>
           </a:xfrm>
           <a:prstGeom prst="rect">
@@ -2979,14 +3123,14 @@
       </p:sp>
       <p:sp>
         <p:nvSpPr>
-          <p:cNvPr id="13" name="Text 11"/>
-          <p:cNvSpPr txBox="1"/>
-          <p:nvPr/>
-        </p:nvSpPr>
-        <p:spPr>
-          <a:xfrm>
-            <a:off x="5138928" y="2706624"/>
-            <a:ext cx="1554480" cy="237744"/>
+          <p:cNvPr id="17" name="Text 15"/>
+          <p:cNvSpPr txBox="1"/>
+          <p:nvPr/>
+        </p:nvSpPr>
+        <p:spPr>
+          <a:xfrm>
+            <a:off x="4846320" y="4389120"/>
+            <a:ext cx="1828800" cy="237744"/>
           </a:xfrm>
           <a:prstGeom prst="rect">
             <a:avLst/>
@@ -3018,14 +3162,14 @@
       </p:sp>
       <p:sp>
         <p:nvSpPr>
-          <p:cNvPr id="14" name="Text 12"/>
-          <p:cNvSpPr txBox="1"/>
-          <p:nvPr/>
-        </p:nvSpPr>
-        <p:spPr>
-          <a:xfrm>
-            <a:off x="5138928" y="2944368"/>
-            <a:ext cx="1691640" cy="495300"/>
+          <p:cNvPr id="18" name="Text 16"/>
+          <p:cNvSpPr txBox="1"/>
+          <p:nvPr/>
+        </p:nvSpPr>
+        <p:spPr>
+          <a:xfrm>
+            <a:off x="4846320" y="4553712"/>
+            <a:ext cx="1920240" cy="462280"/>
           </a:xfrm>
           <a:prstGeom prst="rect">
             <a:avLst/>
@@ -3041,7 +3185,7 @@
               <a:buNone/>
             </a:pPr>
             <a:r>
-              <a:rPr lang="en-US" sz="3000" spc="-200" kern="0" dirty="0">
+              <a:rPr lang="en-US" sz="2800" spc="-200" kern="0" dirty="0">
                 <a:solidFill>
                   <a:srgbClr val="1F7370"/>
                 </a:solidFill>
@@ -3051,58 +3195,80 @@
               </a:rPr>
               <a:t>20 K</a:t>
             </a:r>
-            <a:endParaRPr lang="en-US" sz="3000" dirty="0"/>
-          </a:p>
-        </p:txBody>
-      </p:sp>
-      <p:sp>
-        <p:nvSpPr>
-          <p:cNvPr id="15" name="Text 13"/>
-          <p:cNvSpPr txBox="1"/>
-          <p:nvPr/>
-        </p:nvSpPr>
-        <p:spPr>
-          <a:xfrm>
-            <a:off x="5138928" y="3457956"/>
-            <a:ext cx="1691640" cy="155448"/>
-          </a:xfrm>
-          <a:prstGeom prst="rect">
-            <a:avLst/>
-          </a:prstGeom>
-          <a:noFill/>
-          <a:ln/>
-        </p:spPr>
-        <p:txBody>
-          <a:bodyPr wrap="square" lIns="0" tIns="0" rIns="0" bIns="0" rtlCol="0" anchor="ctr"/>
-          <a:lstStyle/>
-          <a:p>
-            <a:pPr algn="l" indent="0" marL="0">
-              <a:buNone/>
-            </a:pPr>
-            <a:r>
-              <a:rPr lang="en-US" sz="680" spc="260" kern="0" dirty="0">
-                <a:solidFill>
-                  <a:srgbClr val="5B8AAE"/>
-                </a:solidFill>
-                <a:latin typeface="Arial" pitchFamily="34" charset="0"/>
-                <a:ea typeface="Arial" pitchFamily="34" charset="-122"/>
-                <a:cs typeface="Arial" pitchFamily="34" charset="-120"/>
-              </a:rPr>
-              <a:t>T BIOMASSA/ANO</a:t>
-            </a:r>
-            <a:endParaRPr lang="en-US" sz="680" dirty="0"/>
-          </a:p>
-        </p:txBody>
-      </p:sp>
-      <p:sp>
-        <p:nvSpPr>
-          <p:cNvPr id="16" name="Text 14"/>
-          <p:cNvSpPr txBox="1"/>
-          <p:nvPr/>
-        </p:nvSpPr>
-        <p:spPr>
-          <a:xfrm>
-            <a:off x="7406640" y="1243584"/>
+            <a:endParaRPr lang="en-US" sz="2800" dirty="0"/>
+          </a:p>
+        </p:txBody>
+      </p:sp>
+      <p:sp>
+        <p:nvSpPr>
+          <p:cNvPr id="19" name="Text 17"/>
+          <p:cNvSpPr txBox="1"/>
+          <p:nvPr/>
+        </p:nvSpPr>
+        <p:spPr>
+          <a:xfrm>
+            <a:off x="7040880" y="3968496"/>
+            <a:ext cx="1828800" cy="155448"/>
+          </a:xfrm>
+          <a:prstGeom prst="rect">
+            <a:avLst/>
+          </a:prstGeom>
+          <a:noFill/>
+          <a:ln/>
+        </p:spPr>
+        <p:txBody>
+          <a:bodyPr wrap="square" lIns="0" tIns="0" rIns="0" bIns="0" rtlCol="0" anchor="ctr"/>
+          <a:lstStyle/>
+          <a:p>
+            <a:pPr algn="l" indent="0" marL="0">
+              <a:buNone/>
+            </a:pPr>
+            <a:r>
+              <a:rPr lang="en-US" sz="620" spc="260" kern="0" dirty="0">
+                <a:solidFill>
+                  <a:srgbClr val="1F7370"/>
+                </a:solidFill>
+                <a:latin typeface="Arial" pitchFamily="34" charset="0"/>
+                <a:ea typeface="Arial" pitchFamily="34" charset="-122"/>
+                <a:cs typeface="Arial" pitchFamily="34" charset="-120"/>
+              </a:rPr>
+              <a:t>A REDE COMEÇA</a:t>
+            </a:r>
+            <a:endParaRPr lang="en-US" sz="620" dirty="0"/>
+          </a:p>
+        </p:txBody>
+      </p:sp>
+      <p:sp>
+        <p:nvSpPr>
+          <p:cNvPr id="20" name="Shape 18"/>
+          <p:cNvSpPr/>
+          <p:nvPr/>
+        </p:nvSpPr>
+        <p:spPr>
+          <a:xfrm>
+            <a:off x="7040880" y="4133088"/>
+            <a:ext cx="1828800" cy="7315"/>
+          </a:xfrm>
+          <a:prstGeom prst="rect">
+            <a:avLst/>
+          </a:prstGeom>
+          <a:solidFill>
+            <a:srgbClr val="1F7370">
+              <a:alpha val="45000"/>
+            </a:srgbClr>
+          </a:solidFill>
+          <a:ln/>
+        </p:spPr>
+      </p:sp>
+      <p:sp>
+        <p:nvSpPr>
+          <p:cNvPr id="21" name="Text 19"/>
+          <p:cNvSpPr txBox="1"/>
+          <p:nvPr/>
+        </p:nvSpPr>
+        <p:spPr>
+          <a:xfrm>
+            <a:off x="7040880" y="4206240"/>
             <a:ext cx="731520" cy="173736"/>
           </a:xfrm>
           <a:prstGeom prst="rect">
@@ -3135,14 +3301,14 @@
       </p:sp>
       <p:sp>
         <p:nvSpPr>
-          <p:cNvPr id="17" name="Text 15"/>
-          <p:cNvSpPr txBox="1"/>
-          <p:nvPr/>
-        </p:nvSpPr>
-        <p:spPr>
-          <a:xfrm>
-            <a:off x="7406640" y="1426464"/>
-            <a:ext cx="1554480" cy="237744"/>
+          <p:cNvPr id="22" name="Text 20"/>
+          <p:cNvSpPr txBox="1"/>
+          <p:nvPr/>
+        </p:nvSpPr>
+        <p:spPr>
+          <a:xfrm>
+            <a:off x="7040880" y="4389120"/>
+            <a:ext cx="1828800" cy="237744"/>
           </a:xfrm>
           <a:prstGeom prst="rect">
             <a:avLst/>
@@ -3174,14 +3340,14 @@
       </p:sp>
       <p:sp>
         <p:nvSpPr>
-          <p:cNvPr id="18" name="Text 16"/>
-          <p:cNvSpPr txBox="1"/>
-          <p:nvPr/>
-        </p:nvSpPr>
-        <p:spPr>
-          <a:xfrm>
-            <a:off x="7406640" y="1664208"/>
-            <a:ext cx="1691640" cy="594360"/>
+          <p:cNvPr id="23" name="Text 21"/>
+          <p:cNvSpPr txBox="1"/>
+          <p:nvPr/>
+        </p:nvSpPr>
+        <p:spPr>
+          <a:xfrm>
+            <a:off x="7040880" y="4553712"/>
+            <a:ext cx="1920240" cy="561340"/>
           </a:xfrm>
           <a:prstGeom prst="rect">
             <a:avLst/>
@@ -3197,7 +3363,7 @@
               <a:buNone/>
             </a:pPr>
             <a:r>
-              <a:rPr lang="en-US" sz="3600" spc="-200" kern="0" dirty="0">
+              <a:rPr lang="en-US" sz="3400" spc="-200" kern="0" dirty="0">
                 <a:solidFill>
                   <a:srgbClr val="143743"/>
                 </a:solidFill>
@@ -3207,20 +3373,20 @@
               </a:rPr>
               <a:t>40 K</a:t>
             </a:r>
-            <a:endParaRPr lang="en-US" sz="3600" dirty="0"/>
-          </a:p>
-        </p:txBody>
-      </p:sp>
-      <p:sp>
-        <p:nvSpPr>
-          <p:cNvPr id="19" name="Text 17"/>
-          <p:cNvSpPr txBox="1"/>
-          <p:nvPr/>
-        </p:nvSpPr>
-        <p:spPr>
-          <a:xfrm>
-            <a:off x="7406640" y="2276856"/>
-            <a:ext cx="1691640" cy="155448"/>
+            <a:endParaRPr lang="en-US" sz="3400" dirty="0"/>
+          </a:p>
+        </p:txBody>
+      </p:sp>
+      <p:sp>
+        <p:nvSpPr>
+          <p:cNvPr id="24" name="Text 22"/>
+          <p:cNvSpPr txBox="1"/>
+          <p:nvPr/>
+        </p:nvSpPr>
+        <p:spPr>
+          <a:xfrm>
+            <a:off x="457200" y="1792224"/>
+            <a:ext cx="4937760" cy="155448"/>
           </a:xfrm>
           <a:prstGeom prst="rect">
             <a:avLst/>
@@ -3238,93 +3404,54 @@
             <a:r>
               <a:rPr lang="en-US" sz="680" spc="260" kern="0" dirty="0">
                 <a:solidFill>
+                  <a:srgbClr val="1F7370"/>
+                </a:solidFill>
+                <a:latin typeface="Arial" pitchFamily="34" charset="0"/>
+                <a:ea typeface="Arial" pitchFamily="34" charset="-122"/>
+                <a:cs typeface="Arial" pitchFamily="34" charset="-120"/>
+              </a:rPr>
+              <a:t>O BREAKEVEN DO GRUPO FICA EM ~13.000 T/ANO — POR ISSO A SEGUNDA PLANTA NÃO É RÉPLICA, É O DOBRO</a:t>
+            </a:r>
+            <a:endParaRPr lang="en-US" sz="680" dirty="0"/>
+          </a:p>
+        </p:txBody>
+      </p:sp>
+      <p:sp>
+        <p:nvSpPr>
+          <p:cNvPr id="25" name="Text 23"/>
+          <p:cNvSpPr txBox="1"/>
+          <p:nvPr/>
+        </p:nvSpPr>
+        <p:spPr>
+          <a:xfrm>
+            <a:off x="457200" y="1975104"/>
+            <a:ext cx="4937760" cy="155448"/>
+          </a:xfrm>
+          <a:prstGeom prst="rect">
+            <a:avLst/>
+          </a:prstGeom>
+          <a:noFill/>
+          <a:ln/>
+        </p:spPr>
+        <p:txBody>
+          <a:bodyPr wrap="square" lIns="0" tIns="0" rIns="0" bIns="0" rtlCol="0" anchor="ctr"/>
+          <a:lstStyle/>
+          <a:p>
+            <a:pPr algn="l" indent="0" marL="0">
+              <a:buNone/>
+            </a:pPr>
+            <a:r>
+              <a:rPr lang="en-US" sz="650" spc="260" kern="0" dirty="0">
+                <a:solidFill>
                   <a:srgbClr val="5B8AAE"/>
                 </a:solidFill>
                 <a:latin typeface="Arial" pitchFamily="34" charset="0"/>
                 <a:ea typeface="Arial" pitchFamily="34" charset="-122"/>
                 <a:cs typeface="Arial" pitchFamily="34" charset="-120"/>
               </a:rPr>
-              <a:t>T BIOMASSA/ANO</a:t>
-            </a:r>
-            <a:endParaRPr lang="en-US" sz="680" dirty="0"/>
-          </a:p>
-        </p:txBody>
-      </p:sp>
-      <p:sp>
-        <p:nvSpPr>
-          <p:cNvPr id="20" name="Text 18"/>
-          <p:cNvSpPr txBox="1"/>
-          <p:nvPr/>
-        </p:nvSpPr>
-        <p:spPr>
-          <a:xfrm>
-            <a:off x="457200" y="4919472"/>
-            <a:ext cx="6766560" cy="155448"/>
-          </a:xfrm>
-          <a:prstGeom prst="rect">
-            <a:avLst/>
-          </a:prstGeom>
-          <a:noFill/>
-          <a:ln/>
-        </p:spPr>
-        <p:txBody>
-          <a:bodyPr wrap="square" lIns="0" tIns="0" rIns="0" bIns="0" rtlCol="0" anchor="ctr"/>
-          <a:lstStyle/>
-          <a:p>
-            <a:pPr algn="l" indent="0" marL="0">
-              <a:buNone/>
-            </a:pPr>
-            <a:r>
-              <a:rPr lang="en-US" sz="750" spc="260" kern="0" dirty="0">
-                <a:solidFill>
-                  <a:srgbClr val="1F7370"/>
-                </a:solidFill>
-                <a:latin typeface="Arial" pitchFamily="34" charset="0"/>
-                <a:ea typeface="Arial" pitchFamily="34" charset="-122"/>
-                <a:cs typeface="Arial" pitchFamily="34" charset="-120"/>
-              </a:rPr>
-              <a:t>O BREAKEVEN DO GRUPO FICA EM ~13 MIL T/ANO — A SEGUNDA PLANTA NÃO É RÉPLICA, É O DOBRO</a:t>
-            </a:r>
-            <a:endParaRPr lang="en-US" sz="750" dirty="0"/>
-          </a:p>
-        </p:txBody>
-      </p:sp>
-      <p:sp>
-        <p:nvSpPr>
-          <p:cNvPr id="21" name="Text 19"/>
-          <p:cNvSpPr txBox="1"/>
-          <p:nvPr/>
-        </p:nvSpPr>
-        <p:spPr>
-          <a:xfrm rot="5400000">
-            <a:off x="8613648" y="384048"/>
-            <a:ext cx="2377440" cy="164592"/>
-          </a:xfrm>
-          <a:prstGeom prst="rect">
-            <a:avLst/>
-          </a:prstGeom>
-          <a:noFill/>
-          <a:ln/>
-        </p:spPr>
-        <p:txBody>
-          <a:bodyPr wrap="square" lIns="0" tIns="0" rIns="0" bIns="0" rtlCol="0" anchor="ctr"/>
-          <a:lstStyle/>
-          <a:p>
-            <a:pPr indent="0" marL="0">
-              <a:buNone/>
-            </a:pPr>
-            <a:r>
-              <a:rPr lang="en-US" sz="680" spc="300" kern="0" dirty="0">
-                <a:solidFill>
-                  <a:srgbClr val="7AA8C9"/>
-                </a:solidFill>
-                <a:latin typeface="Arial" pitchFamily="34" charset="0"/>
-                <a:ea typeface="Arial" pitchFamily="34" charset="-122"/>
-                <a:cs typeface="Arial" pitchFamily="34" charset="-120"/>
-              </a:rPr>
-              <a:t>BNDES FUNDO CLIMA · SUDENE · FNE VERDE</a:t>
-            </a:r>
-            <a:endParaRPr lang="en-US" sz="680" dirty="0"/>
+              <a:t>BNDES FUNDO CLIMA 6,5% + 1,3% A.A., CARÊNCIA DE 60 MESES · SUDENE 75% IRPJ · FNE VERDE</a:t>
+            </a:r>
+            <a:endParaRPr lang="en-US" sz="650" dirty="0"/>
           </a:p>
         </p:txBody>
       </p:sp>
@@ -5247,7 +5374,7 @@
         </p:nvSpPr>
         <p:spPr>
           <a:xfrm>
-            <a:off x="457200" y="841248"/>
+            <a:off x="457200" y="786384"/>
             <a:ext cx="5120640" cy="861568"/>
           </a:xfrm>
           <a:prstGeom prst="rect">
@@ -6142,6 +6269,45 @@
       <p:sp>
         <p:nvSpPr>
           <p:cNvPr id="27" name="Text 25"/>
+          <p:cNvSpPr txBox="1"/>
+          <p:nvPr/>
+        </p:nvSpPr>
+        <p:spPr>
+          <a:xfrm>
+            <a:off x="457200" y="4315968"/>
+            <a:ext cx="4937760" cy="155448"/>
+          </a:xfrm>
+          <a:prstGeom prst="rect">
+            <a:avLst/>
+          </a:prstGeom>
+          <a:noFill/>
+          <a:ln/>
+        </p:spPr>
+        <p:txBody>
+          <a:bodyPr wrap="square" lIns="0" tIns="0" rIns="0" bIns="0" rtlCol="0" anchor="ctr"/>
+          <a:lstStyle/>
+          <a:p>
+            <a:pPr algn="l" indent="0" marL="0">
+              <a:buNone/>
+            </a:pPr>
+            <a:r>
+              <a:rPr lang="en-US" sz="680" spc="260" kern="0" dirty="0">
+                <a:solidFill>
+                  <a:srgbClr val="1F7370"/>
+                </a:solidFill>
+                <a:latin typeface="Arial" pitchFamily="34" charset="0"/>
+                <a:ea typeface="Arial" pitchFamily="34" charset="-122"/>
+                <a:cs typeface="Arial" pitchFamily="34" charset="-120"/>
+              </a:rPr>
+              <a:t>OS CINCO GATES FECHAM A INCERTEZA; O CAPITAL SEGUE CADA UM DELES</a:t>
+            </a:r>
+            <a:endParaRPr lang="en-US" sz="680" dirty="0"/>
+          </a:p>
+        </p:txBody>
+      </p:sp>
+      <p:sp>
+        <p:nvSpPr>
+          <p:cNvPr id="28" name="Text 26"/>
           <p:cNvSpPr txBox="1"/>
           <p:nvPr/>
         </p:nvSpPr>
@@ -6264,8 +6430,8 @@
         </p:nvSpPr>
         <p:spPr>
           <a:xfrm>
-            <a:off x="457200" y="841248"/>
-            <a:ext cx="5852160" cy="700024"/>
+            <a:off x="457200" y="786384"/>
+            <a:ext cx="4937760" cy="807720"/>
           </a:xfrm>
           <a:prstGeom prst="rect">
             <a:avLst/>
@@ -6279,12 +6445,12 @@
           <a:p>
             <a:pPr indent="0" marL="0">
               <a:lnSpc>
-                <a:spcPts val="2756"/>
+                <a:spcPts val="3180"/>
               </a:lnSpc>
               <a:buNone/>
             </a:pPr>
             <a:r>
-              <a:rPr lang="en-US" sz="2600" spc="-110" kern="0" dirty="0">
+              <a:rPr lang="en-US" sz="3000" spc="-110" kern="0" dirty="0">
                 <a:solidFill>
                   <a:srgbClr val="143743"/>
                 </a:solidFill>
@@ -6292,19 +6458,19 @@
                 <a:ea typeface="Arial" pitchFamily="34" charset="-122"/>
                 <a:cs typeface="Arial" pitchFamily="34" charset="-120"/>
               </a:rPr>
-              <a:t>Remoção durável é o mercado</a:t>
-            </a:r>
-            <a:endParaRPr lang="en-US" sz="2600" dirty="0"/>
+              <a:t>A oferta é o gargalo.</a:t>
+            </a:r>
+            <a:endParaRPr lang="en-US" sz="3000" dirty="0"/>
           </a:p>
           <a:p>
             <a:pPr indent="0" marL="0">
               <a:lnSpc>
-                <a:spcPts val="2756"/>
+                <a:spcPts val="3180"/>
               </a:lnSpc>
               <a:buNone/>
             </a:pPr>
             <a:r>
-              <a:rPr lang="en-US" sz="2600" spc="-110" kern="0" dirty="0">
+              <a:rPr lang="en-US" sz="3000" spc="-110" kern="0" dirty="0">
                 <a:solidFill>
                   <a:srgbClr val="143743"/>
                 </a:solidFill>
@@ -6312,9 +6478,9 @@
                 <a:ea typeface="Arial" pitchFamily="34" charset="-122"/>
                 <a:cs typeface="Arial" pitchFamily="34" charset="-120"/>
               </a:rPr>
-              <a:t>com a demanda travada pela oferta.</a:t>
-            </a:r>
-            <a:endParaRPr lang="en-US" sz="2600" dirty="0"/>
+              <a:t>Não a demanda.</a:t>
+            </a:r>
+            <a:endParaRPr lang="en-US" sz="3000" dirty="0"/>
           </a:p>
         </p:txBody>
       </p:sp>
@@ -6326,8 +6492,47 @@
         </p:nvSpPr>
         <p:spPr>
           <a:xfrm>
-            <a:off x="384048" y="1645920"/>
-            <a:ext cx="2926080" cy="1816100"/>
+            <a:off x="457200" y="1810512"/>
+            <a:ext cx="5486400" cy="155448"/>
+          </a:xfrm>
+          <a:prstGeom prst="rect">
+            <a:avLst/>
+          </a:prstGeom>
+          <a:noFill/>
+          <a:ln/>
+        </p:spPr>
+        <p:txBody>
+          <a:bodyPr wrap="square" lIns="0" tIns="0" rIns="0" bIns="0" rtlCol="0" anchor="ctr"/>
+          <a:lstStyle/>
+          <a:p>
+            <a:pPr algn="l" indent="0" marL="0">
+              <a:buNone/>
+            </a:pPr>
+            <a:r>
+              <a:rPr lang="en-US" sz="750" spc="260" kern="0" dirty="0">
+                <a:solidFill>
+                  <a:srgbClr val="5B8AAE"/>
+                </a:solidFill>
+                <a:latin typeface="Arial" pitchFamily="34" charset="0"/>
+                <a:ea typeface="Arial" pitchFamily="34" charset="-122"/>
+                <a:cs typeface="Arial" pitchFamily="34" charset="-120"/>
+              </a:rPr>
+              <a:t>100 MT/ANO · DEMANDA PROJETADA PARA 2030</a:t>
+            </a:r>
+            <a:endParaRPr lang="en-US" sz="750" dirty="0"/>
+          </a:p>
+        </p:txBody>
+      </p:sp>
+      <p:sp>
+        <p:nvSpPr>
+          <p:cNvPr id="5" name="Text 3"/>
+          <p:cNvSpPr txBox="1"/>
+          <p:nvPr/>
+        </p:nvSpPr>
+        <p:spPr>
+          <a:xfrm>
+            <a:off x="6583680" y="1371600"/>
+            <a:ext cx="2103120" cy="891540"/>
           </a:xfrm>
           <a:prstGeom prst="rect">
             <a:avLst/>
@@ -6339,11 +6544,89 @@
           <a:bodyPr wrap="square" lIns="0" tIns="0" rIns="0" bIns="0" rtlCol="0" anchor="t"/>
           <a:lstStyle/>
           <a:p>
-            <a:pPr algn="l" indent="0" marL="0">
-              <a:buNone/>
-            </a:pPr>
-            <a:r>
-              <a:rPr lang="en-US" sz="11000" spc="-400" kern="0" dirty="0">
+            <a:pPr algn="r" indent="0" marL="0">
+              <a:buNone/>
+            </a:pPr>
+            <a:r>
+              <a:rPr lang="en-US" sz="5400" spc="-200" kern="0" dirty="0">
+                <a:solidFill>
+                  <a:srgbClr val="175D5C"/>
+                </a:solidFill>
+                <a:latin typeface="Arial" pitchFamily="34" charset="0"/>
+                <a:ea typeface="Arial" pitchFamily="34" charset="-122"/>
+                <a:cs typeface="Arial" pitchFamily="34" charset="-120"/>
+              </a:rPr>
+              <a:t>67×</a:t>
+            </a:r>
+            <a:endParaRPr lang="en-US" sz="5400" dirty="0"/>
+          </a:p>
+        </p:txBody>
+      </p:sp>
+      <p:sp>
+        <p:nvSpPr>
+          <p:cNvPr id="6" name="Text 4"/>
+          <p:cNvSpPr txBox="1"/>
+          <p:nvPr/>
+        </p:nvSpPr>
+        <p:spPr>
+          <a:xfrm>
+            <a:off x="6035040" y="2231136"/>
+            <a:ext cx="2651760" cy="155448"/>
+          </a:xfrm>
+          <a:prstGeom prst="rect">
+            <a:avLst/>
+          </a:prstGeom>
+          <a:noFill/>
+          <a:ln/>
+        </p:spPr>
+        <p:txBody>
+          <a:bodyPr wrap="square" lIns="0" tIns="0" rIns="0" bIns="0" rtlCol="0" anchor="ctr"/>
+          <a:lstStyle/>
+          <a:p>
+            <a:pPr algn="r" indent="0" marL="0">
+              <a:buNone/>
+            </a:pPr>
+            <a:r>
+              <a:rPr lang="en-US" sz="750" spc="260" kern="0" dirty="0">
+                <a:solidFill>
+                  <a:srgbClr val="1F7370"/>
+                </a:solidFill>
+                <a:latin typeface="Arial" pitchFamily="34" charset="0"/>
+                <a:ea typeface="Arial" pitchFamily="34" charset="-122"/>
+                <a:cs typeface="Arial" pitchFamily="34" charset="-120"/>
+              </a:rPr>
+              <a:t>ENTRE ENTREGAR E PRECISAR</a:t>
+            </a:r>
+            <a:endParaRPr lang="en-US" sz="750" dirty="0"/>
+          </a:p>
+        </p:txBody>
+      </p:sp>
+      <p:sp>
+        <p:nvSpPr>
+          <p:cNvPr id="7" name="Text 5"/>
+          <p:cNvSpPr txBox="1"/>
+          <p:nvPr/>
+        </p:nvSpPr>
+        <p:spPr>
+          <a:xfrm>
+            <a:off x="384048" y="2889504"/>
+            <a:ext cx="2011680" cy="1056640"/>
+          </a:xfrm>
+          <a:prstGeom prst="rect">
+            <a:avLst/>
+          </a:prstGeom>
+          <a:noFill/>
+          <a:ln/>
+        </p:spPr>
+        <p:txBody>
+          <a:bodyPr wrap="square" lIns="0" tIns="0" rIns="0" bIns="0" rtlCol="0" anchor="t"/>
+          <a:lstStyle/>
+          <a:p>
+            <a:pPr algn="l" indent="0" marL="0">
+              <a:buNone/>
+            </a:pPr>
+            <a:r>
+              <a:rPr lang="en-US" sz="6400" spc="-200" kern="0" dirty="0">
                 <a:solidFill>
                   <a:srgbClr val="143743"/>
                 </a:solidFill>
@@ -6353,20 +6636,20 @@
               </a:rPr>
               <a:t>1,5</a:t>
             </a:r>
-            <a:endParaRPr lang="en-US" sz="11000" dirty="0"/>
-          </a:p>
-        </p:txBody>
-      </p:sp>
-      <p:sp>
-        <p:nvSpPr>
-          <p:cNvPr id="5" name="Text 3"/>
-          <p:cNvSpPr txBox="1"/>
-          <p:nvPr/>
-        </p:nvSpPr>
-        <p:spPr>
-          <a:xfrm>
-            <a:off x="2139696" y="2468880"/>
-            <a:ext cx="914400" cy="502920"/>
+            <a:endParaRPr lang="en-US" sz="6400" dirty="0"/>
+          </a:p>
+        </p:txBody>
+      </p:sp>
+      <p:sp>
+        <p:nvSpPr>
+          <p:cNvPr id="8" name="Text 6"/>
+          <p:cNvSpPr txBox="1"/>
+          <p:nvPr/>
+        </p:nvSpPr>
+        <p:spPr>
+          <a:xfrm>
+            <a:off x="1572768" y="3401568"/>
+            <a:ext cx="731520" cy="365760"/>
           </a:xfrm>
           <a:prstGeom prst="rect">
             <a:avLst/>
@@ -6382,7 +6665,7 @@
               <a:buNone/>
             </a:pPr>
             <a:r>
-              <a:rPr lang="en-US" sz="2800" spc="-60" kern="0" dirty="0">
+              <a:rPr lang="en-US" sz="2100" spc="-40" kern="0" dirty="0">
                 <a:solidFill>
                   <a:srgbClr val="1F7370"/>
                 </a:solidFill>
@@ -6392,20 +6675,20 @@
               </a:rPr>
               <a:t>Mt</a:t>
             </a:r>
-            <a:endParaRPr lang="en-US" sz="2800" dirty="0"/>
-          </a:p>
-        </p:txBody>
-      </p:sp>
-      <p:sp>
-        <p:nvSpPr>
-          <p:cNvPr id="6" name="Text 4"/>
-          <p:cNvSpPr txBox="1"/>
-          <p:nvPr/>
-        </p:nvSpPr>
-        <p:spPr>
-          <a:xfrm>
-            <a:off x="457200" y="3593592"/>
-            <a:ext cx="2194560" cy="155448"/>
+            <a:endParaRPr lang="en-US" sz="2100" dirty="0"/>
+          </a:p>
+        </p:txBody>
+      </p:sp>
+      <p:sp>
+        <p:nvSpPr>
+          <p:cNvPr id="9" name="Text 7"/>
+          <p:cNvSpPr txBox="1"/>
+          <p:nvPr/>
+        </p:nvSpPr>
+        <p:spPr>
+          <a:xfrm>
+            <a:off x="475488" y="3986784"/>
+            <a:ext cx="4023360" cy="155448"/>
           </a:xfrm>
           <a:prstGeom prst="rect">
             <a:avLst/>
@@ -6423,13 +6706,74 @@
             <a:r>
               <a:rPr lang="en-US" sz="750" spc="260" kern="0" dirty="0">
                 <a:solidFill>
+                  <a:srgbClr val="5B8AAE"/>
+                </a:solidFill>
+                <a:latin typeface="Arial" pitchFamily="34" charset="0"/>
+                <a:ea typeface="Arial" pitchFamily="34" charset="-122"/>
+                <a:cs typeface="Arial" pitchFamily="34" charset="-120"/>
+              </a:rPr>
+              <a:t>ENTREGUES NO MUNDO INTEIRO, ACUMULADO ATÉ JUN/26</a:t>
+            </a:r>
+            <a:endParaRPr lang="en-US" sz="750" dirty="0"/>
+          </a:p>
+        </p:txBody>
+      </p:sp>
+      <p:sp>
+        <p:nvSpPr>
+          <p:cNvPr id="10" name="Shape 8"/>
+          <p:cNvSpPr/>
+          <p:nvPr/>
+        </p:nvSpPr>
+        <p:spPr>
+          <a:xfrm>
+            <a:off x="4937760" y="3017520"/>
+            <a:ext cx="3749040" cy="7315"/>
+          </a:xfrm>
+          <a:prstGeom prst="rect">
+            <a:avLst/>
+          </a:prstGeom>
+          <a:solidFill>
+            <a:srgbClr val="1F7370">
+              <a:alpha val="45000"/>
+            </a:srgbClr>
+          </a:solidFill>
+          <a:ln/>
+        </p:spPr>
+      </p:sp>
+      <p:sp>
+        <p:nvSpPr>
+          <p:cNvPr id="11" name="Text 9"/>
+          <p:cNvSpPr txBox="1"/>
+          <p:nvPr/>
+        </p:nvSpPr>
+        <p:spPr>
+          <a:xfrm>
+            <a:off x="4937760" y="3108960"/>
+            <a:ext cx="3749040" cy="155448"/>
+          </a:xfrm>
+          <a:prstGeom prst="rect">
+            <a:avLst/>
+          </a:prstGeom>
+          <a:noFill/>
+          <a:ln/>
+        </p:spPr>
+        <p:txBody>
+          <a:bodyPr wrap="square" lIns="0" tIns="0" rIns="0" bIns="0" rtlCol="0" anchor="ctr"/>
+          <a:lstStyle/>
+          <a:p>
+            <a:pPr algn="l" indent="0" marL="0">
+              <a:buNone/>
+            </a:pPr>
+            <a:r>
+              <a:rPr lang="en-US" sz="750" spc="260" kern="0" dirty="0">
+                <a:solidFill>
                   <a:srgbClr val="1F7370"/>
                 </a:solidFill>
                 <a:latin typeface="Arial" pitchFamily="34" charset="0"/>
                 <a:ea typeface="Arial" pitchFamily="34" charset="-122"/>
                 <a:cs typeface="Arial" pitchFamily="34" charset="-120"/>
               </a:rPr>
-              <a:t>01 · OFERTA</a:t>
+              <a:t>E UM ÚNICO COMPRADOR</a:t>
             </a:r>
             <a:endParaRPr lang="en-US" sz="750" dirty="0"/>
           </a:p>
@@ -6437,14 +6781,53 @@
       </p:sp>
       <p:sp>
         <p:nvSpPr>
-          <p:cNvPr id="7" name="Text 5"/>
-          <p:cNvSpPr txBox="1"/>
-          <p:nvPr/>
-        </p:nvSpPr>
-        <p:spPr>
-          <a:xfrm>
-            <a:off x="457200" y="3767328"/>
-            <a:ext cx="2194560" cy="457200"/>
+          <p:cNvPr id="12" name="Text 10"/>
+          <p:cNvSpPr txBox="1"/>
+          <p:nvPr/>
+        </p:nvSpPr>
+        <p:spPr>
+          <a:xfrm>
+            <a:off x="4937760" y="3291840"/>
+            <a:ext cx="1463040" cy="173736"/>
+          </a:xfrm>
+          <a:prstGeom prst="rect">
+            <a:avLst/>
+          </a:prstGeom>
+          <a:noFill/>
+          <a:ln/>
+        </p:spPr>
+        <p:txBody>
+          <a:bodyPr wrap="square" lIns="0" tIns="0" rIns="0" bIns="0" rtlCol="0" anchor="ctr"/>
+          <a:lstStyle/>
+          <a:p>
+            <a:pPr algn="l" indent="0" marL="0">
+              <a:buNone/>
+            </a:pPr>
+            <a:r>
+              <a:rPr lang="en-US" sz="1500" dirty="0">
+                <a:solidFill>
+                  <a:srgbClr val="143743"/>
+                </a:solidFill>
+                <a:latin typeface="Courier New" pitchFamily="34" charset="0"/>
+                <a:ea typeface="Courier New" pitchFamily="34" charset="-122"/>
+                <a:cs typeface="Courier New" pitchFamily="34" charset="-120"/>
+              </a:rPr>
+              <a:t>34,6 Mt</a:t>
+            </a:r>
+            <a:endParaRPr lang="en-US" sz="1500" dirty="0"/>
+          </a:p>
+        </p:txBody>
+      </p:sp>
+      <p:sp>
+        <p:nvSpPr>
+          <p:cNvPr id="13" name="Text 11"/>
+          <p:cNvSpPr txBox="1"/>
+          <p:nvPr/>
+        </p:nvSpPr>
+        <p:spPr>
+          <a:xfrm>
+            <a:off x="4937760" y="3584448"/>
+            <a:ext cx="3749040" cy="457200"/>
           </a:xfrm>
           <a:prstGeom prst="rect">
             <a:avLst/>
@@ -6471,7 +6854,7 @@
                 <a:ea typeface="Arial" pitchFamily="34" charset="-122"/>
                 <a:cs typeface="Arial" pitchFamily="34" charset="-120"/>
               </a:rPr>
-              <a:t>entregues no mundo inteiro até jun/26</a:t>
+              <a:t>contratados pela Microsoft — 63% de todas as compras de CDR em 2024</a:t>
             </a:r>
             <a:endParaRPr lang="en-US" sz="950" dirty="0"/>
           </a:p>
@@ -6479,272 +6862,32 @@
       </p:sp>
       <p:sp>
         <p:nvSpPr>
-          <p:cNvPr id="8" name="Text 6"/>
-          <p:cNvSpPr txBox="1"/>
-          <p:nvPr/>
-        </p:nvSpPr>
-        <p:spPr>
-          <a:xfrm>
-            <a:off x="4297680" y="3593592"/>
-            <a:ext cx="2194560" cy="155448"/>
-          </a:xfrm>
-          <a:prstGeom prst="rect">
-            <a:avLst/>
-          </a:prstGeom>
-          <a:noFill/>
-          <a:ln/>
-        </p:spPr>
-        <p:txBody>
-          <a:bodyPr wrap="square" lIns="0" tIns="0" rIns="0" bIns="0" rtlCol="0" anchor="ctr"/>
-          <a:lstStyle/>
-          <a:p>
-            <a:pPr algn="l" indent="0" marL="0">
-              <a:buNone/>
-            </a:pPr>
-            <a:r>
-              <a:rPr lang="en-US" sz="750" spc="260" kern="0" dirty="0">
-                <a:solidFill>
-                  <a:srgbClr val="5B8AAE"/>
-                </a:solidFill>
-                <a:latin typeface="Arial" pitchFamily="34" charset="0"/>
-                <a:ea typeface="Arial" pitchFamily="34" charset="-122"/>
-                <a:cs typeface="Arial" pitchFamily="34" charset="-120"/>
-              </a:rPr>
-              <a:t>02 · LACUNA</a:t>
-            </a:r>
-            <a:endParaRPr lang="en-US" sz="750" dirty="0"/>
-          </a:p>
-        </p:txBody>
-      </p:sp>
-      <p:sp>
-        <p:nvSpPr>
-          <p:cNvPr id="9" name="Text 7"/>
-          <p:cNvSpPr txBox="1"/>
-          <p:nvPr/>
-        </p:nvSpPr>
-        <p:spPr>
-          <a:xfrm>
-            <a:off x="4297680" y="3767328"/>
-            <a:ext cx="1783080" cy="457200"/>
-          </a:xfrm>
-          <a:prstGeom prst="rect">
-            <a:avLst/>
-          </a:prstGeom>
-          <a:noFill/>
-          <a:ln/>
-        </p:spPr>
-        <p:txBody>
-          <a:bodyPr wrap="square" lIns="0" tIns="0" rIns="0" bIns="0" rtlCol="0" anchor="t"/>
-          <a:lstStyle/>
-          <a:p>
-            <a:pPr indent="0" marL="0">
-              <a:lnSpc>
-                <a:spcPts val="1473"/>
-              </a:lnSpc>
-              <a:buNone/>
-            </a:pPr>
-            <a:r>
-              <a:rPr lang="en-US" sz="950" dirty="0">
-                <a:solidFill>
-                  <a:srgbClr val="52666B"/>
-                </a:solidFill>
-                <a:latin typeface="Arial" pitchFamily="34" charset="0"/>
-                <a:ea typeface="Arial" pitchFamily="34" charset="-122"/>
-                <a:cs typeface="Arial" pitchFamily="34" charset="-120"/>
-              </a:rPr>
-              <a:t>a oferta certificada é o gargalo — não a demanda</a:t>
-            </a:r>
-            <a:endParaRPr lang="en-US" sz="950" dirty="0"/>
-          </a:p>
-        </p:txBody>
-      </p:sp>
-      <p:sp>
-        <p:nvSpPr>
-          <p:cNvPr id="10" name="Text 8"/>
-          <p:cNvSpPr txBox="1"/>
-          <p:nvPr/>
-        </p:nvSpPr>
-        <p:spPr>
-          <a:xfrm>
-            <a:off x="6263640" y="2505456"/>
-            <a:ext cx="2103120" cy="429260"/>
-          </a:xfrm>
-          <a:prstGeom prst="rect">
-            <a:avLst/>
-          </a:prstGeom>
-          <a:noFill/>
-          <a:ln/>
-        </p:spPr>
-        <p:txBody>
-          <a:bodyPr wrap="square" lIns="0" tIns="0" rIns="0" bIns="0" rtlCol="0" anchor="t"/>
-          <a:lstStyle/>
-          <a:p>
-            <a:pPr algn="r" indent="0" marL="0">
-              <a:buNone/>
-            </a:pPr>
-            <a:r>
-              <a:rPr lang="en-US" sz="2600" spc="-200" kern="0" dirty="0">
+          <p:cNvPr id="14" name="Text 12"/>
+          <p:cNvSpPr txBox="1"/>
+          <p:nvPr/>
+        </p:nvSpPr>
+        <p:spPr>
+          <a:xfrm>
+            <a:off x="4937760" y="4059936"/>
+            <a:ext cx="2194560" cy="173736"/>
+          </a:xfrm>
+          <a:prstGeom prst="rect">
+            <a:avLst/>
+          </a:prstGeom>
+          <a:noFill/>
+          <a:ln/>
+        </p:spPr>
+        <p:txBody>
+          <a:bodyPr wrap="square" lIns="0" tIns="0" rIns="0" bIns="0" rtlCol="0" anchor="ctr"/>
+          <a:lstStyle/>
+          <a:p>
+            <a:pPr algn="l" indent="0" marL="0">
+              <a:buNone/>
+            </a:pPr>
+            <a:r>
+              <a:rPr lang="en-US" sz="1100" dirty="0">
                 <a:solidFill>
                   <a:srgbClr val="175D5C"/>
-                </a:solidFill>
-                <a:latin typeface="Arial" pitchFamily="34" charset="0"/>
-                <a:ea typeface="Arial" pitchFamily="34" charset="-122"/>
-                <a:cs typeface="Arial" pitchFamily="34" charset="-120"/>
-              </a:rPr>
-              <a:t>34,6 Mt</a:t>
-            </a:r>
-            <a:endParaRPr lang="en-US" sz="2600" dirty="0"/>
-          </a:p>
-        </p:txBody>
-      </p:sp>
-      <p:sp>
-        <p:nvSpPr>
-          <p:cNvPr id="11" name="Text 9"/>
-          <p:cNvSpPr txBox="1"/>
-          <p:nvPr/>
-        </p:nvSpPr>
-        <p:spPr>
-          <a:xfrm>
-            <a:off x="6263640" y="3593592"/>
-            <a:ext cx="2103120" cy="155448"/>
-          </a:xfrm>
-          <a:prstGeom prst="rect">
-            <a:avLst/>
-          </a:prstGeom>
-          <a:noFill/>
-          <a:ln/>
-        </p:spPr>
-        <p:txBody>
-          <a:bodyPr wrap="square" lIns="0" tIns="0" rIns="0" bIns="0" rtlCol="0" anchor="ctr"/>
-          <a:lstStyle/>
-          <a:p>
-            <a:pPr algn="r" indent="0" marL="0">
-              <a:buNone/>
-            </a:pPr>
-            <a:r>
-              <a:rPr lang="en-US" sz="750" spc="260" kern="0" dirty="0">
-                <a:solidFill>
-                  <a:srgbClr val="1F7370"/>
-                </a:solidFill>
-                <a:latin typeface="Arial" pitchFamily="34" charset="0"/>
-                <a:ea typeface="Arial" pitchFamily="34" charset="-122"/>
-                <a:cs typeface="Arial" pitchFamily="34" charset="-120"/>
-              </a:rPr>
-              <a:t>03 · DEMANDA · MICROSOFT</a:t>
-            </a:r>
-            <a:endParaRPr lang="en-US" sz="750" dirty="0"/>
-          </a:p>
-        </p:txBody>
-      </p:sp>
-      <p:sp>
-        <p:nvSpPr>
-          <p:cNvPr id="12" name="Text 10"/>
-          <p:cNvSpPr txBox="1"/>
-          <p:nvPr/>
-        </p:nvSpPr>
-        <p:spPr>
-          <a:xfrm>
-            <a:off x="6263640" y="3767328"/>
-            <a:ext cx="2103120" cy="457200"/>
-          </a:xfrm>
-          <a:prstGeom prst="rect">
-            <a:avLst/>
-          </a:prstGeom>
-          <a:noFill/>
-          <a:ln/>
-        </p:spPr>
-        <p:txBody>
-          <a:bodyPr wrap="square" lIns="0" tIns="0" rIns="0" bIns="0" rtlCol="0" anchor="t"/>
-          <a:lstStyle/>
-          <a:p>
-            <a:pPr indent="0" marL="0">
-              <a:lnSpc>
-                <a:spcPts val="1473"/>
-              </a:lnSpc>
-              <a:buNone/>
-            </a:pPr>
-            <a:r>
-              <a:rPr lang="en-US" sz="950" dirty="0">
-                <a:solidFill>
-                  <a:srgbClr val="52666B"/>
-                </a:solidFill>
-                <a:latin typeface="Arial" pitchFamily="34" charset="0"/>
-                <a:ea typeface="Arial" pitchFamily="34" charset="-122"/>
-                <a:cs typeface="Arial" pitchFamily="34" charset="-120"/>
-              </a:rPr>
-              <a:t>63% de todas as compras de CDR em 2024</a:t>
-            </a:r>
-            <a:endParaRPr lang="en-US" sz="950" dirty="0"/>
-          </a:p>
-        </p:txBody>
-      </p:sp>
-      <p:sp>
-        <p:nvSpPr>
-          <p:cNvPr id="13" name="Text 11"/>
-          <p:cNvSpPr txBox="1"/>
-          <p:nvPr/>
-        </p:nvSpPr>
-        <p:spPr>
-          <a:xfrm>
-            <a:off x="6263640" y="1481328"/>
-            <a:ext cx="2103120" cy="155448"/>
-          </a:xfrm>
-          <a:prstGeom prst="rect">
-            <a:avLst/>
-          </a:prstGeom>
-          <a:noFill/>
-          <a:ln/>
-        </p:spPr>
-        <p:txBody>
-          <a:bodyPr wrap="square" lIns="0" tIns="0" rIns="0" bIns="0" rtlCol="0" anchor="ctr"/>
-          <a:lstStyle/>
-          <a:p>
-            <a:pPr algn="r" indent="0" marL="0">
-              <a:buNone/>
-            </a:pPr>
-            <a:r>
-              <a:rPr lang="en-US" sz="750" spc="260" kern="0" dirty="0">
-                <a:solidFill>
-                  <a:srgbClr val="5B8AAE"/>
-                </a:solidFill>
-                <a:latin typeface="Arial" pitchFamily="34" charset="0"/>
-                <a:ea typeface="Arial" pitchFamily="34" charset="-122"/>
-                <a:cs typeface="Arial" pitchFamily="34" charset="-120"/>
-              </a:rPr>
-              <a:t>REFERÊNCIA DE PREÇO</a:t>
-            </a:r>
-            <a:endParaRPr lang="en-US" sz="750" dirty="0"/>
-          </a:p>
-        </p:txBody>
-      </p:sp>
-      <p:sp>
-        <p:nvSpPr>
-          <p:cNvPr id="14" name="Text 12"/>
-          <p:cNvSpPr txBox="1"/>
-          <p:nvPr/>
-        </p:nvSpPr>
-        <p:spPr>
-          <a:xfrm>
-            <a:off x="6263640" y="1645920"/>
-            <a:ext cx="2103120" cy="292608"/>
-          </a:xfrm>
-          <a:prstGeom prst="rect">
-            <a:avLst/>
-          </a:prstGeom>
-          <a:noFill/>
-          <a:ln/>
-        </p:spPr>
-        <p:txBody>
-          <a:bodyPr wrap="square" lIns="0" tIns="0" rIns="0" bIns="0" rtlCol="0" anchor="t"/>
-          <a:lstStyle/>
-          <a:p>
-            <a:pPr algn="r" indent="0" marL="0">
-              <a:buNone/>
-            </a:pPr>
-            <a:r>
-              <a:rPr lang="en-US" sz="1500" dirty="0">
-                <a:solidFill>
-                  <a:srgbClr val="143743"/>
                 </a:solidFill>
                 <a:latin typeface="Courier New" pitchFamily="34" charset="0"/>
                 <a:ea typeface="Courier New" pitchFamily="34" charset="-122"/>
@@ -6752,7 +6895,7 @@
               </a:rPr>
               <a:t>US$ 150 / tCO₂</a:t>
             </a:r>
-            <a:endParaRPr lang="en-US" sz="1500" dirty="0"/>
+            <a:endParaRPr lang="en-US" sz="1100" dirty="0"/>
           </a:p>
         </p:txBody>
       </p:sp>
@@ -6764,24 +6907,85 @@
         </p:nvSpPr>
         <p:spPr>
           <a:xfrm>
-            <a:off x="457200" y="4809744"/>
-            <a:ext cx="3657600" cy="155448"/>
-          </a:xfrm>
-          <a:prstGeom prst="rect">
-            <a:avLst/>
-          </a:prstGeom>
-          <a:noFill/>
-          <a:ln/>
-        </p:spPr>
-        <p:txBody>
-          <a:bodyPr wrap="square" lIns="0" tIns="0" rIns="0" bIns="0" rtlCol="0" anchor="ctr"/>
-          <a:lstStyle/>
-          <a:p>
-            <a:pPr algn="l" indent="0" marL="0">
-              <a:buNone/>
-            </a:pPr>
-            <a:r>
-              <a:rPr lang="en-US" sz="750" spc="260" kern="0" dirty="0">
+            <a:off x="4937760" y="4279392"/>
+            <a:ext cx="3749040" cy="155448"/>
+          </a:xfrm>
+          <a:prstGeom prst="rect">
+            <a:avLst/>
+          </a:prstGeom>
+          <a:noFill/>
+          <a:ln/>
+        </p:spPr>
+        <p:txBody>
+          <a:bodyPr wrap="square" lIns="0" tIns="0" rIns="0" bIns="0" rtlCol="0" anchor="ctr"/>
+          <a:lstStyle/>
+          <a:p>
+            <a:pPr algn="l" indent="0" marL="0">
+              <a:buNone/>
+            </a:pPr>
+            <a:r>
+              <a:rPr lang="en-US" sz="650" spc="260" kern="0" dirty="0">
+                <a:solidFill>
+                  <a:srgbClr val="5B8AAE"/>
+                </a:solidFill>
+                <a:latin typeface="Arial" pitchFamily="34" charset="0"/>
+                <a:ea typeface="Arial" pitchFamily="34" charset="-122"/>
+                <a:cs typeface="Arial" pitchFamily="34" charset="-120"/>
+              </a:rPr>
+              <a:t>REFERÊNCIA DE ENTREGA DO CRÉDITO DE BIOCHAR</a:t>
+            </a:r>
+            <a:endParaRPr lang="en-US" sz="650" dirty="0"/>
+          </a:p>
+        </p:txBody>
+      </p:sp>
+      <p:sp>
+        <p:nvSpPr>
+          <p:cNvPr id="16" name="Shape 14"/>
+          <p:cNvSpPr/>
+          <p:nvPr/>
+        </p:nvSpPr>
+        <p:spPr>
+          <a:xfrm>
+            <a:off x="457200" y="4590288"/>
+            <a:ext cx="8138160" cy="7315"/>
+          </a:xfrm>
+          <a:prstGeom prst="rect">
+            <a:avLst/>
+          </a:prstGeom>
+          <a:solidFill>
+            <a:srgbClr val="5B8AAE">
+              <a:alpha val="32000"/>
+            </a:srgbClr>
+          </a:solidFill>
+          <a:ln/>
+        </p:spPr>
+      </p:sp>
+      <p:sp>
+        <p:nvSpPr>
+          <p:cNvPr id="17" name="Text 15"/>
+          <p:cNvSpPr txBox="1"/>
+          <p:nvPr/>
+        </p:nvSpPr>
+        <p:spPr>
+          <a:xfrm>
+            <a:off x="457200" y="4681728"/>
+            <a:ext cx="8138160" cy="155448"/>
+          </a:xfrm>
+          <a:prstGeom prst="rect">
+            <a:avLst/>
+          </a:prstGeom>
+          <a:noFill/>
+          <a:ln/>
+        </p:spPr>
+        <p:txBody>
+          <a:bodyPr wrap="square" lIns="0" tIns="0" rIns="0" bIns="0" rtlCol="0" anchor="ctr"/>
+          <a:lstStyle/>
+          <a:p>
+            <a:pPr algn="l" indent="0" marL="0">
+              <a:buNone/>
+            </a:pPr>
+            <a:r>
+              <a:rPr lang="en-US" sz="620" spc="260" kern="0" dirty="0">
                 <a:solidFill>
                   <a:srgbClr val="7AA8C9"/>
                 </a:solidFill>
@@ -6789,48 +6993,48 @@
                 <a:ea typeface="Arial" pitchFamily="34" charset="-122"/>
                 <a:cs typeface="Arial" pitchFamily="34" charset="-120"/>
               </a:rPr>
-              <a:t>POC BIOCHAR · PETROLINA</a:t>
-            </a:r>
-            <a:endParaRPr lang="en-US" sz="750" dirty="0"/>
-          </a:p>
-        </p:txBody>
-      </p:sp>
-      <p:sp>
-        <p:nvSpPr>
-          <p:cNvPr id="16" name="Text 14"/>
-          <p:cNvSpPr txBox="1"/>
-          <p:nvPr/>
-        </p:nvSpPr>
-        <p:spPr>
-          <a:xfrm rot="5400000">
-            <a:off x="8613648" y="384048"/>
-            <a:ext cx="2377440" cy="164592"/>
-          </a:xfrm>
-          <a:prstGeom prst="rect">
-            <a:avLst/>
-          </a:prstGeom>
-          <a:noFill/>
-          <a:ln/>
-        </p:spPr>
-        <p:txBody>
-          <a:bodyPr wrap="square" lIns="0" tIns="0" rIns="0" bIns="0" rtlCol="0" anchor="ctr"/>
-          <a:lstStyle/>
-          <a:p>
-            <a:pPr indent="0" marL="0">
-              <a:buNone/>
-            </a:pPr>
-            <a:r>
-              <a:rPr lang="en-US" sz="680" spc="300" kern="0" dirty="0">
-                <a:solidFill>
-                  <a:srgbClr val="7AA8C9"/>
-                </a:solidFill>
-                <a:latin typeface="Arial" pitchFamily="34" charset="0"/>
-                <a:ea typeface="Arial" pitchFamily="34" charset="-122"/>
-                <a:cs typeface="Arial" pitchFamily="34" charset="-120"/>
-              </a:rPr>
-              <a:t>MCKINSEY · CDR.FYI · S&amp;P GLOBAL</a:t>
-            </a:r>
-            <a:endParaRPr lang="en-US" sz="680" dirty="0"/>
+              <a:t>O ENTREGUE É ESTOQUE ACUMULADO E A DEMANDA É FLUXO ANUAL PROJETADO — A BARRA COMPARA ORDENS DE GRANDEZA, NÃO O MESMO PERÍODO</a:t>
+            </a:r>
+            <a:endParaRPr lang="en-US" sz="620" dirty="0"/>
+          </a:p>
+        </p:txBody>
+      </p:sp>
+      <p:sp>
+        <p:nvSpPr>
+          <p:cNvPr id="18" name="Text 16"/>
+          <p:cNvSpPr txBox="1"/>
+          <p:nvPr/>
+        </p:nvSpPr>
+        <p:spPr>
+          <a:xfrm>
+            <a:off x="457200" y="4846320"/>
+            <a:ext cx="8138160" cy="155448"/>
+          </a:xfrm>
+          <a:prstGeom prst="rect">
+            <a:avLst/>
+          </a:prstGeom>
+          <a:noFill/>
+          <a:ln/>
+        </p:spPr>
+        <p:txBody>
+          <a:bodyPr wrap="square" lIns="0" tIns="0" rIns="0" bIns="0" rtlCol="0" anchor="ctr"/>
+          <a:lstStyle/>
+          <a:p>
+            <a:pPr algn="l" indent="0" marL="0">
+              <a:buNone/>
+            </a:pPr>
+            <a:r>
+              <a:rPr lang="en-US" sz="620" spc="260" kern="0" dirty="0">
+                <a:solidFill>
+                  <a:srgbClr val="5B8AAE"/>
+                </a:solidFill>
+                <a:latin typeface="Arial" pitchFamily="34" charset="0"/>
+                <a:ea typeface="Arial" pitchFamily="34" charset="-122"/>
+                <a:cs typeface="Arial" pitchFamily="34" charset="-120"/>
+              </a:rPr>
+              <a:t>FONTES: CDR.FYI · MCKINSEY · S&amp;P GLOBAL   ·   [DOC]</a:t>
+            </a:r>
+            <a:endParaRPr lang="en-US" sz="620" dirty="0"/>
           </a:p>
         </p:txBody>
       </p:sp>
@@ -6881,7 +7085,7 @@
         </p:nvSpPr>
         <p:spPr>
           <a:xfrm>
-            <a:off x="365760" y="292608"/>
+            <a:off x="365760" y="274320"/>
             <a:ext cx="2743200" cy="155448"/>
           </a:xfrm>
           <a:prstGeom prst="rect">
@@ -6920,7 +7124,7 @@
         </p:nvSpPr>
         <p:spPr>
           <a:xfrm>
-            <a:off x="365760" y="3291840"/>
+            <a:off x="365760" y="3273552"/>
             <a:ext cx="365760" cy="173736"/>
           </a:xfrm>
           <a:prstGeom prst="rect">
@@ -6959,8 +7163,8 @@
         </p:nvSpPr>
         <p:spPr>
           <a:xfrm>
-            <a:off x="749808" y="3291840"/>
-            <a:ext cx="1353312" cy="155448"/>
+            <a:off x="749808" y="3273552"/>
+            <a:ext cx="1399032" cy="155448"/>
           </a:xfrm>
           <a:prstGeom prst="rect">
             <a:avLst/>
@@ -6998,8 +7202,8 @@
         </p:nvSpPr>
         <p:spPr>
           <a:xfrm>
-            <a:off x="365760" y="3474720"/>
-            <a:ext cx="1737360" cy="256032"/>
+            <a:off x="365760" y="3456432"/>
+            <a:ext cx="1783080" cy="256032"/>
           </a:xfrm>
           <a:prstGeom prst="rect">
             <a:avLst/>
@@ -7037,8 +7241,8 @@
         </p:nvSpPr>
         <p:spPr>
           <a:xfrm>
-            <a:off x="365760" y="3657600"/>
-            <a:ext cx="1737360" cy="822960"/>
+            <a:off x="365760" y="3749040"/>
+            <a:ext cx="1783080" cy="384048"/>
           </a:xfrm>
           <a:prstGeom prst="rect">
             <a:avLst/>
@@ -7065,7 +7269,7 @@
                 <a:ea typeface="Arial" pitchFamily="34" charset="-122"/>
                 <a:cs typeface="Arial" pitchFamily="34" charset="-120"/>
               </a:rPr>
-              <a:t>~120 mil t de coco por ano EM Petrolina. 100 mil t úmidas de casca na porta da fábrica.</a:t>
+              <a:t>~120 mil t de coco por ano EM Petrolina — 100 mil t úmidas de casca na porta da fábrica.</a:t>
             </a:r>
             <a:endParaRPr lang="en-US" sz="850" dirty="0"/>
           </a:p>
@@ -7073,79 +7277,62 @@
       </p:sp>
       <p:sp>
         <p:nvSpPr>
-          <p:cNvPr id="7" name="Text 5"/>
-          <p:cNvSpPr txBox="1"/>
-          <p:nvPr/>
-        </p:nvSpPr>
-        <p:spPr>
-          <a:xfrm>
-            <a:off x="2743200" y="2468880"/>
-            <a:ext cx="365760" cy="173736"/>
-          </a:xfrm>
-          <a:prstGeom prst="rect">
-            <a:avLst/>
-          </a:prstGeom>
-          <a:noFill/>
-          <a:ln/>
-        </p:spPr>
-        <p:txBody>
-          <a:bodyPr wrap="square" lIns="0" tIns="0" rIns="0" bIns="0" rtlCol="0" anchor="ctr"/>
-          <a:lstStyle/>
-          <a:p>
-            <a:pPr algn="l" indent="0" marL="0">
-              <a:buNone/>
-            </a:pPr>
-            <a:r>
-              <a:rPr lang="en-US" sz="900" dirty="0">
+          <p:cNvPr id="7" name="Shape 5"/>
+          <p:cNvSpPr/>
+          <p:nvPr/>
+        </p:nvSpPr>
+        <p:spPr>
+          <a:xfrm>
+            <a:off x="365760" y="4187952"/>
+            <a:ext cx="1691640" cy="7315"/>
+          </a:xfrm>
+          <a:prstGeom prst="rect">
+            <a:avLst/>
+          </a:prstGeom>
+          <a:solidFill>
+            <a:srgbClr val="1F7370">
+              <a:alpha val="42000"/>
+            </a:srgbClr>
+          </a:solidFill>
+          <a:ln/>
+        </p:spPr>
+      </p:sp>
+      <p:sp>
+        <p:nvSpPr>
+          <p:cNvPr id="8" name="Text 6"/>
+          <p:cNvSpPr txBox="1"/>
+          <p:nvPr/>
+        </p:nvSpPr>
+        <p:spPr>
+          <a:xfrm>
+            <a:off x="365760" y="4261104"/>
+            <a:ext cx="1783080" cy="155448"/>
+          </a:xfrm>
+          <a:prstGeom prst="rect">
+            <a:avLst/>
+          </a:prstGeom>
+          <a:noFill/>
+          <a:ln/>
+        </p:spPr>
+        <p:txBody>
+          <a:bodyPr wrap="square" lIns="0" tIns="0" rIns="0" bIns="0" rtlCol="0" anchor="ctr"/>
+          <a:lstStyle/>
+          <a:p>
+            <a:pPr algn="l" indent="0" marL="0">
+              <a:buNone/>
+            </a:pPr>
+            <a:r>
+              <a:rPr lang="en-US" sz="600" spc="260" kern="0" dirty="0">
                 <a:solidFill>
                   <a:srgbClr val="1F7370"/>
                 </a:solidFill>
-                <a:latin typeface="Courier New" pitchFamily="34" charset="0"/>
-                <a:ea typeface="Courier New" pitchFamily="34" charset="-122"/>
-                <a:cs typeface="Courier New" pitchFamily="34" charset="-120"/>
-              </a:rPr>
-              <a:t>02</a:t>
-            </a:r>
-            <a:endParaRPr lang="en-US" sz="900" dirty="0"/>
-          </a:p>
-        </p:txBody>
-      </p:sp>
-      <p:sp>
-        <p:nvSpPr>
-          <p:cNvPr id="8" name="Text 6"/>
-          <p:cNvSpPr txBox="1"/>
-          <p:nvPr/>
-        </p:nvSpPr>
-        <p:spPr>
-          <a:xfrm>
-            <a:off x="3127248" y="2468880"/>
-            <a:ext cx="2633472" cy="155448"/>
-          </a:xfrm>
-          <a:prstGeom prst="rect">
-            <a:avLst/>
-          </a:prstGeom>
-          <a:noFill/>
-          <a:ln/>
-        </p:spPr>
-        <p:txBody>
-          <a:bodyPr wrap="square" lIns="0" tIns="0" rIns="0" bIns="0" rtlCol="0" anchor="ctr"/>
-          <a:lstStyle/>
-          <a:p>
-            <a:pPr algn="l" indent="0" marL="0">
-              <a:buNone/>
-            </a:pPr>
-            <a:r>
-              <a:rPr lang="en-US" sz="750" spc="260" kern="0" dirty="0">
-                <a:solidFill>
-                  <a:srgbClr val="5B8AAE"/>
-                </a:solidFill>
-                <a:latin typeface="Arial" pitchFamily="34" charset="0"/>
-                <a:ea typeface="Arial" pitchFamily="34" charset="-122"/>
-                <a:cs typeface="Arial" pitchFamily="34" charset="-120"/>
-              </a:rPr>
-              <a:t>CONVERSION</a:t>
-            </a:r>
-            <a:endParaRPr lang="en-US" sz="750" dirty="0"/>
+                <a:latin typeface="Arial" pitchFamily="34" charset="0"/>
+                <a:ea typeface="Arial" pitchFamily="34" charset="-122"/>
+                <a:cs typeface="Arial" pitchFamily="34" charset="-120"/>
+              </a:rPr>
+              <a:t>DESTRAVA</a:t>
+            </a:r>
+            <a:endParaRPr lang="en-US" sz="600" dirty="0"/>
           </a:p>
         </p:txBody>
       </p:sp>
@@ -7157,47 +7344,8 @@
         </p:nvSpPr>
         <p:spPr>
           <a:xfrm>
-            <a:off x="2743200" y="2651760"/>
-            <a:ext cx="3017520" cy="256032"/>
-          </a:xfrm>
-          <a:prstGeom prst="rect">
-            <a:avLst/>
-          </a:prstGeom>
-          <a:noFill/>
-          <a:ln/>
-        </p:spPr>
-        <p:txBody>
-          <a:bodyPr wrap="square" lIns="0" tIns="0" rIns="0" bIns="0" rtlCol="0" anchor="t"/>
-          <a:lstStyle/>
-          <a:p>
-            <a:pPr indent="0" marL="0">
-              <a:buNone/>
-            </a:pPr>
-            <a:r>
-              <a:rPr lang="en-US" sz="1300" spc="-30" kern="0" dirty="0">
-                <a:solidFill>
-                  <a:srgbClr val="143743"/>
-                </a:solidFill>
-                <a:latin typeface="Arial" pitchFamily="34" charset="0"/>
-                <a:ea typeface="Arial" pitchFamily="34" charset="-122"/>
-                <a:cs typeface="Arial" pitchFamily="34" charset="-120"/>
-              </a:rPr>
-              <a:t>tecnologia nacional</a:t>
-            </a:r>
-            <a:endParaRPr lang="en-US" sz="1300" dirty="0"/>
-          </a:p>
-        </p:txBody>
-      </p:sp>
-      <p:sp>
-        <p:nvSpPr>
-          <p:cNvPr id="10" name="Text 8"/>
-          <p:cNvSpPr txBox="1"/>
-          <p:nvPr/>
-        </p:nvSpPr>
-        <p:spPr>
-          <a:xfrm>
-            <a:off x="2743200" y="2834640"/>
-            <a:ext cx="3017520" cy="1005840"/>
+            <a:off x="365760" y="4407408"/>
+            <a:ext cx="1783080" cy="365760"/>
           </a:xfrm>
           <a:prstGeom prst="rect">
             <a:avLst/>
@@ -7218,13 +7366,13 @@
             <a:r>
               <a:rPr lang="en-US" sz="850" dirty="0">
                 <a:solidFill>
-                  <a:srgbClr val="52666B"/>
-                </a:solidFill>
-                <a:latin typeface="Arial" pitchFamily="34" charset="0"/>
-                <a:ea typeface="Arial" pitchFamily="34" charset="-122"/>
-                <a:cs typeface="Arial" pitchFamily="34" charset="-120"/>
-              </a:rPr>
-              <a:t>Leito fluidizado circulante de três zonas (Finep, TRL 4→7): char fino por atrito, redução de potássio pelo leito e syngas queimado no riser — o risco de metano resolvido por projeto.</a:t>
+                  <a:srgbClr val="143743"/>
+                </a:solidFill>
+                <a:latin typeface="Arial" pitchFamily="34" charset="0"/>
+                <a:ea typeface="Arial" pitchFamily="34" charset="-122"/>
+                <a:cs typeface="Arial" pitchFamily="34" charset="-120"/>
+              </a:rPr>
+              <a:t>um contrato alimenta todas as fases</a:t>
             </a:r>
             <a:endParaRPr lang="en-US" sz="850" dirty="0"/>
           </a:p>
@@ -7232,13 +7380,13 @@
       </p:sp>
       <p:sp>
         <p:nvSpPr>
-          <p:cNvPr id="11" name="Text 9"/>
-          <p:cNvSpPr txBox="1"/>
-          <p:nvPr/>
-        </p:nvSpPr>
-        <p:spPr>
-          <a:xfrm>
-            <a:off x="6035040" y="3913632"/>
+          <p:cNvPr id="10" name="Text 8"/>
+          <p:cNvSpPr txBox="1"/>
+          <p:nvPr/>
+        </p:nvSpPr>
+        <p:spPr>
+          <a:xfrm>
+            <a:off x="2743200" y="2450592"/>
             <a:ext cx="365760" cy="173736"/>
           </a:xfrm>
           <a:prstGeom prst="rect">
@@ -7263,7 +7411,7 @@
                 <a:ea typeface="Courier New" pitchFamily="34" charset="-122"/>
                 <a:cs typeface="Courier New" pitchFamily="34" charset="-120"/>
               </a:rPr>
-              <a:t>03</a:t>
+              <a:t>02</a:t>
             </a:r>
             <a:endParaRPr lang="en-US" sz="900" dirty="0"/>
           </a:p>
@@ -7271,40 +7419,79 @@
       </p:sp>
       <p:sp>
         <p:nvSpPr>
+          <p:cNvPr id="11" name="Text 9"/>
+          <p:cNvSpPr txBox="1"/>
+          <p:nvPr/>
+        </p:nvSpPr>
+        <p:spPr>
+          <a:xfrm>
+            <a:off x="3127248" y="2450592"/>
+            <a:ext cx="2542032" cy="155448"/>
+          </a:xfrm>
+          <a:prstGeom prst="rect">
+            <a:avLst/>
+          </a:prstGeom>
+          <a:noFill/>
+          <a:ln/>
+        </p:spPr>
+        <p:txBody>
+          <a:bodyPr wrap="square" lIns="0" tIns="0" rIns="0" bIns="0" rtlCol="0" anchor="ctr"/>
+          <a:lstStyle/>
+          <a:p>
+            <a:pPr algn="l" indent="0" marL="0">
+              <a:buNone/>
+            </a:pPr>
+            <a:r>
+              <a:rPr lang="en-US" sz="750" spc="260" kern="0" dirty="0">
+                <a:solidFill>
+                  <a:srgbClr val="5B8AAE"/>
+                </a:solidFill>
+                <a:latin typeface="Arial" pitchFamily="34" charset="0"/>
+                <a:ea typeface="Arial" pitchFamily="34" charset="-122"/>
+                <a:cs typeface="Arial" pitchFamily="34" charset="-120"/>
+              </a:rPr>
+              <a:t>CONVERSION</a:t>
+            </a:r>
+            <a:endParaRPr lang="en-US" sz="750" dirty="0"/>
+          </a:p>
+        </p:txBody>
+      </p:sp>
+      <p:sp>
+        <p:nvSpPr>
           <p:cNvPr id="12" name="Text 10"/>
           <p:cNvSpPr txBox="1"/>
           <p:nvPr/>
         </p:nvSpPr>
         <p:spPr>
           <a:xfrm>
-            <a:off x="6419088" y="3913632"/>
-            <a:ext cx="2359152" cy="155448"/>
-          </a:xfrm>
-          <a:prstGeom prst="rect">
-            <a:avLst/>
-          </a:prstGeom>
-          <a:noFill/>
-          <a:ln/>
-        </p:spPr>
-        <p:txBody>
-          <a:bodyPr wrap="square" lIns="0" tIns="0" rIns="0" bIns="0" rtlCol="0" anchor="ctr"/>
-          <a:lstStyle/>
-          <a:p>
-            <a:pPr algn="l" indent="0" marL="0">
-              <a:buNone/>
-            </a:pPr>
-            <a:r>
-              <a:rPr lang="en-US" sz="750" spc="260" kern="0" dirty="0">
-                <a:solidFill>
-                  <a:srgbClr val="5B8AAE"/>
-                </a:solidFill>
-                <a:latin typeface="Arial" pitchFamily="34" charset="0"/>
-                <a:ea typeface="Arial" pitchFamily="34" charset="-122"/>
-                <a:cs typeface="Arial" pitchFamily="34" charset="-120"/>
-              </a:rPr>
-              <a:t>VALUE</a:t>
-            </a:r>
-            <a:endParaRPr lang="en-US" sz="750" dirty="0"/>
+            <a:off x="2743200" y="2633472"/>
+            <a:ext cx="2926080" cy="256032"/>
+          </a:xfrm>
+          <a:prstGeom prst="rect">
+            <a:avLst/>
+          </a:prstGeom>
+          <a:noFill/>
+          <a:ln/>
+        </p:spPr>
+        <p:txBody>
+          <a:bodyPr wrap="square" lIns="0" tIns="0" rIns="0" bIns="0" rtlCol="0" anchor="t"/>
+          <a:lstStyle/>
+          <a:p>
+            <a:pPr indent="0" marL="0">
+              <a:buNone/>
+            </a:pPr>
+            <a:r>
+              <a:rPr lang="en-US" sz="1300" spc="-30" kern="0" dirty="0">
+                <a:solidFill>
+                  <a:srgbClr val="143743"/>
+                </a:solidFill>
+                <a:latin typeface="Arial" pitchFamily="34" charset="0"/>
+                <a:ea typeface="Arial" pitchFamily="34" charset="-122"/>
+                <a:cs typeface="Arial" pitchFamily="34" charset="-120"/>
+              </a:rPr>
+              <a:t>tecnologia nacional</a:t>
+            </a:r>
+            <a:endParaRPr lang="en-US" sz="1300" dirty="0"/>
           </a:p>
         </p:txBody>
       </p:sp>
@@ -7316,47 +7503,8 @@
         </p:nvSpPr>
         <p:spPr>
           <a:xfrm>
-            <a:off x="6035040" y="4096512"/>
-            <a:ext cx="2743200" cy="256032"/>
-          </a:xfrm>
-          <a:prstGeom prst="rect">
-            <a:avLst/>
-          </a:prstGeom>
-          <a:noFill/>
-          <a:ln/>
-        </p:spPr>
-        <p:txBody>
-          <a:bodyPr wrap="square" lIns="0" tIns="0" rIns="0" bIns="0" rtlCol="0" anchor="t"/>
-          <a:lstStyle/>
-          <a:p>
-            <a:pPr indent="0" marL="0">
-              <a:buNone/>
-            </a:pPr>
-            <a:r>
-              <a:rPr lang="en-US" sz="1300" spc="-30" kern="0" dirty="0">
-                <a:solidFill>
-                  <a:srgbClr val="143743"/>
-                </a:solidFill>
-                <a:latin typeface="Arial" pitchFamily="34" charset="0"/>
-                <a:ea typeface="Arial" pitchFamily="34" charset="-122"/>
-                <a:cs typeface="Arial" pitchFamily="34" charset="-120"/>
-              </a:rPr>
-              <a:t>três receitas</a:t>
-            </a:r>
-            <a:endParaRPr lang="en-US" sz="1300" dirty="0"/>
-          </a:p>
-        </p:txBody>
-      </p:sp>
-      <p:sp>
-        <p:nvSpPr>
-          <p:cNvPr id="14" name="Text 12"/>
-          <p:cNvSpPr txBox="1"/>
-          <p:nvPr/>
-        </p:nvSpPr>
-        <p:spPr>
-          <a:xfrm>
-            <a:off x="6035040" y="4261104"/>
-            <a:ext cx="2743200" cy="457200"/>
+            <a:off x="2743200" y="2926080"/>
+            <a:ext cx="2926080" cy="640080"/>
           </a:xfrm>
           <a:prstGeom prst="rect">
             <a:avLst/>
@@ -7383,7 +7531,7 @@
                 <a:ea typeface="Arial" pitchFamily="34" charset="-122"/>
                 <a:cs typeface="Arial" pitchFamily="34" charset="-120"/>
               </a:rPr>
-              <a:t>Destinação + material + crédito. O mesmo quilo nunca é vendido duas vezes.</a:t>
+              <a:t>Leito fluidizado circulante de três zonas (Finep, TRL 4→7): char fino por atrito, potássio reduzido pelo leito, syngas queimado no riser.</a:t>
             </a:r>
             <a:endParaRPr lang="en-US" sz="850" dirty="0"/>
           </a:p>
@@ -7391,13 +7539,378 @@
       </p:sp>
       <p:sp>
         <p:nvSpPr>
+          <p:cNvPr id="14" name="Shape 12"/>
+          <p:cNvSpPr/>
+          <p:nvPr/>
+        </p:nvSpPr>
+        <p:spPr>
+          <a:xfrm>
+            <a:off x="2743200" y="3584448"/>
+            <a:ext cx="2834640" cy="7315"/>
+          </a:xfrm>
+          <a:prstGeom prst="rect">
+            <a:avLst/>
+          </a:prstGeom>
+          <a:solidFill>
+            <a:srgbClr val="1F7370">
+              <a:alpha val="42000"/>
+            </a:srgbClr>
+          </a:solidFill>
+          <a:ln/>
+        </p:spPr>
+      </p:sp>
+      <p:sp>
+        <p:nvSpPr>
           <p:cNvPr id="15" name="Text 13"/>
           <p:cNvSpPr txBox="1"/>
           <p:nvPr/>
         </p:nvSpPr>
         <p:spPr>
           <a:xfrm>
-            <a:off x="365760" y="4626864"/>
+            <a:off x="2743200" y="3657600"/>
+            <a:ext cx="2926080" cy="155448"/>
+          </a:xfrm>
+          <a:prstGeom prst="rect">
+            <a:avLst/>
+          </a:prstGeom>
+          <a:noFill/>
+          <a:ln/>
+        </p:spPr>
+        <p:txBody>
+          <a:bodyPr wrap="square" lIns="0" tIns="0" rIns="0" bIns="0" rtlCol="0" anchor="ctr"/>
+          <a:lstStyle/>
+          <a:p>
+            <a:pPr algn="l" indent="0" marL="0">
+              <a:buNone/>
+            </a:pPr>
+            <a:r>
+              <a:rPr lang="en-US" sz="600" spc="260" kern="0" dirty="0">
+                <a:solidFill>
+                  <a:srgbClr val="1F7370"/>
+                </a:solidFill>
+                <a:latin typeface="Arial" pitchFamily="34" charset="0"/>
+                <a:ea typeface="Arial" pitchFamily="34" charset="-122"/>
+                <a:cs typeface="Arial" pitchFamily="34" charset="-120"/>
+              </a:rPr>
+              <a:t>DESTRAVA</a:t>
+            </a:r>
+            <a:endParaRPr lang="en-US" sz="600" dirty="0"/>
+          </a:p>
+        </p:txBody>
+      </p:sp>
+      <p:sp>
+        <p:nvSpPr>
+          <p:cNvPr id="16" name="Text 14"/>
+          <p:cNvSpPr txBox="1"/>
+          <p:nvPr/>
+        </p:nvSpPr>
+        <p:spPr>
+          <a:xfrm>
+            <a:off x="2743200" y="3803904"/>
+            <a:ext cx="2926080" cy="365760"/>
+          </a:xfrm>
+          <a:prstGeom prst="rect">
+            <a:avLst/>
+          </a:prstGeom>
+          <a:noFill/>
+          <a:ln/>
+        </p:spPr>
+        <p:txBody>
+          <a:bodyPr wrap="square" lIns="0" tIns="0" rIns="0" bIns="0" rtlCol="0" anchor="t"/>
+          <a:lstStyle/>
+          <a:p>
+            <a:pPr indent="0" marL="0">
+              <a:lnSpc>
+                <a:spcPts val="1318"/>
+              </a:lnSpc>
+              <a:buNone/>
+            </a:pPr>
+            <a:r>
+              <a:rPr lang="en-US" sz="850" dirty="0">
+                <a:solidFill>
+                  <a:srgbClr val="143743"/>
+                </a:solidFill>
+                <a:latin typeface="Arial" pitchFamily="34" charset="0"/>
+                <a:ea typeface="Arial" pitchFamily="34" charset="-122"/>
+                <a:cs typeface="Arial" pitchFamily="34" charset="-120"/>
+              </a:rPr>
+              <a:t>o risco de metano resolvido por projeto, não por operação</a:t>
+            </a:r>
+            <a:endParaRPr lang="en-US" sz="850" dirty="0"/>
+          </a:p>
+        </p:txBody>
+      </p:sp>
+      <p:sp>
+        <p:nvSpPr>
+          <p:cNvPr id="17" name="Text 15"/>
+          <p:cNvSpPr txBox="1"/>
+          <p:nvPr/>
+        </p:nvSpPr>
+        <p:spPr>
+          <a:xfrm>
+            <a:off x="6035040" y="3511296"/>
+            <a:ext cx="365760" cy="173736"/>
+          </a:xfrm>
+          <a:prstGeom prst="rect">
+            <a:avLst/>
+          </a:prstGeom>
+          <a:noFill/>
+          <a:ln/>
+        </p:spPr>
+        <p:txBody>
+          <a:bodyPr wrap="square" lIns="0" tIns="0" rIns="0" bIns="0" rtlCol="0" anchor="ctr"/>
+          <a:lstStyle/>
+          <a:p>
+            <a:pPr algn="l" indent="0" marL="0">
+              <a:buNone/>
+            </a:pPr>
+            <a:r>
+              <a:rPr lang="en-US" sz="900" dirty="0">
+                <a:solidFill>
+                  <a:srgbClr val="1F7370"/>
+                </a:solidFill>
+                <a:latin typeface="Courier New" pitchFamily="34" charset="0"/>
+                <a:ea typeface="Courier New" pitchFamily="34" charset="-122"/>
+                <a:cs typeface="Courier New" pitchFamily="34" charset="-120"/>
+              </a:rPr>
+              <a:t>03</a:t>
+            </a:r>
+            <a:endParaRPr lang="en-US" sz="900" dirty="0"/>
+          </a:p>
+        </p:txBody>
+      </p:sp>
+      <p:sp>
+        <p:nvSpPr>
+          <p:cNvPr id="18" name="Text 16"/>
+          <p:cNvSpPr txBox="1"/>
+          <p:nvPr/>
+        </p:nvSpPr>
+        <p:spPr>
+          <a:xfrm>
+            <a:off x="6419088" y="3511296"/>
+            <a:ext cx="2359152" cy="155448"/>
+          </a:xfrm>
+          <a:prstGeom prst="rect">
+            <a:avLst/>
+          </a:prstGeom>
+          <a:noFill/>
+          <a:ln/>
+        </p:spPr>
+        <p:txBody>
+          <a:bodyPr wrap="square" lIns="0" tIns="0" rIns="0" bIns="0" rtlCol="0" anchor="ctr"/>
+          <a:lstStyle/>
+          <a:p>
+            <a:pPr algn="l" indent="0" marL="0">
+              <a:buNone/>
+            </a:pPr>
+            <a:r>
+              <a:rPr lang="en-US" sz="750" spc="260" kern="0" dirty="0">
+                <a:solidFill>
+                  <a:srgbClr val="5B8AAE"/>
+                </a:solidFill>
+                <a:latin typeface="Arial" pitchFamily="34" charset="0"/>
+                <a:ea typeface="Arial" pitchFamily="34" charset="-122"/>
+                <a:cs typeface="Arial" pitchFamily="34" charset="-120"/>
+              </a:rPr>
+              <a:t>VALUE</a:t>
+            </a:r>
+            <a:endParaRPr lang="en-US" sz="750" dirty="0"/>
+          </a:p>
+        </p:txBody>
+      </p:sp>
+      <p:sp>
+        <p:nvSpPr>
+          <p:cNvPr id="19" name="Text 17"/>
+          <p:cNvSpPr txBox="1"/>
+          <p:nvPr/>
+        </p:nvSpPr>
+        <p:spPr>
+          <a:xfrm>
+            <a:off x="6035040" y="3694176"/>
+            <a:ext cx="2743200" cy="256032"/>
+          </a:xfrm>
+          <a:prstGeom prst="rect">
+            <a:avLst/>
+          </a:prstGeom>
+          <a:noFill/>
+          <a:ln/>
+        </p:spPr>
+        <p:txBody>
+          <a:bodyPr wrap="square" lIns="0" tIns="0" rIns="0" bIns="0" rtlCol="0" anchor="t"/>
+          <a:lstStyle/>
+          <a:p>
+            <a:pPr indent="0" marL="0">
+              <a:buNone/>
+            </a:pPr>
+            <a:r>
+              <a:rPr lang="en-US" sz="1300" spc="-30" kern="0" dirty="0">
+                <a:solidFill>
+                  <a:srgbClr val="143743"/>
+                </a:solidFill>
+                <a:latin typeface="Arial" pitchFamily="34" charset="0"/>
+                <a:ea typeface="Arial" pitchFamily="34" charset="-122"/>
+                <a:cs typeface="Arial" pitchFamily="34" charset="-120"/>
+              </a:rPr>
+              <a:t>três receitas</a:t>
+            </a:r>
+            <a:endParaRPr lang="en-US" sz="1300" dirty="0"/>
+          </a:p>
+        </p:txBody>
+      </p:sp>
+      <p:sp>
+        <p:nvSpPr>
+          <p:cNvPr id="20" name="Text 18"/>
+          <p:cNvSpPr txBox="1"/>
+          <p:nvPr/>
+        </p:nvSpPr>
+        <p:spPr>
+          <a:xfrm>
+            <a:off x="6035040" y="3986784"/>
+            <a:ext cx="2743200" cy="384048"/>
+          </a:xfrm>
+          <a:prstGeom prst="rect">
+            <a:avLst/>
+          </a:prstGeom>
+          <a:noFill/>
+          <a:ln/>
+        </p:spPr>
+        <p:txBody>
+          <a:bodyPr wrap="square" lIns="0" tIns="0" rIns="0" bIns="0" rtlCol="0" anchor="t"/>
+          <a:lstStyle/>
+          <a:p>
+            <a:pPr indent="0" marL="0">
+              <a:lnSpc>
+                <a:spcPts val="1318"/>
+              </a:lnSpc>
+              <a:buNone/>
+            </a:pPr>
+            <a:r>
+              <a:rPr lang="en-US" sz="850" dirty="0">
+                <a:solidFill>
+                  <a:srgbClr val="52666B"/>
+                </a:solidFill>
+                <a:latin typeface="Arial" pitchFamily="34" charset="0"/>
+                <a:ea typeface="Arial" pitchFamily="34" charset="-122"/>
+                <a:cs typeface="Arial" pitchFamily="34" charset="-120"/>
+              </a:rPr>
+              <a:t>Destinação, material de construção e crédito de remoção.</a:t>
+            </a:r>
+            <a:endParaRPr lang="en-US" sz="850" dirty="0"/>
+          </a:p>
+        </p:txBody>
+      </p:sp>
+      <p:sp>
+        <p:nvSpPr>
+          <p:cNvPr id="21" name="Shape 19"/>
+          <p:cNvSpPr/>
+          <p:nvPr/>
+        </p:nvSpPr>
+        <p:spPr>
+          <a:xfrm>
+            <a:off x="6035040" y="4425696"/>
+            <a:ext cx="2651760" cy="7315"/>
+          </a:xfrm>
+          <a:prstGeom prst="rect">
+            <a:avLst/>
+          </a:prstGeom>
+          <a:solidFill>
+            <a:srgbClr val="1F7370">
+              <a:alpha val="42000"/>
+            </a:srgbClr>
+          </a:solidFill>
+          <a:ln/>
+        </p:spPr>
+      </p:sp>
+      <p:sp>
+        <p:nvSpPr>
+          <p:cNvPr id="22" name="Text 20"/>
+          <p:cNvSpPr txBox="1"/>
+          <p:nvPr/>
+        </p:nvSpPr>
+        <p:spPr>
+          <a:xfrm>
+            <a:off x="6035040" y="4498848"/>
+            <a:ext cx="2743200" cy="155448"/>
+          </a:xfrm>
+          <a:prstGeom prst="rect">
+            <a:avLst/>
+          </a:prstGeom>
+          <a:noFill/>
+          <a:ln/>
+        </p:spPr>
+        <p:txBody>
+          <a:bodyPr wrap="square" lIns="0" tIns="0" rIns="0" bIns="0" rtlCol="0" anchor="ctr"/>
+          <a:lstStyle/>
+          <a:p>
+            <a:pPr algn="l" indent="0" marL="0">
+              <a:buNone/>
+            </a:pPr>
+            <a:r>
+              <a:rPr lang="en-US" sz="600" spc="260" kern="0" dirty="0">
+                <a:solidFill>
+                  <a:srgbClr val="1F7370"/>
+                </a:solidFill>
+                <a:latin typeface="Arial" pitchFamily="34" charset="0"/>
+                <a:ea typeface="Arial" pitchFamily="34" charset="-122"/>
+                <a:cs typeface="Arial" pitchFamily="34" charset="-120"/>
+              </a:rPr>
+              <a:t>DESTRAVA</a:t>
+            </a:r>
+            <a:endParaRPr lang="en-US" sz="600" dirty="0"/>
+          </a:p>
+        </p:txBody>
+      </p:sp>
+      <p:sp>
+        <p:nvSpPr>
+          <p:cNvPr id="23" name="Text 21"/>
+          <p:cNvSpPr txBox="1"/>
+          <p:nvPr/>
+        </p:nvSpPr>
+        <p:spPr>
+          <a:xfrm>
+            <a:off x="6035040" y="4645152"/>
+            <a:ext cx="2743200" cy="365760"/>
+          </a:xfrm>
+          <a:prstGeom prst="rect">
+            <a:avLst/>
+          </a:prstGeom>
+          <a:noFill/>
+          <a:ln/>
+        </p:spPr>
+        <p:txBody>
+          <a:bodyPr wrap="square" lIns="0" tIns="0" rIns="0" bIns="0" rtlCol="0" anchor="t"/>
+          <a:lstStyle/>
+          <a:p>
+            <a:pPr indent="0" marL="0">
+              <a:lnSpc>
+                <a:spcPts val="1318"/>
+              </a:lnSpc>
+              <a:buNone/>
+            </a:pPr>
+            <a:r>
+              <a:rPr lang="en-US" sz="850" dirty="0">
+                <a:solidFill>
+                  <a:srgbClr val="143743"/>
+                </a:solidFill>
+                <a:latin typeface="Arial" pitchFamily="34" charset="0"/>
+                <a:ea typeface="Arial" pitchFamily="34" charset="-122"/>
+                <a:cs typeface="Arial" pitchFamily="34" charset="-120"/>
+              </a:rPr>
+              <a:t>o resíduo paga antes do primeiro crédito</a:t>
+            </a:r>
+            <a:endParaRPr lang="en-US" sz="850" dirty="0"/>
+          </a:p>
+        </p:txBody>
+      </p:sp>
+      <p:sp>
+        <p:nvSpPr>
+          <p:cNvPr id="24" name="Text 22"/>
+          <p:cNvSpPr txBox="1"/>
+          <p:nvPr/>
+        </p:nvSpPr>
+        <p:spPr>
+          <a:xfrm>
+            <a:off x="365760" y="4974336"/>
             <a:ext cx="3657600" cy="155448"/>
           </a:xfrm>
           <a:prstGeom prst="rect">
@@ -7430,14 +7943,14 @@
       </p:sp>
       <p:sp>
         <p:nvSpPr>
-          <p:cNvPr id="16" name="Text 14"/>
-          <p:cNvSpPr txBox="1"/>
-          <p:nvPr/>
-        </p:nvSpPr>
-        <p:spPr>
-          <a:xfrm>
-            <a:off x="4572000" y="4626864"/>
-            <a:ext cx="4206240" cy="155448"/>
+          <p:cNvPr id="25" name="Text 23"/>
+          <p:cNvSpPr txBox="1"/>
+          <p:nvPr/>
+        </p:nvSpPr>
+        <p:spPr>
+          <a:xfrm>
+            <a:off x="4937760" y="4974336"/>
+            <a:ext cx="3749040" cy="155448"/>
           </a:xfrm>
           <a:prstGeom prst="rect">
             <a:avLst/>
@@ -7461,7 +7974,7 @@
                 <a:ea typeface="Arial" pitchFamily="34" charset="-122"/>
                 <a:cs typeface="Arial" pitchFamily="34" charset="-120"/>
               </a:rPr>
-              <a:t>NENHUMA PLANTA LATINO-AMERICANA PRODUZ CHAR DE ESPECIFICAÇÃO PARA CONSTRUÇÃO</a:t>
+              <a:t>NENHUMA PLANTA LATINO-AMERICANA PRODUZ CHAR DE ESPECIFICAÇÃO</a:t>
             </a:r>
             <a:endParaRPr lang="en-US" sz="750" dirty="0"/>
           </a:p>
@@ -8386,7 +8899,7 @@
                 <a:ea typeface="Arial" pitchFamily="34" charset="-122"/>
                 <a:cs typeface="Arial" pitchFamily="34" charset="-120"/>
               </a:rPr>
-              <a:t>04 / CAPEX</a:t>
+              <a:t>04 / CAPEX DA POC</a:t>
             </a:r>
             <a:endParaRPr lang="en-US" sz="750" dirty="0"/>
           </a:p>
@@ -8400,7 +8913,7 @@
         </p:nvSpPr>
         <p:spPr>
           <a:xfrm>
-            <a:off x="457200" y="822960"/>
+            <a:off x="457200" y="786384"/>
             <a:ext cx="4937760" cy="700024"/>
           </a:xfrm>
           <a:prstGeom prst="rect">
@@ -8462,7 +8975,7 @@
         </p:nvSpPr>
         <p:spPr>
           <a:xfrm>
-            <a:off x="384048" y="1627632"/>
+            <a:off x="384048" y="1572768"/>
             <a:ext cx="2743200" cy="1584960"/>
           </a:xfrm>
           <a:prstGeom prst="rect">
@@ -8501,7 +9014,7 @@
         </p:nvSpPr>
         <p:spPr>
           <a:xfrm>
-            <a:off x="1975104" y="2304288"/>
+            <a:off x="1975104" y="2249424"/>
             <a:ext cx="1097280" cy="420624"/>
           </a:xfrm>
           <a:prstGeom prst="rect">
@@ -8534,25 +9047,42 @@
       </p:sp>
       <p:sp>
         <p:nvSpPr>
-          <p:cNvPr id="6" name="Shape 4"/>
-          <p:cNvSpPr/>
-          <p:nvPr/>
-        </p:nvSpPr>
-        <p:spPr>
-          <a:xfrm>
-            <a:off x="457200" y="3529584"/>
-            <a:ext cx="1410789" cy="68580"/>
-          </a:xfrm>
-          <a:prstGeom prst="rect">
-            <a:avLst/>
-          </a:prstGeom>
-          <a:solidFill>
-            <a:srgbClr val="7AA8C9">
-              <a:alpha val="80000"/>
-            </a:srgbClr>
-          </a:solidFill>
-          <a:ln/>
-        </p:spPr>
+          <p:cNvPr id="6" name="Text 4"/>
+          <p:cNvSpPr txBox="1"/>
+          <p:nvPr/>
+        </p:nvSpPr>
+        <p:spPr>
+          <a:xfrm>
+            <a:off x="475488" y="2852928"/>
+            <a:ext cx="2743200" cy="155448"/>
+          </a:xfrm>
+          <a:prstGeom prst="rect">
+            <a:avLst/>
+          </a:prstGeom>
+          <a:noFill/>
+          <a:ln/>
+        </p:spPr>
+        <p:txBody>
+          <a:bodyPr wrap="square" lIns="0" tIns="0" rIns="0" bIns="0" rtlCol="0" anchor="ctr"/>
+          <a:lstStyle/>
+          <a:p>
+            <a:pPr algn="l" indent="0" marL="0">
+              <a:buNone/>
+            </a:pPr>
+            <a:r>
+              <a:rPr lang="en-US" sz="750" spc="260" kern="0" dirty="0">
+                <a:solidFill>
+                  <a:srgbClr val="1F7370"/>
+                </a:solidFill>
+                <a:latin typeface="Arial" pitchFamily="34" charset="0"/>
+                <a:ea typeface="Arial" pitchFamily="34" charset="-122"/>
+                <a:cs typeface="Arial" pitchFamily="34" charset="-120"/>
+              </a:rPr>
+              <a:t>CAPEX TOTAL DA POC</a:t>
+            </a:r>
+            <a:endParaRPr lang="en-US" sz="750" dirty="0"/>
+          </a:p>
+        </p:txBody>
       </p:sp>
       <p:sp>
         <p:nvSpPr>
@@ -8562,24 +9092,24 @@
         </p:nvSpPr>
         <p:spPr>
           <a:xfrm>
-            <a:off x="457200" y="3675888"/>
-            <a:ext cx="1410789" cy="155448"/>
-          </a:xfrm>
-          <a:prstGeom prst="rect">
-            <a:avLst/>
-          </a:prstGeom>
-          <a:noFill/>
-          <a:ln/>
-        </p:spPr>
-        <p:txBody>
-          <a:bodyPr wrap="square" lIns="0" tIns="0" rIns="0" bIns="0" rtlCol="0" anchor="ctr"/>
-          <a:lstStyle/>
-          <a:p>
-            <a:pPr algn="l" indent="0" marL="0">
-              <a:buNone/>
-            </a:pPr>
-            <a:r>
-              <a:rPr lang="en-US" sz="680" spc="260" kern="0" dirty="0">
+            <a:off x="530352" y="3236976"/>
+            <a:ext cx="914400" cy="155448"/>
+          </a:xfrm>
+          <a:prstGeom prst="rect">
+            <a:avLst/>
+          </a:prstGeom>
+          <a:noFill/>
+          <a:ln/>
+        </p:spPr>
+        <p:txBody>
+          <a:bodyPr wrap="square" lIns="0" tIns="0" rIns="0" bIns="0" rtlCol="0" anchor="ctr"/>
+          <a:lstStyle/>
+          <a:p>
+            <a:pPr algn="l" indent="0" marL="0">
+              <a:buNone/>
+            </a:pPr>
+            <a:r>
+              <a:rPr lang="en-US" sz="700" spc="260" kern="0" dirty="0">
                 <a:solidFill>
                   <a:srgbClr val="5B8AAE"/>
                 </a:solidFill>
@@ -8587,9 +9117,9 @@
                 <a:ea typeface="Arial" pitchFamily="34" charset="-122"/>
                 <a:cs typeface="Arial" pitchFamily="34" charset="-120"/>
               </a:rPr>
-              <a:t>MODELAGEM, SIMULAÇÃO E PROJETO</a:t>
-            </a:r>
-            <a:endParaRPr lang="en-US" sz="680" dirty="0"/>
+              <a:t>WP1</a:t>
+            </a:r>
+            <a:endParaRPr lang="en-US" sz="700" dirty="0"/>
           </a:p>
         </p:txBody>
       </p:sp>
@@ -8601,24 +9131,24 @@
         </p:nvSpPr>
         <p:spPr>
           <a:xfrm>
-            <a:off x="457200" y="3218688"/>
-            <a:ext cx="1097280" cy="237744"/>
-          </a:xfrm>
-          <a:prstGeom prst="rect">
-            <a:avLst/>
-          </a:prstGeom>
-          <a:noFill/>
-          <a:ln/>
-        </p:spPr>
-        <p:txBody>
-          <a:bodyPr wrap="square" lIns="0" tIns="0" rIns="0" bIns="0" rtlCol="0" anchor="ctr"/>
-          <a:lstStyle/>
-          <a:p>
-            <a:pPr indent="0" marL="0">
-              <a:buNone/>
-            </a:pPr>
-            <a:r>
-              <a:rPr lang="en-US" sz="1200" dirty="0">
+            <a:off x="530352" y="3419856"/>
+            <a:ext cx="1280160" cy="173736"/>
+          </a:xfrm>
+          <a:prstGeom prst="rect">
+            <a:avLst/>
+          </a:prstGeom>
+          <a:noFill/>
+          <a:ln/>
+        </p:spPr>
+        <p:txBody>
+          <a:bodyPr wrap="square" lIns="0" tIns="0" rIns="0" bIns="0" rtlCol="0" anchor="ctr"/>
+          <a:lstStyle/>
+          <a:p>
+            <a:pPr algn="l" indent="0" marL="0">
+              <a:buNone/>
+            </a:pPr>
+            <a:r>
+              <a:rPr lang="en-US" sz="1100" dirty="0">
                 <a:solidFill>
                   <a:srgbClr val="143743"/>
                 </a:solidFill>
@@ -8626,31 +9156,50 @@
                 <a:ea typeface="Courier New" pitchFamily="34" charset="-122"/>
                 <a:cs typeface="Courier New" pitchFamily="34" charset="-120"/>
               </a:rPr>
-              <a:t>2,2</a:t>
-            </a:r>
-            <a:endParaRPr lang="en-US" sz="1200" dirty="0"/>
-          </a:p>
-        </p:txBody>
-      </p:sp>
-      <p:sp>
-        <p:nvSpPr>
-          <p:cNvPr id="9" name="Shape 7"/>
-          <p:cNvSpPr/>
-          <p:nvPr/>
-        </p:nvSpPr>
-        <p:spPr>
-          <a:xfrm>
-            <a:off x="1895421" y="3529584"/>
-            <a:ext cx="3499539" cy="68580"/>
-          </a:xfrm>
-          <a:prstGeom prst="rect">
-            <a:avLst/>
-          </a:prstGeom>
-          <a:solidFill>
-            <a:srgbClr val="1F7370"/>
-          </a:solidFill>
-          <a:ln/>
-        </p:spPr>
+              <a:t>2,2 M</a:t>
+            </a:r>
+            <a:endParaRPr lang="en-US" sz="1100" dirty="0"/>
+          </a:p>
+        </p:txBody>
+      </p:sp>
+      <p:sp>
+        <p:nvSpPr>
+          <p:cNvPr id="9" name="Text 7"/>
+          <p:cNvSpPr txBox="1"/>
+          <p:nvPr/>
+        </p:nvSpPr>
+        <p:spPr>
+          <a:xfrm>
+            <a:off x="530352" y="3657600"/>
+            <a:ext cx="1395113" cy="155448"/>
+          </a:xfrm>
+          <a:prstGeom prst="rect">
+            <a:avLst/>
+          </a:prstGeom>
+          <a:noFill/>
+          <a:ln/>
+        </p:spPr>
+        <p:txBody>
+          <a:bodyPr wrap="square" lIns="0" tIns="0" rIns="0" bIns="0" rtlCol="0" anchor="ctr"/>
+          <a:lstStyle/>
+          <a:p>
+            <a:pPr algn="l" indent="0" marL="0">
+              <a:buNone/>
+            </a:pPr>
+            <a:r>
+              <a:rPr lang="en-US" sz="620" spc="260" kern="0" dirty="0">
+                <a:solidFill>
+                  <a:srgbClr val="5B8AAE"/>
+                </a:solidFill>
+                <a:latin typeface="Arial" pitchFamily="34" charset="0"/>
+                <a:ea typeface="Arial" pitchFamily="34" charset="-122"/>
+                <a:cs typeface="Arial" pitchFamily="34" charset="-120"/>
+              </a:rPr>
+              <a:t>MODELAGEM, SIMULAÇÃO E PROJETO</a:t>
+            </a:r>
+            <a:endParaRPr lang="en-US" sz="620" dirty="0"/>
+          </a:p>
+        </p:txBody>
       </p:sp>
       <p:sp>
         <p:nvSpPr>
@@ -8660,24 +9209,24 @@
         </p:nvSpPr>
         <p:spPr>
           <a:xfrm>
-            <a:off x="1895421" y="3675888"/>
-            <a:ext cx="3499539" cy="155448"/>
-          </a:xfrm>
-          <a:prstGeom prst="rect">
-            <a:avLst/>
-          </a:prstGeom>
-          <a:noFill/>
-          <a:ln/>
-        </p:spPr>
-        <p:txBody>
-          <a:bodyPr wrap="square" lIns="0" tIns="0" rIns="0" bIns="0" rtlCol="0" anchor="ctr"/>
-          <a:lstStyle/>
-          <a:p>
-            <a:pPr algn="l" indent="0" marL="0">
-              <a:buNone/>
-            </a:pPr>
-            <a:r>
-              <a:rPr lang="en-US" sz="680" spc="260" kern="0" dirty="0">
+            <a:off x="2108345" y="3236976"/>
+            <a:ext cx="914400" cy="155448"/>
+          </a:xfrm>
+          <a:prstGeom prst="rect">
+            <a:avLst/>
+          </a:prstGeom>
+          <a:noFill/>
+          <a:ln/>
+        </p:spPr>
+        <p:txBody>
+          <a:bodyPr wrap="square" lIns="0" tIns="0" rIns="0" bIns="0" rtlCol="0" anchor="ctr"/>
+          <a:lstStyle/>
+          <a:p>
+            <a:pPr algn="l" indent="0" marL="0">
+              <a:buNone/>
+            </a:pPr>
+            <a:r>
+              <a:rPr lang="en-US" sz="700" spc="260" kern="0" dirty="0">
                 <a:solidFill>
                   <a:srgbClr val="1F7370"/>
                 </a:solidFill>
@@ -8685,9 +9234,9 @@
                 <a:ea typeface="Arial" pitchFamily="34" charset="-122"/>
                 <a:cs typeface="Arial" pitchFamily="34" charset="-120"/>
               </a:rPr>
-              <a:t>CONSTRUÇÃO E MONTAGEM DO PILOTO</a:t>
-            </a:r>
-            <a:endParaRPr lang="en-US" sz="680" dirty="0"/>
+              <a:t>WP2</a:t>
+            </a:r>
+            <a:endParaRPr lang="en-US" sz="700" dirty="0"/>
           </a:p>
         </p:txBody>
       </p:sp>
@@ -8699,24 +9248,24 @@
         </p:nvSpPr>
         <p:spPr>
           <a:xfrm>
-            <a:off x="1895421" y="3218688"/>
-            <a:ext cx="1097280" cy="237744"/>
-          </a:xfrm>
-          <a:prstGeom prst="rect">
-            <a:avLst/>
-          </a:prstGeom>
-          <a:noFill/>
-          <a:ln/>
-        </p:spPr>
-        <p:txBody>
-          <a:bodyPr wrap="square" lIns="0" tIns="0" rIns="0" bIns="0" rtlCol="0" anchor="ctr"/>
-          <a:lstStyle/>
-          <a:p>
-            <a:pPr indent="0" marL="0">
-              <a:buNone/>
-            </a:pPr>
-            <a:r>
-              <a:rPr lang="en-US" sz="1200" dirty="0">
+            <a:off x="2108345" y="3419856"/>
+            <a:ext cx="1280160" cy="173736"/>
+          </a:xfrm>
+          <a:prstGeom prst="rect">
+            <a:avLst/>
+          </a:prstGeom>
+          <a:noFill/>
+          <a:ln/>
+        </p:spPr>
+        <p:txBody>
+          <a:bodyPr wrap="square" lIns="0" tIns="0" rIns="0" bIns="0" rtlCol="0" anchor="ctr"/>
+          <a:lstStyle/>
+          <a:p>
+            <a:pPr algn="l" indent="0" marL="0">
+              <a:buNone/>
+            </a:pPr>
+            <a:r>
+              <a:rPr lang="en-US" sz="1100" dirty="0">
                 <a:solidFill>
                   <a:srgbClr val="143743"/>
                 </a:solidFill>
@@ -8724,9 +9273,9 @@
                 <a:ea typeface="Courier New" pitchFamily="34" charset="-122"/>
                 <a:cs typeface="Courier New" pitchFamily="34" charset="-120"/>
               </a:rPr>
-              <a:t>5,5</a:t>
-            </a:r>
-            <a:endParaRPr lang="en-US" sz="1200" dirty="0"/>
+              <a:t>5,5 M</a:t>
+            </a:r>
+            <a:endParaRPr lang="en-US" sz="1100" dirty="0"/>
           </a:p>
         </p:txBody>
       </p:sp>
@@ -8738,63 +9287,24 @@
         </p:nvSpPr>
         <p:spPr>
           <a:xfrm>
-            <a:off x="457200" y="3877056"/>
-            <a:ext cx="1097280" cy="155448"/>
-          </a:xfrm>
-          <a:prstGeom prst="rect">
-            <a:avLst/>
-          </a:prstGeom>
-          <a:noFill/>
-          <a:ln/>
-        </p:spPr>
-        <p:txBody>
-          <a:bodyPr wrap="square" lIns="0" tIns="0" rIns="0" bIns="0" rtlCol="0" anchor="ctr"/>
-          <a:lstStyle/>
-          <a:p>
-            <a:pPr algn="l" indent="0" marL="0">
-              <a:buNone/>
-            </a:pPr>
-            <a:r>
-              <a:rPr lang="en-US" sz="750" spc="260" kern="0" dirty="0">
-                <a:solidFill>
-                  <a:srgbClr val="7AA8C9"/>
-                </a:solidFill>
-                <a:latin typeface="Arial" pitchFamily="34" charset="0"/>
-                <a:ea typeface="Arial" pitchFamily="34" charset="-122"/>
-                <a:cs typeface="Arial" pitchFamily="34" charset="-120"/>
-              </a:rPr>
-              <a:t>WP1</a:t>
-            </a:r>
-            <a:endParaRPr lang="en-US" sz="750" dirty="0"/>
-          </a:p>
-        </p:txBody>
-      </p:sp>
-      <p:sp>
-        <p:nvSpPr>
-          <p:cNvPr id="13" name="Text 11"/>
-          <p:cNvSpPr txBox="1"/>
-          <p:nvPr/>
-        </p:nvSpPr>
-        <p:spPr>
-          <a:xfrm>
-            <a:off x="1895421" y="3877056"/>
-            <a:ext cx="1097280" cy="155448"/>
-          </a:xfrm>
-          <a:prstGeom prst="rect">
-            <a:avLst/>
-          </a:prstGeom>
-          <a:noFill/>
-          <a:ln/>
-        </p:spPr>
-        <p:txBody>
-          <a:bodyPr wrap="square" lIns="0" tIns="0" rIns="0" bIns="0" rtlCol="0" anchor="ctr"/>
-          <a:lstStyle/>
-          <a:p>
-            <a:pPr algn="l" indent="0" marL="0">
-              <a:buNone/>
-            </a:pPr>
-            <a:r>
-              <a:rPr lang="en-US" sz="750" spc="260" kern="0" dirty="0">
+            <a:off x="2108345" y="3657600"/>
+            <a:ext cx="3670663" cy="155448"/>
+          </a:xfrm>
+          <a:prstGeom prst="rect">
+            <a:avLst/>
+          </a:prstGeom>
+          <a:noFill/>
+          <a:ln/>
+        </p:spPr>
+        <p:txBody>
+          <a:bodyPr wrap="square" lIns="0" tIns="0" rIns="0" bIns="0" rtlCol="0" anchor="ctr"/>
+          <a:lstStyle/>
+          <a:p>
+            <a:pPr algn="l" indent="0" marL="0">
+              <a:buNone/>
+            </a:pPr>
+            <a:r>
+              <a:rPr lang="en-US" sz="620" spc="260" kern="0" dirty="0">
                 <a:solidFill>
                   <a:srgbClr val="1F7370"/>
                 </a:solidFill>
@@ -8802,11 +9312,33 @@
                 <a:ea typeface="Arial" pitchFamily="34" charset="-122"/>
                 <a:cs typeface="Arial" pitchFamily="34" charset="-120"/>
               </a:rPr>
-              <a:t>WP2</a:t>
-            </a:r>
-            <a:endParaRPr lang="en-US" sz="750" dirty="0"/>
-          </a:p>
-        </p:txBody>
+              <a:t>CONSTRUÇÃO E MONTAGEM DO PILOTO</a:t>
+            </a:r>
+            <a:endParaRPr lang="en-US" sz="620" dirty="0"/>
+          </a:p>
+        </p:txBody>
+      </p:sp>
+      <p:sp>
+        <p:nvSpPr>
+          <p:cNvPr id="13" name="Shape 11"/>
+          <p:cNvSpPr/>
+          <p:nvPr/>
+        </p:nvSpPr>
+        <p:spPr>
+          <a:xfrm>
+            <a:off x="457200" y="4133088"/>
+            <a:ext cx="1688592" cy="7315"/>
+          </a:xfrm>
+          <a:prstGeom prst="rect">
+            <a:avLst/>
+          </a:prstGeom>
+          <a:solidFill>
+            <a:srgbClr val="5B8AAE">
+              <a:alpha val="38000"/>
+            </a:srgbClr>
+          </a:solidFill>
+          <a:ln/>
+        </p:spPr>
       </p:sp>
       <p:sp>
         <p:nvSpPr>
@@ -8816,24 +9348,24 @@
         </p:nvSpPr>
         <p:spPr>
           <a:xfrm>
-            <a:off x="457200" y="4315968"/>
-            <a:ext cx="1521562" cy="155448"/>
-          </a:xfrm>
-          <a:prstGeom prst="rect">
-            <a:avLst/>
-          </a:prstGeom>
-          <a:noFill/>
-          <a:ln/>
-        </p:spPr>
-        <p:txBody>
-          <a:bodyPr wrap="square" lIns="0" tIns="0" rIns="0" bIns="0" rtlCol="0" anchor="ctr"/>
-          <a:lstStyle/>
-          <a:p>
-            <a:pPr algn="l" indent="0" marL="0">
-              <a:buNone/>
-            </a:pPr>
-            <a:r>
-              <a:rPr lang="en-US" sz="680" spc="260" kern="0" dirty="0">
+            <a:off x="457200" y="4206240"/>
+            <a:ext cx="1670304" cy="155448"/>
+          </a:xfrm>
+          <a:prstGeom prst="rect">
+            <a:avLst/>
+          </a:prstGeom>
+          <a:noFill/>
+          <a:ln/>
+        </p:spPr>
+        <p:txBody>
+          <a:bodyPr wrap="square" lIns="0" tIns="0" rIns="0" bIns="0" rtlCol="0" anchor="ctr"/>
+          <a:lstStyle/>
+          <a:p>
+            <a:pPr algn="l" indent="0" marL="0">
+              <a:buNone/>
+            </a:pPr>
+            <a:r>
+              <a:rPr lang="en-US" sz="650" spc="260" kern="0" dirty="0">
                 <a:solidFill>
                   <a:srgbClr val="5B8AAE"/>
                 </a:solidFill>
@@ -8843,7 +9375,7 @@
               </a:rPr>
               <a:t>POR T DE CAPACIDADE</a:t>
             </a:r>
-            <a:endParaRPr lang="en-US" sz="680" dirty="0"/>
+            <a:endParaRPr lang="en-US" sz="650" dirty="0"/>
           </a:p>
         </p:txBody>
       </p:sp>
@@ -8855,26 +9387,26 @@
         </p:nvSpPr>
         <p:spPr>
           <a:xfrm>
-            <a:off x="1920240" y="4315968"/>
-            <a:ext cx="1463040" cy="173736"/>
-          </a:xfrm>
-          <a:prstGeom prst="rect">
-            <a:avLst/>
-          </a:prstGeom>
-          <a:noFill/>
-          <a:ln/>
-        </p:spPr>
-        <p:txBody>
-          <a:bodyPr wrap="square" lIns="0" tIns="0" rIns="0" bIns="0" rtlCol="0" anchor="ctr"/>
-          <a:lstStyle/>
-          <a:p>
-            <a:pPr algn="r" indent="0" marL="0">
-              <a:buNone/>
-            </a:pPr>
-            <a:r>
-              <a:rPr lang="en-US" sz="760" dirty="0">
-                <a:solidFill>
-                  <a:srgbClr val="7AA8C9"/>
+            <a:off x="457200" y="4370832"/>
+            <a:ext cx="1652016" cy="173736"/>
+          </a:xfrm>
+          <a:prstGeom prst="rect">
+            <a:avLst/>
+          </a:prstGeom>
+          <a:noFill/>
+          <a:ln/>
+        </p:spPr>
+        <p:txBody>
+          <a:bodyPr wrap="square" lIns="0" tIns="0" rIns="0" bIns="0" rtlCol="0" anchor="ctr"/>
+          <a:lstStyle/>
+          <a:p>
+            <a:pPr algn="l" indent="0" marL="0">
+              <a:buNone/>
+            </a:pPr>
+            <a:r>
+              <a:rPr lang="en-US" sz="900" dirty="0">
+                <a:solidFill>
+                  <a:srgbClr val="143743"/>
                 </a:solidFill>
                 <a:latin typeface="Courier New" pitchFamily="34" charset="0"/>
                 <a:ea typeface="Courier New" pitchFamily="34" charset="-122"/>
@@ -8882,36 +9414,58 @@
               </a:rPr>
               <a:t>R$ 9.506/t</a:t>
             </a:r>
-            <a:endParaRPr lang="en-US" sz="760" dirty="0"/>
-          </a:p>
-        </p:txBody>
-      </p:sp>
-      <p:sp>
-        <p:nvSpPr>
-          <p:cNvPr id="16" name="Text 14"/>
-          <p:cNvSpPr txBox="1"/>
-          <p:nvPr/>
-        </p:nvSpPr>
-        <p:spPr>
-          <a:xfrm>
-            <a:off x="457200" y="4530852"/>
-            <a:ext cx="1521562" cy="155448"/>
-          </a:xfrm>
-          <a:prstGeom prst="rect">
-            <a:avLst/>
-          </a:prstGeom>
-          <a:noFill/>
-          <a:ln/>
-        </p:spPr>
-        <p:txBody>
-          <a:bodyPr wrap="square" lIns="0" tIns="0" rIns="0" bIns="0" rtlCol="0" anchor="ctr"/>
-          <a:lstStyle/>
-          <a:p>
-            <a:pPr algn="l" indent="0" marL="0">
-              <a:buNone/>
-            </a:pPr>
-            <a:r>
-              <a:rPr lang="en-US" sz="680" spc="260" kern="0" dirty="0">
+            <a:endParaRPr lang="en-US" sz="900" dirty="0"/>
+          </a:p>
+        </p:txBody>
+      </p:sp>
+      <p:sp>
+        <p:nvSpPr>
+          <p:cNvPr id="16" name="Shape 14"/>
+          <p:cNvSpPr/>
+          <p:nvPr/>
+        </p:nvSpPr>
+        <p:spPr>
+          <a:xfrm>
+            <a:off x="2255520" y="4133088"/>
+            <a:ext cx="1688592" cy="7315"/>
+          </a:xfrm>
+          <a:prstGeom prst="rect">
+            <a:avLst/>
+          </a:prstGeom>
+          <a:solidFill>
+            <a:srgbClr val="5B8AAE">
+              <a:alpha val="38000"/>
+            </a:srgbClr>
+          </a:solidFill>
+          <a:ln/>
+        </p:spPr>
+      </p:sp>
+      <p:sp>
+        <p:nvSpPr>
+          <p:cNvPr id="17" name="Text 15"/>
+          <p:cNvSpPr txBox="1"/>
+          <p:nvPr/>
+        </p:nvSpPr>
+        <p:spPr>
+          <a:xfrm>
+            <a:off x="2255520" y="4206240"/>
+            <a:ext cx="1670304" cy="155448"/>
+          </a:xfrm>
+          <a:prstGeom prst="rect">
+            <a:avLst/>
+          </a:prstGeom>
+          <a:noFill/>
+          <a:ln/>
+        </p:spPr>
+        <p:txBody>
+          <a:bodyPr wrap="square" lIns="0" tIns="0" rIns="0" bIns="0" rtlCol="0" anchor="ctr"/>
+          <a:lstStyle/>
+          <a:p>
+            <a:pPr algn="l" indent="0" marL="0">
+              <a:buNone/>
+            </a:pPr>
+            <a:r>
+              <a:rPr lang="en-US" sz="650" spc="260" kern="0" dirty="0">
                 <a:solidFill>
                   <a:srgbClr val="5B8AAE"/>
                 </a:solidFill>
@@ -8921,38 +9475,38 @@
               </a:rPr>
               <a:t>PRECISÃO</a:t>
             </a:r>
-            <a:endParaRPr lang="en-US" sz="680" dirty="0"/>
-          </a:p>
-        </p:txBody>
-      </p:sp>
-      <p:sp>
-        <p:nvSpPr>
-          <p:cNvPr id="17" name="Text 15"/>
-          <p:cNvSpPr txBox="1"/>
-          <p:nvPr/>
-        </p:nvSpPr>
-        <p:spPr>
-          <a:xfrm>
-            <a:off x="1920240" y="4530852"/>
-            <a:ext cx="1463040" cy="173736"/>
-          </a:xfrm>
-          <a:prstGeom prst="rect">
-            <a:avLst/>
-          </a:prstGeom>
-          <a:noFill/>
-          <a:ln/>
-        </p:spPr>
-        <p:txBody>
-          <a:bodyPr wrap="square" lIns="0" tIns="0" rIns="0" bIns="0" rtlCol="0" anchor="ctr"/>
-          <a:lstStyle/>
-          <a:p>
-            <a:pPr algn="r" indent="0" marL="0">
-              <a:buNone/>
-            </a:pPr>
-            <a:r>
-              <a:rPr lang="en-US" sz="760" dirty="0">
-                <a:solidFill>
-                  <a:srgbClr val="7AA8C9"/>
+            <a:endParaRPr lang="en-US" sz="650" dirty="0"/>
+          </a:p>
+        </p:txBody>
+      </p:sp>
+      <p:sp>
+        <p:nvSpPr>
+          <p:cNvPr id="18" name="Text 16"/>
+          <p:cNvSpPr txBox="1"/>
+          <p:nvPr/>
+        </p:nvSpPr>
+        <p:spPr>
+          <a:xfrm>
+            <a:off x="2255520" y="4370832"/>
+            <a:ext cx="1652016" cy="173736"/>
+          </a:xfrm>
+          <a:prstGeom prst="rect">
+            <a:avLst/>
+          </a:prstGeom>
+          <a:noFill/>
+          <a:ln/>
+        </p:spPr>
+        <p:txBody>
+          <a:bodyPr wrap="square" lIns="0" tIns="0" rIns="0" bIns="0" rtlCol="0" anchor="ctr"/>
+          <a:lstStyle/>
+          <a:p>
+            <a:pPr algn="l" indent="0" marL="0">
+              <a:buNone/>
+            </a:pPr>
+            <a:r>
+              <a:rPr lang="en-US" sz="900" dirty="0">
+                <a:solidFill>
+                  <a:srgbClr val="143743"/>
                 </a:solidFill>
                 <a:latin typeface="Courier New" pitchFamily="34" charset="0"/>
                 <a:ea typeface="Courier New" pitchFamily="34" charset="-122"/>
@@ -8960,55 +9514,152 @@
               </a:rPr>
               <a:t>AACE 4 · −30/+50%</a:t>
             </a:r>
-            <a:endParaRPr lang="en-US" sz="760" dirty="0"/>
-          </a:p>
-        </p:txBody>
-      </p:sp>
-      <p:sp>
-        <p:nvSpPr>
-          <p:cNvPr id="18" name="Text 16"/>
+            <a:endParaRPr lang="en-US" sz="900" dirty="0"/>
+          </a:p>
+        </p:txBody>
+      </p:sp>
+      <p:sp>
+        <p:nvSpPr>
+          <p:cNvPr id="19" name="Shape 17"/>
+          <p:cNvSpPr/>
+          <p:nvPr/>
+        </p:nvSpPr>
+        <p:spPr>
+          <a:xfrm>
+            <a:off x="4053840" y="4133088"/>
+            <a:ext cx="1688592" cy="7315"/>
+          </a:xfrm>
+          <a:prstGeom prst="rect">
+            <a:avLst/>
+          </a:prstGeom>
+          <a:solidFill>
+            <a:srgbClr val="5B8AAE">
+              <a:alpha val="38000"/>
+            </a:srgbClr>
+          </a:solidFill>
+          <a:ln/>
+        </p:spPr>
+      </p:sp>
+      <p:sp>
+        <p:nvSpPr>
+          <p:cNvPr id="20" name="Text 18"/>
+          <p:cNvSpPr txBox="1"/>
+          <p:nvPr/>
+        </p:nvSpPr>
+        <p:spPr>
+          <a:xfrm>
+            <a:off x="4053840" y="4206240"/>
+            <a:ext cx="1670304" cy="155448"/>
+          </a:xfrm>
+          <a:prstGeom prst="rect">
+            <a:avLst/>
+          </a:prstGeom>
+          <a:noFill/>
+          <a:ln/>
+        </p:spPr>
+        <p:txBody>
+          <a:bodyPr wrap="square" lIns="0" tIns="0" rIns="0" bIns="0" rtlCol="0" anchor="ctr"/>
+          <a:lstStyle/>
+          <a:p>
+            <a:pPr algn="l" indent="0" marL="0">
+              <a:buNone/>
+            </a:pPr>
+            <a:r>
+              <a:rPr lang="en-US" sz="650" spc="260" kern="0" dirty="0">
+                <a:solidFill>
+                  <a:srgbClr val="5B8AAE"/>
+                </a:solidFill>
+                <a:latin typeface="Arial" pitchFamily="34" charset="0"/>
+                <a:ea typeface="Arial" pitchFamily="34" charset="-122"/>
+                <a:cs typeface="Arial" pitchFamily="34" charset="-120"/>
+              </a:rPr>
+              <a:t>FRONTEIRA</a:t>
+            </a:r>
+            <a:endParaRPr lang="en-US" sz="650" dirty="0"/>
+          </a:p>
+        </p:txBody>
+      </p:sp>
+      <p:sp>
+        <p:nvSpPr>
+          <p:cNvPr id="21" name="Text 19"/>
+          <p:cNvSpPr txBox="1"/>
+          <p:nvPr/>
+        </p:nvSpPr>
+        <p:spPr>
+          <a:xfrm>
+            <a:off x="4053840" y="4370832"/>
+            <a:ext cx="1652016" cy="173736"/>
+          </a:xfrm>
+          <a:prstGeom prst="rect">
+            <a:avLst/>
+          </a:prstGeom>
+          <a:noFill/>
+          <a:ln/>
+        </p:spPr>
+        <p:txBody>
+          <a:bodyPr wrap="square" lIns="0" tIns="0" rIns="0" bIns="0" rtlCol="0" anchor="ctr"/>
+          <a:lstStyle/>
+          <a:p>
+            <a:pPr algn="l" indent="0" marL="0">
+              <a:buNone/>
+            </a:pPr>
+            <a:r>
+              <a:rPr lang="en-US" sz="900" dirty="0">
+                <a:solidFill>
+                  <a:srgbClr val="143743"/>
+                </a:solidFill>
+                <a:latin typeface="Courier New" pitchFamily="34" charset="0"/>
+                <a:ea typeface="Courier New" pitchFamily="34" charset="-122"/>
+                <a:cs typeface="Courier New" pitchFamily="34" charset="-120"/>
+              </a:rPr>
+              <a:t>WP1 + WP2</a:t>
+            </a:r>
+            <a:endParaRPr lang="en-US" sz="900" dirty="0"/>
+          </a:p>
+        </p:txBody>
+      </p:sp>
+      <p:sp>
+        <p:nvSpPr>
+          <p:cNvPr id="22" name="Text 20"/>
           <p:cNvSpPr txBox="1"/>
           <p:nvPr/>
         </p:nvSpPr>
         <p:spPr>
           <a:xfrm>
             <a:off x="457200" y="4809744"/>
-            <a:ext cx="4937760" cy="274320"/>
-          </a:xfrm>
-          <a:prstGeom prst="rect">
-            <a:avLst/>
-          </a:prstGeom>
-          <a:noFill/>
-          <a:ln/>
-        </p:spPr>
-        <p:txBody>
-          <a:bodyPr wrap="square" lIns="0" tIns="0" rIns="0" bIns="0" rtlCol="0" anchor="t"/>
-          <a:lstStyle/>
-          <a:p>
-            <a:pPr indent="0" marL="0">
-              <a:lnSpc>
-                <a:spcPts val="1318"/>
-              </a:lnSpc>
-              <a:buNone/>
-            </a:pPr>
-            <a:r>
-              <a:rPr lang="en-US" sz="850" dirty="0">
-                <a:solidFill>
-                  <a:srgbClr val="52666B"/>
-                </a:solidFill>
-                <a:latin typeface="Arial" pitchFamily="34" charset="0"/>
-                <a:ea typeface="Arial" pitchFamily="34" charset="-122"/>
-                <a:cs typeface="Arial" pitchFamily="34" charset="-120"/>
-              </a:rPr>
-              <a:t>A engenharia básica e de detalhamento é capitalizada junto com o equipamento: num piloto ela não tem valor separável dele.</a:t>
-            </a:r>
-            <a:endParaRPr lang="en-US" sz="850" dirty="0"/>
-          </a:p>
-        </p:txBody>
-      </p:sp>
-      <p:sp>
-        <p:nvSpPr>
-          <p:cNvPr id="19" name="Text 17"/>
+            <a:ext cx="8138160" cy="155448"/>
+          </a:xfrm>
+          <a:prstGeom prst="rect">
+            <a:avLst/>
+          </a:prstGeom>
+          <a:noFill/>
+          <a:ln/>
+        </p:spPr>
+        <p:txBody>
+          <a:bodyPr wrap="square" lIns="0" tIns="0" rIns="0" bIns="0" rtlCol="0" anchor="ctr"/>
+          <a:lstStyle/>
+          <a:p>
+            <a:pPr algn="l" indent="0" marL="0">
+              <a:buNone/>
+            </a:pPr>
+            <a:r>
+              <a:rPr lang="en-US" sz="650" spc="260" kern="0" dirty="0">
+                <a:solidFill>
+                  <a:srgbClr val="7AA8C9"/>
+                </a:solidFill>
+                <a:latin typeface="Arial" pitchFamily="34" charset="0"/>
+                <a:ea typeface="Arial" pitchFamily="34" charset="-122"/>
+                <a:cs typeface="Arial" pitchFamily="34" charset="-120"/>
+              </a:rPr>
+              <a:t>A ENGENHARIA É CAPITALIZADA JUNTO COM O EQUIPAMENTO: NUM PILOTO ELA NÃO TEM VALOR SEPARÁVEL DELE</a:t>
+            </a:r>
+            <a:endParaRPr lang="en-US" sz="650" dirty="0"/>
+          </a:p>
+        </p:txBody>
+      </p:sp>
+      <p:sp>
+        <p:nvSpPr>
+          <p:cNvPr id="23" name="Text 21"/>
           <p:cNvSpPr txBox="1"/>
           <p:nvPr/>
         </p:nvSpPr>
@@ -9039,7 +9690,7 @@
                 <a:ea typeface="Arial" pitchFamily="34" charset="-122"/>
                 <a:cs typeface="Arial" pitchFamily="34" charset="-120"/>
               </a:rPr>
-              <a:t>WP1 + WP2 · FINEP ECONOMIA CIRCULAR</a:t>
+              <a:t>FINEP ECONOMIA CIRCULAR · 30 MESES</a:t>
             </a:r>
             <a:endParaRPr lang="en-US" sz="680" dirty="0"/>
           </a:p>
@@ -9131,7 +9782,7 @@
         </p:nvSpPr>
         <p:spPr>
           <a:xfrm>
-            <a:off x="457200" y="822960"/>
+            <a:off x="457200" y="786384"/>
             <a:ext cx="4754880" cy="700024"/>
           </a:xfrm>
           <a:prstGeom prst="rect">
@@ -9193,7 +9844,7 @@
         </p:nvSpPr>
         <p:spPr>
           <a:xfrm>
-            <a:off x="384048" y="1700784"/>
+            <a:off x="384048" y="1645920"/>
             <a:ext cx="2377440" cy="1584960"/>
           </a:xfrm>
           <a:prstGeom prst="rect">
@@ -9232,8 +9883,47 @@
         </p:nvSpPr>
         <p:spPr>
           <a:xfrm>
-            <a:off x="512064" y="3529584"/>
-            <a:ext cx="2377440" cy="274320"/>
+            <a:off x="475488" y="2724912"/>
+            <a:ext cx="2377440" cy="155448"/>
+          </a:xfrm>
+          <a:prstGeom prst="rect">
+            <a:avLst/>
+          </a:prstGeom>
+          <a:noFill/>
+          <a:ln/>
+        </p:spPr>
+        <p:txBody>
+          <a:bodyPr wrap="square" lIns="0" tIns="0" rIns="0" bIns="0" rtlCol="0" anchor="ctr"/>
+          <a:lstStyle/>
+          <a:p>
+            <a:pPr algn="l" indent="0" marL="0">
+              <a:buNone/>
+            </a:pPr>
+            <a:r>
+              <a:rPr lang="en-US" sz="750" spc="260" kern="0" dirty="0">
+                <a:solidFill>
+                  <a:srgbClr val="1F7370"/>
+                </a:solidFill>
+                <a:latin typeface="Arial" pitchFamily="34" charset="0"/>
+                <a:ea typeface="Arial" pitchFamily="34" charset="-122"/>
+                <a:cs typeface="Arial" pitchFamily="34" charset="-120"/>
+              </a:rPr>
+              <a:t>R$ M · CUSTEIO</a:t>
+            </a:r>
+            <a:endParaRPr lang="en-US" sz="750" dirty="0"/>
+          </a:p>
+        </p:txBody>
+      </p:sp>
+      <p:sp>
+        <p:nvSpPr>
+          <p:cNvPr id="6" name="Text 4"/>
+          <p:cNvSpPr txBox="1"/>
+          <p:nvPr/>
+        </p:nvSpPr>
+        <p:spPr>
+          <a:xfrm>
+            <a:off x="2395728" y="2048256"/>
+            <a:ext cx="1737360" cy="825500"/>
           </a:xfrm>
           <a:prstGeom prst="rect">
             <a:avLst/>
@@ -9245,45 +9935,23 @@
           <a:bodyPr wrap="square" lIns="0" tIns="0" rIns="0" bIns="0" rtlCol="0" anchor="t"/>
           <a:lstStyle/>
           <a:p>
-            <a:pPr indent="0" marL="0">
-              <a:buNone/>
-            </a:pPr>
-            <a:r>
-              <a:rPr lang="en-US" sz="1400" dirty="0">
-                <a:solidFill>
-                  <a:srgbClr val="1F7370"/>
-                </a:solidFill>
-                <a:latin typeface="Arial" pitchFamily="34" charset="0"/>
-                <a:ea typeface="Arial" pitchFamily="34" charset="-122"/>
-                <a:cs typeface="Arial" pitchFamily="34" charset="-120"/>
-              </a:rPr>
-              <a:t>R$ M · OPEX</a:t>
-            </a:r>
-            <a:endParaRPr lang="en-US" sz="1400" dirty="0"/>
-          </a:p>
-        </p:txBody>
-      </p:sp>
-      <p:sp>
-        <p:nvSpPr>
-          <p:cNvPr id="6" name="Shape 4"/>
-          <p:cNvSpPr/>
-          <p:nvPr/>
-        </p:nvSpPr>
-        <p:spPr>
-          <a:xfrm>
-            <a:off x="475488" y="3456432"/>
-            <a:ext cx="2011680" cy="7315"/>
-          </a:xfrm>
-          <a:prstGeom prst="rect">
-            <a:avLst/>
-          </a:prstGeom>
-          <a:solidFill>
-            <a:srgbClr val="1F7370">
-              <a:alpha val="55000"/>
-            </a:srgbClr>
-          </a:solidFill>
-          <a:ln/>
-        </p:spPr>
+            <a:pPr algn="l" indent="0" marL="0">
+              <a:buNone/>
+            </a:pPr>
+            <a:r>
+              <a:rPr lang="en-US" sz="5000" spc="-200" kern="0" dirty="0">
+                <a:solidFill>
+                  <a:srgbClr val="5B8AAE"/>
+                </a:solidFill>
+                <a:latin typeface="Arial" pitchFamily="34" charset="0"/>
+                <a:ea typeface="Arial" pitchFamily="34" charset="-122"/>
+                <a:cs typeface="Arial" pitchFamily="34" charset="-120"/>
+              </a:rPr>
+              <a:t>7,7</a:t>
+            </a:r>
+            <a:endParaRPr lang="en-US" sz="5000" dirty="0"/>
+          </a:p>
+        </p:txBody>
       </p:sp>
       <p:sp>
         <p:nvSpPr>
@@ -9293,24 +9961,24 @@
         </p:nvSpPr>
         <p:spPr>
           <a:xfrm>
-            <a:off x="2395728" y="2450592"/>
-            <a:ext cx="1737360" cy="825500"/>
-          </a:xfrm>
-          <a:prstGeom prst="rect">
-            <a:avLst/>
-          </a:prstGeom>
-          <a:noFill/>
-          <a:ln/>
-        </p:spPr>
-        <p:txBody>
-          <a:bodyPr wrap="square" lIns="0" tIns="0" rIns="0" bIns="0" rtlCol="0" anchor="t"/>
-          <a:lstStyle/>
-          <a:p>
-            <a:pPr algn="l" indent="0" marL="0">
-              <a:buNone/>
-            </a:pPr>
-            <a:r>
-              <a:rPr lang="en-US" sz="5000" spc="-200" kern="0" dirty="0">
+            <a:off x="2450592" y="2724912"/>
+            <a:ext cx="2011680" cy="155448"/>
+          </a:xfrm>
+          <a:prstGeom prst="rect">
+            <a:avLst/>
+          </a:prstGeom>
+          <a:noFill/>
+          <a:ln/>
+        </p:spPr>
+        <p:txBody>
+          <a:bodyPr wrap="square" lIns="0" tIns="0" rIns="0" bIns="0" rtlCol="0" anchor="ctr"/>
+          <a:lstStyle/>
+          <a:p>
+            <a:pPr algn="l" indent="0" marL="0">
+              <a:buNone/>
+            </a:pPr>
+            <a:r>
+              <a:rPr lang="en-US" sz="750" spc="260" kern="0" dirty="0">
                 <a:solidFill>
                   <a:srgbClr val="5B8AAE"/>
                 </a:solidFill>
@@ -9318,9 +9986,9 @@
                 <a:ea typeface="Arial" pitchFamily="34" charset="-122"/>
                 <a:cs typeface="Arial" pitchFamily="34" charset="-120"/>
               </a:rPr>
-              <a:t>7,7</a:t>
-            </a:r>
-            <a:endParaRPr lang="en-US" sz="5000" dirty="0"/>
+              <a:t>R$ M · INVESTIMENTO</a:t>
+            </a:r>
+            <a:endParaRPr lang="en-US" sz="750" dirty="0"/>
           </a:p>
         </p:txBody>
       </p:sp>
@@ -9332,241 +10000,63 @@
         </p:nvSpPr>
         <p:spPr>
           <a:xfrm>
-            <a:off x="2487168" y="3529584"/>
-            <a:ext cx="1828800" cy="155448"/>
-          </a:xfrm>
-          <a:prstGeom prst="rect">
-            <a:avLst/>
-          </a:prstGeom>
-          <a:noFill/>
-          <a:ln/>
-        </p:spPr>
-        <p:txBody>
-          <a:bodyPr wrap="square" lIns="0" tIns="0" rIns="0" bIns="0" rtlCol="0" anchor="ctr"/>
-          <a:lstStyle/>
-          <a:p>
-            <a:pPr algn="l" indent="0" marL="0">
-              <a:buNone/>
-            </a:pPr>
-            <a:r>
-              <a:rPr lang="en-US" sz="750" spc="260" kern="0" dirty="0">
-                <a:solidFill>
-                  <a:srgbClr val="5B8AAE"/>
-                </a:solidFill>
-                <a:latin typeface="Arial" pitchFamily="34" charset="0"/>
-                <a:ea typeface="Arial" pitchFamily="34" charset="-122"/>
-                <a:cs typeface="Arial" pitchFamily="34" charset="-120"/>
-              </a:rPr>
-              <a:t>R$ M · CAPEX</a:t>
-            </a:r>
-            <a:endParaRPr lang="en-US" sz="750" dirty="0"/>
-          </a:p>
-        </p:txBody>
-      </p:sp>
-      <p:sp>
-        <p:nvSpPr>
-          <p:cNvPr id="9" name="Shape 7"/>
-          <p:cNvSpPr/>
-          <p:nvPr/>
-        </p:nvSpPr>
-        <p:spPr>
-          <a:xfrm>
-            <a:off x="2450592" y="3456432"/>
-            <a:ext cx="1371600" cy="7315"/>
-          </a:xfrm>
-          <a:prstGeom prst="rect">
-            <a:avLst/>
-          </a:prstGeom>
-          <a:solidFill>
-            <a:srgbClr val="5B8AAE">
-              <a:alpha val="45000"/>
-            </a:srgbClr>
-          </a:solidFill>
-          <a:ln/>
-        </p:spPr>
-      </p:sp>
-      <p:sp>
-        <p:nvSpPr>
-          <p:cNvPr id="10" name="Text 8"/>
-          <p:cNvSpPr txBox="1"/>
-          <p:nvPr/>
-        </p:nvSpPr>
-        <p:spPr>
-          <a:xfrm>
-            <a:off x="6309360" y="1371600"/>
-            <a:ext cx="2377440" cy="566928"/>
-          </a:xfrm>
-          <a:prstGeom prst="rect">
-            <a:avLst/>
-          </a:prstGeom>
-          <a:noFill/>
-          <a:ln/>
-        </p:spPr>
-        <p:txBody>
-          <a:bodyPr wrap="square" lIns="0" tIns="0" rIns="0" bIns="0" rtlCol="0" anchor="t"/>
+            <a:off x="6309360" y="2231136"/>
+            <a:ext cx="2377440" cy="173736"/>
+          </a:xfrm>
+          <a:prstGeom prst="rect">
+            <a:avLst/>
+          </a:prstGeom>
+          <a:noFill/>
+          <a:ln/>
+        </p:spPr>
+        <p:txBody>
+          <a:bodyPr wrap="square" lIns="0" tIns="0" rIns="0" bIns="0" rtlCol="0" anchor="ctr"/>
           <a:lstStyle/>
           <a:p>
             <a:pPr algn="r" indent="0" marL="0">
               <a:buNone/>
             </a:pPr>
             <a:r>
-              <a:rPr lang="en-US" sz="4400" spc="-140" kern="0" dirty="0">
-                <a:solidFill>
-                  <a:srgbClr val="175D5C"/>
-                </a:solidFill>
-                <a:latin typeface="Arial" pitchFamily="34" charset="0"/>
-                <a:ea typeface="Arial" pitchFamily="34" charset="-122"/>
-                <a:cs typeface="Arial" pitchFamily="34" charset="-120"/>
-              </a:rPr>
-              <a:t>85 / 15</a:t>
-            </a:r>
-            <a:endParaRPr lang="en-US" sz="4400" dirty="0"/>
-          </a:p>
-        </p:txBody>
-      </p:sp>
-      <p:sp>
-        <p:nvSpPr>
-          <p:cNvPr id="11" name="Text 9"/>
-          <p:cNvSpPr txBox="1"/>
-          <p:nvPr/>
-        </p:nvSpPr>
-        <p:spPr>
-          <a:xfrm>
-            <a:off x="6309360" y="1975104"/>
-            <a:ext cx="2377440" cy="155448"/>
-          </a:xfrm>
-          <a:prstGeom prst="rect">
-            <a:avLst/>
-          </a:prstGeom>
-          <a:noFill/>
-          <a:ln/>
-        </p:spPr>
-        <p:txBody>
-          <a:bodyPr wrap="square" lIns="0" tIns="0" rIns="0" bIns="0" rtlCol="0" anchor="ctr"/>
-          <a:lstStyle/>
-          <a:p>
-            <a:pPr algn="r" indent="0" marL="0">
-              <a:buNone/>
-            </a:pPr>
-            <a:r>
-              <a:rPr lang="en-US" sz="750" spc="260" kern="0" dirty="0">
-                <a:solidFill>
-                  <a:srgbClr val="5B8AAE"/>
-                </a:solidFill>
-                <a:latin typeface="Arial" pitchFamily="34" charset="0"/>
-                <a:ea typeface="Arial" pitchFamily="34" charset="-122"/>
-                <a:cs typeface="Arial" pitchFamily="34" charset="-120"/>
-              </a:rPr>
-              <a:t>SUBVENÇÃO FINEP / CONTRAPARTIDA</a:t>
-            </a:r>
-            <a:endParaRPr lang="en-US" sz="750" dirty="0"/>
-          </a:p>
-        </p:txBody>
-      </p:sp>
-      <p:sp>
-        <p:nvSpPr>
-          <p:cNvPr id="12" name="Text 10"/>
-          <p:cNvSpPr txBox="1"/>
-          <p:nvPr/>
-        </p:nvSpPr>
-        <p:spPr>
-          <a:xfrm>
-            <a:off x="5943600" y="2340864"/>
-            <a:ext cx="1426464" cy="155448"/>
-          </a:xfrm>
-          <a:prstGeom prst="rect">
-            <a:avLst/>
-          </a:prstGeom>
-          <a:noFill/>
-          <a:ln/>
-        </p:spPr>
-        <p:txBody>
-          <a:bodyPr wrap="square" lIns="0" tIns="0" rIns="0" bIns="0" rtlCol="0" anchor="ctr"/>
-          <a:lstStyle/>
-          <a:p>
-            <a:pPr algn="l" indent="0" marL="0">
-              <a:buNone/>
-            </a:pPr>
-            <a:r>
-              <a:rPr lang="en-US" sz="680" spc="260" kern="0" dirty="0">
-                <a:solidFill>
-                  <a:srgbClr val="5B8AAE"/>
-                </a:solidFill>
-                <a:latin typeface="Arial" pitchFamily="34" charset="0"/>
-                <a:ea typeface="Arial" pitchFamily="34" charset="-122"/>
-                <a:cs typeface="Arial" pitchFamily="34" charset="-120"/>
-              </a:rPr>
-              <a:t>SUBVENÇÃO FINEP</a:t>
-            </a:r>
-            <a:endParaRPr lang="en-US" sz="680" dirty="0"/>
-          </a:p>
-        </p:txBody>
-      </p:sp>
-      <p:sp>
-        <p:nvSpPr>
-          <p:cNvPr id="13" name="Text 11"/>
-          <p:cNvSpPr txBox="1"/>
-          <p:nvPr/>
-        </p:nvSpPr>
-        <p:spPr>
-          <a:xfrm>
-            <a:off x="7315200" y="2340864"/>
-            <a:ext cx="1371600" cy="173736"/>
-          </a:xfrm>
-          <a:prstGeom prst="rect">
-            <a:avLst/>
-          </a:prstGeom>
-          <a:noFill/>
-          <a:ln/>
-        </p:spPr>
-        <p:txBody>
-          <a:bodyPr wrap="square" lIns="0" tIns="0" rIns="0" bIns="0" rtlCol="0" anchor="ctr"/>
-          <a:lstStyle/>
-          <a:p>
-            <a:pPr algn="r" indent="0" marL="0">
-              <a:buNone/>
-            </a:pPr>
-            <a:r>
-              <a:rPr lang="en-US" sz="760" dirty="0">
-                <a:solidFill>
-                  <a:srgbClr val="7AA8C9"/>
+              <a:rPr lang="en-US" sz="1300" dirty="0">
+                <a:solidFill>
+                  <a:srgbClr val="143743"/>
                 </a:solidFill>
                 <a:latin typeface="Courier New" pitchFamily="34" charset="0"/>
                 <a:ea typeface="Courier New" pitchFamily="34" charset="-122"/>
                 <a:cs typeface="Courier New" pitchFamily="34" charset="-120"/>
               </a:rPr>
-              <a:t>R$ 12.750.000</a:t>
-            </a:r>
-            <a:endParaRPr lang="en-US" sz="760" dirty="0"/>
-          </a:p>
-        </p:txBody>
-      </p:sp>
-      <p:sp>
-        <p:nvSpPr>
-          <p:cNvPr id="14" name="Text 12"/>
-          <p:cNvSpPr txBox="1"/>
-          <p:nvPr/>
-        </p:nvSpPr>
-        <p:spPr>
-          <a:xfrm>
-            <a:off x="5943600" y="2555748"/>
-            <a:ext cx="1426464" cy="155448"/>
-          </a:xfrm>
-          <a:prstGeom prst="rect">
-            <a:avLst/>
-          </a:prstGeom>
-          <a:noFill/>
-          <a:ln/>
-        </p:spPr>
-        <p:txBody>
-          <a:bodyPr wrap="square" lIns="0" tIns="0" rIns="0" bIns="0" rtlCol="0" anchor="ctr"/>
-          <a:lstStyle/>
-          <a:p>
-            <a:pPr algn="l" indent="0" marL="0">
-              <a:buNone/>
-            </a:pPr>
-            <a:r>
-              <a:rPr lang="en-US" sz="680" spc="260" kern="0" dirty="0">
+              <a:t>R$ 243.333 / mês</a:t>
+            </a:r>
+            <a:endParaRPr lang="en-US" sz="1300" dirty="0"/>
+          </a:p>
+        </p:txBody>
+      </p:sp>
+      <p:sp>
+        <p:nvSpPr>
+          <p:cNvPr id="9" name="Text 7"/>
+          <p:cNvSpPr txBox="1"/>
+          <p:nvPr/>
+        </p:nvSpPr>
+        <p:spPr>
+          <a:xfrm>
+            <a:off x="6309360" y="2468880"/>
+            <a:ext cx="2377440" cy="155448"/>
+          </a:xfrm>
+          <a:prstGeom prst="rect">
+            <a:avLst/>
+          </a:prstGeom>
+          <a:noFill/>
+          <a:ln/>
+        </p:spPr>
+        <p:txBody>
+          <a:bodyPr wrap="square" lIns="0" tIns="0" rIns="0" bIns="0" rtlCol="0" anchor="ctr"/>
+          <a:lstStyle/>
+          <a:p>
+            <a:pPr algn="r" indent="0" marL="0">
+              <a:buNone/>
+            </a:pPr>
+            <a:r>
+              <a:rPr lang="en-US" sz="750" spc="260" kern="0" dirty="0">
                 <a:solidFill>
                   <a:srgbClr val="5B8AAE"/>
                 </a:solidFill>
@@ -9574,77 +10064,194 @@
                 <a:ea typeface="Arial" pitchFamily="34" charset="-122"/>
                 <a:cs typeface="Arial" pitchFamily="34" charset="-120"/>
               </a:rPr>
-              <a:t>CONTRAPARTIDA</a:t>
-            </a:r>
-            <a:endParaRPr lang="en-US" sz="680" dirty="0"/>
-          </a:p>
-        </p:txBody>
-      </p:sp>
-      <p:sp>
-        <p:nvSpPr>
-          <p:cNvPr id="15" name="Text 13"/>
-          <p:cNvSpPr txBox="1"/>
-          <p:nvPr/>
-        </p:nvSpPr>
-        <p:spPr>
-          <a:xfrm>
-            <a:off x="7315200" y="2555748"/>
-            <a:ext cx="1371600" cy="173736"/>
-          </a:xfrm>
-          <a:prstGeom prst="rect">
-            <a:avLst/>
-          </a:prstGeom>
-          <a:noFill/>
-          <a:ln/>
-        </p:spPr>
-        <p:txBody>
-          <a:bodyPr wrap="square" lIns="0" tIns="0" rIns="0" bIns="0" rtlCol="0" anchor="ctr"/>
-          <a:lstStyle/>
-          <a:p>
-            <a:pPr algn="r" indent="0" marL="0">
-              <a:buNone/>
-            </a:pPr>
-            <a:r>
-              <a:rPr lang="en-US" sz="760" dirty="0">
-                <a:solidFill>
-                  <a:srgbClr val="7AA8C9"/>
+              <a:t>MÉDIA AO LONGO DOS 30 MESES</a:t>
+            </a:r>
+            <a:endParaRPr lang="en-US" sz="750" dirty="0"/>
+          </a:p>
+        </p:txBody>
+      </p:sp>
+      <p:sp>
+        <p:nvSpPr>
+          <p:cNvPr id="10" name="Text 8"/>
+          <p:cNvSpPr txBox="1"/>
+          <p:nvPr/>
+        </p:nvSpPr>
+        <p:spPr>
+          <a:xfrm>
+            <a:off x="530352" y="2999232"/>
+            <a:ext cx="1828800" cy="155448"/>
+          </a:xfrm>
+          <a:prstGeom prst="rect">
+            <a:avLst/>
+          </a:prstGeom>
+          <a:noFill/>
+          <a:ln/>
+        </p:spPr>
+        <p:txBody>
+          <a:bodyPr wrap="square" lIns="0" tIns="0" rIns="0" bIns="0" rtlCol="0" anchor="ctr"/>
+          <a:lstStyle/>
+          <a:p>
+            <a:pPr algn="l" indent="0" marL="0">
+              <a:buNone/>
+            </a:pPr>
+            <a:r>
+              <a:rPr lang="en-US" sz="750" spc="260" kern="0" dirty="0">
+                <a:solidFill>
+                  <a:srgbClr val="5B8AAE"/>
+                </a:solidFill>
+                <a:latin typeface="Arial" pitchFamily="34" charset="0"/>
+                <a:ea typeface="Arial" pitchFamily="34" charset="-122"/>
+                <a:cs typeface="Arial" pitchFamily="34" charset="-120"/>
+              </a:rPr>
+              <a:t>CAPEX · 51%</a:t>
+            </a:r>
+            <a:endParaRPr lang="en-US" sz="750" dirty="0"/>
+          </a:p>
+        </p:txBody>
+      </p:sp>
+      <p:sp>
+        <p:nvSpPr>
+          <p:cNvPr id="11" name="Text 9"/>
+          <p:cNvSpPr txBox="1"/>
+          <p:nvPr/>
+        </p:nvSpPr>
+        <p:spPr>
+          <a:xfrm>
+            <a:off x="4754880" y="2999232"/>
+            <a:ext cx="1828800" cy="155448"/>
+          </a:xfrm>
+          <a:prstGeom prst="rect">
+            <a:avLst/>
+          </a:prstGeom>
+          <a:noFill/>
+          <a:ln/>
+        </p:spPr>
+        <p:txBody>
+          <a:bodyPr wrap="square" lIns="0" tIns="0" rIns="0" bIns="0" rtlCol="0" anchor="ctr"/>
+          <a:lstStyle/>
+          <a:p>
+            <a:pPr algn="l" indent="0" marL="0">
+              <a:buNone/>
+            </a:pPr>
+            <a:r>
+              <a:rPr lang="en-US" sz="750" spc="260" kern="0" dirty="0">
+                <a:solidFill>
+                  <a:srgbClr val="1F7370"/>
+                </a:solidFill>
+                <a:latin typeface="Arial" pitchFamily="34" charset="0"/>
+                <a:ea typeface="Arial" pitchFamily="34" charset="-122"/>
+                <a:cs typeface="Arial" pitchFamily="34" charset="-120"/>
+              </a:rPr>
+              <a:t>OPEX · 49%</a:t>
+            </a:r>
+            <a:endParaRPr lang="en-US" sz="750" dirty="0"/>
+          </a:p>
+        </p:txBody>
+      </p:sp>
+      <p:sp>
+        <p:nvSpPr>
+          <p:cNvPr id="12" name="Text 10"/>
+          <p:cNvSpPr txBox="1"/>
+          <p:nvPr/>
+        </p:nvSpPr>
+        <p:spPr>
+          <a:xfrm>
+            <a:off x="530352" y="3749040"/>
+            <a:ext cx="2743200" cy="155448"/>
+          </a:xfrm>
+          <a:prstGeom prst="rect">
+            <a:avLst/>
+          </a:prstGeom>
+          <a:noFill/>
+          <a:ln/>
+        </p:spPr>
+        <p:txBody>
+          <a:bodyPr wrap="square" lIns="0" tIns="0" rIns="0" bIns="0" rtlCol="0" anchor="ctr"/>
+          <a:lstStyle/>
+          <a:p>
+            <a:pPr algn="l" indent="0" marL="0">
+              <a:buNone/>
+            </a:pPr>
+            <a:r>
+              <a:rPr lang="en-US" sz="750" spc="260" kern="0" dirty="0">
+                <a:solidFill>
+                  <a:srgbClr val="1F92AB"/>
+                </a:solidFill>
+                <a:latin typeface="Arial" pitchFamily="34" charset="0"/>
+                <a:ea typeface="Arial" pitchFamily="34" charset="-122"/>
+                <a:cs typeface="Arial" pitchFamily="34" charset="-120"/>
+              </a:rPr>
+              <a:t>SUBVENÇÃO FINEP · 85%</a:t>
+            </a:r>
+            <a:endParaRPr lang="en-US" sz="750" dirty="0"/>
+          </a:p>
+        </p:txBody>
+      </p:sp>
+      <p:sp>
+        <p:nvSpPr>
+          <p:cNvPr id="13" name="Text 11"/>
+          <p:cNvSpPr txBox="1"/>
+          <p:nvPr/>
+        </p:nvSpPr>
+        <p:spPr>
+          <a:xfrm>
+            <a:off x="530352" y="4206240"/>
+            <a:ext cx="2011680" cy="173736"/>
+          </a:xfrm>
+          <a:prstGeom prst="rect">
+            <a:avLst/>
+          </a:prstGeom>
+          <a:noFill/>
+          <a:ln/>
+        </p:spPr>
+        <p:txBody>
+          <a:bodyPr wrap="square" lIns="0" tIns="0" rIns="0" bIns="0" rtlCol="0" anchor="ctr"/>
+          <a:lstStyle/>
+          <a:p>
+            <a:pPr algn="l" indent="0" marL="0">
+              <a:buNone/>
+            </a:pPr>
+            <a:r>
+              <a:rPr lang="en-US" sz="950" dirty="0">
+                <a:solidFill>
+                  <a:srgbClr val="143743"/>
                 </a:solidFill>
                 <a:latin typeface="Courier New" pitchFamily="34" charset="0"/>
                 <a:ea typeface="Courier New" pitchFamily="34" charset="-122"/>
                 <a:cs typeface="Courier New" pitchFamily="34" charset="-120"/>
               </a:rPr>
-              <a:t>R$ 2.250.000</a:t>
-            </a:r>
-            <a:endParaRPr lang="en-US" sz="760" dirty="0"/>
-          </a:p>
-        </p:txBody>
-      </p:sp>
-      <p:sp>
-        <p:nvSpPr>
-          <p:cNvPr id="16" name="Text 14"/>
-          <p:cNvSpPr txBox="1"/>
-          <p:nvPr/>
-        </p:nvSpPr>
-        <p:spPr>
-          <a:xfrm>
-            <a:off x="5943600" y="2770632"/>
-            <a:ext cx="1426464" cy="155448"/>
-          </a:xfrm>
-          <a:prstGeom prst="rect">
-            <a:avLst/>
-          </a:prstGeom>
-          <a:noFill/>
-          <a:ln/>
-        </p:spPr>
-        <p:txBody>
-          <a:bodyPr wrap="square" lIns="0" tIns="0" rIns="0" bIns="0" rtlCol="0" anchor="ctr"/>
-          <a:lstStyle/>
-          <a:p>
-            <a:pPr algn="l" indent="0" marL="0">
-              <a:buNone/>
-            </a:pPr>
-            <a:r>
-              <a:rPr lang="en-US" sz="680" spc="260" kern="0" dirty="0">
+              <a:t>R$ 12.750.000</a:t>
+            </a:r>
+            <a:endParaRPr lang="en-US" sz="950" dirty="0"/>
+          </a:p>
+        </p:txBody>
+      </p:sp>
+      <p:sp>
+        <p:nvSpPr>
+          <p:cNvPr id="14" name="Text 12"/>
+          <p:cNvSpPr txBox="1"/>
+          <p:nvPr/>
+        </p:nvSpPr>
+        <p:spPr>
+          <a:xfrm>
+            <a:off x="7525512" y="3749040"/>
+            <a:ext cx="1161288" cy="155448"/>
+          </a:xfrm>
+          <a:prstGeom prst="rect">
+            <a:avLst/>
+          </a:prstGeom>
+          <a:noFill/>
+          <a:ln/>
+        </p:spPr>
+        <p:txBody>
+          <a:bodyPr wrap="square" lIns="0" tIns="0" rIns="0" bIns="0" rtlCol="0" anchor="ctr"/>
+          <a:lstStyle/>
+          <a:p>
+            <a:pPr algn="r" indent="0" marL="0">
+              <a:buNone/>
+            </a:pPr>
+            <a:r>
+              <a:rPr lang="en-US" sz="620" spc="260" kern="0" dirty="0">
                 <a:solidFill>
                   <a:srgbClr val="5B8AAE"/>
                 </a:solidFill>
@@ -9652,22 +10259,22 @@
                 <a:ea typeface="Arial" pitchFamily="34" charset="-122"/>
                 <a:cs typeface="Arial" pitchFamily="34" charset="-120"/>
               </a:rPr>
-              <a:t>MÉDIA MENSAL</a:t>
-            </a:r>
-            <a:endParaRPr lang="en-US" sz="680" dirty="0"/>
-          </a:p>
-        </p:txBody>
-      </p:sp>
-      <p:sp>
-        <p:nvSpPr>
-          <p:cNvPr id="17" name="Text 15"/>
-          <p:cNvSpPr txBox="1"/>
-          <p:nvPr/>
-        </p:nvSpPr>
-        <p:spPr>
-          <a:xfrm>
-            <a:off x="7315200" y="2770632"/>
-            <a:ext cx="1371600" cy="173736"/>
+              <a:t>CONTRAPARTIDA · 15%</a:t>
+            </a:r>
+            <a:endParaRPr lang="en-US" sz="620" dirty="0"/>
+          </a:p>
+        </p:txBody>
+      </p:sp>
+      <p:sp>
+        <p:nvSpPr>
+          <p:cNvPr id="15" name="Text 13"/>
+          <p:cNvSpPr txBox="1"/>
+          <p:nvPr/>
+        </p:nvSpPr>
+        <p:spPr>
+          <a:xfrm>
+            <a:off x="7525512" y="4206240"/>
+            <a:ext cx="1161288" cy="173736"/>
           </a:xfrm>
           <a:prstGeom prst="rect">
             <a:avLst/>
@@ -9683,37 +10290,37 @@
               <a:buNone/>
             </a:pPr>
             <a:r>
-              <a:rPr lang="en-US" sz="760" dirty="0">
-                <a:solidFill>
-                  <a:srgbClr val="7AA8C9"/>
+              <a:rPr lang="en-US" sz="900" dirty="0">
+                <a:solidFill>
+                  <a:srgbClr val="5B8AAE"/>
                 </a:solidFill>
                 <a:latin typeface="Courier New" pitchFamily="34" charset="0"/>
                 <a:ea typeface="Courier New" pitchFamily="34" charset="-122"/>
                 <a:cs typeface="Courier New" pitchFamily="34" charset="-120"/>
               </a:rPr>
-              <a:t>R$ 243.333</a:t>
-            </a:r>
-            <a:endParaRPr lang="en-US" sz="760" dirty="0"/>
-          </a:p>
-        </p:txBody>
-      </p:sp>
-      <p:sp>
-        <p:nvSpPr>
-          <p:cNvPr id="18" name="Shape 16"/>
+              <a:t>R$ 2.250.000</a:t>
+            </a:r>
+            <a:endParaRPr lang="en-US" sz="900" dirty="0"/>
+          </a:p>
+        </p:txBody>
+      </p:sp>
+      <p:sp>
+        <p:nvSpPr>
+          <p:cNvPr id="16" name="Shape 14"/>
           <p:cNvSpPr/>
           <p:nvPr/>
         </p:nvSpPr>
         <p:spPr>
           <a:xfrm>
-            <a:off x="457200" y="4041648"/>
-            <a:ext cx="2763492" cy="7315"/>
+            <a:off x="457200" y="4480560"/>
+            <a:ext cx="1924812" cy="7315"/>
           </a:xfrm>
           <a:prstGeom prst="rect">
             <a:avLst/>
           </a:prstGeom>
           <a:solidFill>
-            <a:srgbClr val="1F7370">
-              <a:alpha val="45000"/>
+            <a:srgbClr val="5B8AAE">
+              <a:alpha val="38000"/>
             </a:srgbClr>
           </a:solidFill>
           <a:ln/>
@@ -9721,42 +10328,103 @@
       </p:sp>
       <p:sp>
         <p:nvSpPr>
-          <p:cNvPr id="19" name="Text 17"/>
-          <p:cNvSpPr txBox="1"/>
-          <p:nvPr/>
-        </p:nvSpPr>
-        <p:spPr>
-          <a:xfrm>
-            <a:off x="457200" y="4114800"/>
-            <a:ext cx="548640" cy="173736"/>
-          </a:xfrm>
-          <a:prstGeom prst="rect">
-            <a:avLst/>
-          </a:prstGeom>
-          <a:noFill/>
-          <a:ln/>
-        </p:spPr>
-        <p:txBody>
-          <a:bodyPr wrap="square" lIns="0" tIns="0" rIns="0" bIns="0" rtlCol="0" anchor="ctr"/>
-          <a:lstStyle/>
-          <a:p>
-            <a:pPr algn="l" indent="0" marL="0">
-              <a:buNone/>
-            </a:pPr>
-            <a:r>
-              <a:rPr lang="en-US" sz="800" dirty="0">
-                <a:solidFill>
-                  <a:srgbClr val="1F7370"/>
+          <p:cNvPr id="17" name="Text 15"/>
+          <p:cNvSpPr txBox="1"/>
+          <p:nvPr/>
+        </p:nvSpPr>
+        <p:spPr>
+          <a:xfrm>
+            <a:off x="457200" y="4553712"/>
+            <a:ext cx="1906524" cy="155448"/>
+          </a:xfrm>
+          <a:prstGeom prst="rect">
+            <a:avLst/>
+          </a:prstGeom>
+          <a:noFill/>
+          <a:ln/>
+        </p:spPr>
+        <p:txBody>
+          <a:bodyPr wrap="square" lIns="0" tIns="0" rIns="0" bIns="0" rtlCol="0" anchor="ctr"/>
+          <a:lstStyle/>
+          <a:p>
+            <a:pPr algn="l" indent="0" marL="0">
+              <a:buNone/>
+            </a:pPr>
+            <a:r>
+              <a:rPr lang="en-US" sz="650" spc="260" kern="0" dirty="0">
+                <a:solidFill>
+                  <a:srgbClr val="5B8AAE"/>
+                </a:solidFill>
+                <a:latin typeface="Arial" pitchFamily="34" charset="0"/>
+                <a:ea typeface="Arial" pitchFamily="34" charset="-122"/>
+                <a:cs typeface="Arial" pitchFamily="34" charset="-120"/>
+              </a:rPr>
+              <a:t>CAMPANHAS</a:t>
+            </a:r>
+            <a:endParaRPr lang="en-US" sz="650" dirty="0"/>
+          </a:p>
+        </p:txBody>
+      </p:sp>
+      <p:sp>
+        <p:nvSpPr>
+          <p:cNvPr id="18" name="Text 16"/>
+          <p:cNvSpPr txBox="1"/>
+          <p:nvPr/>
+        </p:nvSpPr>
+        <p:spPr>
+          <a:xfrm>
+            <a:off x="457200" y="4718304"/>
+            <a:ext cx="1888236" cy="173736"/>
+          </a:xfrm>
+          <a:prstGeom prst="rect">
+            <a:avLst/>
+          </a:prstGeom>
+          <a:noFill/>
+          <a:ln/>
+        </p:spPr>
+        <p:txBody>
+          <a:bodyPr wrap="square" lIns="0" tIns="0" rIns="0" bIns="0" rtlCol="0" anchor="ctr"/>
+          <a:lstStyle/>
+          <a:p>
+            <a:pPr algn="l" indent="0" marL="0">
+              <a:buNone/>
+            </a:pPr>
+            <a:r>
+              <a:rPr lang="en-US" sz="900" dirty="0">
+                <a:solidFill>
+                  <a:srgbClr val="143743"/>
                 </a:solidFill>
                 <a:latin typeface="Courier New" pitchFamily="34" charset="0"/>
                 <a:ea typeface="Courier New" pitchFamily="34" charset="-122"/>
                 <a:cs typeface="Courier New" pitchFamily="34" charset="-120"/>
               </a:rPr>
-              <a:t>WP3</a:t>
-            </a:r>
-            <a:endParaRPr lang="en-US" sz="800" dirty="0"/>
-          </a:p>
-        </p:txBody>
+              <a:t>2,5 M</a:t>
+            </a:r>
+            <a:endParaRPr lang="en-US" sz="900" dirty="0"/>
+          </a:p>
+        </p:txBody>
+      </p:sp>
+      <p:sp>
+        <p:nvSpPr>
+          <p:cNvPr id="19" name="Shape 17"/>
+          <p:cNvSpPr/>
+          <p:nvPr/>
+        </p:nvSpPr>
+        <p:spPr>
+          <a:xfrm>
+            <a:off x="2491740" y="4480560"/>
+            <a:ext cx="1924812" cy="7315"/>
+          </a:xfrm>
+          <a:prstGeom prst="rect">
+            <a:avLst/>
+          </a:prstGeom>
+          <a:solidFill>
+            <a:srgbClr val="5B8AAE">
+              <a:alpha val="38000"/>
+            </a:srgbClr>
+          </a:solidFill>
+          <a:ln/>
+        </p:spPr>
       </p:sp>
       <p:sp>
         <p:nvSpPr>
@@ -9766,24 +10434,24 @@
         </p:nvSpPr>
         <p:spPr>
           <a:xfrm>
-            <a:off x="457200" y="4315968"/>
-            <a:ext cx="2726916" cy="155448"/>
-          </a:xfrm>
-          <a:prstGeom prst="rect">
-            <a:avLst/>
-          </a:prstGeom>
-          <a:noFill/>
-          <a:ln/>
-        </p:spPr>
-        <p:txBody>
-          <a:bodyPr wrap="square" lIns="0" tIns="0" rIns="0" bIns="0" rtlCol="0" anchor="ctr"/>
-          <a:lstStyle/>
-          <a:p>
-            <a:pPr algn="l" indent="0" marL="0">
-              <a:buNone/>
-            </a:pPr>
-            <a:r>
-              <a:rPr lang="en-US" sz="680" spc="260" kern="0" dirty="0">
+            <a:off x="2491740" y="4553712"/>
+            <a:ext cx="1906524" cy="155448"/>
+          </a:xfrm>
+          <a:prstGeom prst="rect">
+            <a:avLst/>
+          </a:prstGeom>
+          <a:noFill/>
+          <a:ln/>
+        </p:spPr>
+        <p:txBody>
+          <a:bodyPr wrap="square" lIns="0" tIns="0" rIns="0" bIns="0" rtlCol="0" anchor="ctr"/>
+          <a:lstStyle/>
+          <a:p>
+            <a:pPr algn="l" indent="0" marL="0">
+              <a:buNone/>
+            </a:pPr>
+            <a:r>
+              <a:rPr lang="en-US" sz="650" spc="260" kern="0" dirty="0">
                 <a:solidFill>
                   <a:srgbClr val="5B8AAE"/>
                 </a:solidFill>
@@ -9791,9 +10459,9 @@
                 <a:ea typeface="Arial" pitchFamily="34" charset="-122"/>
                 <a:cs typeface="Arial" pitchFamily="34" charset="-120"/>
               </a:rPr>
-              <a:t>CAMPANHAS EXPERIMENTAIS</a:t>
-            </a:r>
-            <a:endParaRPr lang="en-US" sz="680" dirty="0"/>
+              <a:t>CARACTERIZAÇÃO</a:t>
+            </a:r>
+            <a:endParaRPr lang="en-US" sz="650" dirty="0"/>
           </a:p>
         </p:txBody>
       </p:sp>
@@ -9805,24 +10473,24 @@
         </p:nvSpPr>
         <p:spPr>
           <a:xfrm>
-            <a:off x="457200" y="4498848"/>
-            <a:ext cx="2690340" cy="173736"/>
-          </a:xfrm>
-          <a:prstGeom prst="rect">
-            <a:avLst/>
-          </a:prstGeom>
-          <a:noFill/>
-          <a:ln/>
-        </p:spPr>
-        <p:txBody>
-          <a:bodyPr wrap="square" lIns="0" tIns="0" rIns="0" bIns="0" rtlCol="0" anchor="ctr"/>
-          <a:lstStyle/>
-          <a:p>
-            <a:pPr algn="l" indent="0" marL="0">
-              <a:buNone/>
-            </a:pPr>
-            <a:r>
-              <a:rPr lang="en-US" sz="950" dirty="0">
+            <a:off x="2491740" y="4718304"/>
+            <a:ext cx="1888236" cy="173736"/>
+          </a:xfrm>
+          <a:prstGeom prst="rect">
+            <a:avLst/>
+          </a:prstGeom>
+          <a:noFill/>
+          <a:ln/>
+        </p:spPr>
+        <p:txBody>
+          <a:bodyPr wrap="square" lIns="0" tIns="0" rIns="0" bIns="0" rtlCol="0" anchor="ctr"/>
+          <a:lstStyle/>
+          <a:p>
+            <a:pPr algn="l" indent="0" marL="0">
+              <a:buNone/>
+            </a:pPr>
+            <a:r>
+              <a:rPr lang="en-US" sz="900" dirty="0">
                 <a:solidFill>
                   <a:srgbClr val="143743"/>
                 </a:solidFill>
@@ -9830,9 +10498,9 @@
                 <a:ea typeface="Courier New" pitchFamily="34" charset="-122"/>
                 <a:cs typeface="Courier New" pitchFamily="34" charset="-120"/>
               </a:rPr>
-              <a:t>2,5</a:t>
-            </a:r>
-            <a:endParaRPr lang="en-US" sz="950" dirty="0"/>
+              <a:t>2,3 M</a:t>
+            </a:r>
+            <a:endParaRPr lang="en-US" sz="900" dirty="0"/>
           </a:p>
         </p:txBody>
       </p:sp>
@@ -9844,15 +10512,15 @@
         </p:nvSpPr>
         <p:spPr>
           <a:xfrm>
-            <a:off x="3275556" y="4041648"/>
-            <a:ext cx="2538024" cy="7315"/>
+            <a:off x="4526280" y="4480560"/>
+            <a:ext cx="1924812" cy="7315"/>
           </a:xfrm>
           <a:prstGeom prst="rect">
             <a:avLst/>
           </a:prstGeom>
           <a:solidFill>
-            <a:srgbClr val="1F7370">
-              <a:alpha val="45000"/>
+            <a:srgbClr val="5B8AAE">
+              <a:alpha val="38000"/>
             </a:srgbClr>
           </a:solidFill>
           <a:ln/>
@@ -9866,63 +10534,124 @@
         </p:nvSpPr>
         <p:spPr>
           <a:xfrm>
-            <a:off x="3275556" y="4114800"/>
-            <a:ext cx="548640" cy="173736"/>
-          </a:xfrm>
-          <a:prstGeom prst="rect">
-            <a:avLst/>
-          </a:prstGeom>
-          <a:noFill/>
-          <a:ln/>
-        </p:spPr>
-        <p:txBody>
-          <a:bodyPr wrap="square" lIns="0" tIns="0" rIns="0" bIns="0" rtlCol="0" anchor="ctr"/>
-          <a:lstStyle/>
-          <a:p>
-            <a:pPr algn="l" indent="0" marL="0">
-              <a:buNone/>
-            </a:pPr>
-            <a:r>
-              <a:rPr lang="en-US" sz="800" dirty="0">
-                <a:solidFill>
-                  <a:srgbClr val="1F7370"/>
+            <a:off x="4526280" y="4553712"/>
+            <a:ext cx="1906524" cy="155448"/>
+          </a:xfrm>
+          <a:prstGeom prst="rect">
+            <a:avLst/>
+          </a:prstGeom>
+          <a:noFill/>
+          <a:ln/>
+        </p:spPr>
+        <p:txBody>
+          <a:bodyPr wrap="square" lIns="0" tIns="0" rIns="0" bIns="0" rtlCol="0" anchor="ctr"/>
+          <a:lstStyle/>
+          <a:p>
+            <a:pPr algn="l" indent="0" marL="0">
+              <a:buNone/>
+            </a:pPr>
+            <a:r>
+              <a:rPr lang="en-US" sz="650" spc="260" kern="0" dirty="0">
+                <a:solidFill>
+                  <a:srgbClr val="5B8AAE"/>
+                </a:solidFill>
+                <a:latin typeface="Arial" pitchFamily="34" charset="0"/>
+                <a:ea typeface="Arial" pitchFamily="34" charset="-122"/>
+                <a:cs typeface="Arial" pitchFamily="34" charset="-120"/>
+              </a:rPr>
+              <a:t>ACV E CARBONO</a:t>
+            </a:r>
+            <a:endParaRPr lang="en-US" sz="650" dirty="0"/>
+          </a:p>
+        </p:txBody>
+      </p:sp>
+      <p:sp>
+        <p:nvSpPr>
+          <p:cNvPr id="24" name="Text 22"/>
+          <p:cNvSpPr txBox="1"/>
+          <p:nvPr/>
+        </p:nvSpPr>
+        <p:spPr>
+          <a:xfrm>
+            <a:off x="4526280" y="4718304"/>
+            <a:ext cx="1888236" cy="173736"/>
+          </a:xfrm>
+          <a:prstGeom prst="rect">
+            <a:avLst/>
+          </a:prstGeom>
+          <a:noFill/>
+          <a:ln/>
+        </p:spPr>
+        <p:txBody>
+          <a:bodyPr wrap="square" lIns="0" tIns="0" rIns="0" bIns="0" rtlCol="0" anchor="ctr"/>
+          <a:lstStyle/>
+          <a:p>
+            <a:pPr algn="l" indent="0" marL="0">
+              <a:buNone/>
+            </a:pPr>
+            <a:r>
+              <a:rPr lang="en-US" sz="900" dirty="0">
+                <a:solidFill>
+                  <a:srgbClr val="143743"/>
                 </a:solidFill>
                 <a:latin typeface="Courier New" pitchFamily="34" charset="0"/>
                 <a:ea typeface="Courier New" pitchFamily="34" charset="-122"/>
                 <a:cs typeface="Courier New" pitchFamily="34" charset="-120"/>
               </a:rPr>
-              <a:t>WP4</a:t>
-            </a:r>
-            <a:endParaRPr lang="en-US" sz="800" dirty="0"/>
-          </a:p>
-        </p:txBody>
-      </p:sp>
-      <p:sp>
-        <p:nvSpPr>
-          <p:cNvPr id="24" name="Text 22"/>
-          <p:cNvSpPr txBox="1"/>
-          <p:nvPr/>
-        </p:nvSpPr>
-        <p:spPr>
-          <a:xfrm>
-            <a:off x="3275556" y="4315968"/>
-            <a:ext cx="2501448" cy="155448"/>
-          </a:xfrm>
-          <a:prstGeom prst="rect">
-            <a:avLst/>
-          </a:prstGeom>
-          <a:noFill/>
-          <a:ln/>
-        </p:spPr>
-        <p:txBody>
-          <a:bodyPr wrap="square" lIns="0" tIns="0" rIns="0" bIns="0" rtlCol="0" anchor="ctr"/>
-          <a:lstStyle/>
-          <a:p>
-            <a:pPr algn="l" indent="0" marL="0">
-              <a:buNone/>
-            </a:pPr>
-            <a:r>
-              <a:rPr lang="en-US" sz="680" spc="260" kern="0" dirty="0">
+              <a:t>1,0 M</a:t>
+            </a:r>
+            <a:endParaRPr lang="en-US" sz="900" dirty="0"/>
+          </a:p>
+        </p:txBody>
+      </p:sp>
+      <p:sp>
+        <p:nvSpPr>
+          <p:cNvPr id="25" name="Shape 23"/>
+          <p:cNvSpPr/>
+          <p:nvPr/>
+        </p:nvSpPr>
+        <p:spPr>
+          <a:xfrm>
+            <a:off x="6560820" y="4480560"/>
+            <a:ext cx="1924812" cy="7315"/>
+          </a:xfrm>
+          <a:prstGeom prst="rect">
+            <a:avLst/>
+          </a:prstGeom>
+          <a:solidFill>
+            <a:srgbClr val="5B8AAE">
+              <a:alpha val="38000"/>
+            </a:srgbClr>
+          </a:solidFill>
+          <a:ln/>
+        </p:spPr>
+      </p:sp>
+      <p:sp>
+        <p:nvSpPr>
+          <p:cNvPr id="26" name="Text 24"/>
+          <p:cNvSpPr txBox="1"/>
+          <p:nvPr/>
+        </p:nvSpPr>
+        <p:spPr>
+          <a:xfrm>
+            <a:off x="6560820" y="4553712"/>
+            <a:ext cx="1906524" cy="155448"/>
+          </a:xfrm>
+          <a:prstGeom prst="rect">
+            <a:avLst/>
+          </a:prstGeom>
+          <a:noFill/>
+          <a:ln/>
+        </p:spPr>
+        <p:txBody>
+          <a:bodyPr wrap="square" lIns="0" tIns="0" rIns="0" bIns="0" rtlCol="0" anchor="ctr"/>
+          <a:lstStyle/>
+          <a:p>
+            <a:pPr algn="l" indent="0" marL="0">
+              <a:buNone/>
+            </a:pPr>
+            <a:r>
+              <a:rPr lang="en-US" sz="650" spc="260" kern="0" dirty="0">
                 <a:solidFill>
                   <a:srgbClr val="5B8AAE"/>
                 </a:solidFill>
@@ -9930,38 +10659,38 @@
                 <a:ea typeface="Arial" pitchFamily="34" charset="-122"/>
                 <a:cs typeface="Arial" pitchFamily="34" charset="-120"/>
               </a:rPr>
-              <a:t>CARACTERIZAÇÃO E VALIDAÇÃO AGRONÔMICA</a:t>
-            </a:r>
-            <a:endParaRPr lang="en-US" sz="680" dirty="0"/>
-          </a:p>
-        </p:txBody>
-      </p:sp>
-      <p:sp>
-        <p:nvSpPr>
-          <p:cNvPr id="25" name="Text 23"/>
-          <p:cNvSpPr txBox="1"/>
-          <p:nvPr/>
-        </p:nvSpPr>
-        <p:spPr>
-          <a:xfrm>
-            <a:off x="3275556" y="4498848"/>
-            <a:ext cx="2464872" cy="173736"/>
-          </a:xfrm>
-          <a:prstGeom prst="rect">
-            <a:avLst/>
-          </a:prstGeom>
-          <a:noFill/>
-          <a:ln/>
-        </p:spPr>
-        <p:txBody>
-          <a:bodyPr wrap="square" lIns="0" tIns="0" rIns="0" bIns="0" rtlCol="0" anchor="ctr"/>
-          <a:lstStyle/>
-          <a:p>
-            <a:pPr algn="l" indent="0" marL="0">
-              <a:buNone/>
-            </a:pPr>
-            <a:r>
-              <a:rPr lang="en-US" sz="950" dirty="0">
+              <a:t>ENG. INDUSTRIAL</a:t>
+            </a:r>
+            <a:endParaRPr lang="en-US" sz="650" dirty="0"/>
+          </a:p>
+        </p:txBody>
+      </p:sp>
+      <p:sp>
+        <p:nvSpPr>
+          <p:cNvPr id="27" name="Text 25"/>
+          <p:cNvSpPr txBox="1"/>
+          <p:nvPr/>
+        </p:nvSpPr>
+        <p:spPr>
+          <a:xfrm>
+            <a:off x="6560820" y="4718304"/>
+            <a:ext cx="1888236" cy="173736"/>
+          </a:xfrm>
+          <a:prstGeom prst="rect">
+            <a:avLst/>
+          </a:prstGeom>
+          <a:noFill/>
+          <a:ln/>
+        </p:spPr>
+        <p:txBody>
+          <a:bodyPr wrap="square" lIns="0" tIns="0" rIns="0" bIns="0" rtlCol="0" anchor="ctr"/>
+          <a:lstStyle/>
+          <a:p>
+            <a:pPr algn="l" indent="0" marL="0">
+              <a:buNone/>
+            </a:pPr>
+            <a:r>
+              <a:rPr lang="en-US" sz="900" dirty="0">
                 <a:solidFill>
                   <a:srgbClr val="143743"/>
                 </a:solidFill>
@@ -9969,70 +10698,9 @@
                 <a:ea typeface="Courier New" pitchFamily="34" charset="-122"/>
                 <a:cs typeface="Courier New" pitchFamily="34" charset="-120"/>
               </a:rPr>
-              <a:t>2,3</a:t>
-            </a:r>
-            <a:endParaRPr lang="en-US" sz="950" dirty="0"/>
-          </a:p>
-        </p:txBody>
-      </p:sp>
-      <p:sp>
-        <p:nvSpPr>
-          <p:cNvPr id="26" name="Shape 24"/>
-          <p:cNvSpPr/>
-          <p:nvPr/>
-        </p:nvSpPr>
-        <p:spPr>
-          <a:xfrm>
-            <a:off x="5868444" y="4041648"/>
-            <a:ext cx="1072478" cy="7315"/>
-          </a:xfrm>
-          <a:prstGeom prst="rect">
-            <a:avLst/>
-          </a:prstGeom>
-          <a:solidFill>
-            <a:srgbClr val="1F7370">
-              <a:alpha val="45000"/>
-            </a:srgbClr>
-          </a:solidFill>
-          <a:ln/>
-        </p:spPr>
-      </p:sp>
-      <p:sp>
-        <p:nvSpPr>
-          <p:cNvPr id="27" name="Text 25"/>
-          <p:cNvSpPr txBox="1"/>
-          <p:nvPr/>
-        </p:nvSpPr>
-        <p:spPr>
-          <a:xfrm>
-            <a:off x="5868444" y="4114800"/>
-            <a:ext cx="548640" cy="173736"/>
-          </a:xfrm>
-          <a:prstGeom prst="rect">
-            <a:avLst/>
-          </a:prstGeom>
-          <a:noFill/>
-          <a:ln/>
-        </p:spPr>
-        <p:txBody>
-          <a:bodyPr wrap="square" lIns="0" tIns="0" rIns="0" bIns="0" rtlCol="0" anchor="ctr"/>
-          <a:lstStyle/>
-          <a:p>
-            <a:pPr algn="l" indent="0" marL="0">
-              <a:buNone/>
-            </a:pPr>
-            <a:r>
-              <a:rPr lang="en-US" sz="800" dirty="0">
-                <a:solidFill>
-                  <a:srgbClr val="1F7370"/>
-                </a:solidFill>
-                <a:latin typeface="Courier New" pitchFamily="34" charset="0"/>
-                <a:ea typeface="Courier New" pitchFamily="34" charset="-122"/>
-                <a:cs typeface="Courier New" pitchFamily="34" charset="-120"/>
-              </a:rPr>
-              <a:t>WP5</a:t>
-            </a:r>
-            <a:endParaRPr lang="en-US" sz="800" dirty="0"/>
+              <a:t>1,5 M</a:t>
+            </a:r>
+            <a:endParaRPr lang="en-US" sz="900" dirty="0"/>
           </a:p>
         </p:txBody>
       </p:sp>
@@ -10044,241 +10712,24 @@
         </p:nvSpPr>
         <p:spPr>
           <a:xfrm>
-            <a:off x="5868444" y="4315968"/>
-            <a:ext cx="1035902" cy="155448"/>
-          </a:xfrm>
-          <a:prstGeom prst="rect">
-            <a:avLst/>
-          </a:prstGeom>
-          <a:noFill/>
-          <a:ln/>
-        </p:spPr>
-        <p:txBody>
-          <a:bodyPr wrap="square" lIns="0" tIns="0" rIns="0" bIns="0" rtlCol="0" anchor="ctr"/>
-          <a:lstStyle/>
-          <a:p>
-            <a:pPr algn="l" indent="0" marL="0">
-              <a:buNone/>
-            </a:pPr>
-            <a:r>
-              <a:rPr lang="en-US" sz="680" spc="260" kern="0" dirty="0">
-                <a:solidFill>
-                  <a:srgbClr val="5B8AAE"/>
-                </a:solidFill>
-                <a:latin typeface="Arial" pitchFamily="34" charset="0"/>
-                <a:ea typeface="Arial" pitchFamily="34" charset="-122"/>
-                <a:cs typeface="Arial" pitchFamily="34" charset="-120"/>
-              </a:rPr>
-              <a:t>ACV E CRÉDITOS DE CARBONO</a:t>
-            </a:r>
-            <a:endParaRPr lang="en-US" sz="680" dirty="0"/>
-          </a:p>
-        </p:txBody>
-      </p:sp>
-      <p:sp>
-        <p:nvSpPr>
-          <p:cNvPr id="29" name="Text 27"/>
-          <p:cNvSpPr txBox="1"/>
-          <p:nvPr/>
-        </p:nvSpPr>
-        <p:spPr>
-          <a:xfrm>
-            <a:off x="5868444" y="4498848"/>
-            <a:ext cx="999326" cy="173736"/>
-          </a:xfrm>
-          <a:prstGeom prst="rect">
-            <a:avLst/>
-          </a:prstGeom>
-          <a:noFill/>
-          <a:ln/>
-        </p:spPr>
-        <p:txBody>
-          <a:bodyPr wrap="square" lIns="0" tIns="0" rIns="0" bIns="0" rtlCol="0" anchor="ctr"/>
-          <a:lstStyle/>
-          <a:p>
-            <a:pPr algn="l" indent="0" marL="0">
-              <a:buNone/>
-            </a:pPr>
-            <a:r>
-              <a:rPr lang="en-US" sz="950" dirty="0">
-                <a:solidFill>
-                  <a:srgbClr val="143743"/>
-                </a:solidFill>
-                <a:latin typeface="Courier New" pitchFamily="34" charset="0"/>
-                <a:ea typeface="Courier New" pitchFamily="34" charset="-122"/>
-                <a:cs typeface="Courier New" pitchFamily="34" charset="-120"/>
-              </a:rPr>
-              <a:t>1,0</a:t>
-            </a:r>
-            <a:endParaRPr lang="en-US" sz="950" dirty="0"/>
-          </a:p>
-        </p:txBody>
-      </p:sp>
-      <p:sp>
-        <p:nvSpPr>
-          <p:cNvPr id="30" name="Shape 28"/>
-          <p:cNvSpPr/>
-          <p:nvPr/>
-        </p:nvSpPr>
-        <p:spPr>
-          <a:xfrm>
-            <a:off x="6995786" y="4041648"/>
-            <a:ext cx="1636150" cy="7315"/>
-          </a:xfrm>
-          <a:prstGeom prst="rect">
-            <a:avLst/>
-          </a:prstGeom>
-          <a:solidFill>
-            <a:srgbClr val="1F7370">
-              <a:alpha val="45000"/>
-            </a:srgbClr>
-          </a:solidFill>
-          <a:ln/>
-        </p:spPr>
-      </p:sp>
-      <p:sp>
-        <p:nvSpPr>
-          <p:cNvPr id="31" name="Text 29"/>
-          <p:cNvSpPr txBox="1"/>
-          <p:nvPr/>
-        </p:nvSpPr>
-        <p:spPr>
-          <a:xfrm>
-            <a:off x="6995786" y="4114800"/>
-            <a:ext cx="548640" cy="173736"/>
-          </a:xfrm>
-          <a:prstGeom prst="rect">
-            <a:avLst/>
-          </a:prstGeom>
-          <a:noFill/>
-          <a:ln/>
-        </p:spPr>
-        <p:txBody>
-          <a:bodyPr wrap="square" lIns="0" tIns="0" rIns="0" bIns="0" rtlCol="0" anchor="ctr"/>
-          <a:lstStyle/>
-          <a:p>
-            <a:pPr algn="l" indent="0" marL="0">
-              <a:buNone/>
-            </a:pPr>
-            <a:r>
-              <a:rPr lang="en-US" sz="800" dirty="0">
-                <a:solidFill>
-                  <a:srgbClr val="1F7370"/>
-                </a:solidFill>
-                <a:latin typeface="Courier New" pitchFamily="34" charset="0"/>
-                <a:ea typeface="Courier New" pitchFamily="34" charset="-122"/>
-                <a:cs typeface="Courier New" pitchFamily="34" charset="-120"/>
-              </a:rPr>
-              <a:t>WP6</a:t>
-            </a:r>
-            <a:endParaRPr lang="en-US" sz="800" dirty="0"/>
-          </a:p>
-        </p:txBody>
-      </p:sp>
-      <p:sp>
-        <p:nvSpPr>
-          <p:cNvPr id="32" name="Text 30"/>
-          <p:cNvSpPr txBox="1"/>
-          <p:nvPr/>
-        </p:nvSpPr>
-        <p:spPr>
-          <a:xfrm>
-            <a:off x="6995786" y="4315968"/>
-            <a:ext cx="1599574" cy="155448"/>
-          </a:xfrm>
-          <a:prstGeom prst="rect">
-            <a:avLst/>
-          </a:prstGeom>
-          <a:noFill/>
-          <a:ln/>
-        </p:spPr>
-        <p:txBody>
-          <a:bodyPr wrap="square" lIns="0" tIns="0" rIns="0" bIns="0" rtlCol="0" anchor="ctr"/>
-          <a:lstStyle/>
-          <a:p>
-            <a:pPr algn="l" indent="0" marL="0">
-              <a:buNone/>
-            </a:pPr>
-            <a:r>
-              <a:rPr lang="en-US" sz="680" spc="260" kern="0" dirty="0">
-                <a:solidFill>
-                  <a:srgbClr val="5B8AAE"/>
-                </a:solidFill>
-                <a:latin typeface="Arial" pitchFamily="34" charset="0"/>
-                <a:ea typeface="Arial" pitchFamily="34" charset="-122"/>
-                <a:cs typeface="Arial" pitchFamily="34" charset="-120"/>
-              </a:rPr>
-              <a:t>ENGENHARIA INDUSTRIAL E NEGÓCIO</a:t>
-            </a:r>
-            <a:endParaRPr lang="en-US" sz="680" dirty="0"/>
-          </a:p>
-        </p:txBody>
-      </p:sp>
-      <p:sp>
-        <p:nvSpPr>
-          <p:cNvPr id="33" name="Text 31"/>
-          <p:cNvSpPr txBox="1"/>
-          <p:nvPr/>
-        </p:nvSpPr>
-        <p:spPr>
-          <a:xfrm>
-            <a:off x="6995786" y="4498848"/>
-            <a:ext cx="1562998" cy="173736"/>
-          </a:xfrm>
-          <a:prstGeom prst="rect">
-            <a:avLst/>
-          </a:prstGeom>
-          <a:noFill/>
-          <a:ln/>
-        </p:spPr>
-        <p:txBody>
-          <a:bodyPr wrap="square" lIns="0" tIns="0" rIns="0" bIns="0" rtlCol="0" anchor="ctr"/>
-          <a:lstStyle/>
-          <a:p>
-            <a:pPr algn="l" indent="0" marL="0">
-              <a:buNone/>
-            </a:pPr>
-            <a:r>
-              <a:rPr lang="en-US" sz="950" dirty="0">
-                <a:solidFill>
-                  <a:srgbClr val="143743"/>
-                </a:solidFill>
-                <a:latin typeface="Courier New" pitchFamily="34" charset="0"/>
-                <a:ea typeface="Courier New" pitchFamily="34" charset="-122"/>
-                <a:cs typeface="Courier New" pitchFamily="34" charset="-120"/>
-              </a:rPr>
-              <a:t>1,5</a:t>
-            </a:r>
-            <a:endParaRPr lang="en-US" sz="950" dirty="0"/>
-          </a:p>
-        </p:txBody>
-      </p:sp>
-      <p:sp>
-        <p:nvSpPr>
-          <p:cNvPr id="34" name="Text 32"/>
-          <p:cNvSpPr txBox="1"/>
-          <p:nvPr/>
-        </p:nvSpPr>
-        <p:spPr>
-          <a:xfrm>
-            <a:off x="457200" y="4809744"/>
-            <a:ext cx="3657600" cy="155448"/>
-          </a:xfrm>
-          <a:prstGeom prst="rect">
-            <a:avLst/>
-          </a:prstGeom>
-          <a:noFill/>
-          <a:ln/>
-        </p:spPr>
-        <p:txBody>
-          <a:bodyPr wrap="square" lIns="0" tIns="0" rIns="0" bIns="0" rtlCol="0" anchor="ctr"/>
-          <a:lstStyle/>
-          <a:p>
-            <a:pPr algn="l" indent="0" marL="0">
-              <a:buNone/>
-            </a:pPr>
-            <a:r>
-              <a:rPr lang="en-US" sz="750" spc="260" kern="0" dirty="0">
+            <a:off x="457200" y="4901184"/>
+            <a:ext cx="8138160" cy="155448"/>
+          </a:xfrm>
+          <a:prstGeom prst="rect">
+            <a:avLst/>
+          </a:prstGeom>
+          <a:noFill/>
+          <a:ln/>
+        </p:spPr>
+        <p:txBody>
+          <a:bodyPr wrap="square" lIns="0" tIns="0" rIns="0" bIns="0" rtlCol="0" anchor="ctr"/>
+          <a:lstStyle/>
+          <a:p>
+            <a:pPr algn="l" indent="0" marL="0">
+              <a:buNone/>
+            </a:pPr>
+            <a:r>
+              <a:rPr lang="en-US" sz="620" spc="260" kern="0" dirty="0">
                 <a:solidFill>
                   <a:srgbClr val="7AA8C9"/>
                 </a:solidFill>
@@ -10286,9 +10737,9 @@
                 <a:ea typeface="Arial" pitchFamily="34" charset="-122"/>
                 <a:cs typeface="Arial" pitchFamily="34" charset="-120"/>
               </a:rPr>
-              <a:t>POC BIOCHAR · PETROLINA</a:t>
-            </a:r>
-            <a:endParaRPr lang="en-US" sz="750" dirty="0"/>
+              <a:t>WP3 · WP4 · WP5 · WP6   ·   [DOC] PROPOSTA FINEP</a:t>
+            </a:r>
+            <a:endParaRPr lang="en-US" sz="620" dirty="0"/>
           </a:p>
         </p:txBody>
       </p:sp>
@@ -10378,8 +10829,8 @@
         </p:nvSpPr>
         <p:spPr>
           <a:xfrm>
-            <a:off x="457200" y="822960"/>
-            <a:ext cx="4937760" cy="807720"/>
+            <a:off x="4846320" y="731520"/>
+            <a:ext cx="3840480" cy="807720"/>
           </a:xfrm>
           <a:prstGeom prst="rect">
             <a:avLst/>
@@ -10440,8 +10891,47 @@
         </p:nvSpPr>
         <p:spPr>
           <a:xfrm>
-            <a:off x="566928" y="2286000"/>
-            <a:ext cx="3108960" cy="660400"/>
+            <a:off x="457200" y="3675888"/>
+            <a:ext cx="3108960" cy="155448"/>
+          </a:xfrm>
+          <a:prstGeom prst="rect">
+            <a:avLst/>
+          </a:prstGeom>
+          <a:noFill/>
+          <a:ln/>
+        </p:spPr>
+        <p:txBody>
+          <a:bodyPr wrap="square" lIns="0" tIns="0" rIns="0" bIns="0" rtlCol="0" anchor="ctr"/>
+          <a:lstStyle/>
+          <a:p>
+            <a:pPr algn="l" indent="0" marL="0">
+              <a:buNone/>
+            </a:pPr>
+            <a:r>
+              <a:rPr lang="en-US" sz="750" spc="260" kern="0" dirty="0">
+                <a:solidFill>
+                  <a:srgbClr val="5B8AAE"/>
+                </a:solidFill>
+                <a:latin typeface="Arial" pitchFamily="34" charset="0"/>
+                <a:ea typeface="Arial" pitchFamily="34" charset="-122"/>
+                <a:cs typeface="Arial" pitchFamily="34" charset="-120"/>
+              </a:rPr>
+              <a:t>CUSTO POR TONELADA DE CHAR · R$/T</a:t>
+            </a:r>
+            <a:endParaRPr lang="en-US" sz="750" dirty="0"/>
+          </a:p>
+        </p:txBody>
+      </p:sp>
+      <p:sp>
+        <p:nvSpPr>
+          <p:cNvPr id="5" name="Text 3"/>
+          <p:cNvSpPr txBox="1"/>
+          <p:nvPr/>
+        </p:nvSpPr>
+        <p:spPr>
+          <a:xfrm>
+            <a:off x="457200" y="932688"/>
+            <a:ext cx="2194560" cy="495300"/>
           </a:xfrm>
           <a:prstGeom prst="rect">
             <a:avLst/>
@@ -10457,7 +10947,7 @@
               <a:buNone/>
             </a:pPr>
             <a:r>
-              <a:rPr lang="en-US" sz="4000" spc="-200" kern="0" dirty="0">
+              <a:rPr lang="en-US" sz="3000" spc="-200" kern="0" dirty="0">
                 <a:solidFill>
                   <a:srgbClr val="143743"/>
                 </a:solidFill>
@@ -10467,20 +10957,20 @@
               </a:rPr>
               <a:t>R$ 3.336</a:t>
             </a:r>
-            <a:endParaRPr lang="en-US" sz="4000" dirty="0"/>
-          </a:p>
-        </p:txBody>
-      </p:sp>
-      <p:sp>
-        <p:nvSpPr>
-          <p:cNvPr id="5" name="Text 3"/>
-          <p:cNvSpPr txBox="1"/>
-          <p:nvPr/>
-        </p:nvSpPr>
-        <p:spPr>
-          <a:xfrm>
-            <a:off x="603504" y="2999232"/>
-            <a:ext cx="2926080" cy="155448"/>
+            <a:endParaRPr lang="en-US" sz="3000" dirty="0"/>
+          </a:p>
+        </p:txBody>
+      </p:sp>
+      <p:sp>
+        <p:nvSpPr>
+          <p:cNvPr id="6" name="Text 4"/>
+          <p:cNvSpPr txBox="1"/>
+          <p:nvPr/>
+        </p:nvSpPr>
+        <p:spPr>
+          <a:xfrm>
+            <a:off x="457200" y="1464564"/>
+            <a:ext cx="2194560" cy="155448"/>
           </a:xfrm>
           <a:prstGeom prst="rect">
             <a:avLst/>
@@ -10498,13 +10988,91 @@
             <a:r>
               <a:rPr lang="en-US" sz="750" spc="260" kern="0" dirty="0">
                 <a:solidFill>
+                  <a:srgbClr val="1F7370"/>
+                </a:solidFill>
+                <a:latin typeface="Arial" pitchFamily="34" charset="0"/>
+                <a:ea typeface="Arial" pitchFamily="34" charset="-122"/>
+                <a:cs typeface="Arial" pitchFamily="34" charset="-120"/>
+              </a:rPr>
+              <a:t>POC · 810 T/ANO</a:t>
+            </a:r>
+            <a:endParaRPr lang="en-US" sz="750" dirty="0"/>
+          </a:p>
+        </p:txBody>
+      </p:sp>
+      <p:sp>
+        <p:nvSpPr>
+          <p:cNvPr id="7" name="Text 5"/>
+          <p:cNvSpPr txBox="1"/>
+          <p:nvPr/>
+        </p:nvSpPr>
+        <p:spPr>
+          <a:xfrm>
+            <a:off x="5760720" y="2304288"/>
+            <a:ext cx="2194560" cy="396240"/>
+          </a:xfrm>
+          <a:prstGeom prst="rect">
+            <a:avLst/>
+          </a:prstGeom>
+          <a:noFill/>
+          <a:ln/>
+        </p:spPr>
+        <p:txBody>
+          <a:bodyPr wrap="square" lIns="0" tIns="0" rIns="0" bIns="0" rtlCol="0" anchor="t"/>
+          <a:lstStyle/>
+          <a:p>
+            <a:pPr algn="l" indent="0" marL="0">
+              <a:buNone/>
+            </a:pPr>
+            <a:r>
+              <a:rPr lang="en-US" sz="2400" spc="-200" kern="0" dirty="0">
+                <a:solidFill>
+                  <a:srgbClr val="175D5C"/>
+                </a:solidFill>
+                <a:latin typeface="Arial" pitchFamily="34" charset="0"/>
+                <a:ea typeface="Arial" pitchFamily="34" charset="-122"/>
+                <a:cs typeface="Arial" pitchFamily="34" charset="-120"/>
+              </a:rPr>
+              <a:t>R$ 1.192</a:t>
+            </a:r>
+            <a:endParaRPr lang="en-US" sz="2400" dirty="0"/>
+          </a:p>
+        </p:txBody>
+      </p:sp>
+      <p:sp>
+        <p:nvSpPr>
+          <p:cNvPr id="8" name="Text 6"/>
+          <p:cNvSpPr txBox="1"/>
+          <p:nvPr/>
+        </p:nvSpPr>
+        <p:spPr>
+          <a:xfrm>
+            <a:off x="5760720" y="2737104"/>
+            <a:ext cx="2194560" cy="155448"/>
+          </a:xfrm>
+          <a:prstGeom prst="rect">
+            <a:avLst/>
+          </a:prstGeom>
+          <a:noFill/>
+          <a:ln/>
+        </p:spPr>
+        <p:txBody>
+          <a:bodyPr wrap="square" lIns="0" tIns="0" rIns="0" bIns="0" rtlCol="0" anchor="ctr"/>
+          <a:lstStyle/>
+          <a:p>
+            <a:pPr algn="l" indent="0" marL="0">
+              <a:buNone/>
+            </a:pPr>
+            <a:r>
+              <a:rPr lang="en-US" sz="750" spc="260" kern="0" dirty="0">
+                <a:solidFill>
                   <a:srgbClr val="5B8AAE"/>
                 </a:solidFill>
                 <a:latin typeface="Arial" pitchFamily="34" charset="0"/>
                 <a:ea typeface="Arial" pitchFamily="34" charset="-122"/>
                 <a:cs typeface="Arial" pitchFamily="34" charset="-120"/>
               </a:rPr>
-              <a:t>CUSTO POR TONELADA, EM REGIME</a:t>
+              <a:t>MÓDULO 1 · 4.700 T/ANO</a:t>
             </a:r>
             <a:endParaRPr lang="en-US" sz="750" dirty="0"/>
           </a:p>
@@ -10512,14 +11080,14 @@
       </p:sp>
       <p:sp>
         <p:nvSpPr>
-          <p:cNvPr id="6" name="Text 4"/>
-          <p:cNvSpPr txBox="1"/>
-          <p:nvPr/>
-        </p:nvSpPr>
-        <p:spPr>
-          <a:xfrm>
-            <a:off x="2286000" y="2999232"/>
-            <a:ext cx="3108960" cy="660400"/>
+          <p:cNvPr id="9" name="Text 7"/>
+          <p:cNvSpPr txBox="1"/>
+          <p:nvPr/>
+        </p:nvSpPr>
+        <p:spPr>
+          <a:xfrm>
+            <a:off x="6217920" y="2615184"/>
+            <a:ext cx="2194560" cy="297180"/>
           </a:xfrm>
           <a:prstGeom prst="rect">
             <a:avLst/>
@@ -10531,58 +11099,119 @@
           <a:bodyPr wrap="square" lIns="0" tIns="0" rIns="0" bIns="0" rtlCol="0" anchor="t"/>
           <a:lstStyle/>
           <a:p>
-            <a:pPr algn="l" indent="0" marL="0">
-              <a:buNone/>
-            </a:pPr>
-            <a:r>
-              <a:rPr lang="en-US" sz="4000" spc="-200" kern="0" dirty="0">
-                <a:solidFill>
-                  <a:srgbClr val="175D5C"/>
-                </a:solidFill>
-                <a:latin typeface="Arial" pitchFamily="34" charset="0"/>
-                <a:ea typeface="Arial" pitchFamily="34" charset="-122"/>
-                <a:cs typeface="Arial" pitchFamily="34" charset="-120"/>
-              </a:rPr>
-              <a:t>R$ 3.177</a:t>
-            </a:r>
-            <a:endParaRPr lang="en-US" sz="4000" dirty="0"/>
-          </a:p>
-        </p:txBody>
-      </p:sp>
-      <p:sp>
-        <p:nvSpPr>
-          <p:cNvPr id="7" name="Text 5"/>
-          <p:cNvSpPr txBox="1"/>
-          <p:nvPr/>
-        </p:nvSpPr>
-        <p:spPr>
-          <a:xfrm>
-            <a:off x="2322576" y="3712464"/>
-            <a:ext cx="2926080" cy="155448"/>
-          </a:xfrm>
-          <a:prstGeom prst="rect">
-            <a:avLst/>
-          </a:prstGeom>
-          <a:noFill/>
-          <a:ln/>
-        </p:spPr>
-        <p:txBody>
-          <a:bodyPr wrap="square" lIns="0" tIns="0" rIns="0" bIns="0" rtlCol="0" anchor="ctr"/>
-          <a:lstStyle/>
-          <a:p>
-            <a:pPr algn="l" indent="0" marL="0">
+            <a:pPr algn="r" indent="0" marL="0">
+              <a:buNone/>
+            </a:pPr>
+            <a:r>
+              <a:rPr lang="en-US" sz="1800" spc="-200" kern="0" dirty="0">
+                <a:solidFill>
+                  <a:srgbClr val="5B8AAE"/>
+                </a:solidFill>
+                <a:latin typeface="Arial" pitchFamily="34" charset="0"/>
+                <a:ea typeface="Arial" pitchFamily="34" charset="-122"/>
+                <a:cs typeface="Arial" pitchFamily="34" charset="-120"/>
+              </a:rPr>
+              <a:t>R$ 907</a:t>
+            </a:r>
+            <a:endParaRPr lang="en-US" sz="1800" dirty="0"/>
+          </a:p>
+        </p:txBody>
+      </p:sp>
+      <p:sp>
+        <p:nvSpPr>
+          <p:cNvPr id="10" name="Text 8"/>
+          <p:cNvSpPr txBox="1"/>
+          <p:nvPr/>
+        </p:nvSpPr>
+        <p:spPr>
+          <a:xfrm>
+            <a:off x="6217920" y="2948940"/>
+            <a:ext cx="2194560" cy="155448"/>
+          </a:xfrm>
+          <a:prstGeom prst="rect">
+            <a:avLst/>
+          </a:prstGeom>
+          <a:noFill/>
+          <a:ln/>
+        </p:spPr>
+        <p:txBody>
+          <a:bodyPr wrap="square" lIns="0" tIns="0" rIns="0" bIns="0" rtlCol="0" anchor="ctr"/>
+          <a:lstStyle/>
+          <a:p>
+            <a:pPr algn="r" indent="0" marL="0">
               <a:buNone/>
             </a:pPr>
             <a:r>
               <a:rPr lang="en-US" sz="750" spc="260" kern="0" dirty="0">
                 <a:solidFill>
+                  <a:srgbClr val="5B8AAE"/>
+                </a:solidFill>
+                <a:latin typeface="Arial" pitchFamily="34" charset="0"/>
+                <a:ea typeface="Arial" pitchFamily="34" charset="-122"/>
+                <a:cs typeface="Arial" pitchFamily="34" charset="-120"/>
+              </a:rPr>
+              <a:t>GRUPO · 13.000 T/ANO</a:t>
+            </a:r>
+            <a:endParaRPr lang="en-US" sz="750" dirty="0"/>
+          </a:p>
+        </p:txBody>
+      </p:sp>
+      <p:sp>
+        <p:nvSpPr>
+          <p:cNvPr id="11" name="Shape 9"/>
+          <p:cNvSpPr/>
+          <p:nvPr/>
+        </p:nvSpPr>
+        <p:spPr>
+          <a:xfrm>
+            <a:off x="457200" y="3803904"/>
+            <a:ext cx="8138160" cy="7315"/>
+          </a:xfrm>
+          <a:prstGeom prst="rect">
+            <a:avLst/>
+          </a:prstGeom>
+          <a:solidFill>
+            <a:srgbClr val="1F7370">
+              <a:alpha val="45000"/>
+            </a:srgbClr>
+          </a:solidFill>
+          <a:ln/>
+        </p:spPr>
+      </p:sp>
+      <p:sp>
+        <p:nvSpPr>
+          <p:cNvPr id="12" name="Text 10"/>
+          <p:cNvSpPr txBox="1"/>
+          <p:nvPr/>
+        </p:nvSpPr>
+        <p:spPr>
+          <a:xfrm>
+            <a:off x="457200" y="3895344"/>
+            <a:ext cx="1097280" cy="155448"/>
+          </a:xfrm>
+          <a:prstGeom prst="rect">
+            <a:avLst/>
+          </a:prstGeom>
+          <a:noFill/>
+          <a:ln/>
+        </p:spPr>
+        <p:txBody>
+          <a:bodyPr wrap="square" lIns="0" tIns="0" rIns="0" bIns="0" rtlCol="0" anchor="ctr"/>
+          <a:lstStyle/>
+          <a:p>
+            <a:pPr algn="l" indent="0" marL="0">
+              <a:buNone/>
+            </a:pPr>
+            <a:r>
+              <a:rPr lang="en-US" sz="750" spc="260" kern="0" dirty="0">
+                <a:solidFill>
                   <a:srgbClr val="1F7370"/>
                 </a:solidFill>
                 <a:latin typeface="Arial" pitchFamily="34" charset="0"/>
                 <a:ea typeface="Arial" pitchFamily="34" charset="-122"/>
                 <a:cs typeface="Arial" pitchFamily="34" charset="-120"/>
               </a:rPr>
-              <a:t>RECEITA BRUTA POR TONELADA</a:t>
+              <a:t>CUSTO FIXO</a:t>
             </a:r>
             <a:endParaRPr lang="en-US" sz="750" dirty="0"/>
           </a:p>
@@ -10590,77 +11219,77 @@
       </p:sp>
       <p:sp>
         <p:nvSpPr>
-          <p:cNvPr id="8" name="Text 6"/>
-          <p:cNvSpPr txBox="1"/>
-          <p:nvPr/>
-        </p:nvSpPr>
-        <p:spPr>
-          <a:xfrm>
-            <a:off x="5852160" y="3913632"/>
-            <a:ext cx="1463040" cy="310896"/>
-          </a:xfrm>
-          <a:prstGeom prst="rect">
-            <a:avLst/>
-          </a:prstGeom>
-          <a:noFill/>
-          <a:ln/>
-        </p:spPr>
-        <p:txBody>
-          <a:bodyPr wrap="square" lIns="0" tIns="0" rIns="0" bIns="0" rtlCol="0" anchor="t"/>
-          <a:lstStyle/>
-          <a:p>
-            <a:pPr algn="r" indent="0" marL="0">
-              <a:buNone/>
-            </a:pPr>
-            <a:r>
-              <a:rPr lang="en-US" sz="1600" dirty="0">
-                <a:solidFill>
-                  <a:srgbClr val="C9654A"/>
+          <p:cNvPr id="13" name="Text 11"/>
+          <p:cNvSpPr txBox="1"/>
+          <p:nvPr/>
+        </p:nvSpPr>
+        <p:spPr>
+          <a:xfrm>
+            <a:off x="1554480" y="3877056"/>
+            <a:ext cx="1554480" cy="173736"/>
+          </a:xfrm>
+          <a:prstGeom prst="rect">
+            <a:avLst/>
+          </a:prstGeom>
+          <a:noFill/>
+          <a:ln/>
+        </p:spPr>
+        <p:txBody>
+          <a:bodyPr wrap="square" lIns="0" tIns="0" rIns="0" bIns="0" rtlCol="0" anchor="ctr"/>
+          <a:lstStyle/>
+          <a:p>
+            <a:pPr algn="l" indent="0" marL="0">
+              <a:buNone/>
+            </a:pPr>
+            <a:r>
+              <a:rPr lang="en-US" sz="950" dirty="0">
+                <a:solidFill>
+                  <a:srgbClr val="143743"/>
                 </a:solidFill>
                 <a:latin typeface="Courier New" pitchFamily="34" charset="0"/>
                 <a:ea typeface="Courier New" pitchFamily="34" charset="-122"/>
                 <a:cs typeface="Courier New" pitchFamily="34" charset="-120"/>
               </a:rPr>
-              <a:t>−160 / t</a:t>
-            </a:r>
-            <a:endParaRPr lang="en-US" sz="1600" dirty="0"/>
-          </a:p>
-        </p:txBody>
-      </p:sp>
-      <p:sp>
-        <p:nvSpPr>
-          <p:cNvPr id="9" name="Text 7"/>
-          <p:cNvSpPr txBox="1"/>
-          <p:nvPr/>
-        </p:nvSpPr>
-        <p:spPr>
-          <a:xfrm>
-            <a:off x="4937760" y="4261104"/>
-            <a:ext cx="2377440" cy="155448"/>
-          </a:xfrm>
-          <a:prstGeom prst="rect">
-            <a:avLst/>
-          </a:prstGeom>
-          <a:noFill/>
-          <a:ln/>
-        </p:spPr>
-        <p:txBody>
-          <a:bodyPr wrap="square" lIns="0" tIns="0" rIns="0" bIns="0" rtlCol="0" anchor="ctr"/>
-          <a:lstStyle/>
-          <a:p>
-            <a:pPr algn="r" indent="0" marL="0">
+              <a:t>R$ 2.098.800/ano</a:t>
+            </a:r>
+            <a:endParaRPr lang="en-US" sz="950" dirty="0"/>
+          </a:p>
+        </p:txBody>
+      </p:sp>
+      <p:sp>
+        <p:nvSpPr>
+          <p:cNvPr id="14" name="Text 12"/>
+          <p:cNvSpPr txBox="1"/>
+          <p:nvPr/>
+        </p:nvSpPr>
+        <p:spPr>
+          <a:xfrm>
+            <a:off x="3383280" y="3895344"/>
+            <a:ext cx="1188720" cy="155448"/>
+          </a:xfrm>
+          <a:prstGeom prst="rect">
+            <a:avLst/>
+          </a:prstGeom>
+          <a:noFill/>
+          <a:ln/>
+        </p:spPr>
+        <p:txBody>
+          <a:bodyPr wrap="square" lIns="0" tIns="0" rIns="0" bIns="0" rtlCol="0" anchor="ctr"/>
+          <a:lstStyle/>
+          <a:p>
+            <a:pPr algn="l" indent="0" marL="0">
               <a:buNone/>
             </a:pPr>
             <a:r>
               <a:rPr lang="en-US" sz="750" spc="260" kern="0" dirty="0">
                 <a:solidFill>
-                  <a:srgbClr val="5B8AAE"/>
-                </a:solidFill>
-                <a:latin typeface="Arial" pitchFamily="34" charset="0"/>
-                <a:ea typeface="Arial" pitchFamily="34" charset="-122"/>
-                <a:cs typeface="Arial" pitchFamily="34" charset="-120"/>
-              </a:rPr>
-              <a:t>RESULTADO A 810 T/ANO</a:t>
+                  <a:srgbClr val="1F7370"/>
+                </a:solidFill>
+                <a:latin typeface="Arial" pitchFamily="34" charset="0"/>
+                <a:ea typeface="Arial" pitchFamily="34" charset="-122"/>
+                <a:cs typeface="Arial" pitchFamily="34" charset="-120"/>
+              </a:rPr>
+              <a:t>CUSTO VARIÁVEL</a:t>
             </a:r>
             <a:endParaRPr lang="en-US" sz="750" dirty="0"/>
           </a:p>
@@ -10668,108 +11297,69 @@
       </p:sp>
       <p:sp>
         <p:nvSpPr>
-          <p:cNvPr id="10" name="Text 8"/>
-          <p:cNvSpPr txBox="1"/>
-          <p:nvPr/>
-        </p:nvSpPr>
-        <p:spPr>
-          <a:xfrm>
-            <a:off x="5577840" y="1371600"/>
-            <a:ext cx="1616659" cy="155448"/>
-          </a:xfrm>
-          <a:prstGeom prst="rect">
-            <a:avLst/>
-          </a:prstGeom>
-          <a:noFill/>
-          <a:ln/>
-        </p:spPr>
-        <p:txBody>
-          <a:bodyPr wrap="square" lIns="0" tIns="0" rIns="0" bIns="0" rtlCol="0" anchor="ctr"/>
-          <a:lstStyle/>
-          <a:p>
-            <a:pPr algn="l" indent="0" marL="0">
-              <a:buNone/>
-            </a:pPr>
-            <a:r>
-              <a:rPr lang="en-US" sz="680" spc="260" kern="0" dirty="0">
-                <a:solidFill>
-                  <a:srgbClr val="5B8AAE"/>
-                </a:solidFill>
-                <a:latin typeface="Arial" pitchFamily="34" charset="0"/>
-                <a:ea typeface="Arial" pitchFamily="34" charset="-122"/>
-                <a:cs typeface="Arial" pitchFamily="34" charset="-120"/>
-              </a:rPr>
-              <a:t>CUSTO FIXO</a:t>
-            </a:r>
-            <a:endParaRPr lang="en-US" sz="680" dirty="0"/>
-          </a:p>
-        </p:txBody>
-      </p:sp>
-      <p:sp>
-        <p:nvSpPr>
-          <p:cNvPr id="11" name="Text 9"/>
-          <p:cNvSpPr txBox="1"/>
-          <p:nvPr/>
-        </p:nvSpPr>
-        <p:spPr>
-          <a:xfrm>
-            <a:off x="7132320" y="1371600"/>
-            <a:ext cx="1554480" cy="173736"/>
-          </a:xfrm>
-          <a:prstGeom prst="rect">
-            <a:avLst/>
-          </a:prstGeom>
-          <a:noFill/>
-          <a:ln/>
-        </p:spPr>
-        <p:txBody>
-          <a:bodyPr wrap="square" lIns="0" tIns="0" rIns="0" bIns="0" rtlCol="0" anchor="ctr"/>
-          <a:lstStyle/>
-          <a:p>
-            <a:pPr algn="r" indent="0" marL="0">
-              <a:buNone/>
-            </a:pPr>
-            <a:r>
-              <a:rPr lang="en-US" sz="760" dirty="0">
-                <a:solidFill>
-                  <a:srgbClr val="7AA8C9"/>
+          <p:cNvPr id="15" name="Text 13"/>
+          <p:cNvSpPr txBox="1"/>
+          <p:nvPr/>
+        </p:nvSpPr>
+        <p:spPr>
+          <a:xfrm>
+            <a:off x="4572000" y="3877056"/>
+            <a:ext cx="1097280" cy="173736"/>
+          </a:xfrm>
+          <a:prstGeom prst="rect">
+            <a:avLst/>
+          </a:prstGeom>
+          <a:noFill/>
+          <a:ln/>
+        </p:spPr>
+        <p:txBody>
+          <a:bodyPr wrap="square" lIns="0" tIns="0" rIns="0" bIns="0" rtlCol="0" anchor="ctr"/>
+          <a:lstStyle/>
+          <a:p>
+            <a:pPr algn="l" indent="0" marL="0">
+              <a:buNone/>
+            </a:pPr>
+            <a:r>
+              <a:rPr lang="en-US" sz="950" dirty="0">
+                <a:solidFill>
+                  <a:srgbClr val="143743"/>
                 </a:solidFill>
                 <a:latin typeface="Courier New" pitchFamily="34" charset="0"/>
                 <a:ea typeface="Courier New" pitchFamily="34" charset="-122"/>
                 <a:cs typeface="Courier New" pitchFamily="34" charset="-120"/>
               </a:rPr>
-              <a:t>R$ 2.098.800/ano</a:t>
-            </a:r>
-            <a:endParaRPr lang="en-US" sz="760" dirty="0"/>
-          </a:p>
-        </p:txBody>
-      </p:sp>
-      <p:sp>
-        <p:nvSpPr>
-          <p:cNvPr id="12" name="Text 10"/>
-          <p:cNvSpPr txBox="1"/>
-          <p:nvPr/>
-        </p:nvSpPr>
-        <p:spPr>
-          <a:xfrm>
-            <a:off x="5577840" y="1586484"/>
-            <a:ext cx="1616659" cy="155448"/>
-          </a:xfrm>
-          <a:prstGeom prst="rect">
-            <a:avLst/>
-          </a:prstGeom>
-          <a:noFill/>
-          <a:ln/>
-        </p:spPr>
-        <p:txBody>
-          <a:bodyPr wrap="square" lIns="0" tIns="0" rIns="0" bIns="0" rtlCol="0" anchor="ctr"/>
-          <a:lstStyle/>
-          <a:p>
-            <a:pPr algn="l" indent="0" marL="0">
-              <a:buNone/>
-            </a:pPr>
-            <a:r>
-              <a:rPr lang="en-US" sz="680" spc="260" kern="0" dirty="0">
+              <a:t>R$ 745/t</a:t>
+            </a:r>
+            <a:endParaRPr lang="en-US" sz="950" dirty="0"/>
+          </a:p>
+        </p:txBody>
+      </p:sp>
+      <p:sp>
+        <p:nvSpPr>
+          <p:cNvPr id="16" name="Text 14"/>
+          <p:cNvSpPr txBox="1"/>
+          <p:nvPr/>
+        </p:nvSpPr>
+        <p:spPr>
+          <a:xfrm>
+            <a:off x="5852160" y="3895344"/>
+            <a:ext cx="2834640" cy="155448"/>
+          </a:xfrm>
+          <a:prstGeom prst="rect">
+            <a:avLst/>
+          </a:prstGeom>
+          <a:noFill/>
+          <a:ln/>
+        </p:spPr>
+        <p:txBody>
+          <a:bodyPr wrap="square" lIns="0" tIns="0" rIns="0" bIns="0" rtlCol="0" anchor="ctr"/>
+          <a:lstStyle/>
+          <a:p>
+            <a:pPr algn="r" indent="0" marL="0">
+              <a:buNone/>
+            </a:pPr>
+            <a:r>
+              <a:rPr lang="en-US" sz="650" spc="260" kern="0" dirty="0">
                 <a:solidFill>
                   <a:srgbClr val="5B8AAE"/>
                 </a:solidFill>
@@ -10777,77 +11367,138 @@
                 <a:ea typeface="Arial" pitchFamily="34" charset="-122"/>
                 <a:cs typeface="Arial" pitchFamily="34" charset="-120"/>
               </a:rPr>
-              <a:t>CUSTO VARIÁVEL</a:t>
-            </a:r>
-            <a:endParaRPr lang="en-US" sz="680" dirty="0"/>
-          </a:p>
-        </p:txBody>
-      </p:sp>
-      <p:sp>
-        <p:nvSpPr>
-          <p:cNvPr id="13" name="Text 11"/>
-          <p:cNvSpPr txBox="1"/>
-          <p:nvPr/>
-        </p:nvSpPr>
-        <p:spPr>
-          <a:xfrm>
-            <a:off x="7132320" y="1586484"/>
-            <a:ext cx="1554480" cy="173736"/>
-          </a:xfrm>
-          <a:prstGeom prst="rect">
-            <a:avLst/>
-          </a:prstGeom>
-          <a:noFill/>
-          <a:ln/>
-        </p:spPr>
-        <p:txBody>
-          <a:bodyPr wrap="square" lIns="0" tIns="0" rIns="0" bIns="0" rtlCol="0" anchor="ctr"/>
-          <a:lstStyle/>
-          <a:p>
-            <a:pPr algn="r" indent="0" marL="0">
-              <a:buNone/>
-            </a:pPr>
-            <a:r>
-              <a:rPr lang="en-US" sz="760" dirty="0">
+              <a:t>O FIXO NÃO CAI COM A ESCALA — É ELE QUE A CURVA DILUI</a:t>
+            </a:r>
+            <a:endParaRPr lang="en-US" sz="650" dirty="0"/>
+          </a:p>
+        </p:txBody>
+      </p:sp>
+      <p:sp>
+        <p:nvSpPr>
+          <p:cNvPr id="17" name="Text 15"/>
+          <p:cNvSpPr txBox="1"/>
+          <p:nvPr/>
+        </p:nvSpPr>
+        <p:spPr>
+          <a:xfrm>
+            <a:off x="457200" y="4206240"/>
+            <a:ext cx="5486400" cy="310896"/>
+          </a:xfrm>
+          <a:prstGeom prst="rect">
+            <a:avLst/>
+          </a:prstGeom>
+          <a:noFill/>
+          <a:ln/>
+        </p:spPr>
+        <p:txBody>
+          <a:bodyPr wrap="square" lIns="0" tIns="0" rIns="0" bIns="0" rtlCol="0" anchor="t"/>
+          <a:lstStyle/>
+          <a:p>
+            <a:pPr indent="0" marL="0">
+              <a:buNone/>
+            </a:pPr>
+            <a:r>
+              <a:rPr lang="en-US" sz="1500" spc="-40" kern="0" dirty="0">
+                <a:solidFill>
+                  <a:srgbClr val="143743"/>
+                </a:solidFill>
+                <a:latin typeface="Arial" pitchFamily="34" charset="0"/>
+                <a:ea typeface="Arial" pitchFamily="34" charset="-122"/>
+                <a:cs typeface="Arial" pitchFamily="34" charset="-120"/>
+              </a:rPr>
+              <a:t>A escala é o destravamento, e a curva é a razão.</a:t>
+            </a:r>
+            <a:endParaRPr lang="en-US" sz="1500" dirty="0"/>
+          </a:p>
+        </p:txBody>
+      </p:sp>
+      <p:sp>
+        <p:nvSpPr>
+          <p:cNvPr id="18" name="Shape 16"/>
+          <p:cNvSpPr/>
+          <p:nvPr/>
+        </p:nvSpPr>
+        <p:spPr>
+          <a:xfrm>
+            <a:off x="457200" y="4626864"/>
+            <a:ext cx="8138160" cy="7315"/>
+          </a:xfrm>
+          <a:prstGeom prst="rect">
+            <a:avLst/>
+          </a:prstGeom>
+          <a:solidFill>
+            <a:srgbClr val="5B8AAE">
+              <a:alpha val="32000"/>
+            </a:srgbClr>
+          </a:solidFill>
+          <a:ln/>
+        </p:spPr>
+      </p:sp>
+      <p:sp>
+        <p:nvSpPr>
+          <p:cNvPr id="19" name="Text 17"/>
+          <p:cNvSpPr txBox="1"/>
+          <p:nvPr/>
+        </p:nvSpPr>
+        <p:spPr>
+          <a:xfrm>
+            <a:off x="457200" y="4718304"/>
+            <a:ext cx="8138160" cy="155448"/>
+          </a:xfrm>
+          <a:prstGeom prst="rect">
+            <a:avLst/>
+          </a:prstGeom>
+          <a:noFill/>
+          <a:ln/>
+        </p:spPr>
+        <p:txBody>
+          <a:bodyPr wrap="square" lIns="0" tIns="0" rIns="0" bIns="0" rtlCol="0" anchor="ctr"/>
+          <a:lstStyle/>
+          <a:p>
+            <a:pPr algn="l" indent="0" marL="0">
+              <a:buNone/>
+            </a:pPr>
+            <a:r>
+              <a:rPr lang="en-US" sz="620" spc="260" kern="0" dirty="0">
                 <a:solidFill>
                   <a:srgbClr val="7AA8C9"/>
                 </a:solidFill>
-                <a:latin typeface="Courier New" pitchFamily="34" charset="0"/>
-                <a:ea typeface="Courier New" pitchFamily="34" charset="-122"/>
-                <a:cs typeface="Courier New" pitchFamily="34" charset="-120"/>
-              </a:rPr>
-              <a:t>R$ 745/t</a:t>
-            </a:r>
-            <a:endParaRPr lang="en-US" sz="760" dirty="0"/>
-          </a:p>
-        </p:txBody>
-      </p:sp>
-      <p:sp>
-        <p:nvSpPr>
-          <p:cNvPr id="14" name="Text 12"/>
-          <p:cNvSpPr txBox="1"/>
-          <p:nvPr/>
-        </p:nvSpPr>
-        <p:spPr>
-          <a:xfrm>
-            <a:off x="5577840" y="1801368"/>
-            <a:ext cx="1616659" cy="155448"/>
-          </a:xfrm>
-          <a:prstGeom prst="rect">
-            <a:avLst/>
-          </a:prstGeom>
-          <a:noFill/>
-          <a:ln/>
-        </p:spPr>
-        <p:txBody>
-          <a:bodyPr wrap="square" lIns="0" tIns="0" rIns="0" bIns="0" rtlCol="0" anchor="ctr"/>
-          <a:lstStyle/>
-          <a:p>
-            <a:pPr algn="l" indent="0" marL="0">
-              <a:buNone/>
-            </a:pPr>
-            <a:r>
-              <a:rPr lang="en-US" sz="680" spc="260" kern="0" dirty="0">
+                <a:latin typeface="Arial" pitchFamily="34" charset="0"/>
+                <a:ea typeface="Arial" pitchFamily="34" charset="-122"/>
+                <a:cs typeface="Arial" pitchFamily="34" charset="-120"/>
+              </a:rPr>
+              <a:t>CURVA SOBRE A BASE DE CUSTO [EST] DO CASO-BASE — SEM LINHA DE RECEITA, PORQUE CRUZARIA EM ~860 T</a:t>
+            </a:r>
+            <a:endParaRPr lang="en-US" sz="620" dirty="0"/>
+          </a:p>
+        </p:txBody>
+      </p:sp>
+      <p:sp>
+        <p:nvSpPr>
+          <p:cNvPr id="20" name="Text 18"/>
+          <p:cNvSpPr txBox="1"/>
+          <p:nvPr/>
+        </p:nvSpPr>
+        <p:spPr>
+          <a:xfrm>
+            <a:off x="457200" y="4882896"/>
+            <a:ext cx="8138160" cy="155448"/>
+          </a:xfrm>
+          <a:prstGeom prst="rect">
+            <a:avLst/>
+          </a:prstGeom>
+          <a:noFill/>
+          <a:ln/>
+        </p:spPr>
+        <p:txBody>
+          <a:bodyPr wrap="square" lIns="0" tIns="0" rIns="0" bIns="0" rtlCol="0" anchor="ctr"/>
+          <a:lstStyle/>
+          <a:p>
+            <a:pPr algn="l" indent="0" marL="0">
+              <a:buNone/>
+            </a:pPr>
+            <a:r>
+              <a:rPr lang="en-US" sz="620" spc="260" kern="0" dirty="0">
                 <a:solidFill>
                   <a:srgbClr val="5B8AAE"/>
                 </a:solidFill>
@@ -10855,90 +11506,9 @@
                 <a:ea typeface="Arial" pitchFamily="34" charset="-122"/>
                 <a:cs typeface="Arial" pitchFamily="34" charset="-120"/>
               </a:rPr>
-              <a:t>OPEX ANUAL</a:t>
-            </a:r>
-            <a:endParaRPr lang="en-US" sz="680" dirty="0"/>
-          </a:p>
-        </p:txBody>
-      </p:sp>
-      <p:sp>
-        <p:nvSpPr>
-          <p:cNvPr id="15" name="Text 13"/>
-          <p:cNvSpPr txBox="1"/>
-          <p:nvPr/>
-        </p:nvSpPr>
-        <p:spPr>
-          <a:xfrm>
-            <a:off x="7132320" y="1801368"/>
-            <a:ext cx="1554480" cy="173736"/>
-          </a:xfrm>
-          <a:prstGeom prst="rect">
-            <a:avLst/>
-          </a:prstGeom>
-          <a:noFill/>
-          <a:ln/>
-        </p:spPr>
-        <p:txBody>
-          <a:bodyPr wrap="square" lIns="0" tIns="0" rIns="0" bIns="0" rtlCol="0" anchor="ctr"/>
-          <a:lstStyle/>
-          <a:p>
-            <a:pPr algn="r" indent="0" marL="0">
-              <a:buNone/>
-            </a:pPr>
-            <a:r>
-              <a:rPr lang="en-US" sz="760" dirty="0">
-                <a:solidFill>
-                  <a:srgbClr val="7AA8C9"/>
-                </a:solidFill>
-                <a:latin typeface="Courier New" pitchFamily="34" charset="0"/>
-                <a:ea typeface="Courier New" pitchFamily="34" charset="-122"/>
-                <a:cs typeface="Courier New" pitchFamily="34" charset="-120"/>
-              </a:rPr>
-              <a:t>R$ 2.702.503</a:t>
-            </a:r>
-            <a:endParaRPr lang="en-US" sz="760" dirty="0"/>
-          </a:p>
-        </p:txBody>
-      </p:sp>
-      <p:sp>
-        <p:nvSpPr>
-          <p:cNvPr id="16" name="Text 14"/>
-          <p:cNvSpPr txBox="1"/>
-          <p:nvPr/>
-        </p:nvSpPr>
-        <p:spPr>
-          <a:xfrm>
-            <a:off x="457200" y="4462272"/>
-            <a:ext cx="4480560" cy="548640"/>
-          </a:xfrm>
-          <a:prstGeom prst="rect">
-            <a:avLst/>
-          </a:prstGeom>
-          <a:noFill/>
-          <a:ln/>
-        </p:spPr>
-        <p:txBody>
-          <a:bodyPr wrap="square" lIns="0" tIns="0" rIns="0" bIns="0" rtlCol="0" anchor="t"/>
-          <a:lstStyle/>
-          <a:p>
-            <a:pPr indent="0" marL="0">
-              <a:lnSpc>
-                <a:spcPts val="1473"/>
-              </a:lnSpc>
-              <a:buNone/>
-            </a:pPr>
-            <a:r>
-              <a:rPr lang="en-US" sz="950" dirty="0">
-                <a:solidFill>
-                  <a:srgbClr val="52666B"/>
-                </a:solidFill>
-                <a:latin typeface="Arial" pitchFamily="34" charset="0"/>
-                <a:ea typeface="Arial" pitchFamily="34" charset="-122"/>
-                <a:cs typeface="Arial" pitchFamily="34" charset="-120"/>
-              </a:rPr>
-              <a:t>O custo fixo não cai com a escala — e é exatamente por isso que o Módulo 1 fecha a conta e a POC não. A escala é o destravamento.</a:t>
-            </a:r>
-            <a:endParaRPr lang="en-US" sz="950" dirty="0"/>
+              <a:t>OS LIMIARES DO SLIDE 08 VÊM DO SOLVER DO PLANO [DOC], COM QUINZE SALÁRIOS PLENOS: OUTRA BASE DE CUSTO</a:t>
+            </a:r>
+            <a:endParaRPr lang="en-US" sz="620" dirty="0"/>
           </a:p>
         </p:txBody>
       </p:sp>
